--- a/chapter01/ASE_1_SoftwareEngineering.pptx
+++ b/chapter01/ASE_1_SoftwareEngineering.pptx
@@ -1,72 +1,70 @@
 
 <file path=ppt/presentation.xml><?xml version="1.0" encoding="utf-8"?>
-<p:presentation xmlns:a="http://schemas.openxmlformats.org/drawingml/2006/main" xmlns:r="http://schemas.openxmlformats.org/officeDocument/2006/relationships" xmlns:p="http://schemas.openxmlformats.org/presentationml/2006/main" showSpecialPlsOnTitleSld="0" strictFirstAndLastChars="0" saveSubsetFonts="1">
+<p:presentation xmlns:a="http://schemas.openxmlformats.org/drawingml/2006/main" xmlns:r="http://schemas.openxmlformats.org/officeDocument/2006/relationships" xmlns:p="http://schemas.openxmlformats.org/presentationml/2006/main" showSpecialPlsOnTitleSld="0" strictFirstAndLastChars="0">
   <p:sldMasterIdLst>
-    <p:sldMasterId id="2147483902" r:id="rId4"/>
+    <p:sldMasterId id="2147483648" r:id="rId1"/>
   </p:sldMasterIdLst>
   <p:notesMasterIdLst>
-    <p:notesMasterId r:id="rId64"/>
+    <p:notesMasterId r:id="rId4"/>
   </p:notesMasterIdLst>
   <p:sldIdLst>
-    <p:sldId id="256" r:id="rId5"/>
-    <p:sldId id="333" r:id="rId6"/>
-    <p:sldId id="286" r:id="rId7"/>
-    <p:sldId id="284" r:id="rId8"/>
-    <p:sldId id="287" r:id="rId9"/>
-    <p:sldId id="285" r:id="rId10"/>
-    <p:sldId id="300" r:id="rId11"/>
-    <p:sldId id="334" r:id="rId12"/>
-    <p:sldId id="301" r:id="rId13"/>
-    <p:sldId id="335" r:id="rId14"/>
-    <p:sldId id="302" r:id="rId15"/>
-    <p:sldId id="313" r:id="rId16"/>
-    <p:sldId id="336" r:id="rId17"/>
-    <p:sldId id="319" r:id="rId18"/>
-    <p:sldId id="320" r:id="rId19"/>
-    <p:sldId id="321" r:id="rId20"/>
-    <p:sldId id="311" r:id="rId21"/>
-    <p:sldId id="303" r:id="rId22"/>
-    <p:sldId id="295" r:id="rId23"/>
-    <p:sldId id="296" r:id="rId24"/>
-    <p:sldId id="294" r:id="rId25"/>
-    <p:sldId id="315" r:id="rId26"/>
-    <p:sldId id="314" r:id="rId27"/>
-    <p:sldId id="329" r:id="rId28"/>
-    <p:sldId id="346" r:id="rId29"/>
-    <p:sldId id="347" r:id="rId30"/>
-    <p:sldId id="348" r:id="rId31"/>
-    <p:sldId id="375" r:id="rId32"/>
-    <p:sldId id="349" r:id="rId33"/>
-    <p:sldId id="350" r:id="rId34"/>
-    <p:sldId id="351" r:id="rId35"/>
-    <p:sldId id="322" r:id="rId36"/>
-    <p:sldId id="291" r:id="rId37"/>
-    <p:sldId id="345" r:id="rId38"/>
-    <p:sldId id="343" r:id="rId39"/>
-    <p:sldId id="344" r:id="rId40"/>
-    <p:sldId id="305" r:id="rId41"/>
-    <p:sldId id="306" r:id="rId42"/>
-    <p:sldId id="307" r:id="rId43"/>
-    <p:sldId id="323" r:id="rId44"/>
-    <p:sldId id="324" r:id="rId45"/>
-    <p:sldId id="339" r:id="rId46"/>
-    <p:sldId id="340" r:id="rId47"/>
-    <p:sldId id="341" r:id="rId48"/>
-    <p:sldId id="342" r:id="rId49"/>
-    <p:sldId id="352" r:id="rId50"/>
-    <p:sldId id="353" r:id="rId51"/>
-    <p:sldId id="325" r:id="rId52"/>
-    <p:sldId id="354" r:id="rId53"/>
-    <p:sldId id="356" r:id="rId54"/>
-    <p:sldId id="357" r:id="rId55"/>
-    <p:sldId id="358" r:id="rId56"/>
-    <p:sldId id="355" r:id="rId57"/>
-    <p:sldId id="326" r:id="rId58"/>
-    <p:sldId id="337" r:id="rId59"/>
-    <p:sldId id="304" r:id="rId60"/>
-    <p:sldId id="318" r:id="rId61"/>
-    <p:sldId id="330" r:id="rId62"/>
-    <p:sldId id="374" r:id="rId63"/>
+    <p:sldId id="256" r:id="rId3"/>
+    <p:sldId id="333" r:id="rId5"/>
+    <p:sldId id="286" r:id="rId6"/>
+    <p:sldId id="284" r:id="rId7"/>
+    <p:sldId id="287" r:id="rId8"/>
+    <p:sldId id="285" r:id="rId9"/>
+    <p:sldId id="300" r:id="rId10"/>
+    <p:sldId id="334" r:id="rId11"/>
+    <p:sldId id="301" r:id="rId12"/>
+    <p:sldId id="335" r:id="rId13"/>
+    <p:sldId id="302" r:id="rId14"/>
+    <p:sldId id="313" r:id="rId15"/>
+    <p:sldId id="336" r:id="rId16"/>
+    <p:sldId id="319" r:id="rId17"/>
+    <p:sldId id="320" r:id="rId18"/>
+    <p:sldId id="321" r:id="rId19"/>
+    <p:sldId id="311" r:id="rId20"/>
+    <p:sldId id="303" r:id="rId21"/>
+    <p:sldId id="295" r:id="rId22"/>
+    <p:sldId id="296" r:id="rId23"/>
+    <p:sldId id="294" r:id="rId24"/>
+    <p:sldId id="315" r:id="rId25"/>
+    <p:sldId id="314" r:id="rId26"/>
+    <p:sldId id="329" r:id="rId27"/>
+    <p:sldId id="346" r:id="rId28"/>
+    <p:sldId id="347" r:id="rId29"/>
+    <p:sldId id="348" r:id="rId30"/>
+    <p:sldId id="375" r:id="rId31"/>
+    <p:sldId id="349" r:id="rId32"/>
+    <p:sldId id="350" r:id="rId33"/>
+    <p:sldId id="351" r:id="rId34"/>
+    <p:sldId id="322" r:id="rId35"/>
+    <p:sldId id="291" r:id="rId36"/>
+    <p:sldId id="345" r:id="rId37"/>
+    <p:sldId id="343" r:id="rId38"/>
+    <p:sldId id="344" r:id="rId39"/>
+    <p:sldId id="305" r:id="rId40"/>
+    <p:sldId id="306" r:id="rId41"/>
+    <p:sldId id="307" r:id="rId42"/>
+    <p:sldId id="323" r:id="rId43"/>
+    <p:sldId id="324" r:id="rId44"/>
+    <p:sldId id="339" r:id="rId45"/>
+    <p:sldId id="340" r:id="rId46"/>
+    <p:sldId id="341" r:id="rId47"/>
+    <p:sldId id="342" r:id="rId48"/>
+    <p:sldId id="352" r:id="rId49"/>
+    <p:sldId id="353" r:id="rId50"/>
+    <p:sldId id="325" r:id="rId51"/>
+    <p:sldId id="354" r:id="rId52"/>
+    <p:sldId id="356" r:id="rId53"/>
+    <p:sldId id="357" r:id="rId54"/>
+    <p:sldId id="355" r:id="rId55"/>
+    <p:sldId id="326" r:id="rId56"/>
+    <p:sldId id="337" r:id="rId57"/>
+    <p:sldId id="304" r:id="rId58"/>
+    <p:sldId id="318" r:id="rId59"/>
+    <p:sldId id="330" r:id="rId60"/>
   </p:sldIdLst>
   <p:sldSz cx="12192000" cy="6858000"/>
   <p:notesSz cx="6858000" cy="9144000"/>
@@ -85,7 +83,7 @@
         <a:solidFill>
           <a:schemeClr val="tx1"/>
         </a:solidFill>
-        <a:latin typeface="Verdana" pitchFamily="34" charset="0"/>
+        <a:latin typeface="Verdana" panose="020B0604030504040204" pitchFamily="34" charset="0"/>
         <a:ea typeface="+mn-ea"/>
         <a:cs typeface="+mn-cs"/>
       </a:defRPr>
@@ -101,7 +99,7 @@
         <a:solidFill>
           <a:schemeClr val="tx1"/>
         </a:solidFill>
-        <a:latin typeface="Verdana" pitchFamily="34" charset="0"/>
+        <a:latin typeface="Verdana" panose="020B0604030504040204" pitchFamily="34" charset="0"/>
         <a:ea typeface="+mn-ea"/>
         <a:cs typeface="+mn-cs"/>
       </a:defRPr>
@@ -117,7 +115,7 @@
         <a:solidFill>
           <a:schemeClr val="tx1"/>
         </a:solidFill>
-        <a:latin typeface="Verdana" pitchFamily="34" charset="0"/>
+        <a:latin typeface="Verdana" panose="020B0604030504040204" pitchFamily="34" charset="0"/>
         <a:ea typeface="+mn-ea"/>
         <a:cs typeface="+mn-cs"/>
       </a:defRPr>
@@ -133,7 +131,7 @@
         <a:solidFill>
           <a:schemeClr val="tx1"/>
         </a:solidFill>
-        <a:latin typeface="Verdana" pitchFamily="34" charset="0"/>
+        <a:latin typeface="Verdana" panose="020B0604030504040204" pitchFamily="34" charset="0"/>
         <a:ea typeface="+mn-ea"/>
         <a:cs typeface="+mn-cs"/>
       </a:defRPr>
@@ -149,7 +147,7 @@
         <a:solidFill>
           <a:schemeClr val="tx1"/>
         </a:solidFill>
-        <a:latin typeface="Verdana" pitchFamily="34" charset="0"/>
+        <a:latin typeface="Verdana" panose="020B0604030504040204" pitchFamily="34" charset="0"/>
         <a:ea typeface="+mn-ea"/>
         <a:cs typeface="+mn-cs"/>
       </a:defRPr>
@@ -159,7 +157,7 @@
         <a:solidFill>
           <a:schemeClr val="tx1"/>
         </a:solidFill>
-        <a:latin typeface="Verdana" pitchFamily="34" charset="0"/>
+        <a:latin typeface="Verdana" panose="020B0604030504040204" pitchFamily="34" charset="0"/>
         <a:ea typeface="+mn-ea"/>
         <a:cs typeface="+mn-cs"/>
       </a:defRPr>
@@ -169,7 +167,7 @@
         <a:solidFill>
           <a:schemeClr val="tx1"/>
         </a:solidFill>
-        <a:latin typeface="Verdana" pitchFamily="34" charset="0"/>
+        <a:latin typeface="Verdana" panose="020B0604030504040204" pitchFamily="34" charset="0"/>
         <a:ea typeface="+mn-ea"/>
         <a:cs typeface="+mn-cs"/>
       </a:defRPr>
@@ -179,7 +177,7 @@
         <a:solidFill>
           <a:schemeClr val="tx1"/>
         </a:solidFill>
-        <a:latin typeface="Verdana" pitchFamily="34" charset="0"/>
+        <a:latin typeface="Verdana" panose="020B0604030504040204" pitchFamily="34" charset="0"/>
         <a:ea typeface="+mn-ea"/>
         <a:cs typeface="+mn-cs"/>
       </a:defRPr>
@@ -189,7 +187,7 @@
         <a:solidFill>
           <a:schemeClr val="tx1"/>
         </a:solidFill>
-        <a:latin typeface="Verdana" pitchFamily="34" charset="0"/>
+        <a:latin typeface="Verdana" panose="020B0604030504040204" pitchFamily="34" charset="0"/>
         <a:ea typeface="+mn-ea"/>
         <a:cs typeface="+mn-cs"/>
       </a:defRPr>
@@ -214,656 +212,6 @@
 </p:presentation>
 </file>
 
-<file path=ppt/revisionInfo.xml><?xml version="1.0" encoding="utf-8"?>
-<p1510:revInfo xmlns:a="http://schemas.openxmlformats.org/drawingml/2006/main" xmlns:r="http://schemas.openxmlformats.org/officeDocument/2006/relationships" xmlns:p1510="http://schemas.microsoft.com/office/powerpoint/2015/10/main">
-  <p1510:revLst>
-    <p1510:client id="{2D3CB156-12ED-476E-891B-0F4654264055}" v="2" dt="2025-09-24T03:22:10.531"/>
-  </p1510:revLst>
-</p1510:revInfo>
-</file>
-
-<file path=ppt/changesInfos/changesInfo1.xml><?xml version="1.0" encoding="utf-8"?>
-<pc:chgInfo xmlns:a="http://schemas.openxmlformats.org/drawingml/2006/main" xmlns:r="http://schemas.openxmlformats.org/officeDocument/2006/relationships" xmlns:ac="http://schemas.microsoft.com/office/drawing/2013/main/command" xmlns:pc="http://schemas.microsoft.com/office/powerpoint/2013/main/command">
-  <pc:docChgLst>
-    <pc:chgData name="Xin Zou" userId="260b9726081dae15" providerId="LiveId" clId="{9D297BCE-98D2-4025-9670-F2ABFDE5436C}"/>
-    <pc:docChg chg="custSel modSld">
-      <pc:chgData name="Xin Zou" userId="260b9726081dae15" providerId="LiveId" clId="{9D297BCE-98D2-4025-9670-F2ABFDE5436C}" dt="2025-09-24T03:50:24.492" v="32" actId="20577"/>
-      <pc:docMkLst>
-        <pc:docMk/>
-      </pc:docMkLst>
-      <pc:sldChg chg="modSp mod">
-        <pc:chgData name="Xin Zou" userId="260b9726081dae15" providerId="LiveId" clId="{9D297BCE-98D2-4025-9670-F2ABFDE5436C}" dt="2025-09-24T03:50:24.492" v="32" actId="20577"/>
-        <pc:sldMkLst>
-          <pc:docMk/>
-          <pc:sldMk cId="0" sldId="291"/>
-        </pc:sldMkLst>
-        <pc:spChg chg="mod">
-          <ac:chgData name="Xin Zou" userId="260b9726081dae15" providerId="LiveId" clId="{9D297BCE-98D2-4025-9670-F2ABFDE5436C}" dt="2025-09-24T03:50:24.492" v="32" actId="20577"/>
-          <ac:spMkLst>
-            <pc:docMk/>
-            <pc:sldMk cId="0" sldId="291"/>
-            <ac:spMk id="19459" creationId="{00000000-0000-0000-0000-000000000000}"/>
-          </ac:spMkLst>
-        </pc:spChg>
-      </pc:sldChg>
-      <pc:sldChg chg="mod modShow">
-        <pc:chgData name="Xin Zou" userId="260b9726081dae15" providerId="LiveId" clId="{9D297BCE-98D2-4025-9670-F2ABFDE5436C}" dt="2025-09-24T03:24:15.446" v="16" actId="729"/>
-        <pc:sldMkLst>
-          <pc:docMk/>
-          <pc:sldMk cId="0" sldId="304"/>
-        </pc:sldMkLst>
-      </pc:sldChg>
-      <pc:sldChg chg="modSp mod">
-        <pc:chgData name="Xin Zou" userId="260b9726081dae15" providerId="LiveId" clId="{9D297BCE-98D2-4025-9670-F2ABFDE5436C}" dt="2025-09-24T03:18:57.870" v="0" actId="5793"/>
-        <pc:sldMkLst>
-          <pc:docMk/>
-          <pc:sldMk cId="4110949276" sldId="321"/>
-        </pc:sldMkLst>
-        <pc:spChg chg="mod">
-          <ac:chgData name="Xin Zou" userId="260b9726081dae15" providerId="LiveId" clId="{9D297BCE-98D2-4025-9670-F2ABFDE5436C}" dt="2025-09-24T03:18:57.870" v="0" actId="5793"/>
-          <ac:spMkLst>
-            <pc:docMk/>
-            <pc:sldMk cId="4110949276" sldId="321"/>
-            <ac:spMk id="3" creationId="{00000000-0000-0000-0000-000000000000}"/>
-          </ac:spMkLst>
-        </pc:spChg>
-      </pc:sldChg>
-      <pc:sldChg chg="modSp mod">
-        <pc:chgData name="Xin Zou" userId="260b9726081dae15" providerId="LiveId" clId="{9D297BCE-98D2-4025-9670-F2ABFDE5436C}" dt="2025-09-24T03:21:04.755" v="7" actId="27636"/>
-        <pc:sldMkLst>
-          <pc:docMk/>
-          <pc:sldMk cId="1901926812" sldId="324"/>
-        </pc:sldMkLst>
-        <pc:spChg chg="mod">
-          <ac:chgData name="Xin Zou" userId="260b9726081dae15" providerId="LiveId" clId="{9D297BCE-98D2-4025-9670-F2ABFDE5436C}" dt="2025-09-24T03:21:04.755" v="7" actId="27636"/>
-          <ac:spMkLst>
-            <pc:docMk/>
-            <pc:sldMk cId="1901926812" sldId="324"/>
-            <ac:spMk id="3" creationId="{00000000-0000-0000-0000-000000000000}"/>
-          </ac:spMkLst>
-        </pc:spChg>
-      </pc:sldChg>
-      <pc:sldChg chg="modSp mod">
-        <pc:chgData name="Xin Zou" userId="260b9726081dae15" providerId="LiveId" clId="{9D297BCE-98D2-4025-9670-F2ABFDE5436C}" dt="2025-09-24T03:20:41.999" v="5" actId="20577"/>
-        <pc:sldMkLst>
-          <pc:docMk/>
-          <pc:sldMk cId="2232409806" sldId="344"/>
-        </pc:sldMkLst>
-        <pc:spChg chg="mod">
-          <ac:chgData name="Xin Zou" userId="260b9726081dae15" providerId="LiveId" clId="{9D297BCE-98D2-4025-9670-F2ABFDE5436C}" dt="2025-09-24T03:20:41.999" v="5" actId="20577"/>
-          <ac:spMkLst>
-            <pc:docMk/>
-            <pc:sldMk cId="2232409806" sldId="344"/>
-            <ac:spMk id="3" creationId="{AFC80473-C2CB-4379-8AD6-61591627ED9F}"/>
-          </ac:spMkLst>
-        </pc:spChg>
-      </pc:sldChg>
-      <pc:sldChg chg="modSp mod">
-        <pc:chgData name="Xin Zou" userId="260b9726081dae15" providerId="LiveId" clId="{9D297BCE-98D2-4025-9670-F2ABFDE5436C}" dt="2025-09-24T03:20:24.895" v="3" actId="1076"/>
-        <pc:sldMkLst>
-          <pc:docMk/>
-          <pc:sldMk cId="448027658" sldId="345"/>
-        </pc:sldMkLst>
-        <pc:spChg chg="mod">
-          <ac:chgData name="Xin Zou" userId="260b9726081dae15" providerId="LiveId" clId="{9D297BCE-98D2-4025-9670-F2ABFDE5436C}" dt="2025-09-24T03:20:24.895" v="3" actId="1076"/>
-          <ac:spMkLst>
-            <pc:docMk/>
-            <pc:sldMk cId="448027658" sldId="345"/>
-            <ac:spMk id="3" creationId="{05105991-655B-4992-8AC4-905DE58F2176}"/>
-          </ac:spMkLst>
-        </pc:spChg>
-      </pc:sldChg>
-      <pc:sldChg chg="modSp mod">
-        <pc:chgData name="Xin Zou" userId="260b9726081dae15" providerId="LiveId" clId="{9D297BCE-98D2-4025-9670-F2ABFDE5436C}" dt="2025-09-24T03:20:02.177" v="2" actId="27636"/>
-        <pc:sldMkLst>
-          <pc:docMk/>
-          <pc:sldMk cId="1373211857" sldId="351"/>
-        </pc:sldMkLst>
-        <pc:spChg chg="mod">
-          <ac:chgData name="Xin Zou" userId="260b9726081dae15" providerId="LiveId" clId="{9D297BCE-98D2-4025-9670-F2ABFDE5436C}" dt="2025-09-24T03:20:02.177" v="2" actId="27636"/>
-          <ac:spMkLst>
-            <pc:docMk/>
-            <pc:sldMk cId="1373211857" sldId="351"/>
-            <ac:spMk id="3" creationId="{0FA4E4D2-BEFC-49ED-A9B3-D81606F857E8}"/>
-          </ac:spMkLst>
-        </pc:spChg>
-      </pc:sldChg>
-      <pc:sldChg chg="modSp mod">
-        <pc:chgData name="Xin Zou" userId="260b9726081dae15" providerId="LiveId" clId="{9D297BCE-98D2-4025-9670-F2ABFDE5436C}" dt="2025-09-24T03:22:22.787" v="11" actId="14100"/>
-        <pc:sldMkLst>
-          <pc:docMk/>
-          <pc:sldMk cId="1612837189" sldId="356"/>
-        </pc:sldMkLst>
-        <pc:spChg chg="mod">
-          <ac:chgData name="Xin Zou" userId="260b9726081dae15" providerId="LiveId" clId="{9D297BCE-98D2-4025-9670-F2ABFDE5436C}" dt="2025-09-24T03:22:22.787" v="11" actId="14100"/>
-          <ac:spMkLst>
-            <pc:docMk/>
-            <pc:sldMk cId="1612837189" sldId="356"/>
-            <ac:spMk id="3" creationId="{67053C4F-420C-45C2-97BC-F7BCEA9BF982}"/>
-          </ac:spMkLst>
-        </pc:spChg>
-        <pc:picChg chg="mod">
-          <ac:chgData name="Xin Zou" userId="260b9726081dae15" providerId="LiveId" clId="{9D297BCE-98D2-4025-9670-F2ABFDE5436C}" dt="2025-09-24T03:22:10.531" v="10" actId="14100"/>
-          <ac:picMkLst>
-            <pc:docMk/>
-            <pc:sldMk cId="1612837189" sldId="356"/>
-            <ac:picMk id="5126" creationId="{34ACDF57-80AE-4A5B-A128-EF5782F7AB63}"/>
-          </ac:picMkLst>
-        </pc:picChg>
-      </pc:sldChg>
-      <pc:sldChg chg="modSp mod">
-        <pc:chgData name="Xin Zou" userId="260b9726081dae15" providerId="LiveId" clId="{9D297BCE-98D2-4025-9670-F2ABFDE5436C}" dt="2025-09-24T03:23:03.966" v="15" actId="404"/>
-        <pc:sldMkLst>
-          <pc:docMk/>
-          <pc:sldMk cId="3875081412" sldId="357"/>
-        </pc:sldMkLst>
-        <pc:spChg chg="mod">
-          <ac:chgData name="Xin Zou" userId="260b9726081dae15" providerId="LiveId" clId="{9D297BCE-98D2-4025-9670-F2ABFDE5436C}" dt="2025-09-24T03:23:03.966" v="15" actId="404"/>
-          <ac:spMkLst>
-            <pc:docMk/>
-            <pc:sldMk cId="3875081412" sldId="357"/>
-            <ac:spMk id="3" creationId="{DDDF9A79-8643-4F82-A55C-FF3B4DBAD4B2}"/>
-          </ac:spMkLst>
-        </pc:spChg>
-      </pc:sldChg>
-      <pc:sldChg chg="modSp mod">
-        <pc:chgData name="Xin Zou" userId="260b9726081dae15" providerId="LiveId" clId="{9D297BCE-98D2-4025-9670-F2ABFDE5436C}" dt="2025-09-24T03:49:13.617" v="18" actId="404"/>
-        <pc:sldMkLst>
-          <pc:docMk/>
-          <pc:sldMk cId="3836370380" sldId="375"/>
-        </pc:sldMkLst>
-        <pc:spChg chg="mod">
-          <ac:chgData name="Xin Zou" userId="260b9726081dae15" providerId="LiveId" clId="{9D297BCE-98D2-4025-9670-F2ABFDE5436C}" dt="2025-09-24T03:49:13.617" v="18" actId="404"/>
-          <ac:spMkLst>
-            <pc:docMk/>
-            <pc:sldMk cId="3836370380" sldId="375"/>
-            <ac:spMk id="2" creationId="{5EA60B4C-B131-1B47-28AD-D2684BFDFFCC}"/>
-          </ac:spMkLst>
-        </pc:spChg>
-      </pc:sldChg>
-    </pc:docChg>
-  </pc:docChgLst>
-  <pc:docChgLst>
-    <pc:chgData name="Xin Zou" userId="260b9726081dae15" providerId="LiveId" clId="{F7909621-AD8C-4BA3-ADF9-F483C4CE731E}"/>
-    <pc:docChg chg="custSel modSld">
-      <pc:chgData name="Xin Zou" userId="260b9726081dae15" providerId="LiveId" clId="{F7909621-AD8C-4BA3-ADF9-F483C4CE731E}" dt="2019-09-04T03:48:18.046" v="13"/>
-      <pc:docMkLst>
-        <pc:docMk/>
-      </pc:docMkLst>
-      <pc:sldChg chg="modSp">
-        <pc:chgData name="Xin Zou" userId="260b9726081dae15" providerId="LiveId" clId="{F7909621-AD8C-4BA3-ADF9-F483C4CE731E}" dt="2019-09-04T03:30:35.151" v="2"/>
-        <pc:sldMkLst>
-          <pc:docMk/>
-          <pc:sldMk cId="0" sldId="256"/>
-        </pc:sldMkLst>
-      </pc:sldChg>
-      <pc:sldChg chg="modSp">
-        <pc:chgData name="Xin Zou" userId="260b9726081dae15" providerId="LiveId" clId="{F7909621-AD8C-4BA3-ADF9-F483C4CE731E}" dt="2019-09-04T03:32:10.807" v="10" actId="27636"/>
-        <pc:sldMkLst>
-          <pc:docMk/>
-          <pc:sldMk cId="0" sldId="304"/>
-        </pc:sldMkLst>
-      </pc:sldChg>
-      <pc:sldChg chg="modSp">
-        <pc:chgData name="Xin Zou" userId="260b9726081dae15" providerId="LiveId" clId="{F7909621-AD8C-4BA3-ADF9-F483C4CE731E}" dt="2019-09-04T03:48:18.046" v="13"/>
-        <pc:sldMkLst>
-          <pc:docMk/>
-          <pc:sldMk cId="3875081412" sldId="357"/>
-        </pc:sldMkLst>
-      </pc:sldChg>
-    </pc:docChg>
-  </pc:docChgLst>
-  <pc:docChgLst>
-    <pc:chgData name="Xin Zou" userId="260b9726081dae15" providerId="LiveId" clId="{DEE92855-7029-4449-8D1C-EA3BBA661312}"/>
-    <pc:docChg chg="custSel modSld">
-      <pc:chgData name="Xin Zou" userId="260b9726081dae15" providerId="LiveId" clId="{DEE92855-7029-4449-8D1C-EA3BBA661312}" dt="2019-09-12T02:04:08.103" v="12" actId="1076"/>
-      <pc:docMkLst>
-        <pc:docMk/>
-      </pc:docMkLst>
-      <pc:sldChg chg="modSp">
-        <pc:chgData name="Xin Zou" userId="260b9726081dae15" providerId="LiveId" clId="{DEE92855-7029-4449-8D1C-EA3BBA661312}" dt="2019-09-12T02:02:22.345" v="0" actId="2711"/>
-        <pc:sldMkLst>
-          <pc:docMk/>
-          <pc:sldMk cId="0" sldId="291"/>
-        </pc:sldMkLst>
-      </pc:sldChg>
-      <pc:sldChg chg="modSp">
-        <pc:chgData name="Xin Zou" userId="260b9726081dae15" providerId="LiveId" clId="{DEE92855-7029-4449-8D1C-EA3BBA661312}" dt="2019-09-12T02:03:09.276" v="10" actId="14100"/>
-        <pc:sldMkLst>
-          <pc:docMk/>
-          <pc:sldMk cId="398621879" sldId="343"/>
-        </pc:sldMkLst>
-      </pc:sldChg>
-      <pc:sldChg chg="modSp">
-        <pc:chgData name="Xin Zou" userId="260b9726081dae15" providerId="LiveId" clId="{DEE92855-7029-4449-8D1C-EA3BBA661312}" dt="2019-09-12T02:04:08.103" v="12" actId="1076"/>
-        <pc:sldMkLst>
-          <pc:docMk/>
-          <pc:sldMk cId="1957216409" sldId="353"/>
-        </pc:sldMkLst>
-      </pc:sldChg>
-    </pc:docChg>
-  </pc:docChgLst>
-  <pc:docChgLst>
-    <pc:chgData name="Xin Zou" userId="260b9726081dae15" providerId="LiveId" clId="{A68DB0F5-96DC-4D94-A584-52A8F35D33DE}"/>
-    <pc:docChg chg="undo custSel addSld modSld">
-      <pc:chgData name="Xin Zou" userId="260b9726081dae15" providerId="LiveId" clId="{A68DB0F5-96DC-4D94-A584-52A8F35D33DE}" dt="2025-06-06T07:14:28.407" v="332"/>
-      <pc:docMkLst>
-        <pc:docMk/>
-      </pc:docMkLst>
-      <pc:sldChg chg="modSp mod">
-        <pc:chgData name="Xin Zou" userId="260b9726081dae15" providerId="LiveId" clId="{A68DB0F5-96DC-4D94-A584-52A8F35D33DE}" dt="2025-06-06T07:14:10.473" v="331"/>
-        <pc:sldMkLst>
-          <pc:docMk/>
-          <pc:sldMk cId="884238867" sldId="348"/>
-        </pc:sldMkLst>
-      </pc:sldChg>
-      <pc:sldChg chg="modSp">
-        <pc:chgData name="Xin Zou" userId="260b9726081dae15" providerId="LiveId" clId="{A68DB0F5-96DC-4D94-A584-52A8F35D33DE}" dt="2025-06-06T07:14:28.407" v="332"/>
-        <pc:sldMkLst>
-          <pc:docMk/>
-          <pc:sldMk cId="2123279561" sldId="349"/>
-        </pc:sldMkLst>
-      </pc:sldChg>
-      <pc:sldChg chg="addSp delSp modSp new mod modNotesTx">
-        <pc:chgData name="Xin Zou" userId="260b9726081dae15" providerId="LiveId" clId="{A68DB0F5-96DC-4D94-A584-52A8F35D33DE}" dt="2025-06-06T07:11:48.456" v="330" actId="20577"/>
-        <pc:sldMkLst>
-          <pc:docMk/>
-          <pc:sldMk cId="3836370380" sldId="375"/>
-        </pc:sldMkLst>
-      </pc:sldChg>
-    </pc:docChg>
-  </pc:docChgLst>
-  <pc:docChgLst>
-    <pc:chgData name="Xin Zou" userId="260b9726081dae15" providerId="LiveId" clId="{C7191B37-39E9-464A-80F0-C31627521F9C}"/>
-    <pc:docChg chg="undo custSel addSld delSld modSld sldOrd modMainMaster">
-      <pc:chgData name="Xin Zou" userId="260b9726081dae15" providerId="LiveId" clId="{C7191B37-39E9-464A-80F0-C31627521F9C}" dt="2018-10-08T17:35:37.097" v="3108" actId="2711"/>
-      <pc:docMkLst>
-        <pc:docMk/>
-      </pc:docMkLst>
-      <pc:sldChg chg="modSp">
-        <pc:chgData name="Xin Zou" userId="260b9726081dae15" providerId="LiveId" clId="{C7191B37-39E9-464A-80F0-C31627521F9C}" dt="2018-10-08T17:35:37.097" v="3108" actId="2711"/>
-        <pc:sldMkLst>
-          <pc:docMk/>
-          <pc:sldMk cId="0" sldId="256"/>
-        </pc:sldMkLst>
-      </pc:sldChg>
-      <pc:sldChg chg="modSp">
-        <pc:chgData name="Xin Zou" userId="260b9726081dae15" providerId="LiveId" clId="{C7191B37-39E9-464A-80F0-C31627521F9C}" dt="2018-10-08T05:41:00.801" v="2971"/>
-        <pc:sldMkLst>
-          <pc:docMk/>
-          <pc:sldMk cId="0" sldId="284"/>
-        </pc:sldMkLst>
-      </pc:sldChg>
-      <pc:sldChg chg="modSp">
-        <pc:chgData name="Xin Zou" userId="260b9726081dae15" providerId="LiveId" clId="{C7191B37-39E9-464A-80F0-C31627521F9C}" dt="2018-10-08T05:41:00.801" v="2971"/>
-        <pc:sldMkLst>
-          <pc:docMk/>
-          <pc:sldMk cId="0" sldId="285"/>
-        </pc:sldMkLst>
-      </pc:sldChg>
-      <pc:sldChg chg="modSp">
-        <pc:chgData name="Xin Zou" userId="260b9726081dae15" providerId="LiveId" clId="{C7191B37-39E9-464A-80F0-C31627521F9C}" dt="2018-10-08T05:41:00.801" v="2971"/>
-        <pc:sldMkLst>
-          <pc:docMk/>
-          <pc:sldMk cId="0" sldId="286"/>
-        </pc:sldMkLst>
-      </pc:sldChg>
-      <pc:sldChg chg="modSp">
-        <pc:chgData name="Xin Zou" userId="260b9726081dae15" providerId="LiveId" clId="{C7191B37-39E9-464A-80F0-C31627521F9C}" dt="2018-10-08T05:41:00.801" v="2971"/>
-        <pc:sldMkLst>
-          <pc:docMk/>
-          <pc:sldMk cId="0" sldId="287"/>
-        </pc:sldMkLst>
-      </pc:sldChg>
-      <pc:sldChg chg="modSp modNotesTx">
-        <pc:chgData name="Xin Zou" userId="260b9726081dae15" providerId="LiveId" clId="{C7191B37-39E9-464A-80F0-C31627521F9C}" dt="2018-10-02T21:38:38.508" v="731" actId="20577"/>
-        <pc:sldMkLst>
-          <pc:docMk/>
-          <pc:sldMk cId="0" sldId="291"/>
-        </pc:sldMkLst>
-      </pc:sldChg>
-      <pc:sldChg chg="modSp">
-        <pc:chgData name="Xin Zou" userId="260b9726081dae15" providerId="LiveId" clId="{C7191B37-39E9-464A-80F0-C31627521F9C}" dt="2018-10-08T05:41:00.801" v="2971"/>
-        <pc:sldMkLst>
-          <pc:docMk/>
-          <pc:sldMk cId="0" sldId="294"/>
-        </pc:sldMkLst>
-      </pc:sldChg>
-      <pc:sldChg chg="modSp">
-        <pc:chgData name="Xin Zou" userId="260b9726081dae15" providerId="LiveId" clId="{C7191B37-39E9-464A-80F0-C31627521F9C}" dt="2018-10-08T05:41:00.801" v="2971"/>
-        <pc:sldMkLst>
-          <pc:docMk/>
-          <pc:sldMk cId="0" sldId="296"/>
-        </pc:sldMkLst>
-      </pc:sldChg>
-      <pc:sldChg chg="modSp">
-        <pc:chgData name="Xin Zou" userId="260b9726081dae15" providerId="LiveId" clId="{C7191B37-39E9-464A-80F0-C31627521F9C}" dt="2018-10-08T05:41:01.402" v="2972" actId="27636"/>
-        <pc:sldMkLst>
-          <pc:docMk/>
-          <pc:sldMk cId="0" sldId="302"/>
-        </pc:sldMkLst>
-      </pc:sldChg>
-      <pc:sldChg chg="modSp">
-        <pc:chgData name="Xin Zou" userId="260b9726081dae15" providerId="LiveId" clId="{C7191B37-39E9-464A-80F0-C31627521F9C}" dt="2018-10-08T05:41:02.180" v="2979" actId="27636"/>
-        <pc:sldMkLst>
-          <pc:docMk/>
-          <pc:sldMk cId="0" sldId="304"/>
-        </pc:sldMkLst>
-      </pc:sldChg>
-      <pc:sldChg chg="modSp">
-        <pc:chgData name="Xin Zou" userId="260b9726081dae15" providerId="LiveId" clId="{C7191B37-39E9-464A-80F0-C31627521F9C}" dt="2018-10-08T05:41:34.091" v="2985" actId="27636"/>
-        <pc:sldMkLst>
-          <pc:docMk/>
-          <pc:sldMk cId="0" sldId="305"/>
-        </pc:sldMkLst>
-      </pc:sldChg>
-      <pc:sldChg chg="modSp">
-        <pc:chgData name="Xin Zou" userId="260b9726081dae15" providerId="LiveId" clId="{C7191B37-39E9-464A-80F0-C31627521F9C}" dt="2018-10-02T21:55:11.153" v="1872" actId="6549"/>
-        <pc:sldMkLst>
-          <pc:docMk/>
-          <pc:sldMk cId="0" sldId="306"/>
-        </pc:sldMkLst>
-      </pc:sldChg>
-      <pc:sldChg chg="modSp">
-        <pc:chgData name="Xin Zou" userId="260b9726081dae15" providerId="LiveId" clId="{C7191B37-39E9-464A-80F0-C31627521F9C}" dt="2018-10-08T05:41:34.177" v="2986" actId="27636"/>
-        <pc:sldMkLst>
-          <pc:docMk/>
-          <pc:sldMk cId="0" sldId="307"/>
-        </pc:sldMkLst>
-      </pc:sldChg>
-      <pc:sldChg chg="modSp modAnim">
-        <pc:chgData name="Xin Zou" userId="260b9726081dae15" providerId="LiveId" clId="{C7191B37-39E9-464A-80F0-C31627521F9C}" dt="2018-10-02T21:37:51.844" v="605"/>
-        <pc:sldMkLst>
-          <pc:docMk/>
-          <pc:sldMk cId="0" sldId="311"/>
-        </pc:sldMkLst>
-      </pc:sldChg>
-      <pc:sldChg chg="modSp">
-        <pc:chgData name="Xin Zou" userId="260b9726081dae15" providerId="LiveId" clId="{C7191B37-39E9-464A-80F0-C31627521F9C}" dt="2018-10-08T05:41:00.801" v="2971"/>
-        <pc:sldMkLst>
-          <pc:docMk/>
-          <pc:sldMk cId="821573508" sldId="313"/>
-        </pc:sldMkLst>
-      </pc:sldChg>
-      <pc:sldChg chg="modSp">
-        <pc:chgData name="Xin Zou" userId="260b9726081dae15" providerId="LiveId" clId="{C7191B37-39E9-464A-80F0-C31627521F9C}" dt="2018-10-08T05:41:00.801" v="2971"/>
-        <pc:sldMkLst>
-          <pc:docMk/>
-          <pc:sldMk cId="3190123368" sldId="314"/>
-        </pc:sldMkLst>
-      </pc:sldChg>
-      <pc:sldChg chg="modSp">
-        <pc:chgData name="Xin Zou" userId="260b9726081dae15" providerId="LiveId" clId="{C7191B37-39E9-464A-80F0-C31627521F9C}" dt="2018-10-08T05:41:33.898" v="2982" actId="27636"/>
-        <pc:sldMkLst>
-          <pc:docMk/>
-          <pc:sldMk cId="2592908535" sldId="319"/>
-        </pc:sldMkLst>
-      </pc:sldChg>
-      <pc:sldChg chg="modSp">
-        <pc:chgData name="Xin Zou" userId="260b9726081dae15" providerId="LiveId" clId="{C7191B37-39E9-464A-80F0-C31627521F9C}" dt="2018-10-08T05:41:01.806" v="2973" actId="27636"/>
-        <pc:sldMkLst>
-          <pc:docMk/>
-          <pc:sldMk cId="2982333462" sldId="320"/>
-        </pc:sldMkLst>
-      </pc:sldChg>
-      <pc:sldChg chg="modSp">
-        <pc:chgData name="Xin Zou" userId="260b9726081dae15" providerId="LiveId" clId="{C7191B37-39E9-464A-80F0-C31627521F9C}" dt="2018-10-02T21:36:14.497" v="456"/>
-        <pc:sldMkLst>
-          <pc:docMk/>
-          <pc:sldMk cId="4110949276" sldId="321"/>
-        </pc:sldMkLst>
-      </pc:sldChg>
-      <pc:sldChg chg="modSp">
-        <pc:chgData name="Xin Zou" userId="260b9726081dae15" providerId="LiveId" clId="{C7191B37-39E9-464A-80F0-C31627521F9C}" dt="2018-10-02T22:26:49.072" v="2098" actId="16037"/>
-        <pc:sldMkLst>
-          <pc:docMk/>
-          <pc:sldMk cId="2436269639" sldId="322"/>
-        </pc:sldMkLst>
-      </pc:sldChg>
-      <pc:sldChg chg="modSp">
-        <pc:chgData name="Xin Zou" userId="260b9726081dae15" providerId="LiveId" clId="{C7191B37-39E9-464A-80F0-C31627521F9C}" dt="2018-10-08T05:41:00.801" v="2971"/>
-        <pc:sldMkLst>
-          <pc:docMk/>
-          <pc:sldMk cId="375656699" sldId="323"/>
-        </pc:sldMkLst>
-      </pc:sldChg>
-      <pc:sldChg chg="modSp">
-        <pc:chgData name="Xin Zou" userId="260b9726081dae15" providerId="LiveId" clId="{C7191B37-39E9-464A-80F0-C31627521F9C}" dt="2018-10-08T05:41:34.203" v="2987" actId="27636"/>
-        <pc:sldMkLst>
-          <pc:docMk/>
-          <pc:sldMk cId="1901926812" sldId="324"/>
-        </pc:sldMkLst>
-      </pc:sldChg>
-      <pc:sldChg chg="modSp">
-        <pc:chgData name="Xin Zou" userId="260b9726081dae15" providerId="LiveId" clId="{C7191B37-39E9-464A-80F0-C31627521F9C}" dt="2018-10-08T05:41:34.278" v="2989" actId="27636"/>
-        <pc:sldMkLst>
-          <pc:docMk/>
-          <pc:sldMk cId="905460715" sldId="325"/>
-        </pc:sldMkLst>
-      </pc:sldChg>
-      <pc:sldChg chg="modSp">
-        <pc:chgData name="Xin Zou" userId="260b9726081dae15" providerId="LiveId" clId="{C7191B37-39E9-464A-80F0-C31627521F9C}" dt="2018-10-03T04:20:55.005" v="2969" actId="6549"/>
-        <pc:sldMkLst>
-          <pc:docMk/>
-          <pc:sldMk cId="767424033" sldId="326"/>
-        </pc:sldMkLst>
-      </pc:sldChg>
-      <pc:sldChg chg="modSp">
-        <pc:chgData name="Xin Zou" userId="260b9726081dae15" providerId="LiveId" clId="{C7191B37-39E9-464A-80F0-C31627521F9C}" dt="2018-10-08T05:41:34.391" v="2991" actId="27636"/>
-        <pc:sldMkLst>
-          <pc:docMk/>
-          <pc:sldMk cId="1678637684" sldId="337"/>
-        </pc:sldMkLst>
-      </pc:sldChg>
-      <pc:sldChg chg="modSp">
-        <pc:chgData name="Xin Zou" userId="260b9726081dae15" providerId="LiveId" clId="{C7191B37-39E9-464A-80F0-C31627521F9C}" dt="2018-10-08T05:41:00.801" v="2971"/>
-        <pc:sldMkLst>
-          <pc:docMk/>
-          <pc:sldMk cId="3128164546" sldId="339"/>
-        </pc:sldMkLst>
-      </pc:sldChg>
-      <pc:sldChg chg="modSp">
-        <pc:chgData name="Xin Zou" userId="260b9726081dae15" providerId="LiveId" clId="{C7191B37-39E9-464A-80F0-C31627521F9C}" dt="2018-10-08T05:41:00.801" v="2971"/>
-        <pc:sldMkLst>
-          <pc:docMk/>
-          <pc:sldMk cId="1426053382" sldId="340"/>
-        </pc:sldMkLst>
-      </pc:sldChg>
-      <pc:sldChg chg="addSp delSp modSp add ord">
-        <pc:chgData name="Xin Zou" userId="260b9726081dae15" providerId="LiveId" clId="{C7191B37-39E9-464A-80F0-C31627521F9C}" dt="2018-10-08T05:41:34.065" v="2984" actId="27636"/>
-        <pc:sldMkLst>
-          <pc:docMk/>
-          <pc:sldMk cId="398621879" sldId="343"/>
-        </pc:sldMkLst>
-      </pc:sldChg>
-      <pc:sldChg chg="modSp add">
-        <pc:chgData name="Xin Zou" userId="260b9726081dae15" providerId="LiveId" clId="{C7191B37-39E9-464A-80F0-C31627521F9C}" dt="2018-10-08T05:41:01.961" v="2975" actId="27636"/>
-        <pc:sldMkLst>
-          <pc:docMk/>
-          <pc:sldMk cId="2232409806" sldId="344"/>
-        </pc:sldMkLst>
-      </pc:sldChg>
-      <pc:sldChg chg="addSp modSp add">
-        <pc:chgData name="Xin Zou" userId="260b9726081dae15" providerId="LiveId" clId="{C7191B37-39E9-464A-80F0-C31627521F9C}" dt="2018-10-08T05:41:00.801" v="2971"/>
-        <pc:sldMkLst>
-          <pc:docMk/>
-          <pc:sldMk cId="448027658" sldId="345"/>
-        </pc:sldMkLst>
-      </pc:sldChg>
-      <pc:sldChg chg="modSp add">
-        <pc:chgData name="Xin Zou" userId="260b9726081dae15" providerId="LiveId" clId="{C7191B37-39E9-464A-80F0-C31627521F9C}" dt="2018-10-02T22:34:51.510" v="2119" actId="6549"/>
-        <pc:sldMkLst>
-          <pc:docMk/>
-          <pc:sldMk cId="4131179668" sldId="346"/>
-        </pc:sldMkLst>
-      </pc:sldChg>
-      <pc:sldChg chg="modSp add">
-        <pc:chgData name="Xin Zou" userId="260b9726081dae15" providerId="LiveId" clId="{C7191B37-39E9-464A-80F0-C31627521F9C}" dt="2018-10-08T05:41:01.875" v="2974" actId="27636"/>
-        <pc:sldMkLst>
-          <pc:docMk/>
-          <pc:sldMk cId="3139242268" sldId="347"/>
-        </pc:sldMkLst>
-      </pc:sldChg>
-      <pc:sldChg chg="modSp add">
-        <pc:chgData name="Xin Zou" userId="260b9726081dae15" providerId="LiveId" clId="{C7191B37-39E9-464A-80F0-C31627521F9C}" dt="2018-10-02T22:14:10.683" v="2036"/>
-        <pc:sldMkLst>
-          <pc:docMk/>
-          <pc:sldMk cId="884238867" sldId="348"/>
-        </pc:sldMkLst>
-      </pc:sldChg>
-      <pc:sldChg chg="modSp add">
-        <pc:chgData name="Xin Zou" userId="260b9726081dae15" providerId="LiveId" clId="{C7191B37-39E9-464A-80F0-C31627521F9C}" dt="2018-10-02T22:14:25.383" v="2038"/>
-        <pc:sldMkLst>
-          <pc:docMk/>
-          <pc:sldMk cId="2123279561" sldId="349"/>
-        </pc:sldMkLst>
-      </pc:sldChg>
-      <pc:sldChg chg="modSp add">
-        <pc:chgData name="Xin Zou" userId="260b9726081dae15" providerId="LiveId" clId="{C7191B37-39E9-464A-80F0-C31627521F9C}" dt="2018-10-02T22:15:01.091" v="2044"/>
-        <pc:sldMkLst>
-          <pc:docMk/>
-          <pc:sldMk cId="463745865" sldId="350"/>
-        </pc:sldMkLst>
-      </pc:sldChg>
-      <pc:sldChg chg="modSp add">
-        <pc:chgData name="Xin Zou" userId="260b9726081dae15" providerId="LiveId" clId="{C7191B37-39E9-464A-80F0-C31627521F9C}" dt="2018-10-08T05:41:34.003" v="2983" actId="27636"/>
-        <pc:sldMkLst>
-          <pc:docMk/>
-          <pc:sldMk cId="1373211857" sldId="351"/>
-        </pc:sldMkLst>
-      </pc:sldChg>
-      <pc:sldChg chg="modSp add modAnim">
-        <pc:chgData name="Xin Zou" userId="260b9726081dae15" providerId="LiveId" clId="{C7191B37-39E9-464A-80F0-C31627521F9C}" dt="2018-10-08T05:41:34.240" v="2988" actId="27636"/>
-        <pc:sldMkLst>
-          <pc:docMk/>
-          <pc:sldMk cId="3889425858" sldId="352"/>
-        </pc:sldMkLst>
-      </pc:sldChg>
-      <pc:sldChg chg="addSp delSp modSp add">
-        <pc:chgData name="Xin Zou" userId="260b9726081dae15" providerId="LiveId" clId="{C7191B37-39E9-464A-80F0-C31627521F9C}" dt="2018-10-08T05:41:00.801" v="2971"/>
-        <pc:sldMkLst>
-          <pc:docMk/>
-          <pc:sldMk cId="1957216409" sldId="353"/>
-        </pc:sldMkLst>
-      </pc:sldChg>
-      <pc:sldChg chg="modSp add">
-        <pc:chgData name="Xin Zou" userId="260b9726081dae15" providerId="LiveId" clId="{C7191B37-39E9-464A-80F0-C31627521F9C}" dt="2018-10-02T22:58:55.280" v="2567" actId="6549"/>
-        <pc:sldMkLst>
-          <pc:docMk/>
-          <pc:sldMk cId="2338638659" sldId="354"/>
-        </pc:sldMkLst>
-      </pc:sldChg>
-      <pc:sldChg chg="addSp delSp modSp add ord">
-        <pc:chgData name="Xin Zou" userId="260b9726081dae15" providerId="LiveId" clId="{C7191B37-39E9-464A-80F0-C31627521F9C}" dt="2018-10-03T04:20:13.627" v="2949" actId="27636"/>
-        <pc:sldMkLst>
-          <pc:docMk/>
-          <pc:sldMk cId="2264470809" sldId="355"/>
-        </pc:sldMkLst>
-      </pc:sldChg>
-      <pc:sldChg chg="addSp modSp add">
-        <pc:chgData name="Xin Zou" userId="260b9726081dae15" providerId="LiveId" clId="{C7191B37-39E9-464A-80F0-C31627521F9C}" dt="2018-10-08T05:41:34.318" v="2990" actId="27636"/>
-        <pc:sldMkLst>
-          <pc:docMk/>
-          <pc:sldMk cId="1612837189" sldId="356"/>
-        </pc:sldMkLst>
-      </pc:sldChg>
-      <pc:sldChg chg="modSp add">
-        <pc:chgData name="Xin Zou" userId="260b9726081dae15" providerId="LiveId" clId="{C7191B37-39E9-464A-80F0-C31627521F9C}" dt="2018-10-08T05:41:02.130" v="2978" actId="27636"/>
-        <pc:sldMkLst>
-          <pc:docMk/>
-          <pc:sldMk cId="3875081412" sldId="357"/>
-        </pc:sldMkLst>
-      </pc:sldChg>
-      <pc:sldChg chg="addSp delSp modSp add">
-        <pc:chgData name="Xin Zou" userId="260b9726081dae15" providerId="LiveId" clId="{C7191B37-39E9-464A-80F0-C31627521F9C}" dt="2018-10-08T05:41:00.801" v="2971"/>
-        <pc:sldMkLst>
-          <pc:docMk/>
-          <pc:sldMk cId="3412302101" sldId="358"/>
-        </pc:sldMkLst>
-      </pc:sldChg>
-      <pc:sldChg chg="add">
-        <pc:chgData name="Xin Zou" userId="260b9726081dae15" providerId="LiveId" clId="{C7191B37-39E9-464A-80F0-C31627521F9C}" dt="2018-10-08T05:41:29.185" v="2980"/>
-        <pc:sldMkLst>
-          <pc:docMk/>
-          <pc:sldMk cId="161325156" sldId="374"/>
-        </pc:sldMkLst>
-      </pc:sldChg>
-      <pc:sldMasterChg chg="modSp setBg modSldLayout">
-        <pc:chgData name="Xin Zou" userId="260b9726081dae15" providerId="LiveId" clId="{C7191B37-39E9-464A-80F0-C31627521F9C}" dt="2018-10-08T05:41:00.801" v="2971"/>
-        <pc:sldMasterMkLst>
-          <pc:docMk/>
-          <pc:sldMasterMk cId="0" sldId="2147483890"/>
-        </pc:sldMasterMkLst>
-        <pc:sldLayoutChg chg="modSp setBg">
-          <pc:chgData name="Xin Zou" userId="260b9726081dae15" providerId="LiveId" clId="{C7191B37-39E9-464A-80F0-C31627521F9C}" dt="2018-10-08T05:41:00.801" v="2971"/>
-          <pc:sldLayoutMkLst>
-            <pc:docMk/>
-            <pc:sldMasterMk cId="0" sldId="2147483890"/>
-            <pc:sldLayoutMk cId="0" sldId="2147483891"/>
-          </pc:sldLayoutMkLst>
-        </pc:sldLayoutChg>
-        <pc:sldLayoutChg chg="modSp">
-          <pc:chgData name="Xin Zou" userId="260b9726081dae15" providerId="LiveId" clId="{C7191B37-39E9-464A-80F0-C31627521F9C}" dt="2018-10-08T05:41:00.801" v="2971"/>
-          <pc:sldLayoutMkLst>
-            <pc:docMk/>
-            <pc:sldMasterMk cId="0" sldId="2147483890"/>
-            <pc:sldLayoutMk cId="0" sldId="2147483892"/>
-          </pc:sldLayoutMkLst>
-        </pc:sldLayoutChg>
-        <pc:sldLayoutChg chg="modSp setBg">
-          <pc:chgData name="Xin Zou" userId="260b9726081dae15" providerId="LiveId" clId="{C7191B37-39E9-464A-80F0-C31627521F9C}" dt="2018-10-08T05:41:00.801" v="2971"/>
-          <pc:sldLayoutMkLst>
-            <pc:docMk/>
-            <pc:sldMasterMk cId="0" sldId="2147483890"/>
-            <pc:sldLayoutMk cId="0" sldId="2147483893"/>
-          </pc:sldLayoutMkLst>
-        </pc:sldLayoutChg>
-        <pc:sldLayoutChg chg="modSp">
-          <pc:chgData name="Xin Zou" userId="260b9726081dae15" providerId="LiveId" clId="{C7191B37-39E9-464A-80F0-C31627521F9C}" dt="2018-10-08T05:41:00.801" v="2971"/>
-          <pc:sldLayoutMkLst>
-            <pc:docMk/>
-            <pc:sldMasterMk cId="0" sldId="2147483890"/>
-            <pc:sldLayoutMk cId="0" sldId="2147483894"/>
-          </pc:sldLayoutMkLst>
-        </pc:sldLayoutChg>
-        <pc:sldLayoutChg chg="modSp">
-          <pc:chgData name="Xin Zou" userId="260b9726081dae15" providerId="LiveId" clId="{C7191B37-39E9-464A-80F0-C31627521F9C}" dt="2018-10-08T05:41:00.801" v="2971"/>
-          <pc:sldLayoutMkLst>
-            <pc:docMk/>
-            <pc:sldMasterMk cId="0" sldId="2147483890"/>
-            <pc:sldLayoutMk cId="0" sldId="2147483895"/>
-          </pc:sldLayoutMkLst>
-        </pc:sldLayoutChg>
-        <pc:sldLayoutChg chg="modSp">
-          <pc:chgData name="Xin Zou" userId="260b9726081dae15" providerId="LiveId" clId="{C7191B37-39E9-464A-80F0-C31627521F9C}" dt="2018-10-08T05:41:00.801" v="2971"/>
-          <pc:sldLayoutMkLst>
-            <pc:docMk/>
-            <pc:sldMasterMk cId="0" sldId="2147483890"/>
-            <pc:sldLayoutMk cId="0" sldId="2147483898"/>
-          </pc:sldLayoutMkLst>
-        </pc:sldLayoutChg>
-        <pc:sldLayoutChg chg="modSp setBg">
-          <pc:chgData name="Xin Zou" userId="260b9726081dae15" providerId="LiveId" clId="{C7191B37-39E9-464A-80F0-C31627521F9C}" dt="2018-10-08T05:41:00.801" v="2971"/>
-          <pc:sldLayoutMkLst>
-            <pc:docMk/>
-            <pc:sldMasterMk cId="0" sldId="2147483890"/>
-            <pc:sldLayoutMk cId="0" sldId="2147483899"/>
-          </pc:sldLayoutMkLst>
-        </pc:sldLayoutChg>
-        <pc:sldLayoutChg chg="modSp">
-          <pc:chgData name="Xin Zou" userId="260b9726081dae15" providerId="LiveId" clId="{C7191B37-39E9-464A-80F0-C31627521F9C}" dt="2018-10-08T05:41:00.801" v="2971"/>
-          <pc:sldLayoutMkLst>
-            <pc:docMk/>
-            <pc:sldMasterMk cId="0" sldId="2147483890"/>
-            <pc:sldLayoutMk cId="0" sldId="2147483901"/>
-          </pc:sldLayoutMkLst>
-        </pc:sldLayoutChg>
-      </pc:sldMasterChg>
-    </pc:docChg>
-  </pc:docChgLst>
-</pc:chgInfo>
-</file>
-
 <file path=ppt/notesMasters/notesMaster1.xml><?xml version="1.0" encoding="utf-8"?>
 <p:notesMaster xmlns:a="http://schemas.openxmlformats.org/drawingml/2006/main" xmlns:r="http://schemas.openxmlformats.org/officeDocument/2006/relationships" xmlns:p="http://schemas.openxmlformats.org/presentationml/2006/main">
   <p:cSld>
@@ -952,10 +300,6 @@
             </a:pPr>
             <a:fld id="{D9FE4259-CDD9-4688-807A-933F5020E247}" type="datetimeFigureOut">
               <a:rPr lang="en-US"/>
-              <a:pPr>
-                <a:defRPr/>
-              </a:pPr>
-              <a:t>9/24/2025</a:t>
             </a:fld>
             <a:endParaRPr lang="en-US"/>
           </a:p>
@@ -1025,6 +369,7 @@
               <a:rPr lang="en-US" noProof="0"/>
               <a:t>Click to edit Master text styles</a:t>
             </a:r>
+            <a:endParaRPr lang="en-US" noProof="0"/>
           </a:p>
           <a:p>
             <a:pPr lvl="1"/>
@@ -1032,6 +377,7 @@
               <a:rPr lang="en-US" noProof="0"/>
               <a:t>Second level</a:t>
             </a:r>
+            <a:endParaRPr lang="en-US" noProof="0"/>
           </a:p>
           <a:p>
             <a:pPr lvl="2"/>
@@ -1039,6 +385,7 @@
               <a:rPr lang="en-US" noProof="0"/>
               <a:t>Third level</a:t>
             </a:r>
+            <a:endParaRPr lang="en-US" noProof="0"/>
           </a:p>
           <a:p>
             <a:pPr lvl="3"/>
@@ -1046,6 +393,7 @@
               <a:rPr lang="en-US" noProof="0"/>
               <a:t>Fourth level</a:t>
             </a:r>
+            <a:endParaRPr lang="en-US" noProof="0"/>
           </a:p>
           <a:p>
             <a:pPr lvl="4"/>
@@ -1053,6 +401,7 @@
               <a:rPr lang="en-US" noProof="0"/>
               <a:t>Fifth level</a:t>
             </a:r>
+            <a:endParaRPr lang="en-US" noProof="0"/>
           </a:p>
         </p:txBody>
       </p:sp>
@@ -1122,21 +471,12 @@
             </a:pPr>
             <a:fld id="{C5ADAB1E-5BE0-4555-8709-524C8D586A6B}" type="slidenum">
               <a:rPr lang="en-US"/>
-              <a:pPr>
-                <a:defRPr/>
-              </a:pPr>
-              <a:t>‹#›</a:t>
             </a:fld>
             <a:endParaRPr lang="en-US"/>
           </a:p>
         </p:txBody>
       </p:sp>
     </p:spTree>
-    <p:extLst>
-      <p:ext uri="{BB962C8B-B14F-4D97-AF65-F5344CB8AC3E}">
-        <p14:creationId xmlns:p14="http://schemas.microsoft.com/office/powerpoint/2010/main" val="2845711412"/>
-      </p:ext>
-    </p:extLst>
   </p:cSld>
   <p:clrMap bg1="lt1" tx1="dk1" bg2="lt2" tx2="dk2" accent1="accent1" accent2="accent2" accent3="accent3" accent4="accent4" accent5="accent5" accent6="accent6" hlink="hlink" folHlink="folHlink"/>
   <p:notesStyle>
@@ -1337,21 +677,12 @@
             </a:pPr>
             <a:fld id="{C5ADAB1E-5BE0-4555-8709-524C8D586A6B}" type="slidenum">
               <a:rPr lang="en-US" smtClean="0"/>
-              <a:pPr>
-                <a:defRPr/>
-              </a:pPr>
-              <a:t>1</a:t>
             </a:fld>
             <a:endParaRPr lang="en-US"/>
           </a:p>
         </p:txBody>
       </p:sp>
     </p:spTree>
-    <p:extLst>
-      <p:ext uri="{BB962C8B-B14F-4D97-AF65-F5344CB8AC3E}">
-        <p14:creationId xmlns:p14="http://schemas.microsoft.com/office/powerpoint/2010/main" val="3178638970"/>
-      </p:ext>
-    </p:extLst>
   </p:cSld>
   <p:clrMapOvr>
     <a:masterClrMapping/>
@@ -1397,8 +728,6 @@
               <a:srgbClr val="000000"/>
             </a:solidFill>
             <a:miter lim="800000"/>
-            <a:headEnd/>
-            <a:tailEnd/>
           </a:ln>
           <a:extLst>
             <a:ext uri="{909E8E84-426E-40DD-AFC4-6F175D3DCCD1}">
@@ -1444,11 +773,7 @@
           </a:extLst>
         </p:spPr>
         <p:txBody>
-          <a:bodyPr wrap="square" numCol="1" anchor="t" anchorCtr="0" compatLnSpc="1">
-            <a:prstTxWarp prst="textNoShape">
-              <a:avLst/>
-            </a:prstTxWarp>
-          </a:bodyPr>
+          <a:bodyPr wrap="square" numCol="1" anchor="t" anchorCtr="0" compatLnSpc="1"/>
           <a:lstStyle/>
           <a:p>
             <a:pPr marL="0" lvl="1" eaLnBrk="1" hangingPunct="1">
@@ -1472,6 +797,7 @@
               <a:rPr lang="en-US" altLang="zh-CN" sz="2200" dirty="0"/>
               <a:t>Quiz – housing &amp; 1Billion$</a:t>
             </a:r>
+            <a:endParaRPr lang="en-US" altLang="zh-CN" sz="2200" dirty="0"/>
           </a:p>
           <a:p>
             <a:pPr eaLnBrk="1" hangingPunct="1">
@@ -1516,18 +842,14 @@
           </a:extLst>
         </p:spPr>
         <p:txBody>
-          <a:bodyPr wrap="square" numCol="1" anchorCtr="0" compatLnSpc="1">
-            <a:prstTxWarp prst="textNoShape">
-              <a:avLst/>
-            </a:prstTxWarp>
-          </a:bodyPr>
+          <a:bodyPr wrap="square" numCol="1" anchorCtr="0" compatLnSpc="1"/>
           <a:lstStyle>
             <a:lvl1pPr>
               <a:defRPr>
                 <a:solidFill>
                   <a:schemeClr val="tx1"/>
                 </a:solidFill>
-                <a:latin typeface="Verdana" pitchFamily="34" charset="0"/>
+                <a:latin typeface="Verdana" panose="020B0604030504040204" pitchFamily="34" charset="0"/>
               </a:defRPr>
             </a:lvl1pPr>
             <a:lvl2pPr marL="742950" indent="-285750">
@@ -1535,7 +857,7 @@
                 <a:solidFill>
                   <a:schemeClr val="tx1"/>
                 </a:solidFill>
-                <a:latin typeface="Verdana" pitchFamily="34" charset="0"/>
+                <a:latin typeface="Verdana" panose="020B0604030504040204" pitchFamily="34" charset="0"/>
               </a:defRPr>
             </a:lvl2pPr>
             <a:lvl3pPr marL="1143000" indent="-228600">
@@ -1543,7 +865,7 @@
                 <a:solidFill>
                   <a:schemeClr val="tx1"/>
                 </a:solidFill>
-                <a:latin typeface="Verdana" pitchFamily="34" charset="0"/>
+                <a:latin typeface="Verdana" panose="020B0604030504040204" pitchFamily="34" charset="0"/>
               </a:defRPr>
             </a:lvl3pPr>
             <a:lvl4pPr marL="1600200" indent="-228600">
@@ -1551,7 +873,7 @@
                 <a:solidFill>
                   <a:schemeClr val="tx1"/>
                 </a:solidFill>
-                <a:latin typeface="Verdana" pitchFamily="34" charset="0"/>
+                <a:latin typeface="Verdana" panose="020B0604030504040204" pitchFamily="34" charset="0"/>
               </a:defRPr>
             </a:lvl4pPr>
             <a:lvl5pPr marL="2057400" indent="-228600">
@@ -1559,7 +881,7 @@
                 <a:solidFill>
                   <a:schemeClr val="tx1"/>
                 </a:solidFill>
-                <a:latin typeface="Verdana" pitchFamily="34" charset="0"/>
+                <a:latin typeface="Verdana" panose="020B0604030504040204" pitchFamily="34" charset="0"/>
               </a:defRPr>
             </a:lvl5pPr>
             <a:lvl6pPr marL="2514600" indent="-228600" eaLnBrk="0" fontAlgn="base" hangingPunct="0">
@@ -1573,7 +895,7 @@
                 <a:solidFill>
                   <a:schemeClr val="tx1"/>
                 </a:solidFill>
-                <a:latin typeface="Verdana" pitchFamily="34" charset="0"/>
+                <a:latin typeface="Verdana" panose="020B0604030504040204" pitchFamily="34" charset="0"/>
               </a:defRPr>
             </a:lvl6pPr>
             <a:lvl7pPr marL="2971800" indent="-228600" eaLnBrk="0" fontAlgn="base" hangingPunct="0">
@@ -1587,7 +909,7 @@
                 <a:solidFill>
                   <a:schemeClr val="tx1"/>
                 </a:solidFill>
-                <a:latin typeface="Verdana" pitchFamily="34" charset="0"/>
+                <a:latin typeface="Verdana" panose="020B0604030504040204" pitchFamily="34" charset="0"/>
               </a:defRPr>
             </a:lvl7pPr>
             <a:lvl8pPr marL="3429000" indent="-228600" eaLnBrk="0" fontAlgn="base" hangingPunct="0">
@@ -1601,7 +923,7 @@
                 <a:solidFill>
                   <a:schemeClr val="tx1"/>
                 </a:solidFill>
-                <a:latin typeface="Verdana" pitchFamily="34" charset="0"/>
+                <a:latin typeface="Verdana" panose="020B0604030504040204" pitchFamily="34" charset="0"/>
               </a:defRPr>
             </a:lvl8pPr>
             <a:lvl9pPr marL="3886200" indent="-228600" eaLnBrk="0" fontAlgn="base" hangingPunct="0">
@@ -1615,26 +937,19 @@
                 <a:solidFill>
                   <a:schemeClr val="tx1"/>
                 </a:solidFill>
-                <a:latin typeface="Verdana" pitchFamily="34" charset="0"/>
+                <a:latin typeface="Verdana" panose="020B0604030504040204" pitchFamily="34" charset="0"/>
               </a:defRPr>
             </a:lvl9pPr>
           </a:lstStyle>
           <a:p>
             <a:fld id="{9FA30708-CCA8-4933-B01C-46738CEF215D}" type="slidenum">
               <a:rPr lang="en-US" smtClean="0"/>
-              <a:pPr/>
-              <a:t>33</a:t>
             </a:fld>
             <a:endParaRPr lang="en-US"/>
           </a:p>
         </p:txBody>
       </p:sp>
     </p:spTree>
-    <p:extLst>
-      <p:ext uri="{BB962C8B-B14F-4D97-AF65-F5344CB8AC3E}">
-        <p14:creationId xmlns:p14="http://schemas.microsoft.com/office/powerpoint/2010/main" val="45289420"/>
-      </p:ext>
-    </p:extLst>
   </p:cSld>
   <p:clrMapOvr>
     <a:masterClrMapping/>
@@ -1680,8 +995,6 @@
               <a:srgbClr val="000000"/>
             </a:solidFill>
             <a:miter lim="800000"/>
-            <a:headEnd/>
-            <a:tailEnd/>
           </a:ln>
           <a:extLst>
             <a:ext uri="{909E8E84-426E-40DD-AFC4-6F175D3DCCD1}">
@@ -1727,11 +1040,7 @@
           </a:extLst>
         </p:spPr>
         <p:txBody>
-          <a:bodyPr wrap="square" numCol="1" anchor="t" anchorCtr="0" compatLnSpc="1">
-            <a:prstTxWarp prst="textNoShape">
-              <a:avLst/>
-            </a:prstTxWarp>
-          </a:bodyPr>
+          <a:bodyPr wrap="square" numCol="1" anchor="t" anchorCtr="0" compatLnSpc="1"/>
           <a:lstStyle/>
           <a:p>
             <a:endParaRPr lang="en-US"/>
@@ -1771,18 +1080,14 @@
           </a:extLst>
         </p:spPr>
         <p:txBody>
-          <a:bodyPr wrap="square" numCol="1" anchorCtr="0" compatLnSpc="1">
-            <a:prstTxWarp prst="textNoShape">
-              <a:avLst/>
-            </a:prstTxWarp>
-          </a:bodyPr>
+          <a:bodyPr wrap="square" numCol="1" anchorCtr="0" compatLnSpc="1"/>
           <a:lstStyle>
             <a:lvl1pPr>
               <a:defRPr>
                 <a:solidFill>
                   <a:schemeClr val="tx1"/>
                 </a:solidFill>
-                <a:latin typeface="Verdana" pitchFamily="34" charset="0"/>
+                <a:latin typeface="Verdana" panose="020B0604030504040204" pitchFamily="34" charset="0"/>
               </a:defRPr>
             </a:lvl1pPr>
             <a:lvl2pPr marL="742950" indent="-285750">
@@ -1790,7 +1095,7 @@
                 <a:solidFill>
                   <a:schemeClr val="tx1"/>
                 </a:solidFill>
-                <a:latin typeface="Verdana" pitchFamily="34" charset="0"/>
+                <a:latin typeface="Verdana" panose="020B0604030504040204" pitchFamily="34" charset="0"/>
               </a:defRPr>
             </a:lvl2pPr>
             <a:lvl3pPr marL="1143000" indent="-228600">
@@ -1798,7 +1103,7 @@
                 <a:solidFill>
                   <a:schemeClr val="tx1"/>
                 </a:solidFill>
-                <a:latin typeface="Verdana" pitchFamily="34" charset="0"/>
+                <a:latin typeface="Verdana" panose="020B0604030504040204" pitchFamily="34" charset="0"/>
               </a:defRPr>
             </a:lvl3pPr>
             <a:lvl4pPr marL="1600200" indent="-228600">
@@ -1806,7 +1111,7 @@
                 <a:solidFill>
                   <a:schemeClr val="tx1"/>
                 </a:solidFill>
-                <a:latin typeface="Verdana" pitchFamily="34" charset="0"/>
+                <a:latin typeface="Verdana" panose="020B0604030504040204" pitchFamily="34" charset="0"/>
               </a:defRPr>
             </a:lvl4pPr>
             <a:lvl5pPr marL="2057400" indent="-228600">
@@ -1814,7 +1119,7 @@
                 <a:solidFill>
                   <a:schemeClr val="tx1"/>
                 </a:solidFill>
-                <a:latin typeface="Verdana" pitchFamily="34" charset="0"/>
+                <a:latin typeface="Verdana" panose="020B0604030504040204" pitchFamily="34" charset="0"/>
               </a:defRPr>
             </a:lvl5pPr>
             <a:lvl6pPr marL="2514600" indent="-228600" eaLnBrk="0" fontAlgn="base" hangingPunct="0">
@@ -1828,7 +1133,7 @@
                 <a:solidFill>
                   <a:schemeClr val="tx1"/>
                 </a:solidFill>
-                <a:latin typeface="Verdana" pitchFamily="34" charset="0"/>
+                <a:latin typeface="Verdana" panose="020B0604030504040204" pitchFamily="34" charset="0"/>
               </a:defRPr>
             </a:lvl6pPr>
             <a:lvl7pPr marL="2971800" indent="-228600" eaLnBrk="0" fontAlgn="base" hangingPunct="0">
@@ -1842,7 +1147,7 @@
                 <a:solidFill>
                   <a:schemeClr val="tx1"/>
                 </a:solidFill>
-                <a:latin typeface="Verdana" pitchFamily="34" charset="0"/>
+                <a:latin typeface="Verdana" panose="020B0604030504040204" pitchFamily="34" charset="0"/>
               </a:defRPr>
             </a:lvl7pPr>
             <a:lvl8pPr marL="3429000" indent="-228600" eaLnBrk="0" fontAlgn="base" hangingPunct="0">
@@ -1856,7 +1161,7 @@
                 <a:solidFill>
                   <a:schemeClr val="tx1"/>
                 </a:solidFill>
-                <a:latin typeface="Verdana" pitchFamily="34" charset="0"/>
+                <a:latin typeface="Verdana" panose="020B0604030504040204" pitchFamily="34" charset="0"/>
               </a:defRPr>
             </a:lvl8pPr>
             <a:lvl9pPr marL="3886200" indent="-228600" eaLnBrk="0" fontAlgn="base" hangingPunct="0">
@@ -1870,26 +1175,19 @@
                 <a:solidFill>
                   <a:schemeClr val="tx1"/>
                 </a:solidFill>
-                <a:latin typeface="Verdana" pitchFamily="34" charset="0"/>
+                <a:latin typeface="Verdana" panose="020B0604030504040204" pitchFamily="34" charset="0"/>
               </a:defRPr>
             </a:lvl9pPr>
           </a:lstStyle>
           <a:p>
             <a:fld id="{3F4CE25E-E002-44E5-ACD7-66C89E0F12B2}" type="slidenum">
               <a:rPr lang="en-US" smtClean="0"/>
-              <a:pPr/>
-              <a:t>38</a:t>
             </a:fld>
             <a:endParaRPr lang="en-US"/>
           </a:p>
         </p:txBody>
       </p:sp>
     </p:spTree>
-    <p:extLst>
-      <p:ext uri="{BB962C8B-B14F-4D97-AF65-F5344CB8AC3E}">
-        <p14:creationId xmlns:p14="http://schemas.microsoft.com/office/powerpoint/2010/main" val="3762966191"/>
-      </p:ext>
-    </p:extLst>
   </p:cSld>
   <p:clrMapOvr>
     <a:masterClrMapping/>
@@ -1970,21 +1268,12 @@
             </a:pPr>
             <a:fld id="{C5ADAB1E-5BE0-4555-8709-524C8D586A6B}" type="slidenum">
               <a:rPr lang="en-US" smtClean="0"/>
-              <a:pPr>
-                <a:defRPr/>
-              </a:pPr>
-              <a:t>46</a:t>
             </a:fld>
             <a:endParaRPr lang="en-US"/>
           </a:p>
         </p:txBody>
       </p:sp>
     </p:spTree>
-    <p:extLst>
-      <p:ext uri="{BB962C8B-B14F-4D97-AF65-F5344CB8AC3E}">
-        <p14:creationId xmlns:p14="http://schemas.microsoft.com/office/powerpoint/2010/main" val="3572653862"/>
-      </p:ext>
-    </p:extLst>
   </p:cSld>
   <p:clrMapOvr>
     <a:masterClrMapping/>
@@ -2011,7 +1300,7 @@
       </p:grpSpPr>
       <p:sp>
         <p:nvSpPr>
-          <p:cNvPr id="2" name="Slide Image Placeholder 1"/>
+          <p:cNvPr id="2" name="幻灯片图像占位符 1"/>
           <p:cNvSpPr>
             <a:spLocks noGrp="1" noRot="1" noChangeAspect="1"/>
           </p:cNvSpPr>
@@ -2028,7 +1317,7 @@
       </p:sp>
       <p:sp>
         <p:nvSpPr>
-          <p:cNvPr id="3" name="Notes Placeholder 2"/>
+          <p:cNvPr id="3" name="备注占位符 2"/>
           <p:cNvSpPr>
             <a:spLocks noGrp="1"/>
           </p:cNvSpPr>
@@ -2041,18 +1330,60 @@
           <a:bodyPr/>
           <a:lstStyle/>
           <a:p>
-            <a:endParaRPr lang="en-US" dirty="0"/>
-          </a:p>
-        </p:txBody>
-      </p:sp>
-      <p:sp>
-        <p:nvSpPr>
-          <p:cNvPr id="4" name="Slide Number Placeholder 3"/>
-          <p:cNvSpPr>
-            <a:spLocks noGrp="1"/>
-          </p:cNvSpPr>
-          <p:nvPr>
-            <p:ph type="sldNum" sz="quarter" idx="5"/>
+            <a:r>
+              <a:rPr lang="zh-CN" altLang="en-US" dirty="0"/>
+              <a:t>那些塔吊，就是建筑工程的工具， </a:t>
+            </a:r>
+            <a:r>
+              <a:rPr lang="zh-CN" altLang="en-US"/>
+              <a:t>当产品交付时</a:t>
+            </a:r>
+            <a:r>
+              <a:rPr lang="zh-CN" altLang="en-US" dirty="0"/>
+              <a:t>，它们就消失了。 </a:t>
+            </a:r>
+            <a:endParaRPr lang="en-US" altLang="zh-CN" dirty="0"/>
+          </a:p>
+          <a:p>
+            <a:endParaRPr lang="en-US" dirty="0"/>
+          </a:p>
+          <a:p>
+            <a:r>
+              <a:rPr lang="zh-CN" altLang="en-US" dirty="0"/>
+              <a:t>提问：在软件的构建过程中， 有什么样的工具，像塔吊那样？ </a:t>
+            </a:r>
+            <a:endParaRPr lang="en-US" altLang="zh-CN" dirty="0"/>
+          </a:p>
+          <a:p>
+            <a:endParaRPr lang="en-US" dirty="0"/>
+          </a:p>
+          <a:p>
+            <a:r>
+              <a:rPr lang="zh-CN" altLang="en-US" dirty="0"/>
+              <a:t>塔吊也有一个设计，建造，安装，使用，拆卸的过程：</a:t>
+            </a:r>
+            <a:endParaRPr lang="en-US" dirty="0"/>
+          </a:p>
+          <a:p>
+            <a:r>
+              <a:rPr lang="en-US" dirty="0"/>
+              <a:t>	http://www.wuji8.com/meta/565085646.html</a:t>
+            </a:r>
+            <a:endParaRPr lang="en-US" dirty="0"/>
+          </a:p>
+          <a:p>
+            <a:endParaRPr lang="en-US" dirty="0"/>
+          </a:p>
+        </p:txBody>
+      </p:sp>
+      <p:sp>
+        <p:nvSpPr>
+          <p:cNvPr id="4" name="灯片编号占位符 3"/>
+          <p:cNvSpPr>
+            <a:spLocks noGrp="1"/>
+          </p:cNvSpPr>
+          <p:nvPr>
+            <p:ph type="sldNum" sz="quarter" idx="10"/>
           </p:nvPr>
         </p:nvSpPr>
         <p:spPr/>
@@ -2065,157 +1396,12 @@
             </a:pPr>
             <a:fld id="{C5ADAB1E-5BE0-4555-8709-524C8D586A6B}" type="slidenum">
               <a:rPr lang="en-US" smtClean="0"/>
-              <a:pPr>
-                <a:defRPr/>
-              </a:pPr>
-              <a:t>52</a:t>
             </a:fld>
             <a:endParaRPr lang="en-US"/>
           </a:p>
         </p:txBody>
       </p:sp>
     </p:spTree>
-    <p:extLst>
-      <p:ext uri="{BB962C8B-B14F-4D97-AF65-F5344CB8AC3E}">
-        <p14:creationId xmlns:p14="http://schemas.microsoft.com/office/powerpoint/2010/main" val="122513713"/>
-      </p:ext>
-    </p:extLst>
-  </p:cSld>
-  <p:clrMapOvr>
-    <a:masterClrMapping/>
-  </p:clrMapOvr>
-</p:notes>
-</file>
-
-<file path=ppt/notesSlides/notesSlide14.xml><?xml version="1.0" encoding="utf-8"?>
-<p:notes xmlns:a="http://schemas.openxmlformats.org/drawingml/2006/main" xmlns:r="http://schemas.openxmlformats.org/officeDocument/2006/relationships" xmlns:p="http://schemas.openxmlformats.org/presentationml/2006/main">
-  <p:cSld>
-    <p:spTree>
-      <p:nvGrpSpPr>
-        <p:cNvPr id="1" name=""/>
-        <p:cNvGrpSpPr/>
-        <p:nvPr/>
-      </p:nvGrpSpPr>
-      <p:grpSpPr>
-        <a:xfrm>
-          <a:off x="0" y="0"/>
-          <a:ext cx="0" cy="0"/>
-          <a:chOff x="0" y="0"/>
-          <a:chExt cx="0" cy="0"/>
-        </a:xfrm>
-      </p:grpSpPr>
-      <p:sp>
-        <p:nvSpPr>
-          <p:cNvPr id="2" name="幻灯片图像占位符 1"/>
-          <p:cNvSpPr>
-            <a:spLocks noGrp="1" noRot="1" noChangeAspect="1"/>
-          </p:cNvSpPr>
-          <p:nvPr>
-            <p:ph type="sldImg"/>
-          </p:nvPr>
-        </p:nvSpPr>
-        <p:spPr>
-          <a:xfrm>
-            <a:off x="381000" y="685800"/>
-            <a:ext cx="6096000" cy="3429000"/>
-          </a:xfrm>
-        </p:spPr>
-      </p:sp>
-      <p:sp>
-        <p:nvSpPr>
-          <p:cNvPr id="3" name="备注占位符 2"/>
-          <p:cNvSpPr>
-            <a:spLocks noGrp="1"/>
-          </p:cNvSpPr>
-          <p:nvPr>
-            <p:ph type="body" idx="1"/>
-          </p:nvPr>
-        </p:nvSpPr>
-        <p:spPr/>
-        <p:txBody>
-          <a:bodyPr/>
-          <a:lstStyle/>
-          <a:p>
-            <a:r>
-              <a:rPr lang="zh-CN" altLang="en-US" dirty="0"/>
-              <a:t>那些塔吊，就是建筑工程的工具， </a:t>
-            </a:r>
-            <a:r>
-              <a:rPr lang="zh-CN" altLang="en-US"/>
-              <a:t>当产品交付时</a:t>
-            </a:r>
-            <a:r>
-              <a:rPr lang="zh-CN" altLang="en-US" dirty="0"/>
-              <a:t>，它们就消失了。 </a:t>
-            </a:r>
-            <a:endParaRPr lang="en-US" altLang="zh-CN" dirty="0"/>
-          </a:p>
-          <a:p>
-            <a:endParaRPr lang="en-US" dirty="0"/>
-          </a:p>
-          <a:p>
-            <a:r>
-              <a:rPr lang="zh-CN" altLang="en-US" dirty="0"/>
-              <a:t>提问：在软件的构建过程中， 有什么样的工具，像塔吊那样？ </a:t>
-            </a:r>
-            <a:endParaRPr lang="en-US" altLang="zh-CN" dirty="0"/>
-          </a:p>
-          <a:p>
-            <a:endParaRPr lang="en-US" dirty="0"/>
-          </a:p>
-          <a:p>
-            <a:r>
-              <a:rPr lang="zh-CN" altLang="en-US" dirty="0"/>
-              <a:t>塔吊也有一个设计，建造，安装，使用，拆卸的过程：</a:t>
-            </a:r>
-            <a:endParaRPr lang="en-US" dirty="0"/>
-          </a:p>
-          <a:p>
-            <a:r>
-              <a:rPr lang="en-US" dirty="0"/>
-              <a:t>	http://www.wuji8.com/meta/565085646.html</a:t>
-            </a:r>
-          </a:p>
-          <a:p>
-            <a:endParaRPr lang="en-US" dirty="0"/>
-          </a:p>
-        </p:txBody>
-      </p:sp>
-      <p:sp>
-        <p:nvSpPr>
-          <p:cNvPr id="4" name="灯片编号占位符 3"/>
-          <p:cNvSpPr>
-            <a:spLocks noGrp="1"/>
-          </p:cNvSpPr>
-          <p:nvPr>
-            <p:ph type="sldNum" sz="quarter" idx="10"/>
-          </p:nvPr>
-        </p:nvSpPr>
-        <p:spPr/>
-        <p:txBody>
-          <a:bodyPr/>
-          <a:lstStyle/>
-          <a:p>
-            <a:pPr>
-              <a:defRPr/>
-            </a:pPr>
-            <a:fld id="{C5ADAB1E-5BE0-4555-8709-524C8D586A6B}" type="slidenum">
-              <a:rPr lang="en-US" smtClean="0"/>
-              <a:pPr>
-                <a:defRPr/>
-              </a:pPr>
-              <a:t>55</a:t>
-            </a:fld>
-            <a:endParaRPr lang="en-US"/>
-          </a:p>
-        </p:txBody>
-      </p:sp>
-    </p:spTree>
-    <p:extLst>
-      <p:ext uri="{BB962C8B-B14F-4D97-AF65-F5344CB8AC3E}">
-        <p14:creationId xmlns:p14="http://schemas.microsoft.com/office/powerpoint/2010/main" val="277751624"/>
-      </p:ext>
-    </p:extLst>
   </p:cSld>
   <p:clrMapOvr>
     <a:masterClrMapping/>
@@ -2261,8 +1447,6 @@
               <a:srgbClr val="000000"/>
             </a:solidFill>
             <a:miter lim="800000"/>
-            <a:headEnd/>
-            <a:tailEnd/>
           </a:ln>
           <a:extLst>
             <a:ext uri="{909E8E84-426E-40DD-AFC4-6F175D3DCCD1}">
@@ -2585,18 +1769,14 @@
           </a:extLst>
         </p:spPr>
         <p:txBody>
-          <a:bodyPr wrap="square" numCol="1" anchorCtr="0" compatLnSpc="1">
-            <a:prstTxWarp prst="textNoShape">
-              <a:avLst/>
-            </a:prstTxWarp>
-          </a:bodyPr>
+          <a:bodyPr wrap="square" numCol="1" anchorCtr="0" compatLnSpc="1"/>
           <a:lstStyle>
             <a:lvl1pPr>
               <a:defRPr>
                 <a:solidFill>
                   <a:schemeClr val="tx1"/>
                 </a:solidFill>
-                <a:latin typeface="Verdana" pitchFamily="34" charset="0"/>
+                <a:latin typeface="Verdana" panose="020B0604030504040204" pitchFamily="34" charset="0"/>
               </a:defRPr>
             </a:lvl1pPr>
             <a:lvl2pPr marL="742950" indent="-285750">
@@ -2604,7 +1784,7 @@
                 <a:solidFill>
                   <a:schemeClr val="tx1"/>
                 </a:solidFill>
-                <a:latin typeface="Verdana" pitchFamily="34" charset="0"/>
+                <a:latin typeface="Verdana" panose="020B0604030504040204" pitchFamily="34" charset="0"/>
               </a:defRPr>
             </a:lvl2pPr>
             <a:lvl3pPr marL="1143000" indent="-228600">
@@ -2612,7 +1792,7 @@
                 <a:solidFill>
                   <a:schemeClr val="tx1"/>
                 </a:solidFill>
-                <a:latin typeface="Verdana" pitchFamily="34" charset="0"/>
+                <a:latin typeface="Verdana" panose="020B0604030504040204" pitchFamily="34" charset="0"/>
               </a:defRPr>
             </a:lvl3pPr>
             <a:lvl4pPr marL="1600200" indent="-228600">
@@ -2620,7 +1800,7 @@
                 <a:solidFill>
                   <a:schemeClr val="tx1"/>
                 </a:solidFill>
-                <a:latin typeface="Verdana" pitchFamily="34" charset="0"/>
+                <a:latin typeface="Verdana" panose="020B0604030504040204" pitchFamily="34" charset="0"/>
               </a:defRPr>
             </a:lvl4pPr>
             <a:lvl5pPr marL="2057400" indent="-228600">
@@ -2628,7 +1808,7 @@
                 <a:solidFill>
                   <a:schemeClr val="tx1"/>
                 </a:solidFill>
-                <a:latin typeface="Verdana" pitchFamily="34" charset="0"/>
+                <a:latin typeface="Verdana" panose="020B0604030504040204" pitchFamily="34" charset="0"/>
               </a:defRPr>
             </a:lvl5pPr>
             <a:lvl6pPr marL="2514600" indent="-228600" eaLnBrk="0" fontAlgn="base" hangingPunct="0">
@@ -2642,7 +1822,7 @@
                 <a:solidFill>
                   <a:schemeClr val="tx1"/>
                 </a:solidFill>
-                <a:latin typeface="Verdana" pitchFamily="34" charset="0"/>
+                <a:latin typeface="Verdana" panose="020B0604030504040204" pitchFamily="34" charset="0"/>
               </a:defRPr>
             </a:lvl6pPr>
             <a:lvl7pPr marL="2971800" indent="-228600" eaLnBrk="0" fontAlgn="base" hangingPunct="0">
@@ -2656,7 +1836,7 @@
                 <a:solidFill>
                   <a:schemeClr val="tx1"/>
                 </a:solidFill>
-                <a:latin typeface="Verdana" pitchFamily="34" charset="0"/>
+                <a:latin typeface="Verdana" panose="020B0604030504040204" pitchFamily="34" charset="0"/>
               </a:defRPr>
             </a:lvl7pPr>
             <a:lvl8pPr marL="3429000" indent="-228600" eaLnBrk="0" fontAlgn="base" hangingPunct="0">
@@ -2670,7 +1850,7 @@
                 <a:solidFill>
                   <a:schemeClr val="tx1"/>
                 </a:solidFill>
-                <a:latin typeface="Verdana" pitchFamily="34" charset="0"/>
+                <a:latin typeface="Verdana" panose="020B0604030504040204" pitchFamily="34" charset="0"/>
               </a:defRPr>
             </a:lvl8pPr>
             <a:lvl9pPr marL="3886200" indent="-228600" eaLnBrk="0" fontAlgn="base" hangingPunct="0">
@@ -2684,26 +1864,19 @@
                 <a:solidFill>
                   <a:schemeClr val="tx1"/>
                 </a:solidFill>
-                <a:latin typeface="Verdana" pitchFamily="34" charset="0"/>
+                <a:latin typeface="Verdana" panose="020B0604030504040204" pitchFamily="34" charset="0"/>
               </a:defRPr>
             </a:lvl9pPr>
           </a:lstStyle>
           <a:p>
             <a:fld id="{2551ACDB-B434-4061-BA28-70898E2A9AA7}" type="slidenum">
               <a:rPr lang="en-US" smtClean="0"/>
-              <a:pPr/>
-              <a:t>4</a:t>
             </a:fld>
             <a:endParaRPr lang="en-US"/>
           </a:p>
         </p:txBody>
       </p:sp>
     </p:spTree>
-    <p:extLst>
-      <p:ext uri="{BB962C8B-B14F-4D97-AF65-F5344CB8AC3E}">
-        <p14:creationId xmlns:p14="http://schemas.microsoft.com/office/powerpoint/2010/main" val="4250614303"/>
-      </p:ext>
-    </p:extLst>
   </p:cSld>
   <p:clrMapOvr>
     <a:masterClrMapping/>
@@ -2749,8 +1922,6 @@
               <a:srgbClr val="000000"/>
             </a:solidFill>
             <a:miter lim="800000"/>
-            <a:headEnd/>
-            <a:tailEnd/>
           </a:ln>
           <a:extLst>
             <a:ext uri="{909E8E84-426E-40DD-AFC4-6F175D3DCCD1}">
@@ -2796,11 +1967,7 @@
           </a:extLst>
         </p:spPr>
         <p:txBody>
-          <a:bodyPr wrap="square" numCol="1" anchor="t" anchorCtr="0" compatLnSpc="1">
-            <a:prstTxWarp prst="textNoShape">
-              <a:avLst/>
-            </a:prstTxWarp>
-          </a:bodyPr>
+          <a:bodyPr wrap="square" numCol="1" anchor="t" anchorCtr="0" compatLnSpc="1"/>
           <a:lstStyle/>
           <a:p>
             <a:r>
@@ -2817,7 +1984,7 @@
             </a:r>
             <a:r>
               <a:rPr lang="en-US">
-                <a:hlinkClick r:id="rId3" action="ppaction://hlinkfile" tooltip="Brian Randell"/>
+                <a:hlinkClick r:id="rId3" tooltip="Brian Randell" action="ppaction://hlinkfile"/>
               </a:rPr>
               <a:t>Brian Randell</a:t>
             </a:r>
@@ -2827,7 +1994,7 @@
             </a:r>
             <a:r>
               <a:rPr lang="en-US">
-                <a:hlinkClick r:id="rId4" action="ppaction://hlinkfile" tooltip="F.L. Bauer"/>
+                <a:hlinkClick r:id="rId4" tooltip="F.L. Bauer" action="ppaction://hlinkfile"/>
               </a:rPr>
               <a:t>F.L. Bauer</a:t>
             </a:r>
@@ -2847,7 +2014,7 @@
             </a:r>
             <a:r>
               <a:rPr lang="en-US">
-                <a:hlinkClick r:id="rId6" action="ppaction://hlinkfile" tooltip="Requirements analysis"/>
+                <a:hlinkClick r:id="rId6" tooltip="Requirements analysis" action="ppaction://hlinkfile"/>
               </a:rPr>
               <a:t>software requirements</a:t>
             </a:r>
@@ -2857,7 +2024,7 @@
             </a:r>
             <a:r>
               <a:rPr lang="en-US">
-                <a:hlinkClick r:id="rId7" action="ppaction://hlinkfile" tooltip="Software design"/>
+                <a:hlinkClick r:id="rId7" tooltip="Software design" action="ppaction://hlinkfile"/>
               </a:rPr>
               <a:t>software design</a:t>
             </a:r>
@@ -2867,7 +2034,7 @@
             </a:r>
             <a:r>
               <a:rPr lang="en-US">
-                <a:hlinkClick r:id="rId8" action="ppaction://hlinkfile" tooltip="Computer programming"/>
+                <a:hlinkClick r:id="rId8" tooltip="Computer programming" action="ppaction://hlinkfile"/>
               </a:rPr>
               <a:t>software construction</a:t>
             </a:r>
@@ -2877,7 +2044,7 @@
             </a:r>
             <a:r>
               <a:rPr lang="en-US">
-                <a:hlinkClick r:id="rId9" action="ppaction://hlinkfile" tooltip="Software testing"/>
+                <a:hlinkClick r:id="rId9" tooltip="Software testing" action="ppaction://hlinkfile"/>
               </a:rPr>
               <a:t>software testing</a:t>
             </a:r>
@@ -2887,7 +2054,7 @@
             </a:r>
             <a:r>
               <a:rPr lang="en-US">
-                <a:hlinkClick r:id="rId10" action="ppaction://hlinkfile" tooltip="Software maintenance"/>
+                <a:hlinkClick r:id="rId10" tooltip="Software maintenance" action="ppaction://hlinkfile"/>
               </a:rPr>
               <a:t>software maintenance</a:t>
             </a:r>
@@ -2907,7 +2074,7 @@
             </a:r>
             <a:r>
               <a:rPr lang="en-US">
-                <a:hlinkClick r:id="rId12" action="ppaction://hlinkfile" tooltip="Computer science"/>
+                <a:hlinkClick r:id="rId12" tooltip="Computer science" action="ppaction://hlinkfile"/>
               </a:rPr>
               <a:t>computer science</a:t>
             </a:r>
@@ -2917,7 +2084,7 @@
             </a:r>
             <a:r>
               <a:rPr lang="en-US">
-                <a:hlinkClick r:id="rId13" action="ppaction://hlinkfile" tooltip="Computer engineering"/>
+                <a:hlinkClick r:id="rId13" tooltip="Computer engineering" action="ppaction://hlinkfile"/>
               </a:rPr>
               <a:t>computer engineering</a:t>
             </a:r>
@@ -2927,7 +2094,7 @@
             </a:r>
             <a:r>
               <a:rPr lang="en-US">
-                <a:hlinkClick r:id="rId14" action="ppaction://hlinkfile" tooltip="Management"/>
+                <a:hlinkClick r:id="rId14" tooltip="Management" action="ppaction://hlinkfile"/>
               </a:rPr>
               <a:t>management</a:t>
             </a:r>
@@ -2937,7 +2104,7 @@
             </a:r>
             <a:r>
               <a:rPr lang="en-US">
-                <a:hlinkClick r:id="rId15" action="ppaction://hlinkfile" tooltip="Mathematics"/>
+                <a:hlinkClick r:id="rId15" tooltip="Mathematics" action="ppaction://hlinkfile"/>
               </a:rPr>
               <a:t>mathematics</a:t>
             </a:r>
@@ -2947,7 +2114,7 @@
             </a:r>
             <a:r>
               <a:rPr lang="en-US">
-                <a:hlinkClick r:id="rId16" action="ppaction://hlinkfile" tooltip="Project management"/>
+                <a:hlinkClick r:id="rId16" tooltip="Project management" action="ppaction://hlinkfile"/>
               </a:rPr>
               <a:t>project management</a:t>
             </a:r>
@@ -2957,7 +2124,7 @@
             </a:r>
             <a:r>
               <a:rPr lang="en-US">
-                <a:hlinkClick r:id="rId17" action="ppaction://hlinkfile" tooltip="Quality management"/>
+                <a:hlinkClick r:id="rId17" tooltip="Quality management" action="ppaction://hlinkfile"/>
               </a:rPr>
               <a:t>quality management</a:t>
             </a:r>
@@ -2967,7 +2134,7 @@
             </a:r>
             <a:r>
               <a:rPr lang="en-US">
-                <a:hlinkClick r:id="rId18" action="ppaction://hlinkfile" tooltip="Ergonomics"/>
+                <a:hlinkClick r:id="rId18" tooltip="Ergonomics" action="ppaction://hlinkfile"/>
               </a:rPr>
               <a:t>ergonomics</a:t>
             </a:r>
@@ -2977,7 +2144,7 @@
             </a:r>
             <a:r>
               <a:rPr lang="en-US">
-                <a:hlinkClick r:id="rId19" action="ppaction://hlinkfile" tooltip="Systems engineering"/>
+                <a:hlinkClick r:id="rId19" tooltip="Systems engineering" action="ppaction://hlinkfile"/>
               </a:rPr>
               <a:t>systems engineering</a:t>
             </a:r>
@@ -3031,18 +2198,14 @@
           </a:extLst>
         </p:spPr>
         <p:txBody>
-          <a:bodyPr wrap="square" numCol="1" anchorCtr="0" compatLnSpc="1">
-            <a:prstTxWarp prst="textNoShape">
-              <a:avLst/>
-            </a:prstTxWarp>
-          </a:bodyPr>
+          <a:bodyPr wrap="square" numCol="1" anchorCtr="0" compatLnSpc="1"/>
           <a:lstStyle>
             <a:lvl1pPr>
               <a:defRPr>
                 <a:solidFill>
                   <a:schemeClr val="tx1"/>
                 </a:solidFill>
-                <a:latin typeface="Verdana" pitchFamily="34" charset="0"/>
+                <a:latin typeface="Verdana" panose="020B0604030504040204" pitchFamily="34" charset="0"/>
               </a:defRPr>
             </a:lvl1pPr>
             <a:lvl2pPr marL="742950" indent="-285750">
@@ -3050,7 +2213,7 @@
                 <a:solidFill>
                   <a:schemeClr val="tx1"/>
                 </a:solidFill>
-                <a:latin typeface="Verdana" pitchFamily="34" charset="0"/>
+                <a:latin typeface="Verdana" panose="020B0604030504040204" pitchFamily="34" charset="0"/>
               </a:defRPr>
             </a:lvl2pPr>
             <a:lvl3pPr marL="1143000" indent="-228600">
@@ -3058,7 +2221,7 @@
                 <a:solidFill>
                   <a:schemeClr val="tx1"/>
                 </a:solidFill>
-                <a:latin typeface="Verdana" pitchFamily="34" charset="0"/>
+                <a:latin typeface="Verdana" panose="020B0604030504040204" pitchFamily="34" charset="0"/>
               </a:defRPr>
             </a:lvl3pPr>
             <a:lvl4pPr marL="1600200" indent="-228600">
@@ -3066,7 +2229,7 @@
                 <a:solidFill>
                   <a:schemeClr val="tx1"/>
                 </a:solidFill>
-                <a:latin typeface="Verdana" pitchFamily="34" charset="0"/>
+                <a:latin typeface="Verdana" panose="020B0604030504040204" pitchFamily="34" charset="0"/>
               </a:defRPr>
             </a:lvl4pPr>
             <a:lvl5pPr marL="2057400" indent="-228600">
@@ -3074,7 +2237,7 @@
                 <a:solidFill>
                   <a:schemeClr val="tx1"/>
                 </a:solidFill>
-                <a:latin typeface="Verdana" pitchFamily="34" charset="0"/>
+                <a:latin typeface="Verdana" panose="020B0604030504040204" pitchFamily="34" charset="0"/>
               </a:defRPr>
             </a:lvl5pPr>
             <a:lvl6pPr marL="2514600" indent="-228600" eaLnBrk="0" fontAlgn="base" hangingPunct="0">
@@ -3088,7 +2251,7 @@
                 <a:solidFill>
                   <a:schemeClr val="tx1"/>
                 </a:solidFill>
-                <a:latin typeface="Verdana" pitchFamily="34" charset="0"/>
+                <a:latin typeface="Verdana" panose="020B0604030504040204" pitchFamily="34" charset="0"/>
               </a:defRPr>
             </a:lvl6pPr>
             <a:lvl7pPr marL="2971800" indent="-228600" eaLnBrk="0" fontAlgn="base" hangingPunct="0">
@@ -3102,7 +2265,7 @@
                 <a:solidFill>
                   <a:schemeClr val="tx1"/>
                 </a:solidFill>
-                <a:latin typeface="Verdana" pitchFamily="34" charset="0"/>
+                <a:latin typeface="Verdana" panose="020B0604030504040204" pitchFamily="34" charset="0"/>
               </a:defRPr>
             </a:lvl7pPr>
             <a:lvl8pPr marL="3429000" indent="-228600" eaLnBrk="0" fontAlgn="base" hangingPunct="0">
@@ -3116,7 +2279,7 @@
                 <a:solidFill>
                   <a:schemeClr val="tx1"/>
                 </a:solidFill>
-                <a:latin typeface="Verdana" pitchFamily="34" charset="0"/>
+                <a:latin typeface="Verdana" panose="020B0604030504040204" pitchFamily="34" charset="0"/>
               </a:defRPr>
             </a:lvl8pPr>
             <a:lvl9pPr marL="3886200" indent="-228600" eaLnBrk="0" fontAlgn="base" hangingPunct="0">
@@ -3130,26 +2293,19 @@
                 <a:solidFill>
                   <a:schemeClr val="tx1"/>
                 </a:solidFill>
-                <a:latin typeface="Verdana" pitchFamily="34" charset="0"/>
+                <a:latin typeface="Verdana" panose="020B0604030504040204" pitchFamily="34" charset="0"/>
               </a:defRPr>
             </a:lvl9pPr>
           </a:lstStyle>
           <a:p>
             <a:fld id="{97989AEB-0172-4163-907A-0644FD1BC23F}" type="slidenum">
               <a:rPr lang="en-US" smtClean="0"/>
-              <a:pPr/>
-              <a:t>7</a:t>
             </a:fld>
             <a:endParaRPr lang="en-US"/>
           </a:p>
         </p:txBody>
       </p:sp>
     </p:spTree>
-    <p:extLst>
-      <p:ext uri="{BB962C8B-B14F-4D97-AF65-F5344CB8AC3E}">
-        <p14:creationId xmlns:p14="http://schemas.microsoft.com/office/powerpoint/2010/main" val="2318913042"/>
-      </p:ext>
-    </p:extLst>
   </p:cSld>
   <p:clrMapOvr>
     <a:masterClrMapping/>
@@ -3195,8 +2351,6 @@
               <a:srgbClr val="000000"/>
             </a:solidFill>
             <a:miter lim="800000"/>
-            <a:headEnd/>
-            <a:tailEnd/>
           </a:ln>
           <a:extLst>
             <a:ext uri="{909E8E84-426E-40DD-AFC4-6F175D3DCCD1}">
@@ -3242,11 +2396,7 @@
           </a:extLst>
         </p:spPr>
         <p:txBody>
-          <a:bodyPr wrap="square" numCol="1" anchor="t" anchorCtr="0" compatLnSpc="1">
-            <a:prstTxWarp prst="textNoShape">
-              <a:avLst/>
-            </a:prstTxWarp>
-          </a:bodyPr>
+          <a:bodyPr wrap="square" numCol="1" anchor="t" anchorCtr="0" compatLnSpc="1"/>
           <a:lstStyle/>
           <a:p>
             <a:pPr eaLnBrk="1" hangingPunct="1"/>
@@ -3287,18 +2437,14 @@
           </a:extLst>
         </p:spPr>
         <p:txBody>
-          <a:bodyPr wrap="square" numCol="1" anchorCtr="0" compatLnSpc="1">
-            <a:prstTxWarp prst="textNoShape">
-              <a:avLst/>
-            </a:prstTxWarp>
-          </a:bodyPr>
+          <a:bodyPr wrap="square" numCol="1" anchorCtr="0" compatLnSpc="1"/>
           <a:lstStyle>
             <a:lvl1pPr>
               <a:defRPr>
                 <a:solidFill>
                   <a:schemeClr val="tx1"/>
                 </a:solidFill>
-                <a:latin typeface="Verdana" pitchFamily="34" charset="0"/>
+                <a:latin typeface="Verdana" panose="020B0604030504040204" pitchFamily="34" charset="0"/>
               </a:defRPr>
             </a:lvl1pPr>
             <a:lvl2pPr marL="742950" indent="-285750">
@@ -3306,7 +2452,7 @@
                 <a:solidFill>
                   <a:schemeClr val="tx1"/>
                 </a:solidFill>
-                <a:latin typeface="Verdana" pitchFamily="34" charset="0"/>
+                <a:latin typeface="Verdana" panose="020B0604030504040204" pitchFamily="34" charset="0"/>
               </a:defRPr>
             </a:lvl2pPr>
             <a:lvl3pPr marL="1143000" indent="-228600">
@@ -3314,7 +2460,7 @@
                 <a:solidFill>
                   <a:schemeClr val="tx1"/>
                 </a:solidFill>
-                <a:latin typeface="Verdana" pitchFamily="34" charset="0"/>
+                <a:latin typeface="Verdana" panose="020B0604030504040204" pitchFamily="34" charset="0"/>
               </a:defRPr>
             </a:lvl3pPr>
             <a:lvl4pPr marL="1600200" indent="-228600">
@@ -3322,7 +2468,7 @@
                 <a:solidFill>
                   <a:schemeClr val="tx1"/>
                 </a:solidFill>
-                <a:latin typeface="Verdana" pitchFamily="34" charset="0"/>
+                <a:latin typeface="Verdana" panose="020B0604030504040204" pitchFamily="34" charset="0"/>
               </a:defRPr>
             </a:lvl4pPr>
             <a:lvl5pPr marL="2057400" indent="-228600">
@@ -3330,7 +2476,7 @@
                 <a:solidFill>
                   <a:schemeClr val="tx1"/>
                 </a:solidFill>
-                <a:latin typeface="Verdana" pitchFamily="34" charset="0"/>
+                <a:latin typeface="Verdana" panose="020B0604030504040204" pitchFamily="34" charset="0"/>
               </a:defRPr>
             </a:lvl5pPr>
             <a:lvl6pPr marL="2514600" indent="-228600" eaLnBrk="0" fontAlgn="base" hangingPunct="0">
@@ -3344,7 +2490,7 @@
                 <a:solidFill>
                   <a:schemeClr val="tx1"/>
                 </a:solidFill>
-                <a:latin typeface="Verdana" pitchFamily="34" charset="0"/>
+                <a:latin typeface="Verdana" panose="020B0604030504040204" pitchFamily="34" charset="0"/>
               </a:defRPr>
             </a:lvl6pPr>
             <a:lvl7pPr marL="2971800" indent="-228600" eaLnBrk="0" fontAlgn="base" hangingPunct="0">
@@ -3358,7 +2504,7 @@
                 <a:solidFill>
                   <a:schemeClr val="tx1"/>
                 </a:solidFill>
-                <a:latin typeface="Verdana" pitchFamily="34" charset="0"/>
+                <a:latin typeface="Verdana" panose="020B0604030504040204" pitchFamily="34" charset="0"/>
               </a:defRPr>
             </a:lvl7pPr>
             <a:lvl8pPr marL="3429000" indent="-228600" eaLnBrk="0" fontAlgn="base" hangingPunct="0">
@@ -3372,7 +2518,7 @@
                 <a:solidFill>
                   <a:schemeClr val="tx1"/>
                 </a:solidFill>
-                <a:latin typeface="Verdana" pitchFamily="34" charset="0"/>
+                <a:latin typeface="Verdana" panose="020B0604030504040204" pitchFamily="34" charset="0"/>
               </a:defRPr>
             </a:lvl8pPr>
             <a:lvl9pPr marL="3886200" indent="-228600" eaLnBrk="0" fontAlgn="base" hangingPunct="0">
@@ -3386,26 +2532,19 @@
                 <a:solidFill>
                   <a:schemeClr val="tx1"/>
                 </a:solidFill>
-                <a:latin typeface="Verdana" pitchFamily="34" charset="0"/>
+                <a:latin typeface="Verdana" panose="020B0604030504040204" pitchFamily="34" charset="0"/>
               </a:defRPr>
             </a:lvl9pPr>
           </a:lstStyle>
           <a:p>
             <a:fld id="{C95BD9B2-E9EE-4A05-9F7C-A035C87EA3D1}" type="slidenum">
               <a:rPr lang="en-US" smtClean="0"/>
-              <a:pPr/>
-              <a:t>19</a:t>
             </a:fld>
             <a:endParaRPr lang="en-US"/>
           </a:p>
         </p:txBody>
       </p:sp>
     </p:spTree>
-    <p:extLst>
-      <p:ext uri="{BB962C8B-B14F-4D97-AF65-F5344CB8AC3E}">
-        <p14:creationId xmlns:p14="http://schemas.microsoft.com/office/powerpoint/2010/main" val="4138268482"/>
-      </p:ext>
-    </p:extLst>
   </p:cSld>
   <p:clrMapOvr>
     <a:masterClrMapping/>
@@ -3451,8 +2590,6 @@
               <a:srgbClr val="000000"/>
             </a:solidFill>
             <a:miter lim="800000"/>
-            <a:headEnd/>
-            <a:tailEnd/>
           </a:ln>
           <a:extLst>
             <a:ext uri="{909E8E84-426E-40DD-AFC4-6F175D3DCCD1}">
@@ -3498,11 +2635,7 @@
           </a:extLst>
         </p:spPr>
         <p:txBody>
-          <a:bodyPr wrap="square" numCol="1" anchor="t" anchorCtr="0" compatLnSpc="1">
-            <a:prstTxWarp prst="textNoShape">
-              <a:avLst/>
-            </a:prstTxWarp>
-          </a:bodyPr>
+          <a:bodyPr wrap="square" numCol="1" anchor="t" anchorCtr="0" compatLnSpc="1"/>
           <a:lstStyle/>
           <a:p>
             <a:pPr eaLnBrk="1" hangingPunct="1"/>
@@ -3510,6 +2643,7 @@
               <a:rPr lang="en-US" dirty="0"/>
               <a:t>Each month, there are about 1-2 flight accidents involving use of flight safety equipment. </a:t>
             </a:r>
+            <a:endParaRPr lang="en-US" dirty="0"/>
           </a:p>
           <a:p>
             <a:pPr eaLnBrk="1" hangingPunct="1"/>
@@ -3521,6 +2655,7 @@
               <a:rPr lang="en-US" dirty="0"/>
               <a:t>The total number of flights scheduled to operate worldwide this month is 2.55 million, offering 306.9 million seats to travelers around the globe. </a:t>
             </a:r>
+            <a:endParaRPr lang="en-US" dirty="0"/>
           </a:p>
           <a:p>
             <a:pPr eaLnBrk="1" hangingPunct="1"/>
@@ -3532,6 +2667,7 @@
               <a:rPr lang="en-US" dirty="0"/>
               <a:t>http://portal.antara.co.id/en/arc/2008/5/16/slowdown-in-growth-rate-of-flights-worldwide/</a:t>
             </a:r>
+            <a:endParaRPr lang="en-US" dirty="0"/>
           </a:p>
           <a:p>
             <a:pPr eaLnBrk="1" hangingPunct="1"/>
@@ -3572,18 +2708,14 @@
           </a:extLst>
         </p:spPr>
         <p:txBody>
-          <a:bodyPr wrap="square" numCol="1" anchorCtr="0" compatLnSpc="1">
-            <a:prstTxWarp prst="textNoShape">
-              <a:avLst/>
-            </a:prstTxWarp>
-          </a:bodyPr>
+          <a:bodyPr wrap="square" numCol="1" anchorCtr="0" compatLnSpc="1"/>
           <a:lstStyle>
             <a:lvl1pPr>
               <a:defRPr>
                 <a:solidFill>
                   <a:schemeClr val="tx1"/>
                 </a:solidFill>
-                <a:latin typeface="Verdana" pitchFamily="34" charset="0"/>
+                <a:latin typeface="Verdana" panose="020B0604030504040204" pitchFamily="34" charset="0"/>
               </a:defRPr>
             </a:lvl1pPr>
             <a:lvl2pPr marL="742950" indent="-285750">
@@ -3591,7 +2723,7 @@
                 <a:solidFill>
                   <a:schemeClr val="tx1"/>
                 </a:solidFill>
-                <a:latin typeface="Verdana" pitchFamily="34" charset="0"/>
+                <a:latin typeface="Verdana" panose="020B0604030504040204" pitchFamily="34" charset="0"/>
               </a:defRPr>
             </a:lvl2pPr>
             <a:lvl3pPr marL="1143000" indent="-228600">
@@ -3599,7 +2731,7 @@
                 <a:solidFill>
                   <a:schemeClr val="tx1"/>
                 </a:solidFill>
-                <a:latin typeface="Verdana" pitchFamily="34" charset="0"/>
+                <a:latin typeface="Verdana" panose="020B0604030504040204" pitchFamily="34" charset="0"/>
               </a:defRPr>
             </a:lvl3pPr>
             <a:lvl4pPr marL="1600200" indent="-228600">
@@ -3607,7 +2739,7 @@
                 <a:solidFill>
                   <a:schemeClr val="tx1"/>
                 </a:solidFill>
-                <a:latin typeface="Verdana" pitchFamily="34" charset="0"/>
+                <a:latin typeface="Verdana" panose="020B0604030504040204" pitchFamily="34" charset="0"/>
               </a:defRPr>
             </a:lvl4pPr>
             <a:lvl5pPr marL="2057400" indent="-228600">
@@ -3615,7 +2747,7 @@
                 <a:solidFill>
                   <a:schemeClr val="tx1"/>
                 </a:solidFill>
-                <a:latin typeface="Verdana" pitchFamily="34" charset="0"/>
+                <a:latin typeface="Verdana" panose="020B0604030504040204" pitchFamily="34" charset="0"/>
               </a:defRPr>
             </a:lvl5pPr>
             <a:lvl6pPr marL="2514600" indent="-228600" eaLnBrk="0" fontAlgn="base" hangingPunct="0">
@@ -3629,7 +2761,7 @@
                 <a:solidFill>
                   <a:schemeClr val="tx1"/>
                 </a:solidFill>
-                <a:latin typeface="Verdana" pitchFamily="34" charset="0"/>
+                <a:latin typeface="Verdana" panose="020B0604030504040204" pitchFamily="34" charset="0"/>
               </a:defRPr>
             </a:lvl6pPr>
             <a:lvl7pPr marL="2971800" indent="-228600" eaLnBrk="0" fontAlgn="base" hangingPunct="0">
@@ -3643,7 +2775,7 @@
                 <a:solidFill>
                   <a:schemeClr val="tx1"/>
                 </a:solidFill>
-                <a:latin typeface="Verdana" pitchFamily="34" charset="0"/>
+                <a:latin typeface="Verdana" panose="020B0604030504040204" pitchFamily="34" charset="0"/>
               </a:defRPr>
             </a:lvl7pPr>
             <a:lvl8pPr marL="3429000" indent="-228600" eaLnBrk="0" fontAlgn="base" hangingPunct="0">
@@ -3657,7 +2789,7 @@
                 <a:solidFill>
                   <a:schemeClr val="tx1"/>
                 </a:solidFill>
-                <a:latin typeface="Verdana" pitchFamily="34" charset="0"/>
+                <a:latin typeface="Verdana" panose="020B0604030504040204" pitchFamily="34" charset="0"/>
               </a:defRPr>
             </a:lvl8pPr>
             <a:lvl9pPr marL="3886200" indent="-228600" eaLnBrk="0" fontAlgn="base" hangingPunct="0">
@@ -3671,26 +2803,19 @@
                 <a:solidFill>
                   <a:schemeClr val="tx1"/>
                 </a:solidFill>
-                <a:latin typeface="Verdana" pitchFamily="34" charset="0"/>
+                <a:latin typeface="Verdana" panose="020B0604030504040204" pitchFamily="34" charset="0"/>
               </a:defRPr>
             </a:lvl9pPr>
           </a:lstStyle>
           <a:p>
             <a:fld id="{3A2928E0-FC3A-4241-9402-C30252AEB309}" type="slidenum">
               <a:rPr lang="en-US" smtClean="0"/>
-              <a:pPr/>
-              <a:t>21</a:t>
             </a:fld>
             <a:endParaRPr lang="en-US"/>
           </a:p>
         </p:txBody>
       </p:sp>
     </p:spTree>
-    <p:extLst>
-      <p:ext uri="{BB962C8B-B14F-4D97-AF65-F5344CB8AC3E}">
-        <p14:creationId xmlns:p14="http://schemas.microsoft.com/office/powerpoint/2010/main" val="925673886"/>
-      </p:ext>
-    </p:extLst>
   </p:cSld>
   <p:clrMapOvr>
     <a:masterClrMapping/>
@@ -3751,6 +2876,7 @@
               <a:rPr lang="en-US" dirty="0"/>
               <a:t>https://en.wikipedia.org/wiki/US_Airways_Flight_1549</a:t>
             </a:r>
+            <a:endParaRPr lang="en-US" dirty="0"/>
           </a:p>
           <a:p>
             <a:endParaRPr lang="en-US" dirty="0"/>
@@ -3763,6 +2889,7 @@
               <a:rPr lang="en-US" dirty="0"/>
               <a:t>https://www.youtube.com/watch?v=imDFSnklB0k</a:t>
             </a:r>
+            <a:endParaRPr lang="en-US" dirty="0"/>
           </a:p>
           <a:p>
             <a:endParaRPr lang="en-US" dirty="0"/>
@@ -3789,21 +2916,12 @@
             </a:pPr>
             <a:fld id="{C5ADAB1E-5BE0-4555-8709-524C8D586A6B}" type="slidenum">
               <a:rPr lang="en-US" smtClean="0"/>
-              <a:pPr>
-                <a:defRPr/>
-              </a:pPr>
-              <a:t>23</a:t>
             </a:fld>
             <a:endParaRPr lang="en-US"/>
           </a:p>
         </p:txBody>
       </p:sp>
     </p:spTree>
-    <p:extLst>
-      <p:ext uri="{BB962C8B-B14F-4D97-AF65-F5344CB8AC3E}">
-        <p14:creationId xmlns:p14="http://schemas.microsoft.com/office/powerpoint/2010/main" val="468195310"/>
-      </p:ext>
-    </p:extLst>
   </p:cSld>
   <p:clrMapOvr>
     <a:masterClrMapping/>
@@ -3888,21 +3006,12 @@
             </a:pPr>
             <a:fld id="{C5ADAB1E-5BE0-4555-8709-524C8D586A6B}" type="slidenum">
               <a:rPr lang="en-US" smtClean="0"/>
-              <a:pPr>
-                <a:defRPr/>
-              </a:pPr>
-              <a:t>25</a:t>
             </a:fld>
             <a:endParaRPr lang="en-US"/>
           </a:p>
         </p:txBody>
       </p:sp>
     </p:spTree>
-    <p:extLst>
-      <p:ext uri="{BB962C8B-B14F-4D97-AF65-F5344CB8AC3E}">
-        <p14:creationId xmlns:p14="http://schemas.microsoft.com/office/powerpoint/2010/main" val="742410221"/>
-      </p:ext>
-    </p:extLst>
   </p:cSld>
   <p:clrMapOvr>
     <a:masterClrMapping/>
@@ -4018,6 +3127,7 @@
               <a:rPr lang="zh-CN" altLang="en-US" dirty="0"/>
               <a:t>）其他方面的知识</a:t>
             </a:r>
+            <a:endParaRPr lang="zh-CN" altLang="en-US" dirty="0"/>
           </a:p>
         </p:txBody>
       </p:sp>
@@ -4041,21 +3151,12 @@
             </a:pPr>
             <a:fld id="{C5ADAB1E-5BE0-4555-8709-524C8D586A6B}" type="slidenum">
               <a:rPr lang="en-US" smtClean="0"/>
-              <a:pPr>
-                <a:defRPr/>
-              </a:pPr>
-              <a:t>28</a:t>
             </a:fld>
             <a:endParaRPr lang="en-US"/>
           </a:p>
         </p:txBody>
       </p:sp>
     </p:spTree>
-    <p:extLst>
-      <p:ext uri="{BB962C8B-B14F-4D97-AF65-F5344CB8AC3E}">
-        <p14:creationId xmlns:p14="http://schemas.microsoft.com/office/powerpoint/2010/main" val="3660476218"/>
-      </p:ext>
-    </p:extLst>
   </p:cSld>
   <p:clrMapOvr>
     <a:masterClrMapping/>
@@ -4126,13 +3227,13 @@
               <a:buSzTx/>
               <a:buFontTx/>
               <a:buNone/>
-              <a:tabLst/>
               <a:defRPr/>
             </a:pPr>
             <a:r>
               <a:rPr lang="zh-CN" altLang="en-US" dirty="0"/>
               <a:t>软件的这些本质特性让 “做一个好软件”变得很难，同时也让软件工程有它独特的挑战和魅力。</a:t>
             </a:r>
+            <a:endParaRPr lang="zh-CN" altLang="en-US" dirty="0"/>
           </a:p>
           <a:p>
             <a:endParaRPr lang="en-US" dirty="0"/>
@@ -4159,21 +3260,12 @@
             </a:pPr>
             <a:fld id="{C5ADAB1E-5BE0-4555-8709-524C8D586A6B}" type="slidenum">
               <a:rPr lang="en-US" smtClean="0"/>
-              <a:pPr>
-                <a:defRPr/>
-              </a:pPr>
-              <a:t>31</a:t>
             </a:fld>
             <a:endParaRPr lang="en-US"/>
           </a:p>
         </p:txBody>
       </p:sp>
     </p:spTree>
-    <p:extLst>
-      <p:ext uri="{BB962C8B-B14F-4D97-AF65-F5344CB8AC3E}">
-        <p14:creationId xmlns:p14="http://schemas.microsoft.com/office/powerpoint/2010/main" val="2011983867"/>
-      </p:ext>
-    </p:extLst>
   </p:cSld>
   <p:clrMapOvr>
     <a:masterClrMapping/>
@@ -4377,7 +3469,6 @@
           <a:p>
             <a:fld id="{48A87A34-81AB-432B-8DAE-1953F412C126}" type="datetimeFigureOut">
               <a:rPr lang="en-US" smtClean="0"/>
-              <a:t>9/24/2025</a:t>
             </a:fld>
             <a:endParaRPr lang="en-US" dirty="0"/>
           </a:p>
@@ -4419,18 +3510,12 @@
           <a:p>
             <a:fld id="{6D22F896-40B5-4ADD-8801-0D06FADFA095}" type="slidenum">
               <a:rPr lang="en-US" smtClean="0"/>
-              <a:t>‹#›</a:t>
             </a:fld>
             <a:endParaRPr lang="en-US" dirty="0"/>
           </a:p>
         </p:txBody>
       </p:sp>
     </p:spTree>
-    <p:extLst>
-      <p:ext uri="{BB962C8B-B14F-4D97-AF65-F5344CB8AC3E}">
-        <p14:creationId xmlns:p14="http://schemas.microsoft.com/office/powerpoint/2010/main" val="1202022132"/>
-      </p:ext>
-    </p:extLst>
   </p:cSld>
   <p:clrMapOvr>
     <a:masterClrMapping/>
@@ -4638,6 +3723,7 @@
               <a:rPr lang="en-US"/>
               <a:t>Edit Master text styles</a:t>
             </a:r>
+            <a:endParaRPr lang="en-US"/>
           </a:p>
         </p:txBody>
       </p:sp>
@@ -4658,8 +3744,6 @@
           <a:p>
             <a:fld id="{48A87A34-81AB-432B-8DAE-1953F412C126}" type="datetimeFigureOut">
               <a:rPr lang="en-US" smtClean="0"/>
-              <a:pPr/>
-              <a:t>9/24/2025</a:t>
             </a:fld>
             <a:endParaRPr lang="en-US" dirty="0"/>
           </a:p>
@@ -4701,19 +3785,12 @@
           <a:p>
             <a:fld id="{6D22F896-40B5-4ADD-8801-0D06FADFA095}" type="slidenum">
               <a:rPr lang="en-US" smtClean="0"/>
-              <a:pPr/>
-              <a:t>‹#›</a:t>
             </a:fld>
             <a:endParaRPr lang="en-US" dirty="0"/>
           </a:p>
         </p:txBody>
       </p:sp>
     </p:spTree>
-    <p:extLst>
-      <p:ext uri="{BB962C8B-B14F-4D97-AF65-F5344CB8AC3E}">
-        <p14:creationId xmlns:p14="http://schemas.microsoft.com/office/powerpoint/2010/main" val="168546759"/>
-      </p:ext>
-    </p:extLst>
   </p:cSld>
   <p:clrMapOvr>
     <a:masterClrMapping/>
@@ -4832,6 +3909,7 @@
               <a:rPr lang="en-US"/>
               <a:t>Edit Master text styles</a:t>
             </a:r>
+            <a:endParaRPr lang="en-US"/>
           </a:p>
         </p:txBody>
       </p:sp>
@@ -4852,8 +3930,6 @@
           <a:p>
             <a:fld id="{48A87A34-81AB-432B-8DAE-1953F412C126}" type="datetimeFigureOut">
               <a:rPr lang="en-US" smtClean="0"/>
-              <a:pPr/>
-              <a:t>9/24/2025</a:t>
             </a:fld>
             <a:endParaRPr lang="en-US" dirty="0"/>
           </a:p>
@@ -4895,19 +3971,12 @@
           <a:p>
             <a:fld id="{6D22F896-40B5-4ADD-8801-0D06FADFA095}" type="slidenum">
               <a:rPr lang="en-US" smtClean="0"/>
-              <a:pPr/>
-              <a:t>‹#›</a:t>
             </a:fld>
             <a:endParaRPr lang="en-US" dirty="0"/>
           </a:p>
         </p:txBody>
       </p:sp>
     </p:spTree>
-    <p:extLst>
-      <p:ext uri="{BB962C8B-B14F-4D97-AF65-F5344CB8AC3E}">
-        <p14:creationId xmlns:p14="http://schemas.microsoft.com/office/powerpoint/2010/main" val="2946520880"/>
-      </p:ext>
-    </p:extLst>
   </p:cSld>
   <p:clrMapOvr>
     <a:masterClrMapping/>
@@ -5028,6 +4097,7 @@
               <a:rPr lang="en-US"/>
               <a:t>Edit Master text styles</a:t>
             </a:r>
+            <a:endParaRPr lang="en-US"/>
           </a:p>
         </p:txBody>
       </p:sp>
@@ -5095,6 +4165,7 @@
               <a:rPr lang="en-US"/>
               <a:t>Edit Master text styles</a:t>
             </a:r>
+            <a:endParaRPr lang="en-US"/>
           </a:p>
         </p:txBody>
       </p:sp>
@@ -5115,8 +4186,6 @@
           <a:p>
             <a:fld id="{48A87A34-81AB-432B-8DAE-1953F412C126}" type="datetimeFigureOut">
               <a:rPr lang="en-US" smtClean="0"/>
-              <a:pPr/>
-              <a:t>9/24/2025</a:t>
             </a:fld>
             <a:endParaRPr lang="en-US" dirty="0"/>
           </a:p>
@@ -5158,8 +4227,6 @@
           <a:p>
             <a:fld id="{6D22F896-40B5-4ADD-8801-0D06FADFA095}" type="slidenum">
               <a:rPr lang="en-US" smtClean="0"/>
-              <a:pPr/>
-              <a:t>‹#›</a:t>
             </a:fld>
             <a:endParaRPr lang="en-US" dirty="0"/>
           </a:p>
@@ -5278,6 +4345,12 @@
               </a:rPr>
               <a:t>“</a:t>
             </a:r>
+            <a:endParaRPr lang="en-US" sz="8000" dirty="0">
+              <a:solidFill>
+                <a:schemeClr val="tx1"/>
+              </a:solidFill>
+              <a:effectLst/>
+            </a:endParaRPr>
           </a:p>
         </p:txBody>
       </p:sp>
@@ -5394,15 +4467,16 @@
               </a:rPr>
               <a:t>”</a:t>
             </a:r>
+            <a:endParaRPr lang="en-US" sz="8000" dirty="0">
+              <a:solidFill>
+                <a:schemeClr val="tx1"/>
+              </a:solidFill>
+              <a:effectLst/>
+            </a:endParaRPr>
           </a:p>
         </p:txBody>
       </p:sp>
     </p:spTree>
-    <p:extLst>
-      <p:ext uri="{BB962C8B-B14F-4D97-AF65-F5344CB8AC3E}">
-        <p14:creationId xmlns:p14="http://schemas.microsoft.com/office/powerpoint/2010/main" val="1905382245"/>
-      </p:ext>
-    </p:extLst>
   </p:cSld>
   <p:clrMapOvr>
     <a:masterClrMapping/>
@@ -5523,6 +4597,7 @@
               <a:rPr lang="en-US"/>
               <a:t>Edit Master text styles</a:t>
             </a:r>
+            <a:endParaRPr lang="en-US"/>
           </a:p>
         </p:txBody>
       </p:sp>
@@ -5543,8 +4618,6 @@
           <a:p>
             <a:fld id="{48A87A34-81AB-432B-8DAE-1953F412C126}" type="datetimeFigureOut">
               <a:rPr lang="en-US" smtClean="0"/>
-              <a:pPr/>
-              <a:t>9/24/2025</a:t>
             </a:fld>
             <a:endParaRPr lang="en-US" dirty="0"/>
           </a:p>
@@ -5586,19 +4659,12 @@
           <a:p>
             <a:fld id="{6D22F896-40B5-4ADD-8801-0D06FADFA095}" type="slidenum">
               <a:rPr lang="en-US" smtClean="0"/>
-              <a:pPr/>
-              <a:t>‹#›</a:t>
             </a:fld>
             <a:endParaRPr lang="en-US" dirty="0"/>
           </a:p>
         </p:txBody>
       </p:sp>
     </p:spTree>
-    <p:extLst>
-      <p:ext uri="{BB962C8B-B14F-4D97-AF65-F5344CB8AC3E}">
-        <p14:creationId xmlns:p14="http://schemas.microsoft.com/office/powerpoint/2010/main" val="2922750012"/>
-      </p:ext>
-    </p:extLst>
   </p:cSld>
   <p:clrMapOvr>
     <a:masterClrMapping/>
@@ -5742,6 +4808,7 @@
               <a:rPr lang="en-US"/>
               <a:t>Edit Master text styles</a:t>
             </a:r>
+            <a:endParaRPr lang="en-US"/>
           </a:p>
         </p:txBody>
       </p:sp>
@@ -5809,6 +4876,7 @@
               <a:rPr lang="en-US"/>
               <a:t>Edit Master text styles</a:t>
             </a:r>
+            <a:endParaRPr lang="en-US"/>
           </a:p>
         </p:txBody>
       </p:sp>
@@ -5873,6 +4941,7 @@
               <a:rPr lang="en-US"/>
               <a:t>Edit Master text styles</a:t>
             </a:r>
+            <a:endParaRPr lang="en-US"/>
           </a:p>
         </p:txBody>
       </p:sp>
@@ -5940,6 +5009,7 @@
               <a:rPr lang="en-US"/>
               <a:t>Edit Master text styles</a:t>
             </a:r>
+            <a:endParaRPr lang="en-US"/>
           </a:p>
         </p:txBody>
       </p:sp>
@@ -6004,6 +5074,7 @@
               <a:rPr lang="en-US"/>
               <a:t>Edit Master text styles</a:t>
             </a:r>
+            <a:endParaRPr lang="en-US"/>
           </a:p>
         </p:txBody>
       </p:sp>
@@ -6071,6 +5142,7 @@
               <a:rPr lang="en-US"/>
               <a:t>Edit Master text styles</a:t>
             </a:r>
+            <a:endParaRPr lang="en-US"/>
           </a:p>
         </p:txBody>
       </p:sp>
@@ -6091,8 +5163,6 @@
           <a:p>
             <a:fld id="{48A87A34-81AB-432B-8DAE-1953F412C126}" type="datetimeFigureOut">
               <a:rPr lang="en-US" smtClean="0"/>
-              <a:pPr/>
-              <a:t>9/24/2025</a:t>
             </a:fld>
             <a:endParaRPr lang="en-US" dirty="0"/>
           </a:p>
@@ -6134,19 +5204,12 @@
           <a:p>
             <a:fld id="{6D22F896-40B5-4ADD-8801-0D06FADFA095}" type="slidenum">
               <a:rPr lang="en-US" smtClean="0"/>
-              <a:pPr/>
-              <a:t>‹#›</a:t>
             </a:fld>
             <a:endParaRPr lang="en-US" dirty="0"/>
           </a:p>
         </p:txBody>
       </p:sp>
     </p:spTree>
-    <p:extLst>
-      <p:ext uri="{BB962C8B-B14F-4D97-AF65-F5344CB8AC3E}">
-        <p14:creationId xmlns:p14="http://schemas.microsoft.com/office/powerpoint/2010/main" val="2010348077"/>
-      </p:ext>
-    </p:extLst>
   </p:cSld>
   <p:clrMapOvr>
     <a:masterClrMapping/>
@@ -6286,6 +5349,7 @@
               <a:rPr lang="en-US"/>
               <a:t>Edit Master text styles</a:t>
             </a:r>
+            <a:endParaRPr lang="en-US"/>
           </a:p>
         </p:txBody>
       </p:sp>
@@ -6432,6 +5496,7 @@
               <a:rPr lang="en-US"/>
               <a:t>Edit Master text styles</a:t>
             </a:r>
+            <a:endParaRPr lang="en-US"/>
           </a:p>
         </p:txBody>
       </p:sp>
@@ -6522,6 +5587,7 @@
               <a:rPr lang="en-US"/>
               <a:t>Edit Master text styles</a:t>
             </a:r>
+            <a:endParaRPr lang="en-US"/>
           </a:p>
         </p:txBody>
       </p:sp>
@@ -6668,6 +5734,7 @@
               <a:rPr lang="en-US"/>
               <a:t>Edit Master text styles</a:t>
             </a:r>
+            <a:endParaRPr lang="en-US"/>
           </a:p>
         </p:txBody>
       </p:sp>
@@ -6758,6 +5825,7 @@
               <a:rPr lang="en-US"/>
               <a:t>Edit Master text styles</a:t>
             </a:r>
+            <a:endParaRPr lang="en-US"/>
           </a:p>
         </p:txBody>
       </p:sp>
@@ -6904,6 +5972,7 @@
               <a:rPr lang="en-US"/>
               <a:t>Edit Master text styles</a:t>
             </a:r>
+            <a:endParaRPr lang="en-US"/>
           </a:p>
         </p:txBody>
       </p:sp>
@@ -6924,8 +5993,6 @@
           <a:p>
             <a:fld id="{48A87A34-81AB-432B-8DAE-1953F412C126}" type="datetimeFigureOut">
               <a:rPr lang="en-US" smtClean="0"/>
-              <a:pPr/>
-              <a:t>9/24/2025</a:t>
             </a:fld>
             <a:endParaRPr lang="en-US" dirty="0"/>
           </a:p>
@@ -6967,19 +6034,12 @@
           <a:p>
             <a:fld id="{6D22F896-40B5-4ADD-8801-0D06FADFA095}" type="slidenum">
               <a:rPr lang="en-US" smtClean="0"/>
-              <a:pPr/>
-              <a:t>‹#›</a:t>
             </a:fld>
             <a:endParaRPr lang="en-US" dirty="0"/>
           </a:p>
         </p:txBody>
       </p:sp>
     </p:spTree>
-    <p:extLst>
-      <p:ext uri="{BB962C8B-B14F-4D97-AF65-F5344CB8AC3E}">
-        <p14:creationId xmlns:p14="http://schemas.microsoft.com/office/powerpoint/2010/main" val="137005331"/>
-      </p:ext>
-    </p:extLst>
   </p:cSld>
   <p:clrMapOvr>
     <a:masterClrMapping/>
@@ -7047,6 +6107,7 @@
               <a:rPr lang="en-US"/>
               <a:t>Edit Master text styles</a:t>
             </a:r>
+            <a:endParaRPr lang="en-US"/>
           </a:p>
           <a:p>
             <a:pPr lvl="1"/>
@@ -7054,6 +6115,7 @@
               <a:rPr lang="en-US"/>
               <a:t>Second level</a:t>
             </a:r>
+            <a:endParaRPr lang="en-US"/>
           </a:p>
           <a:p>
             <a:pPr lvl="2"/>
@@ -7061,6 +6123,7 @@
               <a:rPr lang="en-US"/>
               <a:t>Third level</a:t>
             </a:r>
+            <a:endParaRPr lang="en-US"/>
           </a:p>
           <a:p>
             <a:pPr lvl="3"/>
@@ -7068,6 +6131,7 @@
               <a:rPr lang="en-US"/>
               <a:t>Fourth level</a:t>
             </a:r>
+            <a:endParaRPr lang="en-US"/>
           </a:p>
           <a:p>
             <a:pPr lvl="4"/>
@@ -7096,7 +6160,6 @@
           <a:p>
             <a:fld id="{48A87A34-81AB-432B-8DAE-1953F412C126}" type="datetimeFigureOut">
               <a:rPr lang="en-US" smtClean="0"/>
-              <a:t>9/24/2025</a:t>
             </a:fld>
             <a:endParaRPr lang="en-US" dirty="0"/>
           </a:p>
@@ -7138,18 +6201,12 @@
           <a:p>
             <a:fld id="{6D22F896-40B5-4ADD-8801-0D06FADFA095}" type="slidenum">
               <a:rPr lang="en-US" smtClean="0"/>
-              <a:t>‹#›</a:t>
             </a:fld>
             <a:endParaRPr lang="en-US" dirty="0"/>
           </a:p>
         </p:txBody>
       </p:sp>
     </p:spTree>
-    <p:extLst>
-      <p:ext uri="{BB962C8B-B14F-4D97-AF65-F5344CB8AC3E}">
-        <p14:creationId xmlns:p14="http://schemas.microsoft.com/office/powerpoint/2010/main" val="770754270"/>
-      </p:ext>
-    </p:extLst>
   </p:cSld>
   <p:clrMapOvr>
     <a:masterClrMapping/>
@@ -7227,6 +6284,7 @@
               <a:rPr lang="en-US"/>
               <a:t>Edit Master text styles</a:t>
             </a:r>
+            <a:endParaRPr lang="en-US"/>
           </a:p>
           <a:p>
             <a:pPr lvl="1"/>
@@ -7234,6 +6292,7 @@
               <a:rPr lang="en-US"/>
               <a:t>Second level</a:t>
             </a:r>
+            <a:endParaRPr lang="en-US"/>
           </a:p>
           <a:p>
             <a:pPr lvl="2"/>
@@ -7241,6 +6300,7 @@
               <a:rPr lang="en-US"/>
               <a:t>Third level</a:t>
             </a:r>
+            <a:endParaRPr lang="en-US"/>
           </a:p>
           <a:p>
             <a:pPr lvl="3"/>
@@ -7248,6 +6308,7 @@
               <a:rPr lang="en-US"/>
               <a:t>Fourth level</a:t>
             </a:r>
+            <a:endParaRPr lang="en-US"/>
           </a:p>
           <a:p>
             <a:pPr lvl="4"/>
@@ -7276,7 +6337,6 @@
           <a:p>
             <a:fld id="{48A87A34-81AB-432B-8DAE-1953F412C126}" type="datetimeFigureOut">
               <a:rPr lang="en-US" smtClean="0"/>
-              <a:t>9/24/2025</a:t>
             </a:fld>
             <a:endParaRPr lang="en-US" dirty="0"/>
           </a:p>
@@ -7318,18 +6378,12 @@
           <a:p>
             <a:fld id="{6D22F896-40B5-4ADD-8801-0D06FADFA095}" type="slidenum">
               <a:rPr lang="en-US" smtClean="0"/>
-              <a:t>‹#›</a:t>
             </a:fld>
             <a:endParaRPr lang="en-US" dirty="0"/>
           </a:p>
         </p:txBody>
       </p:sp>
     </p:spTree>
-    <p:extLst>
-      <p:ext uri="{BB962C8B-B14F-4D97-AF65-F5344CB8AC3E}">
-        <p14:creationId xmlns:p14="http://schemas.microsoft.com/office/powerpoint/2010/main" val="800036477"/>
-      </p:ext>
-    </p:extLst>
   </p:cSld>
   <p:clrMapOvr>
     <a:masterClrMapping/>
@@ -7397,6 +6451,7 @@
               <a:rPr lang="en-US"/>
               <a:t>Edit Master text styles</a:t>
             </a:r>
+            <a:endParaRPr lang="en-US"/>
           </a:p>
           <a:p>
             <a:pPr lvl="1"/>
@@ -7404,6 +6459,7 @@
               <a:rPr lang="en-US"/>
               <a:t>Second level</a:t>
             </a:r>
+            <a:endParaRPr lang="en-US"/>
           </a:p>
           <a:p>
             <a:pPr lvl="2"/>
@@ -7411,6 +6467,7 @@
               <a:rPr lang="en-US"/>
               <a:t>Third level</a:t>
             </a:r>
+            <a:endParaRPr lang="en-US"/>
           </a:p>
           <a:p>
             <a:pPr lvl="3"/>
@@ -7418,6 +6475,7 @@
               <a:rPr lang="en-US"/>
               <a:t>Fourth level</a:t>
             </a:r>
+            <a:endParaRPr lang="en-US"/>
           </a:p>
           <a:p>
             <a:pPr lvl="4"/>
@@ -7446,7 +6504,6 @@
           <a:p>
             <a:fld id="{48A87A34-81AB-432B-8DAE-1953F412C126}" type="datetimeFigureOut">
               <a:rPr lang="en-US" smtClean="0"/>
-              <a:t>9/24/2025</a:t>
             </a:fld>
             <a:endParaRPr lang="en-US" dirty="0"/>
           </a:p>
@@ -7488,18 +6545,12 @@
           <a:p>
             <a:fld id="{6D22F896-40B5-4ADD-8801-0D06FADFA095}" type="slidenum">
               <a:rPr lang="en-US" smtClean="0"/>
-              <a:t>‹#›</a:t>
             </a:fld>
             <a:endParaRPr lang="en-US" dirty="0"/>
           </a:p>
         </p:txBody>
       </p:sp>
     </p:spTree>
-    <p:extLst>
-      <p:ext uri="{BB962C8B-B14F-4D97-AF65-F5344CB8AC3E}">
-        <p14:creationId xmlns:p14="http://schemas.microsoft.com/office/powerpoint/2010/main" val="1692745500"/>
-      </p:ext>
-    </p:extLst>
   </p:cSld>
   <p:clrMapOvr>
     <a:masterClrMapping/>
@@ -7703,7 +6754,6 @@
           <a:p>
             <a:fld id="{48A87A34-81AB-432B-8DAE-1953F412C126}" type="datetimeFigureOut">
               <a:rPr lang="en-US" smtClean="0"/>
-              <a:t>9/24/2025</a:t>
             </a:fld>
             <a:endParaRPr lang="en-US" dirty="0"/>
           </a:p>
@@ -7745,18 +6795,12 @@
           <a:p>
             <a:fld id="{6D22F896-40B5-4ADD-8801-0D06FADFA095}" type="slidenum">
               <a:rPr lang="en-US" smtClean="0"/>
-              <a:t>‹#›</a:t>
             </a:fld>
             <a:endParaRPr lang="en-US" dirty="0"/>
           </a:p>
         </p:txBody>
       </p:sp>
     </p:spTree>
-    <p:extLst>
-      <p:ext uri="{BB962C8B-B14F-4D97-AF65-F5344CB8AC3E}">
-        <p14:creationId xmlns:p14="http://schemas.microsoft.com/office/powerpoint/2010/main" val="601353267"/>
-      </p:ext>
-    </p:extLst>
   </p:cSld>
   <p:clrMapOvr>
     <a:masterClrMapping/>
@@ -7829,6 +6873,7 @@
               <a:rPr lang="en-US"/>
               <a:t>Edit Master text styles</a:t>
             </a:r>
+            <a:endParaRPr lang="en-US"/>
           </a:p>
           <a:p>
             <a:pPr lvl="1"/>
@@ -7836,6 +6881,7 @@
               <a:rPr lang="en-US"/>
               <a:t>Second level</a:t>
             </a:r>
+            <a:endParaRPr lang="en-US"/>
           </a:p>
           <a:p>
             <a:pPr lvl="2"/>
@@ -7843,6 +6889,7 @@
               <a:rPr lang="en-US"/>
               <a:t>Third level</a:t>
             </a:r>
+            <a:endParaRPr lang="en-US"/>
           </a:p>
           <a:p>
             <a:pPr lvl="3"/>
@@ -7850,6 +6897,7 @@
               <a:rPr lang="en-US"/>
               <a:t>Fourth level</a:t>
             </a:r>
+            <a:endParaRPr lang="en-US"/>
           </a:p>
           <a:p>
             <a:pPr lvl="4"/>
@@ -7886,6 +6934,7 @@
               <a:rPr lang="en-US"/>
               <a:t>Edit Master text styles</a:t>
             </a:r>
+            <a:endParaRPr lang="en-US"/>
           </a:p>
           <a:p>
             <a:pPr lvl="1"/>
@@ -7893,6 +6942,7 @@
               <a:rPr lang="en-US"/>
               <a:t>Second level</a:t>
             </a:r>
+            <a:endParaRPr lang="en-US"/>
           </a:p>
           <a:p>
             <a:pPr lvl="2"/>
@@ -7900,6 +6950,7 @@
               <a:rPr lang="en-US"/>
               <a:t>Third level</a:t>
             </a:r>
+            <a:endParaRPr lang="en-US"/>
           </a:p>
           <a:p>
             <a:pPr lvl="3"/>
@@ -7907,6 +6958,7 @@
               <a:rPr lang="en-US"/>
               <a:t>Fourth level</a:t>
             </a:r>
+            <a:endParaRPr lang="en-US"/>
           </a:p>
           <a:p>
             <a:pPr lvl="4"/>
@@ -7935,7 +6987,6 @@
           <a:p>
             <a:fld id="{48A87A34-81AB-432B-8DAE-1953F412C126}" type="datetimeFigureOut">
               <a:rPr lang="en-US" smtClean="0"/>
-              <a:t>9/24/2025</a:t>
             </a:fld>
             <a:endParaRPr lang="en-US" dirty="0"/>
           </a:p>
@@ -7977,18 +7028,12 @@
           <a:p>
             <a:fld id="{6D22F896-40B5-4ADD-8801-0D06FADFA095}" type="slidenum">
               <a:rPr lang="en-US" smtClean="0"/>
-              <a:t>‹#›</a:t>
             </a:fld>
             <a:endParaRPr lang="en-US" dirty="0"/>
           </a:p>
         </p:txBody>
       </p:sp>
     </p:spTree>
-    <p:extLst>
-      <p:ext uri="{BB962C8B-B14F-4D97-AF65-F5344CB8AC3E}">
-        <p14:creationId xmlns:p14="http://schemas.microsoft.com/office/powerpoint/2010/main" val="751484355"/>
-      </p:ext>
-    </p:extLst>
   </p:cSld>
   <p:clrMapOvr>
     <a:masterClrMapping/>
@@ -8130,6 +7175,7 @@
               <a:rPr lang="en-US"/>
               <a:t>Edit Master text styles</a:t>
             </a:r>
+            <a:endParaRPr lang="en-US"/>
           </a:p>
         </p:txBody>
       </p:sp>
@@ -8158,6 +7204,7 @@
               <a:rPr lang="en-US"/>
               <a:t>Edit Master text styles</a:t>
             </a:r>
+            <a:endParaRPr lang="en-US"/>
           </a:p>
           <a:p>
             <a:pPr lvl="1"/>
@@ -8165,6 +7212,7 @@
               <a:rPr lang="en-US"/>
               <a:t>Second level</a:t>
             </a:r>
+            <a:endParaRPr lang="en-US"/>
           </a:p>
           <a:p>
             <a:pPr lvl="2"/>
@@ -8172,6 +7220,7 @@
               <a:rPr lang="en-US"/>
               <a:t>Third level</a:t>
             </a:r>
+            <a:endParaRPr lang="en-US"/>
           </a:p>
           <a:p>
             <a:pPr lvl="3"/>
@@ -8179,6 +7228,7 @@
               <a:rPr lang="en-US"/>
               <a:t>Fourth level</a:t>
             </a:r>
+            <a:endParaRPr lang="en-US"/>
           </a:p>
           <a:p>
             <a:pPr lvl="4"/>
@@ -8251,6 +7301,7 @@
               <a:rPr lang="en-US"/>
               <a:t>Edit Master text styles</a:t>
             </a:r>
+            <a:endParaRPr lang="en-US"/>
           </a:p>
         </p:txBody>
       </p:sp>
@@ -8279,6 +7330,7 @@
               <a:rPr lang="en-US"/>
               <a:t>Edit Master text styles</a:t>
             </a:r>
+            <a:endParaRPr lang="en-US"/>
           </a:p>
           <a:p>
             <a:pPr lvl="1"/>
@@ -8286,6 +7338,7 @@
               <a:rPr lang="en-US"/>
               <a:t>Second level</a:t>
             </a:r>
+            <a:endParaRPr lang="en-US"/>
           </a:p>
           <a:p>
             <a:pPr lvl="2"/>
@@ -8293,6 +7346,7 @@
               <a:rPr lang="en-US"/>
               <a:t>Third level</a:t>
             </a:r>
+            <a:endParaRPr lang="en-US"/>
           </a:p>
           <a:p>
             <a:pPr lvl="3"/>
@@ -8300,6 +7354,7 @@
               <a:rPr lang="en-US"/>
               <a:t>Fourth level</a:t>
             </a:r>
+            <a:endParaRPr lang="en-US"/>
           </a:p>
           <a:p>
             <a:pPr lvl="4"/>
@@ -8328,7 +7383,6 @@
           <a:p>
             <a:fld id="{48A87A34-81AB-432B-8DAE-1953F412C126}" type="datetimeFigureOut">
               <a:rPr lang="en-US" smtClean="0"/>
-              <a:t>9/24/2025</a:t>
             </a:fld>
             <a:endParaRPr lang="en-US" dirty="0"/>
           </a:p>
@@ -8370,18 +7424,12 @@
           <a:p>
             <a:fld id="{6D22F896-40B5-4ADD-8801-0D06FADFA095}" type="slidenum">
               <a:rPr lang="en-US" smtClean="0"/>
-              <a:t>‹#›</a:t>
             </a:fld>
             <a:endParaRPr lang="en-US" dirty="0"/>
           </a:p>
         </p:txBody>
       </p:sp>
     </p:spTree>
-    <p:extLst>
-      <p:ext uri="{BB962C8B-B14F-4D97-AF65-F5344CB8AC3E}">
-        <p14:creationId xmlns:p14="http://schemas.microsoft.com/office/powerpoint/2010/main" val="1663297075"/>
-      </p:ext>
-    </p:extLst>
   </p:cSld>
   <p:clrMapOvr>
     <a:masterClrMapping/>
@@ -8446,7 +7494,6 @@
           <a:p>
             <a:fld id="{48A87A34-81AB-432B-8DAE-1953F412C126}" type="datetimeFigureOut">
               <a:rPr lang="en-US" smtClean="0"/>
-              <a:t>9/24/2025</a:t>
             </a:fld>
             <a:endParaRPr lang="en-US" dirty="0"/>
           </a:p>
@@ -8488,18 +7535,12 @@
           <a:p>
             <a:fld id="{6D22F896-40B5-4ADD-8801-0D06FADFA095}" type="slidenum">
               <a:rPr lang="en-US" smtClean="0"/>
-              <a:t>‹#›</a:t>
             </a:fld>
             <a:endParaRPr lang="en-US" dirty="0"/>
           </a:p>
         </p:txBody>
       </p:sp>
     </p:spTree>
-    <p:extLst>
-      <p:ext uri="{BB962C8B-B14F-4D97-AF65-F5344CB8AC3E}">
-        <p14:creationId xmlns:p14="http://schemas.microsoft.com/office/powerpoint/2010/main" val="10623003"/>
-      </p:ext>
-    </p:extLst>
   </p:cSld>
   <p:clrMapOvr>
     <a:masterClrMapping/>
@@ -8541,7 +7582,6 @@
           <a:p>
             <a:fld id="{48A87A34-81AB-432B-8DAE-1953F412C126}" type="datetimeFigureOut">
               <a:rPr lang="en-US" smtClean="0"/>
-              <a:t>9/24/2025</a:t>
             </a:fld>
             <a:endParaRPr lang="en-US" dirty="0"/>
           </a:p>
@@ -8583,18 +7623,12 @@
           <a:p>
             <a:fld id="{6D22F896-40B5-4ADD-8801-0D06FADFA095}" type="slidenum">
               <a:rPr lang="en-US" smtClean="0"/>
-              <a:t>‹#›</a:t>
             </a:fld>
             <a:endParaRPr lang="en-US" dirty="0"/>
           </a:p>
         </p:txBody>
       </p:sp>
     </p:spTree>
-    <p:extLst>
-      <p:ext uri="{BB962C8B-B14F-4D97-AF65-F5344CB8AC3E}">
-        <p14:creationId xmlns:p14="http://schemas.microsoft.com/office/powerpoint/2010/main" val="1560091838"/>
-      </p:ext>
-    </p:extLst>
   </p:cSld>
   <p:clrMapOvr>
     <a:masterClrMapping/>
@@ -8676,6 +7710,7 @@
               <a:rPr lang="en-US"/>
               <a:t>Edit Master text styles</a:t>
             </a:r>
+            <a:endParaRPr lang="en-US"/>
           </a:p>
           <a:p>
             <a:pPr lvl="1"/>
@@ -8683,6 +7718,7 @@
               <a:rPr lang="en-US"/>
               <a:t>Second level</a:t>
             </a:r>
+            <a:endParaRPr lang="en-US"/>
           </a:p>
           <a:p>
             <a:pPr lvl="2"/>
@@ -8690,6 +7726,7 @@
               <a:rPr lang="en-US"/>
               <a:t>Third level</a:t>
             </a:r>
+            <a:endParaRPr lang="en-US"/>
           </a:p>
           <a:p>
             <a:pPr lvl="3"/>
@@ -8697,6 +7734,7 @@
               <a:rPr lang="en-US"/>
               <a:t>Fourth level</a:t>
             </a:r>
+            <a:endParaRPr lang="en-US"/>
           </a:p>
           <a:p>
             <a:pPr lvl="4"/>
@@ -8794,6 +7832,7 @@
               <a:rPr lang="en-US"/>
               <a:t>Edit Master text styles</a:t>
             </a:r>
+            <a:endParaRPr lang="en-US"/>
           </a:p>
         </p:txBody>
       </p:sp>
@@ -8814,7 +7853,6 @@
           <a:p>
             <a:fld id="{48A87A34-81AB-432B-8DAE-1953F412C126}" type="datetimeFigureOut">
               <a:rPr lang="en-US" smtClean="0"/>
-              <a:t>9/24/2025</a:t>
             </a:fld>
             <a:endParaRPr lang="en-US" dirty="0"/>
           </a:p>
@@ -8856,18 +7894,12 @@
           <a:p>
             <a:fld id="{6D22F896-40B5-4ADD-8801-0D06FADFA095}" type="slidenum">
               <a:rPr lang="en-US" smtClean="0"/>
-              <a:t>‹#›</a:t>
             </a:fld>
             <a:endParaRPr lang="en-US" dirty="0"/>
           </a:p>
         </p:txBody>
       </p:sp>
     </p:spTree>
-    <p:extLst>
-      <p:ext uri="{BB962C8B-B14F-4D97-AF65-F5344CB8AC3E}">
-        <p14:creationId xmlns:p14="http://schemas.microsoft.com/office/powerpoint/2010/main" val="3131883933"/>
-      </p:ext>
-    </p:extLst>
   </p:cSld>
   <p:clrMapOvr>
     <a:masterClrMapping/>
@@ -9075,6 +8107,7 @@
               <a:rPr lang="en-US"/>
               <a:t>Edit Master text styles</a:t>
             </a:r>
+            <a:endParaRPr lang="en-US"/>
           </a:p>
         </p:txBody>
       </p:sp>
@@ -9095,7 +8128,6 @@
           <a:p>
             <a:fld id="{48A87A34-81AB-432B-8DAE-1953F412C126}" type="datetimeFigureOut">
               <a:rPr lang="en-US" smtClean="0"/>
-              <a:t>9/24/2025</a:t>
             </a:fld>
             <a:endParaRPr lang="en-US" dirty="0"/>
           </a:p>
@@ -9137,18 +8169,12 @@
           <a:p>
             <a:fld id="{6D22F896-40B5-4ADD-8801-0D06FADFA095}" type="slidenum">
               <a:rPr lang="en-US" smtClean="0"/>
-              <a:t>‹#›</a:t>
             </a:fld>
             <a:endParaRPr lang="en-US" dirty="0"/>
           </a:p>
         </p:txBody>
       </p:sp>
     </p:spTree>
-    <p:extLst>
-      <p:ext uri="{BB962C8B-B14F-4D97-AF65-F5344CB8AC3E}">
-        <p14:creationId xmlns:p14="http://schemas.microsoft.com/office/powerpoint/2010/main" val="2761403685"/>
-      </p:ext>
-    </p:extLst>
   </p:cSld>
   <p:clrMapOvr>
     <a:masterClrMapping/>
@@ -9162,7 +8188,7 @@
     <p:bg>
       <p:bgPr>
         <a:blipFill dpi="0" rotWithShape="1">
-          <a:blip r:embed="rId19">
+          <a:blip r:embed="rId18">
             <a:lum/>
           </a:blip>
           <a:srcRect/>
@@ -9250,6 +8276,7 @@
               <a:rPr lang="en-US"/>
               <a:t>Edit Master text styles</a:t>
             </a:r>
+            <a:endParaRPr lang="en-US"/>
           </a:p>
           <a:p>
             <a:pPr lvl="1"/>
@@ -9257,6 +8284,7 @@
               <a:rPr lang="en-US"/>
               <a:t>Second level</a:t>
             </a:r>
+            <a:endParaRPr lang="en-US"/>
           </a:p>
           <a:p>
             <a:pPr lvl="2"/>
@@ -9264,6 +8292,7 @@
               <a:rPr lang="en-US"/>
               <a:t>Third level</a:t>
             </a:r>
+            <a:endParaRPr lang="en-US"/>
           </a:p>
           <a:p>
             <a:pPr lvl="3"/>
@@ -9271,6 +8300,7 @@
               <a:rPr lang="en-US"/>
               <a:t>Fourth level</a:t>
             </a:r>
+            <a:endParaRPr lang="en-US"/>
           </a:p>
           <a:p>
             <a:pPr lvl="4"/>
@@ -9335,8 +8365,6 @@
           <a:p>
             <a:fld id="{48A87A34-81AB-432B-8DAE-1953F412C126}" type="datetimeFigureOut">
               <a:rPr lang="en-US" smtClean="0"/>
-              <a:pPr/>
-              <a:t>9/24/2025</a:t>
             </a:fld>
             <a:endParaRPr lang="en-US" dirty="0"/>
           </a:p>
@@ -9450,39 +8478,32 @@
           <a:p>
             <a:fld id="{6D22F896-40B5-4ADD-8801-0D06FADFA095}" type="slidenum">
               <a:rPr lang="en-US" smtClean="0"/>
-              <a:pPr/>
-              <a:t>‹#›</a:t>
             </a:fld>
             <a:endParaRPr lang="en-US" dirty="0"/>
           </a:p>
         </p:txBody>
       </p:sp>
     </p:spTree>
-    <p:extLst>
-      <p:ext uri="{BB962C8B-B14F-4D97-AF65-F5344CB8AC3E}">
-        <p14:creationId xmlns:p14="http://schemas.microsoft.com/office/powerpoint/2010/main" val="2375634374"/>
-      </p:ext>
-    </p:extLst>
   </p:cSld>
   <p:clrMap bg1="dk1" tx1="lt1" bg2="dk2" tx2="lt2" accent1="accent1" accent2="accent2" accent3="accent3" accent4="accent4" accent5="accent5" accent6="accent6" hlink="hlink" folHlink="folHlink"/>
   <p:sldLayoutIdLst>
-    <p:sldLayoutId id="2147483903" r:id="rId1"/>
-    <p:sldLayoutId id="2147483904" r:id="rId2"/>
-    <p:sldLayoutId id="2147483905" r:id="rId3"/>
-    <p:sldLayoutId id="2147483906" r:id="rId4"/>
-    <p:sldLayoutId id="2147483907" r:id="rId5"/>
-    <p:sldLayoutId id="2147483908" r:id="rId6"/>
-    <p:sldLayoutId id="2147483909" r:id="rId7"/>
-    <p:sldLayoutId id="2147483910" r:id="rId8"/>
-    <p:sldLayoutId id="2147483911" r:id="rId9"/>
-    <p:sldLayoutId id="2147483912" r:id="rId10"/>
-    <p:sldLayoutId id="2147483913" r:id="rId11"/>
-    <p:sldLayoutId id="2147483914" r:id="rId12"/>
-    <p:sldLayoutId id="2147483915" r:id="rId13"/>
-    <p:sldLayoutId id="2147483916" r:id="rId14"/>
-    <p:sldLayoutId id="2147483917" r:id="rId15"/>
-    <p:sldLayoutId id="2147483918" r:id="rId16"/>
-    <p:sldLayoutId id="2147483919" r:id="rId17"/>
+    <p:sldLayoutId id="2147483649" r:id="rId1"/>
+    <p:sldLayoutId id="2147483650" r:id="rId2"/>
+    <p:sldLayoutId id="2147483651" r:id="rId3"/>
+    <p:sldLayoutId id="2147483652" r:id="rId4"/>
+    <p:sldLayoutId id="2147483653" r:id="rId5"/>
+    <p:sldLayoutId id="2147483654" r:id="rId6"/>
+    <p:sldLayoutId id="2147483655" r:id="rId7"/>
+    <p:sldLayoutId id="2147483656" r:id="rId8"/>
+    <p:sldLayoutId id="2147483657" r:id="rId9"/>
+    <p:sldLayoutId id="2147483658" r:id="rId10"/>
+    <p:sldLayoutId id="2147483659" r:id="rId11"/>
+    <p:sldLayoutId id="2147483660" r:id="rId12"/>
+    <p:sldLayoutId id="2147483661" r:id="rId13"/>
+    <p:sldLayoutId id="2147483662" r:id="rId14"/>
+    <p:sldLayoutId id="2147483663" r:id="rId15"/>
+    <p:sldLayoutId id="2147483664" r:id="rId16"/>
+    <p:sldLayoutId id="2147483665" r:id="rId17"/>
   </p:sldLayoutIdLst>
   <p:txStyles>
     <p:titleStyle>
@@ -9912,8 +8933,6 @@
         <p:spPr>
           <a:ln>
             <a:miter lim="800000"/>
-            <a:headEnd/>
-            <a:tailEnd/>
           </a:ln>
         </p:spPr>
         <p:txBody>
@@ -9978,29 +8997,29 @@
               <a:t>现代软件工程 第一章</a:t>
             </a:r>
             <a:endParaRPr lang="en-US" altLang="zh-CN" sz="4000" dirty="0">
-              <a:ea typeface="宋体" pitchFamily="2" charset="-122"/>
+              <a:ea typeface="宋体" panose="02010600030101010101" pitchFamily="2" charset="-122"/>
             </a:endParaRPr>
           </a:p>
           <a:p>
             <a:r>
               <a:rPr lang="zh-CN" altLang="en-US" sz="4000" dirty="0">
-                <a:ea typeface="宋体" pitchFamily="2" charset="-122"/>
+                <a:ea typeface="宋体" panose="02010600030101010101" pitchFamily="2" charset="-122"/>
               </a:rPr>
               <a:t>邹欣</a:t>
             </a:r>
             <a:endParaRPr lang="en-US" altLang="zh-CN" sz="4000" dirty="0">
-              <a:ea typeface="宋体" pitchFamily="2" charset="-122"/>
+              <a:ea typeface="宋体" panose="02010600030101010101" pitchFamily="2" charset="-122"/>
             </a:endParaRPr>
           </a:p>
           <a:p>
             <a:r>
               <a:rPr lang="en-US" altLang="zh-CN" sz="4000" dirty="0">
-                <a:ea typeface="SimHei" pitchFamily="49" charset="-122"/>
+                <a:ea typeface="黑体" panose="02010609060101010101" pitchFamily="49" charset="-122"/>
               </a:rPr>
               <a:t>2019</a:t>
             </a:r>
             <a:endParaRPr lang="zh-CN" altLang="en-US" sz="4000" dirty="0">
-              <a:ea typeface="SimHei" pitchFamily="49" charset="-122"/>
+              <a:ea typeface="黑体" panose="02010609060101010101" pitchFamily="49" charset="-122"/>
             </a:endParaRPr>
           </a:p>
         </p:txBody>
@@ -10079,6 +9098,7 @@
               <a:rPr lang="zh-CN" altLang="en-US" dirty="0"/>
               <a:t>软件开发流程的目的是为了提高 软件开发、运营、维护的效率，并提高软件的质量、用户满意度、可靠性和软件的可维护性。</a:t>
             </a:r>
+            <a:endParaRPr lang="zh-CN" altLang="en-US" dirty="0"/>
           </a:p>
           <a:p>
             <a:endParaRPr lang="en-US" dirty="0"/>
@@ -10086,11 +9106,6 @@
         </p:txBody>
       </p:sp>
     </p:spTree>
-    <p:extLst>
-      <p:ext uri="{BB962C8B-B14F-4D97-AF65-F5344CB8AC3E}">
-        <p14:creationId xmlns:p14="http://schemas.microsoft.com/office/powerpoint/2010/main" val="177360688"/>
-      </p:ext>
-    </p:extLst>
   </p:cSld>
   <p:clrMapOvr>
     <a:masterClrMapping/>
@@ -10139,6 +9154,7 @@
               <a:rPr lang="en-US" dirty="0"/>
               <a:t>?</a:t>
             </a:r>
+            <a:endParaRPr lang="en-US" dirty="0"/>
           </a:p>
         </p:txBody>
       </p:sp>
@@ -10188,6 +9204,7 @@
               <a:rPr lang="en-US" dirty="0"/>
               <a:t>The effort is necessitated by the potential complexity of those systems, which may contain millions of lines of code.</a:t>
             </a:r>
+            <a:endParaRPr lang="en-US" dirty="0"/>
           </a:p>
           <a:p>
             <a:pPr eaLnBrk="1" hangingPunct="1"/>
@@ -10203,10 +9220,11 @@
               <a:rPr lang="en-US" dirty="0"/>
               <a:t>Millions of dollars, people’s life, business depends on it. </a:t>
             </a:r>
+            <a:endParaRPr lang="en-US" dirty="0"/>
           </a:p>
           <a:p>
             <a:pPr eaLnBrk="1" hangingPunct="1">
-              <a:buFont typeface="Wingdings 2" pitchFamily="18" charset="2"/>
+              <a:buFont typeface="Wingdings 2" panose="05020102010507070707" pitchFamily="18" charset="2"/>
               <a:buNone/>
             </a:pPr>
             <a:endParaRPr lang="en-US" dirty="0"/>
@@ -10277,11 +9295,6 @@
           </p:cNvGraphicFramePr>
           <p:nvPr>
             <p:ph idx="1"/>
-            <p:extLst>
-              <p:ext uri="{D42A27DB-BD31-4B8C-83A1-F6EECF244321}">
-                <p14:modId xmlns:p14="http://schemas.microsoft.com/office/powerpoint/2010/main" val="1846823648"/>
-              </p:ext>
-            </p:extLst>
           </p:nvPr>
         </p:nvGraphicFramePr>
         <p:xfrm>
@@ -10295,20 +9308,8 @@
                 <a:tableStyleId>{5C22544A-7EE6-4342-B048-85BDC9FD1C3A}</a:tableStyleId>
               </a:tblPr>
               <a:tblGrid>
-                <a:gridCol w="7238999">
-                  <a:extLst>
-                    <a:ext uri="{9D8B030D-6E8A-4147-A177-3AD203B41FA5}">
-                      <a16:colId xmlns:a16="http://schemas.microsoft.com/office/drawing/2014/main" val="20000"/>
-                    </a:ext>
-                  </a:extLst>
-                </a:gridCol>
-                <a:gridCol w="1066804">
-                  <a:extLst>
-                    <a:ext uri="{9D8B030D-6E8A-4147-A177-3AD203B41FA5}">
-                      <a16:colId xmlns:a16="http://schemas.microsoft.com/office/drawing/2014/main" val="20001"/>
-                    </a:ext>
-                  </a:extLst>
-                </a:gridCol>
+                <a:gridCol w="7238999"/>
+                <a:gridCol w="1066804"/>
               </a:tblGrid>
               <a:tr h="370840">
                 <a:tc>
@@ -10320,6 +9321,7 @@
                         <a:rPr lang="en-US" dirty="0"/>
                         <a:t>Programming</a:t>
                       </a:r>
+                      <a:endParaRPr lang="en-US" dirty="0"/>
                     </a:p>
                   </a:txBody>
                   <a:tcPr/>
@@ -10342,11 +9344,6 @@
                   </a:txBody>
                   <a:tcPr/>
                 </a:tc>
-                <a:extLst>
-                  <a:ext uri="{0D108BD9-81ED-4DB2-BD59-A6C34878D82A}">
-                    <a16:rowId xmlns:a16="http://schemas.microsoft.com/office/drawing/2014/main" val="10000"/>
-                  </a:ext>
-                </a:extLst>
               </a:tr>
               <a:tr h="370840">
                 <a:tc>
@@ -10361,7 +9358,7 @@
                         <a:buClr>
                           <a:schemeClr val="accent3"/>
                         </a:buClr>
-                        <a:buFont typeface="Wingdings 2"/>
+                        <a:buFont typeface="Wingdings 2" panose="05020102010507070707"/>
                         <a:buNone/>
                         <a:defRPr/>
                       </a:pPr>
@@ -10369,13 +9366,14 @@
                         <a:rPr lang="en-US" dirty="0"/>
                         <a:t>Children’s toy </a:t>
                       </a:r>
+                      <a:endParaRPr lang="en-US" dirty="0"/>
                     </a:p>
                     <a:p>
-                      <a:pPr marL="640080" lvl="1" indent="-246888" eaLnBrk="1" fontAlgn="auto" hangingPunct="1">
+                      <a:pPr marL="640080" lvl="1" indent="-247015" eaLnBrk="1" fontAlgn="auto" hangingPunct="1">
                         <a:spcAft>
                           <a:spcPts val="0"/>
                         </a:spcAft>
-                        <a:buFont typeface="Wingdings 2"/>
+                        <a:buFont typeface="Wingdings 2" panose="05020102010507070707"/>
                         <a:buChar char=""/>
                         <a:defRPr/>
                       </a:pPr>
@@ -10383,13 +9381,14 @@
                         <a:rPr lang="en-US" dirty="0"/>
                         <a:t>Write a “hello world” in a new language</a:t>
                       </a:r>
+                      <a:endParaRPr lang="en-US" dirty="0"/>
                     </a:p>
                     <a:p>
-                      <a:pPr marL="640080" lvl="1" indent="-246888" eaLnBrk="1" fontAlgn="auto" hangingPunct="1">
+                      <a:pPr marL="640080" lvl="1" indent="-247015" eaLnBrk="1" fontAlgn="auto" hangingPunct="1">
                         <a:spcAft>
                           <a:spcPts val="0"/>
                         </a:spcAft>
-                        <a:buFont typeface="Wingdings 2"/>
+                        <a:buFont typeface="Wingdings 2" panose="05020102010507070707"/>
                         <a:buChar char=""/>
                         <a:defRPr/>
                       </a:pPr>
@@ -10397,6 +9396,7 @@
                         <a:rPr lang="en-US" dirty="0"/>
                         <a:t>Time: one afternoon</a:t>
                       </a:r>
+                      <a:endParaRPr lang="en-US" dirty="0"/>
                     </a:p>
                   </a:txBody>
                   <a:tcPr/>
@@ -10411,11 +9411,6 @@
                   </a:txBody>
                   <a:tcPr/>
                 </a:tc>
-                <a:extLst>
-                  <a:ext uri="{0D108BD9-81ED-4DB2-BD59-A6C34878D82A}">
-                    <a16:rowId xmlns:a16="http://schemas.microsoft.com/office/drawing/2014/main" val="10001"/>
-                  </a:ext>
-                </a:extLst>
               </a:tr>
               <a:tr h="370840">
                 <a:tc>
@@ -10430,7 +9425,7 @@
                         <a:buClr>
                           <a:schemeClr val="accent3"/>
                         </a:buClr>
-                        <a:buFont typeface="Wingdings 2"/>
+                        <a:buFont typeface="Wingdings 2" panose="05020102010507070707"/>
                         <a:buNone/>
                         <a:defRPr/>
                       </a:pPr>
@@ -10438,13 +9433,14 @@
                         <a:rPr lang="en-US" dirty="0"/>
                         <a:t>Hobbyist</a:t>
                       </a:r>
+                      <a:endParaRPr lang="en-US" dirty="0"/>
                     </a:p>
                     <a:p>
-                      <a:pPr marL="640080" lvl="1" indent="-246888" eaLnBrk="1" fontAlgn="auto" hangingPunct="1">
+                      <a:pPr marL="640080" lvl="1" indent="-247015" eaLnBrk="1" fontAlgn="auto" hangingPunct="1">
                         <a:spcAft>
                           <a:spcPts val="0"/>
                         </a:spcAft>
-                        <a:buFont typeface="Wingdings 2"/>
+                        <a:buFont typeface="Wingdings 2" panose="05020102010507070707"/>
                         <a:buChar char=""/>
                         <a:defRPr/>
                       </a:pPr>
@@ -10452,13 +9448,14 @@
                         <a:rPr lang="en-US" dirty="0"/>
                         <a:t>Try something new and cool in Perl, Python, Asp.net, etc. </a:t>
                       </a:r>
+                      <a:endParaRPr lang="en-US" dirty="0"/>
                     </a:p>
                     <a:p>
-                      <a:pPr marL="640080" lvl="1" indent="-246888" eaLnBrk="1" fontAlgn="auto" hangingPunct="1">
+                      <a:pPr marL="640080" lvl="1" indent="-247015" eaLnBrk="1" fontAlgn="auto" hangingPunct="1">
                         <a:spcAft>
                           <a:spcPts val="0"/>
                         </a:spcAft>
-                        <a:buFont typeface="Wingdings 2"/>
+                        <a:buFont typeface="Wingdings 2" panose="05020102010507070707"/>
                         <a:buChar char=""/>
                         <a:defRPr/>
                       </a:pPr>
@@ -10466,6 +9463,7 @@
                         <a:rPr lang="en-US" dirty="0"/>
                         <a:t>Time: a couple of days</a:t>
                       </a:r>
+                      <a:endParaRPr lang="en-US" dirty="0"/>
                     </a:p>
                   </a:txBody>
                   <a:tcPr/>
@@ -10480,11 +9478,6 @@
                   </a:txBody>
                   <a:tcPr/>
                 </a:tc>
-                <a:extLst>
-                  <a:ext uri="{0D108BD9-81ED-4DB2-BD59-A6C34878D82A}">
-                    <a16:rowId xmlns:a16="http://schemas.microsoft.com/office/drawing/2014/main" val="10002"/>
-                  </a:ext>
-                </a:extLst>
               </a:tr>
               <a:tr h="370840">
                 <a:tc>
@@ -10499,7 +9492,7 @@
                         <a:buClr>
                           <a:schemeClr val="accent3"/>
                         </a:buClr>
-                        <a:buFont typeface="Wingdings 2"/>
+                        <a:buFont typeface="Wingdings 2" panose="05020102010507070707"/>
                         <a:buNone/>
                         <a:defRPr/>
                       </a:pPr>
@@ -10507,13 +9500,14 @@
                         <a:rPr lang="en-US" dirty="0"/>
                         <a:t>Prototype</a:t>
                       </a:r>
+                      <a:endParaRPr lang="en-US" dirty="0"/>
                     </a:p>
                     <a:p>
-                      <a:pPr marL="640080" lvl="1" indent="-246888" eaLnBrk="1" fontAlgn="auto" hangingPunct="1">
+                      <a:pPr marL="640080" lvl="1" indent="-247015" eaLnBrk="1" fontAlgn="auto" hangingPunct="1">
                         <a:spcAft>
                           <a:spcPts val="0"/>
                         </a:spcAft>
-                        <a:buFont typeface="Wingdings 2"/>
+                        <a:buFont typeface="Wingdings 2" panose="05020102010507070707"/>
                         <a:buChar char=""/>
                         <a:defRPr/>
                       </a:pPr>
@@ -10521,13 +9515,14 @@
                         <a:rPr lang="en-US" dirty="0"/>
                         <a:t>Write some web sites, tools for others to use</a:t>
                       </a:r>
+                      <a:endParaRPr lang="en-US" dirty="0"/>
                     </a:p>
                     <a:p>
-                      <a:pPr marL="640080" lvl="1" indent="-246888" eaLnBrk="1" fontAlgn="auto" hangingPunct="1">
+                      <a:pPr marL="640080" lvl="1" indent="-247015" eaLnBrk="1" fontAlgn="auto" hangingPunct="1">
                         <a:spcAft>
                           <a:spcPts val="0"/>
                         </a:spcAft>
-                        <a:buFont typeface="Wingdings 2"/>
+                        <a:buFont typeface="Wingdings 2" panose="05020102010507070707"/>
                         <a:buChar char=""/>
                         <a:defRPr/>
                       </a:pPr>
@@ -10535,6 +9530,7 @@
                         <a:rPr lang="en-US" dirty="0"/>
                         <a:t>Several weeks, months</a:t>
                       </a:r>
+                      <a:endParaRPr lang="en-US" dirty="0"/>
                     </a:p>
                   </a:txBody>
                   <a:tcPr/>
@@ -10549,11 +9545,6 @@
                   </a:txBody>
                   <a:tcPr/>
                 </a:tc>
-                <a:extLst>
-                  <a:ext uri="{0D108BD9-81ED-4DB2-BD59-A6C34878D82A}">
-                    <a16:rowId xmlns:a16="http://schemas.microsoft.com/office/drawing/2014/main" val="10003"/>
-                  </a:ext>
-                </a:extLst>
               </a:tr>
               <a:tr h="370840">
                 <a:tc>
@@ -10568,7 +9559,7 @@
                         <a:buClr>
                           <a:schemeClr val="accent3"/>
                         </a:buClr>
-                        <a:buFont typeface="Wingdings 2"/>
+                        <a:buFont typeface="Wingdings 2" panose="05020102010507070707"/>
                         <a:buNone/>
                         <a:defRPr/>
                       </a:pPr>
@@ -10576,13 +9567,14 @@
                         <a:rPr lang="en-US" dirty="0"/>
                         <a:t>Professionals</a:t>
                       </a:r>
+                      <a:endParaRPr lang="en-US" dirty="0"/>
                     </a:p>
                     <a:p>
-                      <a:pPr marL="640080" lvl="1" indent="-246888" eaLnBrk="1" fontAlgn="auto" hangingPunct="1">
+                      <a:pPr marL="640080" lvl="1" indent="-247015" eaLnBrk="1" fontAlgn="auto" hangingPunct="1">
                         <a:spcAft>
                           <a:spcPts val="0"/>
                         </a:spcAft>
-                        <a:buFont typeface="Wingdings 2"/>
+                        <a:buFont typeface="Wingdings 2" panose="05020102010507070707"/>
                         <a:buChar char=""/>
                         <a:defRPr/>
                       </a:pPr>
@@ -10590,13 +9582,14 @@
                         <a:rPr lang="en-US" dirty="0"/>
                         <a:t>Make a living by writing software, like Bill Gates.</a:t>
                       </a:r>
+                      <a:endParaRPr lang="en-US" dirty="0"/>
                     </a:p>
                     <a:p>
-                      <a:pPr marL="640080" lvl="1" indent="-246888" eaLnBrk="1" fontAlgn="auto" hangingPunct="1">
+                      <a:pPr marL="640080" lvl="1" indent="-247015" eaLnBrk="1" fontAlgn="auto" hangingPunct="1">
                         <a:spcAft>
                           <a:spcPts val="0"/>
                         </a:spcAft>
-                        <a:buFont typeface="Wingdings 2"/>
+                        <a:buFont typeface="Wingdings 2" panose="05020102010507070707"/>
                         <a:buChar char=""/>
                         <a:defRPr/>
                       </a:pPr>
@@ -10604,6 +9597,7 @@
                         <a:rPr lang="en-US" dirty="0"/>
                         <a:t>Time: several years, several million/billion dollars. </a:t>
                       </a:r>
+                      <a:endParaRPr lang="en-US" dirty="0"/>
                     </a:p>
                   </a:txBody>
                   <a:tcPr/>
@@ -10618,11 +9612,6 @@
                   </a:txBody>
                   <a:tcPr/>
                 </a:tc>
-                <a:extLst>
-                  <a:ext uri="{0D108BD9-81ED-4DB2-BD59-A6C34878D82A}">
-                    <a16:rowId xmlns:a16="http://schemas.microsoft.com/office/drawing/2014/main" val="10004"/>
-                  </a:ext>
-                </a:extLst>
               </a:tr>
             </a:tbl>
           </a:graphicData>
@@ -10631,7 +9620,7 @@
       <p:pic>
         <p:nvPicPr>
           <p:cNvPr id="5" name="Picture 4" descr="http://tbn0.google.com/images?q=tbn:50QzruCKWotv6M:http://veronikanagy.files.wordpress.com/2008/02/paper_airplane_sm.jpg">
-            <a:hlinkClick r:id="rId2"/>
+            <a:hlinkClick r:id="rId1"/>
           </p:cNvPr>
           <p:cNvPicPr>
             <a:picLocks noChangeAspect="1" noChangeArrowheads="1"/>
@@ -10639,7 +9628,7 @@
           <p:nvPr/>
         </p:nvPicPr>
         <p:blipFill>
-          <a:blip r:embed="rId3">
+          <a:blip r:embed="rId2">
             <a:extLst>
               <a:ext uri="{28A0092B-C50C-407E-A947-70E740481C1C}">
                 <a14:useLocalDpi xmlns:a14="http://schemas.microsoft.com/office/drawing/2010/main" val="0"/>
@@ -10693,7 +9682,7 @@
           <p:nvPr/>
         </p:nvPicPr>
         <p:blipFill>
-          <a:blip r:embed="rId4" cstate="print">
+          <a:blip r:embed="rId3" cstate="print">
             <a:extLst>
               <a:ext uri="{28A0092B-C50C-407E-A947-70E740481C1C}">
                 <a14:useLocalDpi xmlns:a14="http://schemas.microsoft.com/office/drawing/2010/main" val="0"/>
@@ -10747,7 +9736,7 @@
           <p:nvPr/>
         </p:nvPicPr>
         <p:blipFill>
-          <a:blip r:embed="rId5" cstate="print">
+          <a:blip r:embed="rId4" cstate="print">
             <a:extLst>
               <a:ext uri="{28A0092B-C50C-407E-A947-70E740481C1C}">
                 <a14:useLocalDpi xmlns:a14="http://schemas.microsoft.com/office/drawing/2010/main" val="0"/>
@@ -10801,7 +9790,7 @@
           <p:nvPr/>
         </p:nvPicPr>
         <p:blipFill>
-          <a:blip r:embed="rId6" cstate="print">
+          <a:blip r:embed="rId5" cstate="print">
             <a:extLst>
               <a:ext uri="{28A0092B-C50C-407E-A947-70E740481C1C}">
                 <a14:useLocalDpi xmlns:a14="http://schemas.microsoft.com/office/drawing/2010/main" val="0"/>
@@ -10847,11 +9836,6 @@
         </p:spPr>
       </p:pic>
     </p:spTree>
-    <p:extLst>
-      <p:ext uri="{BB962C8B-B14F-4D97-AF65-F5344CB8AC3E}">
-        <p14:creationId xmlns:p14="http://schemas.microsoft.com/office/powerpoint/2010/main" val="821573508"/>
-      </p:ext>
-    </p:extLst>
   </p:cSld>
   <p:clrMapOvr>
     <a:masterClrMapping/>
@@ -10939,11 +9923,6 @@
         </p:txBody>
       </p:sp>
     </p:spTree>
-    <p:extLst>
-      <p:ext uri="{BB962C8B-B14F-4D97-AF65-F5344CB8AC3E}">
-        <p14:creationId xmlns:p14="http://schemas.microsoft.com/office/powerpoint/2010/main" val="641043592"/>
-      </p:ext>
-    </p:extLst>
   </p:cSld>
   <p:clrMapOvr>
     <a:masterClrMapping/>
@@ -10995,6 +9974,7 @@
               <a:rPr lang="en-US" dirty="0"/>
               <a:t>Service</a:t>
             </a:r>
+            <a:endParaRPr lang="en-US" dirty="0"/>
           </a:p>
         </p:txBody>
       </p:sp>
@@ -11038,6 +10018,7 @@
               <a:rPr lang="en-US" altLang="zh-CN" sz="2000" dirty="0"/>
               <a:t>:</a:t>
             </a:r>
+            <a:endParaRPr lang="en-US" altLang="zh-CN" sz="2000" dirty="0"/>
           </a:p>
           <a:p>
             <a:pPr lvl="1"/>
@@ -11045,6 +10026,7 @@
               <a:rPr lang="en-US" altLang="zh-CN" sz="1800" dirty="0"/>
               <a:t>C/C++</a:t>
             </a:r>
+            <a:endParaRPr lang="en-US" altLang="zh-CN" sz="1800" dirty="0"/>
           </a:p>
           <a:p>
             <a:pPr lvl="1"/>
@@ -11052,6 +10034,7 @@
               <a:rPr lang="en-US" altLang="zh-CN" sz="1800" dirty="0"/>
               <a:t>C#/VB.net/Java</a:t>
             </a:r>
+            <a:endParaRPr lang="en-US" altLang="zh-CN" sz="1800" dirty="0"/>
           </a:p>
           <a:p>
             <a:pPr lvl="1"/>
@@ -11059,6 +10042,7 @@
               <a:rPr lang="en-US" sz="1800" dirty="0"/>
               <a:t>Excel</a:t>
             </a:r>
+            <a:endParaRPr lang="en-US" sz="1800" dirty="0"/>
           </a:p>
           <a:p>
             <a:pPr lvl="1"/>
@@ -11066,6 +10050,7 @@
               <a:rPr lang="en-US" sz="1800" dirty="0"/>
               <a:t>Unix Shell</a:t>
             </a:r>
+            <a:endParaRPr lang="en-US" sz="1800" dirty="0"/>
           </a:p>
           <a:p>
             <a:pPr lvl="1"/>
@@ -11097,6 +10082,7 @@
               <a:rPr lang="en-US" sz="1800" dirty="0"/>
               <a:t>Perl</a:t>
             </a:r>
+            <a:endParaRPr lang="en-US" sz="1800" dirty="0"/>
           </a:p>
           <a:p>
             <a:pPr lvl="1"/>
@@ -11104,6 +10090,7 @@
               <a:rPr lang="en-US" sz="1800" dirty="0"/>
               <a:t>Python</a:t>
             </a:r>
+            <a:endParaRPr lang="en-US" sz="1800" dirty="0"/>
           </a:p>
           <a:p>
             <a:r>
@@ -11130,6 +10117,7 @@
               <a:rPr lang="en-US" altLang="zh-CN" sz="2200" dirty="0"/>
               <a:t>1】</a:t>
             </a:r>
+            <a:endParaRPr lang="en-US" altLang="zh-CN" sz="2200" dirty="0"/>
           </a:p>
           <a:p>
             <a:r>
@@ -11170,6 +10158,7 @@
               <a:rPr lang="en-US" altLang="zh-CN" sz="2200" dirty="0"/>
               <a:t>2】</a:t>
             </a:r>
+            <a:endParaRPr lang="en-US" altLang="zh-CN" sz="2200" dirty="0"/>
           </a:p>
           <a:p>
             <a:r>
@@ -11181,11 +10170,6 @@
         </p:txBody>
       </p:sp>
     </p:spTree>
-    <p:extLst>
-      <p:ext uri="{BB962C8B-B14F-4D97-AF65-F5344CB8AC3E}">
-        <p14:creationId xmlns:p14="http://schemas.microsoft.com/office/powerpoint/2010/main" val="2592908535"/>
-      </p:ext>
-    </p:extLst>
   </p:cSld>
   <p:clrMapOvr>
     <a:masterClrMapping/>
@@ -11330,11 +10314,6 @@
         </p:txBody>
       </p:sp>
     </p:spTree>
-    <p:extLst>
-      <p:ext uri="{BB962C8B-B14F-4D97-AF65-F5344CB8AC3E}">
-        <p14:creationId xmlns:p14="http://schemas.microsoft.com/office/powerpoint/2010/main" val="2982333462"/>
-      </p:ext>
-    </p:extLst>
   </p:cSld>
   <p:clrMapOvr>
     <a:masterClrMapping/>
@@ -11451,11 +10430,6 @@
         </p:txBody>
       </p:sp>
     </p:spTree>
-    <p:extLst>
-      <p:ext uri="{BB962C8B-B14F-4D97-AF65-F5344CB8AC3E}">
-        <p14:creationId xmlns:p14="http://schemas.microsoft.com/office/powerpoint/2010/main" val="4110949276"/>
-      </p:ext>
-    </p:extLst>
   </p:cSld>
   <p:clrMapOvr>
     <a:masterClrMapping/>
@@ -11532,21 +10506,24 @@
               <a:rPr lang="en-US" dirty="0"/>
               <a:t>Program = data structure + algorithm</a:t>
             </a:r>
+            <a:endParaRPr lang="en-US" dirty="0"/>
           </a:p>
           <a:p>
             <a:r>
               <a:rPr lang="en-US" dirty="0"/>
               <a:t>Software = Program + Software Engineering</a:t>
             </a:r>
+            <a:endParaRPr lang="en-US" dirty="0"/>
           </a:p>
           <a:p>
             <a:r>
               <a:rPr lang="en-US" altLang="zh-CN" dirty="0"/>
               <a:t>Software Company = </a:t>
             </a:r>
-          </a:p>
-          <a:p>
-            <a:pPr marL="118872" indent="0">
+            <a:endParaRPr lang="en-US" altLang="zh-CN" dirty="0"/>
+          </a:p>
+          <a:p>
+            <a:pPr marL="118745" indent="0">
               <a:buNone/>
             </a:pPr>
             <a:r>
@@ -11565,15 +10542,16 @@
               <a:rPr lang="en-US" altLang="zh-CN" dirty="0"/>
               <a:t>Model</a:t>
             </a:r>
-          </a:p>
-          <a:p>
-            <a:pPr marL="118872" indent="0">
+            <a:endParaRPr lang="en-US" altLang="zh-CN" dirty="0"/>
+          </a:p>
+          <a:p>
+            <a:pPr marL="118745" indent="0">
               <a:buNone/>
             </a:pPr>
             <a:endParaRPr lang="en-US" dirty="0"/>
           </a:p>
           <a:p>
-            <a:pPr marL="118872" indent="0">
+            <a:pPr marL="118745" indent="0">
               <a:buNone/>
             </a:pPr>
             <a:r>
@@ -11598,13 +10576,13 @@
               <p:cTn id="2" dur="indefinite" nodeType="mainSeq">
                 <p:childTnLst>
                   <p:par>
-                    <p:cTn id="3" fill="hold" nodeType="clickPar">
+                    <p:cTn id="3" fill="hold">
                       <p:stCondLst>
                         <p:cond delay="indefinite"/>
                       </p:stCondLst>
                       <p:childTnLst>
                         <p:par>
-                          <p:cTn id="4" fill="hold" nodeType="withGroup">
+                          <p:cTn id="4" fill="hold">
                             <p:stCondLst>
                               <p:cond delay="0"/>
                             </p:stCondLst>
@@ -11659,13 +10637,13 @@
                     </p:cTn>
                   </p:par>
                   <p:par>
-                    <p:cTn id="8" fill="hold" nodeType="clickPar">
+                    <p:cTn id="8" fill="hold">
                       <p:stCondLst>
                         <p:cond delay="indefinite"/>
                       </p:stCondLst>
                       <p:childTnLst>
                         <p:par>
-                          <p:cTn id="9" fill="hold" nodeType="withGroup">
+                          <p:cTn id="9" fill="hold">
                             <p:stCondLst>
                               <p:cond delay="0"/>
                             </p:stCondLst>
@@ -11975,6 +10953,7 @@
               <a:rPr lang="en-US" dirty="0"/>
               <a:t>…</a:t>
             </a:r>
+            <a:endParaRPr lang="en-US" dirty="0"/>
           </a:p>
         </p:txBody>
       </p:sp>
@@ -12016,6 +10995,7 @@
               <a:rPr lang="en-US" sz="2000" dirty="0"/>
               <a:t>get a new one</a:t>
             </a:r>
+            <a:endParaRPr lang="en-US" sz="2000" dirty="0"/>
           </a:p>
           <a:p>
             <a:pPr eaLnBrk="1" hangingPunct="1"/>
@@ -12035,6 +11015,7 @@
               <a:rPr lang="en-US" sz="2000" dirty="0"/>
               <a:t>we had fun, move on… </a:t>
             </a:r>
+            <a:endParaRPr lang="en-US" sz="2000" dirty="0"/>
           </a:p>
           <a:p>
             <a:pPr eaLnBrk="1" hangingPunct="1"/>
@@ -12054,6 +11035,7 @@
               <a:rPr lang="en-US" sz="2000" dirty="0"/>
               <a:t>learn the lesson, find another way, and keep going…</a:t>
             </a:r>
+            <a:endParaRPr lang="en-US" sz="2000" dirty="0"/>
           </a:p>
           <a:p>
             <a:pPr eaLnBrk="1" hangingPunct="1"/>
@@ -12089,6 +11071,7 @@
               <a:rPr lang="en-US" sz="1700" dirty="0"/>
               <a:t>people’s life, money</a:t>
             </a:r>
+            <a:endParaRPr lang="en-US" sz="1700" dirty="0"/>
           </a:p>
           <a:p>
             <a:pPr lvl="1" eaLnBrk="1" hangingPunct="1"/>
@@ -12145,6 +11128,7 @@
               <a:rPr lang="en-US"/>
               <a:t>Quiz:</a:t>
             </a:r>
+            <a:endParaRPr lang="en-US"/>
           </a:p>
         </p:txBody>
       </p:sp>
@@ -12164,53 +11148,58 @@
           <a:lstStyle/>
           <a:p>
             <a:pPr eaLnBrk="1" hangingPunct="1">
-              <a:buFont typeface="Wingdings 2" pitchFamily="18" charset="2"/>
+              <a:buFont typeface="Wingdings 2" panose="05020102010507070707" pitchFamily="18" charset="2"/>
               <a:buNone/>
             </a:pPr>
             <a:r>
               <a:rPr lang="en-US"/>
               <a:t>If a feature in a commercial product has 1-in-a-million chance of usage, do you want to build it and educate customer about it every time they use the product?</a:t>
             </a:r>
+            <a:endParaRPr lang="en-US"/>
           </a:p>
           <a:p>
             <a:pPr marL="984250" lvl="1" indent="-514350">
-              <a:buFont typeface="Verdana" pitchFamily="34" charset="0"/>
+              <a:buFont typeface="Verdana" panose="020B0604030504040204" pitchFamily="34" charset="0"/>
               <a:buAutoNum type="alphaUcPeriod"/>
             </a:pPr>
             <a:r>
               <a:rPr lang="en-US"/>
               <a:t>don’t even plan it. </a:t>
             </a:r>
+            <a:endParaRPr lang="en-US"/>
           </a:p>
           <a:p>
             <a:pPr marL="984250" lvl="1" indent="-514350">
-              <a:buFont typeface="Verdana" pitchFamily="34" charset="0"/>
+              <a:buFont typeface="Verdana" panose="020B0604030504040204" pitchFamily="34" charset="0"/>
               <a:buAutoNum type="alphaUcPeriod"/>
             </a:pPr>
             <a:r>
               <a:rPr lang="en-US"/>
               <a:t>cut it if we don’t have time. </a:t>
             </a:r>
+            <a:endParaRPr lang="en-US"/>
           </a:p>
           <a:p>
             <a:pPr marL="984250" lvl="1" indent="-514350">
-              <a:buFont typeface="Verdana" pitchFamily="34" charset="0"/>
+              <a:buFont typeface="Verdana" panose="020B0604030504040204" pitchFamily="34" charset="0"/>
               <a:buAutoNum type="alphaUcPeriod"/>
             </a:pPr>
             <a:r>
               <a:rPr lang="en-US"/>
               <a:t>Build it, but don’t need to tell users</a:t>
             </a:r>
+            <a:endParaRPr lang="en-US"/>
           </a:p>
           <a:p>
             <a:pPr marL="984250" lvl="1" indent="-514350">
-              <a:buFont typeface="Verdana" pitchFamily="34" charset="0"/>
+              <a:buFont typeface="Verdana" panose="020B0604030504040204" pitchFamily="34" charset="0"/>
               <a:buAutoNum type="alphaUcPeriod"/>
             </a:pPr>
             <a:r>
               <a:rPr lang="en-US"/>
               <a:t>Build it, tell uses about it</a:t>
             </a:r>
+            <a:endParaRPr lang="en-US"/>
           </a:p>
         </p:txBody>
       </p:sp>
@@ -12286,11 +11275,6 @@
         </p:txBody>
       </p:sp>
     </p:spTree>
-    <p:extLst>
-      <p:ext uri="{BB962C8B-B14F-4D97-AF65-F5344CB8AC3E}">
-        <p14:creationId xmlns:p14="http://schemas.microsoft.com/office/powerpoint/2010/main" val="915299588"/>
-      </p:ext>
-    </p:extLst>
   </p:cSld>
   <p:clrMapOvr>
     <a:masterClrMapping/>
@@ -12335,6 +11319,7 @@
               <a:rPr lang="en-US"/>
               <a:t>The answer is:</a:t>
             </a:r>
+            <a:endParaRPr lang="en-US"/>
           </a:p>
         </p:txBody>
       </p:sp>
@@ -12347,7 +11332,7 @@
           <p:nvPr/>
         </p:nvPicPr>
         <p:blipFill>
-          <a:blip r:embed="rId2">
+          <a:blip r:embed="rId1">
             <a:extLst>
               <a:ext uri="{28A0092B-C50C-407E-A947-70E740481C1C}">
                 <a14:useLocalDpi xmlns:a14="http://schemas.microsoft.com/office/drawing/2010/main" val="0"/>
@@ -12437,6 +11422,7 @@
               <a:rPr lang="en-US"/>
               <a:t>A hole</a:t>
             </a:r>
+            <a:endParaRPr lang="en-US"/>
           </a:p>
         </p:txBody>
       </p:sp>
@@ -12449,7 +11435,7 @@
           <p:nvPr/>
         </p:nvPicPr>
         <p:blipFill>
-          <a:blip r:embed="rId3">
+          <a:blip r:embed="rId1">
             <a:extLst>
               <a:ext uri="{28A0092B-C50C-407E-A947-70E740481C1C}">
                 <a14:useLocalDpi xmlns:a14="http://schemas.microsoft.com/office/drawing/2010/main" val="0"/>
@@ -12567,15 +11553,11 @@
               <a:rPr lang="en-US" dirty="0"/>
               <a:t>?</a:t>
             </a:r>
+            <a:endParaRPr lang="en-US" dirty="0"/>
           </a:p>
         </p:txBody>
       </p:sp>
     </p:spTree>
-    <p:extLst>
-      <p:ext uri="{BB962C8B-B14F-4D97-AF65-F5344CB8AC3E}">
-        <p14:creationId xmlns:p14="http://schemas.microsoft.com/office/powerpoint/2010/main" val="460742064"/>
-      </p:ext>
-    </p:extLst>
   </p:cSld>
   <p:clrMapOvr>
     <a:masterClrMapping/>
@@ -12626,7 +11608,7 @@
       <p:pic>
         <p:nvPicPr>
           <p:cNvPr id="26627" name="Picture 2" descr="File:Plane crash into Hudson River (crop).jpg">
-            <a:hlinkClick r:id="rId3"/>
+            <a:hlinkClick r:id="rId1"/>
           </p:cNvPr>
           <p:cNvPicPr>
             <a:picLocks noChangeAspect="1" noChangeArrowheads="1"/>
@@ -12634,7 +11616,7 @@
           <p:nvPr/>
         </p:nvPicPr>
         <p:blipFill>
-          <a:blip r:embed="rId4">
+          <a:blip r:embed="rId2">
             <a:extLst>
               <a:ext uri="{28A0092B-C50C-407E-A947-70E740481C1C}">
                 <a14:useLocalDpi xmlns:a14="http://schemas.microsoft.com/office/drawing/2010/main" val="0"/>
@@ -12680,11 +11662,6 @@
         </p:spPr>
       </p:pic>
     </p:spTree>
-    <p:extLst>
-      <p:ext uri="{BB962C8B-B14F-4D97-AF65-F5344CB8AC3E}">
-        <p14:creationId xmlns:p14="http://schemas.microsoft.com/office/powerpoint/2010/main" val="3190123368"/>
-      </p:ext>
-    </p:extLst>
   </p:cSld>
   <p:clrMapOvr>
     <a:masterClrMapping/>
@@ -12790,6 +11767,7 @@
               <a:rPr lang="en-US" altLang="zh-CN" dirty="0"/>
               <a:t>?</a:t>
             </a:r>
+            <a:endParaRPr lang="en-US" altLang="zh-CN" dirty="0"/>
           </a:p>
           <a:p>
             <a:r>
@@ -12813,11 +11791,6 @@
         </p:txBody>
       </p:sp>
     </p:spTree>
-    <p:extLst>
-      <p:ext uri="{BB962C8B-B14F-4D97-AF65-F5344CB8AC3E}">
-        <p14:creationId xmlns:p14="http://schemas.microsoft.com/office/powerpoint/2010/main" val="359777111"/>
-      </p:ext>
-    </p:extLst>
   </p:cSld>
   <p:clrMapOvr>
     <a:masterClrMapping/>
@@ -12844,13 +11817,7 @@
       </p:grpSpPr>
       <p:sp>
         <p:nvSpPr>
-          <p:cNvPr id="2" name="Title 1">
-            <a:extLst>
-              <a:ext uri="{FF2B5EF4-FFF2-40B4-BE49-F238E27FC236}">
-                <a16:creationId xmlns:a16="http://schemas.microsoft.com/office/drawing/2014/main" id="{BBE06833-18FF-40FB-8528-405C07686983}"/>
-              </a:ext>
-            </a:extLst>
-          </p:cNvPr>
+          <p:cNvPr id="2" name="Title 1"/>
           <p:cNvSpPr>
             <a:spLocks noGrp="1"/>
           </p:cNvSpPr>
@@ -12873,13 +11840,7 @@
       </p:sp>
       <p:sp>
         <p:nvSpPr>
-          <p:cNvPr id="3" name="Content Placeholder 2">
-            <a:extLst>
-              <a:ext uri="{FF2B5EF4-FFF2-40B4-BE49-F238E27FC236}">
-                <a16:creationId xmlns:a16="http://schemas.microsoft.com/office/drawing/2014/main" id="{9E214A16-91DA-4062-9BFC-87D0639DA81B}"/>
-              </a:ext>
-            </a:extLst>
-          </p:cNvPr>
+          <p:cNvPr id="3" name="Content Placeholder 2"/>
           <p:cNvSpPr>
             <a:spLocks noGrp="1"/>
           </p:cNvSpPr>
@@ -12913,6 +11874,7 @@
               <a:rPr lang="zh-CN" altLang="en-US" dirty="0"/>
               <a:t>行源代码（相当于显示器的一屏）， 他们的智力、记忆力和常人差不多。软件的各个模块之间有各种显性或 隐性的依赖关系，随着系统的成长和模块的增多，这些关系的数量往往以几何级数的速度增长。</a:t>
             </a:r>
+            <a:endParaRPr lang="zh-CN" altLang="en-US" dirty="0"/>
           </a:p>
           <a:p>
             <a:endParaRPr lang="en-US" dirty="0"/>
@@ -12920,11 +11882,6 @@
         </p:txBody>
       </p:sp>
     </p:spTree>
-    <p:extLst>
-      <p:ext uri="{BB962C8B-B14F-4D97-AF65-F5344CB8AC3E}">
-        <p14:creationId xmlns:p14="http://schemas.microsoft.com/office/powerpoint/2010/main" val="4131179668"/>
-      </p:ext>
-    </p:extLst>
   </p:cSld>
   <p:clrMapOvr>
     <a:masterClrMapping/>
@@ -12951,13 +11908,7 @@
       </p:grpSpPr>
       <p:sp>
         <p:nvSpPr>
-          <p:cNvPr id="2" name="Title 1">
-            <a:extLst>
-              <a:ext uri="{FF2B5EF4-FFF2-40B4-BE49-F238E27FC236}">
-                <a16:creationId xmlns:a16="http://schemas.microsoft.com/office/drawing/2014/main" id="{FDAA107D-9843-421D-9402-32397C9A2C44}"/>
-              </a:ext>
-            </a:extLst>
-          </p:cNvPr>
+          <p:cNvPr id="2" name="Title 1"/>
           <p:cNvSpPr>
             <a:spLocks noGrp="1"/>
           </p:cNvSpPr>
@@ -12988,13 +11939,7 @@
       </p:sp>
       <p:sp>
         <p:nvSpPr>
-          <p:cNvPr id="3" name="Content Placeholder 2">
-            <a:extLst>
-              <a:ext uri="{FF2B5EF4-FFF2-40B4-BE49-F238E27FC236}">
-                <a16:creationId xmlns:a16="http://schemas.microsoft.com/office/drawing/2014/main" id="{6F76B870-06A1-443F-9B1C-9AEA743EDF78}"/>
-              </a:ext>
-            </a:extLst>
-          </p:cNvPr>
+          <p:cNvPr id="3" name="Content Placeholder 2"/>
           <p:cNvSpPr>
             <a:spLocks noGrp="1"/>
           </p:cNvSpPr>
@@ -13028,6 +11973,7 @@
               <a:rPr lang="zh-CN" altLang="en-US" dirty="0"/>
               <a:t>商用软件出现 了错误，工程师可以看到程序在出错的一瞬间留下的一些痕迹（错误代号、 大致的目标代码位置、错误信息），但是几乎无法完整重现到底程序出 现了什么问题。</a:t>
             </a:r>
+            <a:endParaRPr lang="zh-CN" altLang="en-US" dirty="0"/>
           </a:p>
           <a:p>
             <a:r>
@@ -13043,11 +11989,6 @@
         </p:txBody>
       </p:sp>
     </p:spTree>
-    <p:extLst>
-      <p:ext uri="{BB962C8B-B14F-4D97-AF65-F5344CB8AC3E}">
-        <p14:creationId xmlns:p14="http://schemas.microsoft.com/office/powerpoint/2010/main" val="3139242268"/>
-      </p:ext>
-    </p:extLst>
   </p:cSld>
   <p:clrMapOvr>
     <a:masterClrMapping/>
@@ -13074,13 +12015,7 @@
       </p:grpSpPr>
       <p:sp>
         <p:nvSpPr>
-          <p:cNvPr id="2" name="Title 1">
-            <a:extLst>
-              <a:ext uri="{FF2B5EF4-FFF2-40B4-BE49-F238E27FC236}">
-                <a16:creationId xmlns:a16="http://schemas.microsoft.com/office/drawing/2014/main" id="{CD14DB56-63BA-4236-9392-973DFD23E468}"/>
-              </a:ext>
-            </a:extLst>
-          </p:cNvPr>
+          <p:cNvPr id="2" name="Title 1"/>
           <p:cNvSpPr>
             <a:spLocks noGrp="1"/>
           </p:cNvSpPr>
@@ -13111,13 +12046,7 @@
       </p:sp>
       <p:sp>
         <p:nvSpPr>
-          <p:cNvPr id="3" name="Content Placeholder 2">
-            <a:extLst>
-              <a:ext uri="{FF2B5EF4-FFF2-40B4-BE49-F238E27FC236}">
-                <a16:creationId xmlns:a16="http://schemas.microsoft.com/office/drawing/2014/main" id="{E1AF90C2-B6FA-4AD4-B9C0-1AEBF7DD580D}"/>
-              </a:ext>
-            </a:extLst>
-          </p:cNvPr>
+          <p:cNvPr id="3" name="Content Placeholder 2"/>
           <p:cNvSpPr>
             <a:spLocks noGrp="1"/>
           </p:cNvSpPr>
@@ -13174,6 +12103,7 @@
               <a:rPr lang="zh-CN" altLang="en-US" dirty="0"/>
               <a:t>但是与此同时，正确地修改软件是一件很困难的事情。</a:t>
             </a:r>
+            <a:endParaRPr lang="zh-CN" altLang="en-US" dirty="0"/>
           </a:p>
           <a:p>
             <a:endParaRPr lang="en-US" dirty="0"/>
@@ -13181,11 +12111,6 @@
         </p:txBody>
       </p:sp>
     </p:spTree>
-    <p:extLst>
-      <p:ext uri="{BB962C8B-B14F-4D97-AF65-F5344CB8AC3E}">
-        <p14:creationId xmlns:p14="http://schemas.microsoft.com/office/powerpoint/2010/main" val="884238867"/>
-      </p:ext>
-    </p:extLst>
   </p:cSld>
   <p:clrMapOvr>
     <a:masterClrMapping/>
@@ -13212,13 +12137,7 @@
       </p:grpSpPr>
       <p:sp>
         <p:nvSpPr>
-          <p:cNvPr id="2" name="标题 1">
-            <a:extLst>
-              <a:ext uri="{FF2B5EF4-FFF2-40B4-BE49-F238E27FC236}">
-                <a16:creationId xmlns:a16="http://schemas.microsoft.com/office/drawing/2014/main" id="{5EA60B4C-B131-1B47-28AD-D2684BFDFFCC}"/>
-              </a:ext>
-            </a:extLst>
-          </p:cNvPr>
+          <p:cNvPr id="2" name="标题 1"/>
           <p:cNvSpPr>
             <a:spLocks noGrp="1"/>
           </p:cNvSpPr>
@@ -13263,13 +12182,7 @@
       </p:sp>
       <p:pic>
         <p:nvPicPr>
-          <p:cNvPr id="5" name="内容占位符 4" descr="一些文字和图片的手机截图&#10;&#10;AI 生成的内容可能不正确。">
-            <a:extLst>
-              <a:ext uri="{FF2B5EF4-FFF2-40B4-BE49-F238E27FC236}">
-                <a16:creationId xmlns:a16="http://schemas.microsoft.com/office/drawing/2014/main" id="{B7129103-77F6-F549-B9CA-610ABA4B30C9}"/>
-              </a:ext>
-            </a:extLst>
-          </p:cNvPr>
+          <p:cNvPr id="5" name="内容占位符 4" descr="一些文字和图片的手机截图&#10;&#10;AI 生成的内容可能不正确。"/>
           <p:cNvPicPr>
             <a:picLocks noGrp="1" noChangeAspect="1"/>
           </p:cNvPicPr>
@@ -13278,7 +12191,7 @@
           </p:nvPr>
         </p:nvPicPr>
         <p:blipFill>
-          <a:blip r:embed="rId3">
+          <a:blip r:embed="rId1">
             <a:extLst>
               <a:ext uri="{28A0092B-C50C-407E-A947-70E740481C1C}">
                 <a14:useLocalDpi xmlns:a14="http://schemas.microsoft.com/office/drawing/2010/main" val="0"/>
@@ -13297,11 +12210,6 @@
         </p:spPr>
       </p:pic>
     </p:spTree>
-    <p:extLst>
-      <p:ext uri="{BB962C8B-B14F-4D97-AF65-F5344CB8AC3E}">
-        <p14:creationId xmlns:p14="http://schemas.microsoft.com/office/powerpoint/2010/main" val="3836370380"/>
-      </p:ext>
-    </p:extLst>
   </p:cSld>
   <p:clrMapOvr>
     <a:masterClrMapping/>
@@ -13328,13 +12236,7 @@
       </p:grpSpPr>
       <p:sp>
         <p:nvSpPr>
-          <p:cNvPr id="2" name="Title 1">
-            <a:extLst>
-              <a:ext uri="{FF2B5EF4-FFF2-40B4-BE49-F238E27FC236}">
-                <a16:creationId xmlns:a16="http://schemas.microsoft.com/office/drawing/2014/main" id="{BF4A00D8-3956-4483-821E-2C87CA5085BE}"/>
-              </a:ext>
-            </a:extLst>
-          </p:cNvPr>
+          <p:cNvPr id="2" name="Title 1"/>
           <p:cNvSpPr>
             <a:spLocks noGrp="1"/>
           </p:cNvSpPr>
@@ -13365,13 +12267,7 @@
       </p:sp>
       <p:sp>
         <p:nvSpPr>
-          <p:cNvPr id="3" name="Content Placeholder 2">
-            <a:extLst>
-              <a:ext uri="{FF2B5EF4-FFF2-40B4-BE49-F238E27FC236}">
-                <a16:creationId xmlns:a16="http://schemas.microsoft.com/office/drawing/2014/main" id="{33FAEA2C-2297-4D36-A6D1-9C6D93E4E91A}"/>
-              </a:ext>
-            </a:extLst>
-          </p:cNvPr>
+          <p:cNvPr id="3" name="Content Placeholder 2"/>
           <p:cNvSpPr>
             <a:spLocks noGrp="1"/>
           </p:cNvSpPr>
@@ -13396,6 +12292,7 @@
               <a:rPr lang="zh-CN" altLang="en-US" dirty="0"/>
               <a:t>） 软件不能独立存在，它总是要运行在硬件上面，它要服从系统中其他组 成部分的要求，它还要服从用户的要求、行业系统的要求（例如银行利 率的变化）。</a:t>
             </a:r>
+            <a:endParaRPr lang="zh-CN" altLang="en-US" dirty="0"/>
           </a:p>
           <a:p>
             <a:endParaRPr lang="en-US" dirty="0"/>
@@ -13403,11 +12300,6 @@
         </p:txBody>
       </p:sp>
     </p:spTree>
-    <p:extLst>
-      <p:ext uri="{BB962C8B-B14F-4D97-AF65-F5344CB8AC3E}">
-        <p14:creationId xmlns:p14="http://schemas.microsoft.com/office/powerpoint/2010/main" val="2123279561"/>
-      </p:ext>
-    </p:extLst>
   </p:cSld>
   <p:clrMapOvr>
     <a:masterClrMapping/>
@@ -13452,13 +12344,14 @@
               <a:rPr lang="en-US"/>
               <a:t>Children’s toy</a:t>
             </a:r>
+            <a:endParaRPr lang="en-US"/>
           </a:p>
         </p:txBody>
       </p:sp>
       <p:pic>
         <p:nvPicPr>
           <p:cNvPr id="6147" name="Picture 4" descr="http://tbn0.google.com/images?q=tbn:50QzruCKWotv6M:http://veronikanagy.files.wordpress.com/2008/02/paper_airplane_sm.jpg">
-            <a:hlinkClick r:id="rId2"/>
+            <a:hlinkClick r:id="rId1"/>
           </p:cNvPr>
           <p:cNvPicPr>
             <a:picLocks noChangeAspect="1" noChangeArrowheads="1"/>
@@ -13466,7 +12359,7 @@
           <p:nvPr/>
         </p:nvPicPr>
         <p:blipFill>
-          <a:blip r:embed="rId3">
+          <a:blip r:embed="rId2">
             <a:extLst>
               <a:ext uri="{28A0092B-C50C-407E-A947-70E740481C1C}">
                 <a14:useLocalDpi xmlns:a14="http://schemas.microsoft.com/office/drawing/2010/main" val="0"/>
@@ -13538,13 +12431,7 @@
       </p:grpSpPr>
       <p:sp>
         <p:nvSpPr>
-          <p:cNvPr id="2" name="Title 1">
-            <a:extLst>
-              <a:ext uri="{FF2B5EF4-FFF2-40B4-BE49-F238E27FC236}">
-                <a16:creationId xmlns:a16="http://schemas.microsoft.com/office/drawing/2014/main" id="{162AED86-CD5A-478A-A45A-4F9B2D208EC4}"/>
-              </a:ext>
-            </a:extLst>
-          </p:cNvPr>
+          <p:cNvPr id="2" name="Title 1"/>
           <p:cNvSpPr>
             <a:spLocks noGrp="1"/>
           </p:cNvSpPr>
@@ -13575,13 +12462,7 @@
       </p:sp>
       <p:sp>
         <p:nvSpPr>
-          <p:cNvPr id="3" name="Content Placeholder 2">
-            <a:extLst>
-              <a:ext uri="{FF2B5EF4-FFF2-40B4-BE49-F238E27FC236}">
-                <a16:creationId xmlns:a16="http://schemas.microsoft.com/office/drawing/2014/main" id="{FC6F580A-2846-4332-949E-4192AB137126}"/>
-              </a:ext>
-            </a:extLst>
-          </p:cNvPr>
+          <p:cNvPr id="3" name="Content Placeholder 2"/>
           <p:cNvSpPr>
             <a:spLocks noGrp="1"/>
           </p:cNvSpPr>
@@ -13605,6 +12486,7 @@
               <a:rPr lang="zh-CN" altLang="en-US" dirty="0"/>
               <a:t>但是许多软件系统却没有这样的特性，有时输入上很小的变化，会 引起输出上极大的变化。</a:t>
             </a:r>
+            <a:endParaRPr lang="zh-CN" altLang="en-US" dirty="0"/>
           </a:p>
           <a:p>
             <a:endParaRPr lang="en-US" dirty="0"/>
@@ -13612,11 +12494,6 @@
         </p:txBody>
       </p:sp>
     </p:spTree>
-    <p:extLst>
-      <p:ext uri="{BB962C8B-B14F-4D97-AF65-F5344CB8AC3E}">
-        <p14:creationId xmlns:p14="http://schemas.microsoft.com/office/powerpoint/2010/main" val="463745865"/>
-      </p:ext>
-    </p:extLst>
   </p:cSld>
   <p:clrMapOvr>
     <a:masterClrMapping/>
@@ -13643,13 +12520,7 @@
       </p:grpSpPr>
       <p:sp>
         <p:nvSpPr>
-          <p:cNvPr id="2" name="Title 1">
-            <a:extLst>
-              <a:ext uri="{FF2B5EF4-FFF2-40B4-BE49-F238E27FC236}">
-                <a16:creationId xmlns:a16="http://schemas.microsoft.com/office/drawing/2014/main" id="{73BF1C45-F79D-4715-A111-8C79ADF369FD}"/>
-              </a:ext>
-            </a:extLst>
-          </p:cNvPr>
+          <p:cNvPr id="2" name="Title 1"/>
           <p:cNvSpPr>
             <a:spLocks noGrp="1"/>
           </p:cNvSpPr>
@@ -13672,13 +12543,7 @@
       </p:sp>
       <p:sp>
         <p:nvSpPr>
-          <p:cNvPr id="3" name="Content Placeholder 2">
-            <a:extLst>
-              <a:ext uri="{FF2B5EF4-FFF2-40B4-BE49-F238E27FC236}">
-                <a16:creationId xmlns:a16="http://schemas.microsoft.com/office/drawing/2014/main" id="{0FA4E4D2-BEFC-49ED-A9B3-D81606F857E8}"/>
-              </a:ext>
-            </a:extLst>
-          </p:cNvPr>
+          <p:cNvPr id="3" name="Content Placeholder 2"/>
           <p:cNvSpPr>
             <a:spLocks noGrp="1"/>
           </p:cNvSpPr>
@@ -13693,7 +12558,7 @@
           </a:bodyPr>
           <a:lstStyle/>
           <a:p>
-            <a:pPr marL="118872" indent="0">
+            <a:pPr marL="118745" indent="0">
               <a:lnSpc>
                 <a:spcPct val="120000"/>
               </a:lnSpc>
@@ -13795,9 +12660,10 @@
               <a:rPr lang="zh-CN" altLang="en-US" dirty="0"/>
               <a:t>社区</a:t>
             </a:r>
-          </a:p>
-          <a:p>
-            <a:pPr marL="118872" indent="0">
+            <a:endParaRPr lang="zh-CN" altLang="en-US" dirty="0"/>
+          </a:p>
+          <a:p>
+            <a:pPr marL="118745" indent="0">
               <a:lnSpc>
                 <a:spcPct val="120000"/>
               </a:lnSpc>
@@ -13806,7 +12672,7 @@
             <a:endParaRPr lang="en-US" altLang="zh-CN" dirty="0"/>
           </a:p>
           <a:p>
-            <a:pPr marL="118872" indent="0">
+            <a:pPr marL="118745" indent="0">
               <a:lnSpc>
                 <a:spcPct val="120000"/>
               </a:lnSpc>
@@ -13837,11 +12703,6 @@
         </p:txBody>
       </p:sp>
     </p:spTree>
-    <p:extLst>
-      <p:ext uri="{BB962C8B-B14F-4D97-AF65-F5344CB8AC3E}">
-        <p14:creationId xmlns:p14="http://schemas.microsoft.com/office/powerpoint/2010/main" val="1373211857"/>
-      </p:ext>
-    </p:extLst>
   </p:cSld>
   <p:clrMapOvr>
     <a:masterClrMapping/>
@@ -13917,7 +12778,7 @@
             <a:endParaRPr lang="en-US" altLang="zh-CN" dirty="0"/>
           </a:p>
           <a:p>
-            <a:pPr marL="749808" lvl="1" indent="-457200">
+            <a:pPr marL="749935" lvl="1" indent="-457200">
               <a:buClr>
                 <a:schemeClr val="accent3"/>
               </a:buClr>
@@ -13935,6 +12796,7 @@
               <a:rPr lang="en-US" dirty="0"/>
               <a:t> and maintainability of software systems.</a:t>
             </a:r>
+            <a:endParaRPr lang="en-US" dirty="0"/>
           </a:p>
           <a:p>
             <a:pPr marL="457200" indent="-457200">
@@ -13958,7 +12820,7 @@
             <a:endParaRPr lang="en-US" altLang="zh-CN" dirty="0"/>
           </a:p>
           <a:p>
-            <a:pPr marL="749808" lvl="1" indent="-457200">
+            <a:pPr marL="749935" lvl="1" indent="-457200">
               <a:buClr>
                 <a:schemeClr val="accent3"/>
               </a:buClr>
@@ -13968,15 +12830,11 @@
               <a:rPr lang="en-US" dirty="0"/>
               <a:t>Lack of quality = defect (bug)</a:t>
             </a:r>
+            <a:endParaRPr lang="en-US" dirty="0"/>
           </a:p>
         </p:txBody>
       </p:sp>
     </p:spTree>
-    <p:extLst>
-      <p:ext uri="{BB962C8B-B14F-4D97-AF65-F5344CB8AC3E}">
-        <p14:creationId xmlns:p14="http://schemas.microsoft.com/office/powerpoint/2010/main" val="2436269639"/>
-      </p:ext>
-    </p:extLst>
   </p:cSld>
   <p:clrMapOvr>
     <a:masterClrMapping/>
@@ -14061,6 +12919,7 @@
               <a:rPr lang="en-US" altLang="zh-CN" sz="2200" dirty="0"/>
               <a:t>3 lines of code</a:t>
             </a:r>
+            <a:endParaRPr lang="en-US" altLang="zh-CN" sz="2200" dirty="0"/>
           </a:p>
           <a:p>
             <a:pPr lvl="1" eaLnBrk="1" hangingPunct="1"/>
@@ -14068,6 +12927,7 @@
               <a:rPr lang="en-US" altLang="zh-CN" sz="2200" dirty="0"/>
               <a:t>Cost Microsoft 1Billion$</a:t>
             </a:r>
+            <a:endParaRPr lang="en-US" altLang="zh-CN" sz="2200" dirty="0"/>
           </a:p>
           <a:p>
             <a:pPr eaLnBrk="1" hangingPunct="1"/>
@@ -14075,6 +12935,7 @@
               <a:rPr lang="en-US" altLang="zh-CN" dirty="0"/>
               <a:t>MSFT research</a:t>
             </a:r>
+            <a:endParaRPr lang="en-US" altLang="zh-CN" dirty="0"/>
           </a:p>
           <a:p>
             <a:pPr lvl="1" eaLnBrk="1" hangingPunct="1"/>
@@ -14082,6 +12943,7 @@
               <a:rPr lang="en-US" altLang="zh-CN" sz="2200" dirty="0"/>
               <a:t>Bug cost 12 hours of extra work, about 900$</a:t>
             </a:r>
+            <a:endParaRPr lang="en-US" altLang="zh-CN" sz="2200" dirty="0"/>
           </a:p>
           <a:p>
             <a:pPr lvl="1" eaLnBrk="1" hangingPunct="1"/>
@@ -14093,6 +12955,7 @@
               <a:rPr lang="en-US" altLang="zh-CN" sz="2200" dirty="0"/>
               <a:t>missing)</a:t>
             </a:r>
+            <a:endParaRPr lang="en-US" altLang="zh-CN" sz="2200" dirty="0"/>
           </a:p>
         </p:txBody>
       </p:sp>
@@ -14123,13 +12986,7 @@
       </p:grpSpPr>
       <p:sp>
         <p:nvSpPr>
-          <p:cNvPr id="2" name="Title 1">
-            <a:extLst>
-              <a:ext uri="{FF2B5EF4-FFF2-40B4-BE49-F238E27FC236}">
-                <a16:creationId xmlns:a16="http://schemas.microsoft.com/office/drawing/2014/main" id="{729BBF23-2373-4FD4-9AE4-69D1D32A5AB6}"/>
-              </a:ext>
-            </a:extLst>
-          </p:cNvPr>
+          <p:cNvPr id="2" name="Title 1"/>
           <p:cNvSpPr>
             <a:spLocks noGrp="1"/>
           </p:cNvSpPr>
@@ -14162,13 +13019,7 @@
       </p:sp>
       <p:sp>
         <p:nvSpPr>
-          <p:cNvPr id="3" name="Content Placeholder 2">
-            <a:extLst>
-              <a:ext uri="{FF2B5EF4-FFF2-40B4-BE49-F238E27FC236}">
-                <a16:creationId xmlns:a16="http://schemas.microsoft.com/office/drawing/2014/main" id="{05105991-655B-4992-8AC4-905DE58F2176}"/>
-              </a:ext>
-            </a:extLst>
-          </p:cNvPr>
+          <p:cNvPr id="3" name="Content Placeholder 2"/>
           <p:cNvSpPr>
             <a:spLocks noGrp="1"/>
           </p:cNvSpPr>
@@ -14188,7 +13039,7 @@
           </a:bodyPr>
           <a:lstStyle/>
           <a:p>
-            <a:pPr marL="118872" indent="0">
+            <a:pPr marL="118745" indent="0">
               <a:buNone/>
             </a:pPr>
             <a:r>
@@ -14273,6 +13124,7 @@
               <a:rPr lang="en-US" altLang="zh-CN" sz="2400" dirty="0"/>
               <a:t>  </a:t>
             </a:r>
+            <a:endParaRPr lang="en-US" altLang="zh-CN" sz="2400" dirty="0"/>
           </a:p>
           <a:p>
             <a:r>
@@ -14309,20 +13161,14 @@
       </p:sp>
       <p:pic>
         <p:nvPicPr>
-          <p:cNvPr id="3074" name="Picture 2" descr="Mars Climate Orbiter 2.jpg">
-            <a:extLst>
-              <a:ext uri="{FF2B5EF4-FFF2-40B4-BE49-F238E27FC236}">
-                <a16:creationId xmlns:a16="http://schemas.microsoft.com/office/drawing/2014/main" id="{892EC2D3-36C2-4D46-8FBB-C31D7BD1B914}"/>
-              </a:ext>
-            </a:extLst>
-          </p:cNvPr>
+          <p:cNvPr id="3074" name="Picture 2" descr="Mars Climate Orbiter 2.jpg"/>
           <p:cNvPicPr>
             <a:picLocks noChangeAspect="1" noChangeArrowheads="1"/>
           </p:cNvPicPr>
           <p:nvPr/>
         </p:nvPicPr>
         <p:blipFill>
-          <a:blip r:embed="rId2">
+          <a:blip r:embed="rId1">
             <a:extLst>
               <a:ext uri="{28A0092B-C50C-407E-A947-70E740481C1C}">
                 <a14:useLocalDpi xmlns:a14="http://schemas.microsoft.com/office/drawing/2010/main" val="0"/>
@@ -14355,11 +13201,6 @@
         </p:spPr>
       </p:pic>
     </p:spTree>
-    <p:extLst>
-      <p:ext uri="{BB962C8B-B14F-4D97-AF65-F5344CB8AC3E}">
-        <p14:creationId xmlns:p14="http://schemas.microsoft.com/office/powerpoint/2010/main" val="448027658"/>
-      </p:ext>
-    </p:extLst>
   </p:cSld>
   <p:clrMapOvr>
     <a:masterClrMapping/>
@@ -14386,13 +13227,7 @@
       </p:grpSpPr>
       <p:sp>
         <p:nvSpPr>
-          <p:cNvPr id="2" name="Title 1">
-            <a:extLst>
-              <a:ext uri="{FF2B5EF4-FFF2-40B4-BE49-F238E27FC236}">
-                <a16:creationId xmlns:a16="http://schemas.microsoft.com/office/drawing/2014/main" id="{729BBF23-2373-4FD4-9AE4-69D1D32A5AB6}"/>
-              </a:ext>
-            </a:extLst>
-          </p:cNvPr>
+          <p:cNvPr id="2" name="Title 1"/>
           <p:cNvSpPr>
             <a:spLocks noGrp="1"/>
           </p:cNvSpPr>
@@ -14417,13 +13252,7 @@
       </p:sp>
       <p:sp>
         <p:nvSpPr>
-          <p:cNvPr id="3" name="Content Placeholder 2">
-            <a:extLst>
-              <a:ext uri="{FF2B5EF4-FFF2-40B4-BE49-F238E27FC236}">
-                <a16:creationId xmlns:a16="http://schemas.microsoft.com/office/drawing/2014/main" id="{05105991-655B-4992-8AC4-905DE58F2176}"/>
-              </a:ext>
-            </a:extLst>
-          </p:cNvPr>
+          <p:cNvPr id="3" name="Content Placeholder 2"/>
           <p:cNvSpPr>
             <a:spLocks noGrp="1"/>
           </p:cNvSpPr>
@@ -14443,7 +13272,7 @@
           </a:bodyPr>
           <a:lstStyle/>
           <a:p>
-            <a:pPr marL="633222" indent="-514350">
+            <a:pPr marL="633095" indent="-514350">
               <a:lnSpc>
                 <a:spcPct val="120000"/>
               </a:lnSpc>
@@ -14465,7 +13294,7 @@
             <a:endParaRPr lang="en-US" altLang="zh-CN" sz="1800" dirty="0"/>
           </a:p>
           <a:p>
-            <a:pPr marL="633222" indent="-514350">
+            <a:pPr marL="633095" indent="-514350">
               <a:lnSpc>
                 <a:spcPct val="120000"/>
               </a:lnSpc>
@@ -14536,9 +13365,10 @@
               <a:rPr lang="en-US" altLang="zh-CN" sz="1800" dirty="0"/>
               <a:t>)</a:t>
             </a:r>
-          </a:p>
-          <a:p>
-            <a:pPr marL="633222" indent="-514350">
+            <a:endParaRPr lang="en-US" altLang="zh-CN" sz="1800" dirty="0"/>
+          </a:p>
+          <a:p>
+            <a:pPr marL="633095" indent="-514350">
               <a:lnSpc>
                 <a:spcPct val="120000"/>
               </a:lnSpc>
@@ -14565,9 +13395,10 @@
               <a:rPr lang="zh-CN" altLang="en-US" sz="1800" dirty="0"/>
               <a:t>的模块。</a:t>
             </a:r>
-          </a:p>
-          <a:p>
-            <a:pPr marL="633222" indent="-514350">
+            <a:endParaRPr lang="zh-CN" altLang="en-US" sz="1800" dirty="0"/>
+          </a:p>
+          <a:p>
+            <a:pPr marL="633095" indent="-514350">
               <a:lnSpc>
                 <a:spcPct val="120000"/>
               </a:lnSpc>
@@ -14605,7 +13436,7 @@
             <a:endParaRPr lang="en-US" altLang="zh-CN" sz="1800" dirty="0"/>
           </a:p>
           <a:p>
-            <a:pPr marL="633222" indent="-514350">
+            <a:pPr marL="633095" indent="-514350">
               <a:lnSpc>
                 <a:spcPct val="120000"/>
               </a:lnSpc>
@@ -14644,6 +13475,7 @@
               <a:rPr lang="en-US" altLang="zh-CN" sz="1800" dirty="0"/>
               <a:t>-  </a:t>
             </a:r>
+            <a:endParaRPr lang="en-US" altLang="zh-CN" sz="1800" dirty="0"/>
           </a:p>
           <a:p>
             <a:pPr marL="925830" lvl="1" indent="-514350">
@@ -14681,6 +13513,7 @@
               <a:rPr lang="en-US" altLang="zh-CN" sz="1400" dirty="0"/>
               <a:t>…</a:t>
             </a:r>
+            <a:endParaRPr lang="en-US" altLang="zh-CN" sz="1400" dirty="0"/>
           </a:p>
           <a:p>
             <a:pPr marL="925830" lvl="1" indent="-514350">
@@ -14702,6 +13535,7 @@
               <a:rPr lang="en-US" altLang="zh-CN" sz="1400" dirty="0"/>
               <a:t>…</a:t>
             </a:r>
+            <a:endParaRPr lang="en-US" altLang="zh-CN" sz="1400" dirty="0"/>
           </a:p>
           <a:p>
             <a:pPr marL="925830" lvl="1" indent="-514350">
@@ -14723,6 +13557,7 @@
               <a:rPr lang="en-US" altLang="zh-CN" sz="1400" dirty="0"/>
               <a:t>…</a:t>
             </a:r>
+            <a:endParaRPr lang="en-US" altLang="zh-CN" sz="1400" dirty="0"/>
           </a:p>
           <a:p>
             <a:pPr marL="925830" lvl="1" indent="-514350">
@@ -14736,9 +13571,10 @@
               <a:rPr lang="zh-CN" altLang="en-US" sz="1400" dirty="0"/>
               <a:t>最后没有人再发邮件了</a:t>
             </a:r>
-          </a:p>
-          <a:p>
-            <a:pPr marL="633222" indent="-514350">
+            <a:endParaRPr lang="zh-CN" altLang="en-US" sz="1400" dirty="0"/>
+          </a:p>
+          <a:p>
+            <a:pPr marL="633095" indent="-514350">
               <a:lnSpc>
                 <a:spcPct val="120000"/>
               </a:lnSpc>
@@ -14785,6 +13621,7 @@
               <a:rPr lang="en-US" altLang="zh-CN" sz="1800" dirty="0"/>
               <a:t> </a:t>
             </a:r>
+            <a:endParaRPr lang="en-US" altLang="zh-CN" sz="1800" dirty="0"/>
           </a:p>
           <a:p>
             <a:pPr>
@@ -14801,11 +13638,6 @@
         </p:txBody>
       </p:sp>
     </p:spTree>
-    <p:extLst>
-      <p:ext uri="{BB962C8B-B14F-4D97-AF65-F5344CB8AC3E}">
-        <p14:creationId xmlns:p14="http://schemas.microsoft.com/office/powerpoint/2010/main" val="398621879"/>
-      </p:ext>
-    </p:extLst>
   </p:cSld>
   <p:clrMapOvr>
     <a:masterClrMapping/>
@@ -14832,13 +13664,7 @@
       </p:grpSpPr>
       <p:sp>
         <p:nvSpPr>
-          <p:cNvPr id="2" name="Title 1">
-            <a:extLst>
-              <a:ext uri="{FF2B5EF4-FFF2-40B4-BE49-F238E27FC236}">
-                <a16:creationId xmlns:a16="http://schemas.microsoft.com/office/drawing/2014/main" id="{75F5FD93-C02B-49F3-9B90-E278FF3C3DE8}"/>
-              </a:ext>
-            </a:extLst>
-          </p:cNvPr>
+          <p:cNvPr id="2" name="Title 1"/>
           <p:cNvSpPr>
             <a:spLocks noGrp="1"/>
           </p:cNvSpPr>
@@ -14861,13 +13687,7 @@
       </p:sp>
       <p:sp>
         <p:nvSpPr>
-          <p:cNvPr id="3" name="Content Placeholder 2">
-            <a:extLst>
-              <a:ext uri="{FF2B5EF4-FFF2-40B4-BE49-F238E27FC236}">
-                <a16:creationId xmlns:a16="http://schemas.microsoft.com/office/drawing/2014/main" id="{AFC80473-C2CB-4379-8AD6-61591627ED9F}"/>
-              </a:ext>
-            </a:extLst>
-          </p:cNvPr>
+          <p:cNvPr id="3" name="Content Placeholder 2"/>
           <p:cNvSpPr>
             <a:spLocks noGrp="1"/>
           </p:cNvSpPr>
@@ -14890,6 +13710,7 @@
               <a:rPr lang="en-US" altLang="zh-CN" dirty="0"/>
               <a:t>1: </a:t>
             </a:r>
+            <a:endParaRPr lang="en-US" altLang="zh-CN" dirty="0"/>
           </a:p>
           <a:p>
             <a:pPr lvl="1"/>
@@ -14927,6 +13748,7 @@
               <a:rPr lang="en-US" altLang="zh-CN" dirty="0"/>
               <a:t>2: </a:t>
             </a:r>
+            <a:endParaRPr lang="en-US" altLang="zh-CN" dirty="0"/>
           </a:p>
           <a:p>
             <a:pPr lvl="1"/>
@@ -14974,11 +13796,6 @@
         </p:txBody>
       </p:sp>
     </p:spTree>
-    <p:extLst>
-      <p:ext uri="{BB962C8B-B14F-4D97-AF65-F5344CB8AC3E}">
-        <p14:creationId xmlns:p14="http://schemas.microsoft.com/office/powerpoint/2010/main" val="2232409806"/>
-      </p:ext>
-    </p:extLst>
   </p:cSld>
   <p:clrMapOvr>
     <a:masterClrMapping/>
@@ -15057,6 +13874,7 @@
               <a:rPr lang="en-US" altLang="zh-CN" dirty="0"/>
               <a:t>bug</a:t>
             </a:r>
+            <a:endParaRPr lang="en-US" altLang="zh-CN" dirty="0"/>
           </a:p>
           <a:p>
             <a:pPr lvl="1"/>
@@ -15249,6 +14067,7 @@
               <a:rPr lang="en-US" altLang="zh-CN" sz="2000"/>
               <a:t>…</a:t>
             </a:r>
+            <a:endParaRPr lang="en-US" altLang="zh-CN" sz="2000"/>
           </a:p>
           <a:p>
             <a:pPr eaLnBrk="1" hangingPunct="1"/>
@@ -15260,6 +14079,7 @@
               <a:rPr lang="en-US" altLang="zh-CN" sz="2000"/>
               <a:t>…</a:t>
             </a:r>
+            <a:endParaRPr lang="en-US" altLang="zh-CN" sz="2000"/>
           </a:p>
           <a:p>
             <a:pPr eaLnBrk="1" hangingPunct="1"/>
@@ -15319,6 +14139,7 @@
               <a:rPr lang="en-US" altLang="zh-CN" sz="2000"/>
               <a:t>? </a:t>
             </a:r>
+            <a:endParaRPr lang="en-US" altLang="zh-CN" sz="2000"/>
           </a:p>
         </p:txBody>
       </p:sp>
@@ -15389,7 +14210,7 @@
           <a:lstStyle/>
           <a:p>
             <a:pPr eaLnBrk="1" hangingPunct="1">
-              <a:buFont typeface="Wingdings 2" pitchFamily="18" charset="2"/>
+              <a:buFont typeface="Wingdings 2" panose="05020102010507070707" pitchFamily="18" charset="2"/>
               <a:buNone/>
             </a:pPr>
             <a:r>
@@ -15436,6 +14257,7 @@
               <a:rPr lang="en-US" altLang="zh-CN" dirty="0"/>
               <a:t>It’s a bug!</a:t>
             </a:r>
+            <a:endParaRPr lang="en-US" altLang="zh-CN" dirty="0"/>
           </a:p>
           <a:p>
             <a:pPr eaLnBrk="1" hangingPunct="1"/>
@@ -15538,6 +14360,7 @@
               <a:rPr lang="en-US"/>
               <a:t>Hobbyist: Lawn chair, balloon</a:t>
             </a:r>
+            <a:endParaRPr lang="en-US"/>
           </a:p>
         </p:txBody>
       </p:sp>
@@ -15550,7 +14373,7 @@
           <p:nvPr/>
         </p:nvPicPr>
         <p:blipFill>
-          <a:blip r:embed="rId3">
+          <a:blip r:embed="rId1">
             <a:extLst>
               <a:ext uri="{28A0092B-C50C-407E-A947-70E740481C1C}">
                 <a14:useLocalDpi xmlns:a14="http://schemas.microsoft.com/office/drawing/2010/main" val="0"/>
@@ -15639,6 +14462,7 @@
               <a:rPr lang="en-US" dirty="0"/>
               <a:t>User’s Perspective</a:t>
             </a:r>
+            <a:endParaRPr lang="en-US" dirty="0"/>
           </a:p>
         </p:txBody>
       </p:sp>
@@ -15676,6 +14500,7 @@
               <a:rPr lang="en-US" altLang="zh-CN" dirty="0"/>
               <a:t>QQ</a:t>
             </a:r>
+            <a:endParaRPr lang="en-US" altLang="zh-CN" dirty="0"/>
           </a:p>
           <a:p>
             <a:pPr lvl="1"/>
@@ -15695,6 +14520,7 @@
               <a:rPr lang="en-US" altLang="zh-CN" dirty="0"/>
               <a:t>BMW</a:t>
             </a:r>
+            <a:endParaRPr lang="en-US" altLang="zh-CN" dirty="0"/>
           </a:p>
           <a:p>
             <a:r>
@@ -15720,6 +14546,7 @@
               <a:rPr lang="en-US" altLang="zh-CN" dirty="0"/>
               <a:t>?</a:t>
             </a:r>
+            <a:endParaRPr lang="en-US" altLang="zh-CN" dirty="0"/>
           </a:p>
           <a:p>
             <a:r>
@@ -15739,7 +14566,7 @@
           <p:nvPr/>
         </p:nvPicPr>
         <p:blipFill>
-          <a:blip r:embed="rId2">
+          <a:blip r:embed="rId1">
             <a:extLst>
               <a:ext uri="{28A0092B-C50C-407E-A947-70E740481C1C}">
                 <a14:useLocalDpi xmlns:a14="http://schemas.microsoft.com/office/drawing/2010/main" val="0"/>
@@ -15803,7 +14630,7 @@
           <p:nvPr/>
         </p:nvPicPr>
         <p:blipFill>
-          <a:blip r:embed="rId3">
+          <a:blip r:embed="rId2">
             <a:extLst>
               <a:ext uri="{28A0092B-C50C-407E-A947-70E740481C1C}">
                 <a14:useLocalDpi xmlns:a14="http://schemas.microsoft.com/office/drawing/2010/main" val="0"/>
@@ -15867,7 +14694,7 @@
           <p:nvPr/>
         </p:nvPicPr>
         <p:blipFill>
-          <a:blip r:embed="rId4">
+          <a:blip r:embed="rId3">
             <a:extLst>
               <a:ext uri="{28A0092B-C50C-407E-A947-70E740481C1C}">
                 <a14:useLocalDpi xmlns:a14="http://schemas.microsoft.com/office/drawing/2010/main" val="0"/>
@@ -15923,11 +14750,6 @@
         </p:spPr>
       </p:pic>
     </p:spTree>
-    <p:extLst>
-      <p:ext uri="{BB962C8B-B14F-4D97-AF65-F5344CB8AC3E}">
-        <p14:creationId xmlns:p14="http://schemas.microsoft.com/office/powerpoint/2010/main" val="375656699"/>
-      </p:ext>
-    </p:extLst>
   </p:cSld>
   <p:clrMapOvr>
     <a:masterClrMapping/>
@@ -16132,11 +14954,6 @@
         </p:txBody>
       </p:sp>
     </p:spTree>
-    <p:extLst>
-      <p:ext uri="{BB962C8B-B14F-4D97-AF65-F5344CB8AC3E}">
-        <p14:creationId xmlns:p14="http://schemas.microsoft.com/office/powerpoint/2010/main" val="1901926812"/>
-      </p:ext>
-    </p:extLst>
   </p:cSld>
   <p:clrMapOvr>
     <a:masterClrMapping/>
@@ -16203,7 +15020,7 @@
           </p:nvPr>
         </p:nvPicPr>
         <p:blipFill>
-          <a:blip r:embed="rId2">
+          <a:blip r:embed="rId1">
             <a:extLst>
               <a:ext uri="{28A0092B-C50C-407E-A947-70E740481C1C}">
                 <a14:useLocalDpi xmlns:a14="http://schemas.microsoft.com/office/drawing/2010/main" val="0"/>
@@ -16222,11 +15039,6 @@
         </p:spPr>
       </p:pic>
     </p:spTree>
-    <p:extLst>
-      <p:ext uri="{BB962C8B-B14F-4D97-AF65-F5344CB8AC3E}">
-        <p14:creationId xmlns:p14="http://schemas.microsoft.com/office/powerpoint/2010/main" val="3128164546"/>
-      </p:ext>
-    </p:extLst>
   </p:cSld>
   <p:clrMapOvr>
     <a:masterClrMapping/>
@@ -16285,7 +15097,7 @@
           </p:nvPr>
         </p:nvPicPr>
         <p:blipFill>
-          <a:blip r:embed="rId2"/>
+          <a:blip r:embed="rId1"/>
           <a:stretch>
             <a:fillRect/>
           </a:stretch>
@@ -16301,11 +15113,6 @@
         </p:spPr>
       </p:pic>
     </p:spTree>
-    <p:extLst>
-      <p:ext uri="{BB962C8B-B14F-4D97-AF65-F5344CB8AC3E}">
-        <p14:creationId xmlns:p14="http://schemas.microsoft.com/office/powerpoint/2010/main" val="1426053382"/>
-      </p:ext>
-    </p:extLst>
   </p:cSld>
   <p:clrMapOvr>
     <a:masterClrMapping/>
@@ -16376,7 +15183,7 @@
           <a:bodyPr/>
           <a:lstStyle/>
           <a:p>
-            <a:pPr marL="118872" indent="0">
+            <a:pPr marL="118745" indent="0">
               <a:buNone/>
             </a:pPr>
             <a:r>
@@ -16450,11 +15257,6 @@
         </p:txBody>
       </p:sp>
     </p:spTree>
-    <p:extLst>
-      <p:ext uri="{BB962C8B-B14F-4D97-AF65-F5344CB8AC3E}">
-        <p14:creationId xmlns:p14="http://schemas.microsoft.com/office/powerpoint/2010/main" val="2778667451"/>
-      </p:ext>
-    </p:extLst>
   </p:cSld>
   <p:clrMapOvr>
     <a:masterClrMapping/>
@@ -16527,20 +15329,21 @@
           <a:p>
             <a:r>
               <a:rPr lang="en-US" dirty="0">
-                <a:hlinkClick r:id="rId2"/>
+                <a:hlinkClick r:id="rId1"/>
               </a:rPr>
               <a:t>http://www.infoq.com/presentations/tony-hoare-computing-engineering</a:t>
             </a:r>
+            <a:endParaRPr lang="en-US" dirty="0"/>
           </a:p>
           <a:p>
             <a:endParaRPr lang="en-US" dirty="0">
-              <a:hlinkClick r:id="rId2"/>
+              <a:hlinkClick r:id="rId1"/>
             </a:endParaRPr>
           </a:p>
           <a:p>
             <a:r>
               <a:rPr lang="en-US" dirty="0">
-                <a:hlinkClick r:id="rId2"/>
+                <a:hlinkClick r:id="rId1"/>
               </a:rPr>
               <a:t>http://pan.baidu.com/s/1pJuNp03</a:t>
             </a:r>
@@ -16552,11 +15355,6 @@
         </p:txBody>
       </p:sp>
     </p:spTree>
-    <p:extLst>
-      <p:ext uri="{BB962C8B-B14F-4D97-AF65-F5344CB8AC3E}">
-        <p14:creationId xmlns:p14="http://schemas.microsoft.com/office/powerpoint/2010/main" val="3436105033"/>
-      </p:ext>
-    </p:extLst>
   </p:cSld>
   <p:clrMapOvr>
     <a:masterClrMapping/>
@@ -16583,13 +15381,7 @@
       </p:grpSpPr>
       <p:sp>
         <p:nvSpPr>
-          <p:cNvPr id="2" name="Title 1">
-            <a:extLst>
-              <a:ext uri="{FF2B5EF4-FFF2-40B4-BE49-F238E27FC236}">
-                <a16:creationId xmlns:a16="http://schemas.microsoft.com/office/drawing/2014/main" id="{BC1E4FD5-46D1-4555-8AC1-2692CEA9F979}"/>
-              </a:ext>
-            </a:extLst>
-          </p:cNvPr>
+          <p:cNvPr id="2" name="Title 1"/>
           <p:cNvSpPr>
             <a:spLocks noGrp="1"/>
           </p:cNvSpPr>
@@ -16612,13 +15404,7 @@
       </p:sp>
       <p:sp>
         <p:nvSpPr>
-          <p:cNvPr id="3" name="Content Placeholder 2">
-            <a:extLst>
-              <a:ext uri="{FF2B5EF4-FFF2-40B4-BE49-F238E27FC236}">
-                <a16:creationId xmlns:a16="http://schemas.microsoft.com/office/drawing/2014/main" id="{6944B1D5-7794-47C3-8F2A-3780196FDF74}"/>
-              </a:ext>
-            </a:extLst>
-          </p:cNvPr>
+          <p:cNvPr id="3" name="Content Placeholder 2"/>
           <p:cNvSpPr>
             <a:spLocks noGrp="1"/>
           </p:cNvSpPr>
@@ -16772,15 +15558,13 @@
               </a:rPr>
               <a:t>：以在市场上赢得用户为目标而构建的软件。这也是种种科学发现、技 术突破最好的试金石。</a:t>
             </a:r>
+            <a:endParaRPr lang="zh-CN" altLang="en-US" dirty="0">
+              <a:latin typeface="+mn-ea"/>
+            </a:endParaRPr>
           </a:p>
         </p:txBody>
       </p:sp>
     </p:spTree>
-    <p:extLst>
-      <p:ext uri="{BB962C8B-B14F-4D97-AF65-F5344CB8AC3E}">
-        <p14:creationId xmlns:p14="http://schemas.microsoft.com/office/powerpoint/2010/main" val="3889425858"/>
-      </p:ext>
-    </p:extLst>
   </p:cSld>
   <p:clrMapOvr>
     <a:masterClrMapping/>
@@ -17033,20 +15817,14 @@
       </p:grpSpPr>
       <p:pic>
         <p:nvPicPr>
-          <p:cNvPr id="12" name="Picture 11">
-            <a:extLst>
-              <a:ext uri="{FF2B5EF4-FFF2-40B4-BE49-F238E27FC236}">
-                <a16:creationId xmlns:a16="http://schemas.microsoft.com/office/drawing/2014/main" id="{2F23FC39-9A9E-4D31-AE04-27712188C158}"/>
-              </a:ext>
-            </a:extLst>
-          </p:cNvPr>
+          <p:cNvPr id="12" name="Picture 11"/>
           <p:cNvPicPr>
             <a:picLocks noChangeAspect="1"/>
           </p:cNvPicPr>
           <p:nvPr/>
         </p:nvPicPr>
         <p:blipFill>
-          <a:blip r:embed="rId2"/>
+          <a:blip r:embed="rId1"/>
           <a:stretch>
             <a:fillRect/>
           </a:stretch>
@@ -17063,13 +15841,7 @@
       </p:pic>
       <p:sp>
         <p:nvSpPr>
-          <p:cNvPr id="14" name="Title 1">
-            <a:extLst>
-              <a:ext uri="{FF2B5EF4-FFF2-40B4-BE49-F238E27FC236}">
-                <a16:creationId xmlns:a16="http://schemas.microsoft.com/office/drawing/2014/main" id="{D9414AD9-E62D-4F19-8526-ECEB4502AD26}"/>
-              </a:ext>
-            </a:extLst>
-          </p:cNvPr>
+          <p:cNvPr id="14" name="Title 1"/>
           <p:cNvSpPr>
             <a:spLocks noGrp="1"/>
           </p:cNvSpPr>
@@ -17096,11 +15868,6 @@
         </p:txBody>
       </p:sp>
     </p:spTree>
-    <p:extLst>
-      <p:ext uri="{BB962C8B-B14F-4D97-AF65-F5344CB8AC3E}">
-        <p14:creationId xmlns:p14="http://schemas.microsoft.com/office/powerpoint/2010/main" val="1957216409"/>
-      </p:ext>
-    </p:extLst>
   </p:cSld>
   <p:clrMapOvr>
     <a:masterClrMapping/>
@@ -17218,6 +15985,7 @@
               <a:rPr lang="en-US" dirty="0"/>
               <a:t>Software Requirements</a:t>
             </a:r>
+            <a:endParaRPr lang="en-US" dirty="0"/>
           </a:p>
           <a:p>
             <a:pPr lvl="1"/>
@@ -17225,6 +15993,7 @@
               <a:rPr lang="en-US" dirty="0"/>
               <a:t>Software Design</a:t>
             </a:r>
+            <a:endParaRPr lang="en-US" dirty="0"/>
           </a:p>
           <a:p>
             <a:pPr lvl="1"/>
@@ -17232,6 +16001,7 @@
               <a:rPr lang="en-US" dirty="0"/>
               <a:t>Software Construction</a:t>
             </a:r>
+            <a:endParaRPr lang="en-US" dirty="0"/>
           </a:p>
           <a:p>
             <a:pPr lvl="1"/>
@@ -17239,6 +16009,7 @@
               <a:rPr lang="en-US" dirty="0"/>
               <a:t>Software Testing</a:t>
             </a:r>
+            <a:endParaRPr lang="en-US" dirty="0"/>
           </a:p>
           <a:p>
             <a:pPr lvl="1"/>
@@ -17246,6 +16017,7 @@
               <a:rPr lang="en-US" dirty="0"/>
               <a:t>Software Maintenance</a:t>
             </a:r>
+            <a:endParaRPr lang="en-US" dirty="0"/>
           </a:p>
           <a:p>
             <a:pPr lvl="1"/>
@@ -17253,6 +16025,7 @@
               <a:rPr lang="en-US" dirty="0"/>
               <a:t>Software Configuration Management</a:t>
             </a:r>
+            <a:endParaRPr lang="en-US" dirty="0"/>
           </a:p>
           <a:p>
             <a:pPr lvl="1"/>
@@ -17260,6 +16033,7 @@
               <a:rPr lang="en-US" dirty="0"/>
               <a:t>Software Engineering Management</a:t>
             </a:r>
+            <a:endParaRPr lang="en-US" dirty="0"/>
           </a:p>
           <a:p>
             <a:pPr lvl="1"/>
@@ -17267,6 +16041,7 @@
               <a:rPr lang="en-US" dirty="0"/>
               <a:t>Software Engineering Process</a:t>
             </a:r>
+            <a:endParaRPr lang="en-US" dirty="0"/>
           </a:p>
           <a:p>
             <a:pPr lvl="1"/>
@@ -17274,6 +16049,7 @@
               <a:rPr lang="en-US" dirty="0"/>
               <a:t>Software Engineering Models and Methods</a:t>
             </a:r>
+            <a:endParaRPr lang="en-US" dirty="0"/>
           </a:p>
           <a:p>
             <a:pPr lvl="1"/>
@@ -17281,6 +16057,7 @@
               <a:rPr lang="en-US" dirty="0"/>
               <a:t>Software Quality</a:t>
             </a:r>
+            <a:endParaRPr lang="en-US" dirty="0"/>
           </a:p>
           <a:p>
             <a:pPr lvl="1"/>
@@ -17288,6 +16065,7 @@
               <a:rPr lang="en-US" dirty="0"/>
               <a:t>Software Engineering Professional Practice</a:t>
             </a:r>
+            <a:endParaRPr lang="en-US" dirty="0"/>
           </a:p>
           <a:p>
             <a:pPr lvl="1"/>
@@ -17295,15 +16073,11 @@
               <a:rPr lang="en-US" dirty="0"/>
               <a:t>Software Engineering Economics</a:t>
             </a:r>
+            <a:endParaRPr lang="en-US" dirty="0"/>
           </a:p>
         </p:txBody>
       </p:sp>
     </p:spTree>
-    <p:extLst>
-      <p:ext uri="{BB962C8B-B14F-4D97-AF65-F5344CB8AC3E}">
-        <p14:creationId xmlns:p14="http://schemas.microsoft.com/office/powerpoint/2010/main" val="905460715"/>
-      </p:ext>
-    </p:extLst>
   </p:cSld>
   <p:clrMapOvr>
     <a:masterClrMapping/>
@@ -17330,13 +16104,7 @@
       </p:grpSpPr>
       <p:sp>
         <p:nvSpPr>
-          <p:cNvPr id="2" name="Title 1">
-            <a:extLst>
-              <a:ext uri="{FF2B5EF4-FFF2-40B4-BE49-F238E27FC236}">
-                <a16:creationId xmlns:a16="http://schemas.microsoft.com/office/drawing/2014/main" id="{31B71AFA-30C0-4DAF-A7BF-4F4B50CDA3FE}"/>
-              </a:ext>
-            </a:extLst>
-          </p:cNvPr>
+          <p:cNvPr id="2" name="Title 1"/>
           <p:cNvSpPr>
             <a:spLocks noGrp="1"/>
           </p:cNvSpPr>
@@ -17359,13 +16127,7 @@
       </p:sp>
       <p:sp>
         <p:nvSpPr>
-          <p:cNvPr id="3" name="Content Placeholder 2">
-            <a:extLst>
-              <a:ext uri="{FF2B5EF4-FFF2-40B4-BE49-F238E27FC236}">
-                <a16:creationId xmlns:a16="http://schemas.microsoft.com/office/drawing/2014/main" id="{67053C4F-420C-45C2-97BC-F7BCEA9BF982}"/>
-              </a:ext>
-            </a:extLst>
-          </p:cNvPr>
+          <p:cNvPr id="3" name="Content Placeholder 2"/>
           <p:cNvSpPr>
             <a:spLocks noGrp="1"/>
           </p:cNvSpPr>
@@ -17394,6 +16156,7 @@
               <a:rPr lang="en-US" dirty="0"/>
               <a:t> </a:t>
             </a:r>
+            <a:endParaRPr lang="en-US" dirty="0"/>
           </a:p>
           <a:p>
             <a:r>
@@ -17413,11 +16176,6 @@
         </p:txBody>
       </p:sp>
     </p:spTree>
-    <p:extLst>
-      <p:ext uri="{BB962C8B-B14F-4D97-AF65-F5344CB8AC3E}">
-        <p14:creationId xmlns:p14="http://schemas.microsoft.com/office/powerpoint/2010/main" val="2338638659"/>
-      </p:ext>
-    </p:extLst>
   </p:cSld>
   <p:clrMapOvr>
     <a:masterClrMapping/>
@@ -17462,6 +16220,7 @@
               <a:rPr lang="en-US" dirty="0"/>
               <a:t>Prototype: Wright Brother</a:t>
             </a:r>
+            <a:endParaRPr lang="en-US" dirty="0"/>
           </a:p>
         </p:txBody>
       </p:sp>
@@ -17474,7 +16233,7 @@
           <p:nvPr/>
         </p:nvPicPr>
         <p:blipFill>
-          <a:blip r:embed="rId2">
+          <a:blip r:embed="rId1">
             <a:extLst>
               <a:ext uri="{28A0092B-C50C-407E-A947-70E740481C1C}">
                 <a14:useLocalDpi xmlns:a14="http://schemas.microsoft.com/office/drawing/2010/main" val="0"/>
@@ -17546,13 +16305,7 @@
       </p:grpSpPr>
       <p:sp>
         <p:nvSpPr>
-          <p:cNvPr id="2" name="Title 1">
-            <a:extLst>
-              <a:ext uri="{FF2B5EF4-FFF2-40B4-BE49-F238E27FC236}">
-                <a16:creationId xmlns:a16="http://schemas.microsoft.com/office/drawing/2014/main" id="{31B71AFA-30C0-4DAF-A7BF-4F4B50CDA3FE}"/>
-              </a:ext>
-            </a:extLst>
-          </p:cNvPr>
+          <p:cNvPr id="2" name="Title 1"/>
           <p:cNvSpPr>
             <a:spLocks noGrp="1"/>
           </p:cNvSpPr>
@@ -17575,13 +16328,7 @@
       </p:sp>
       <p:sp>
         <p:nvSpPr>
-          <p:cNvPr id="3" name="Content Placeholder 2">
-            <a:extLst>
-              <a:ext uri="{FF2B5EF4-FFF2-40B4-BE49-F238E27FC236}">
-                <a16:creationId xmlns:a16="http://schemas.microsoft.com/office/drawing/2014/main" id="{67053C4F-420C-45C2-97BC-F7BCEA9BF982}"/>
-              </a:ext>
-            </a:extLst>
-          </p:cNvPr>
+          <p:cNvPr id="3" name="Content Placeholder 2"/>
           <p:cNvSpPr>
             <a:spLocks noGrp="1"/>
           </p:cNvSpPr>
@@ -17680,20 +16427,14 @@
       </p:sp>
       <p:pic>
         <p:nvPicPr>
-          <p:cNvPr id="5122" name="Picture 2" descr="Hofstadter2002.jpg">
-            <a:extLst>
-              <a:ext uri="{FF2B5EF4-FFF2-40B4-BE49-F238E27FC236}">
-                <a16:creationId xmlns:a16="http://schemas.microsoft.com/office/drawing/2014/main" id="{6F4FBE6D-6CA7-445A-8621-691E147844BC}"/>
-              </a:ext>
-            </a:extLst>
-          </p:cNvPr>
+          <p:cNvPr id="5122" name="Picture 2" descr="Hofstadter2002.jpg"/>
           <p:cNvPicPr>
             <a:picLocks noChangeAspect="1" noChangeArrowheads="1"/>
           </p:cNvPicPr>
           <p:nvPr/>
         </p:nvPicPr>
         <p:blipFill>
-          <a:blip r:embed="rId2">
+          <a:blip r:embed="rId1">
             <a:extLst>
               <a:ext uri="{28A0092B-C50C-407E-A947-70E740481C1C}">
                 <a14:useLocalDpi xmlns:a14="http://schemas.microsoft.com/office/drawing/2010/main" val="0"/>
@@ -17727,20 +16468,14 @@
       </p:pic>
       <p:pic>
         <p:nvPicPr>
-          <p:cNvPr id="5124" name="Picture 4" descr="Godel, Escher, Bach (first edition).jpg">
-            <a:extLst>
-              <a:ext uri="{FF2B5EF4-FFF2-40B4-BE49-F238E27FC236}">
-                <a16:creationId xmlns:a16="http://schemas.microsoft.com/office/drawing/2014/main" id="{50F77647-09B8-4F65-AF81-67D876EEA13C}"/>
-              </a:ext>
-            </a:extLst>
-          </p:cNvPr>
+          <p:cNvPr id="5124" name="Picture 4" descr="Godel, Escher, Bach (first edition).jpg"/>
           <p:cNvPicPr>
             <a:picLocks noChangeAspect="1" noChangeArrowheads="1"/>
           </p:cNvPicPr>
           <p:nvPr/>
         </p:nvPicPr>
         <p:blipFill>
-          <a:blip r:embed="rId3">
+          <a:blip r:embed="rId2">
             <a:extLst>
               <a:ext uri="{28A0092B-C50C-407E-A947-70E740481C1C}">
                 <a14:useLocalDpi xmlns:a14="http://schemas.microsoft.com/office/drawing/2010/main" val="0"/>
@@ -17774,20 +16509,14 @@
       </p:pic>
       <p:pic>
         <p:nvPicPr>
-          <p:cNvPr id="5126" name="Picture 6" descr="âLeonard hofstadterâçå¾çæç´¢ç»æ">
-            <a:extLst>
-              <a:ext uri="{FF2B5EF4-FFF2-40B4-BE49-F238E27FC236}">
-                <a16:creationId xmlns:a16="http://schemas.microsoft.com/office/drawing/2014/main" id="{34ACDF57-80AE-4A5B-A128-EF5782F7AB63}"/>
-              </a:ext>
-            </a:extLst>
-          </p:cNvPr>
+          <p:cNvPr id="5126" name="Picture 6" descr="âLeonard hofstadterâçå¾çæç´¢ç»æ"/>
           <p:cNvPicPr>
             <a:picLocks noChangeAspect="1" noChangeArrowheads="1"/>
           </p:cNvPicPr>
           <p:nvPr/>
         </p:nvPicPr>
         <p:blipFill>
-          <a:blip r:embed="rId4">
+          <a:blip r:embed="rId3">
             <a:extLst>
               <a:ext uri="{28A0092B-C50C-407E-A947-70E740481C1C}">
                 <a14:useLocalDpi xmlns:a14="http://schemas.microsoft.com/office/drawing/2010/main" val="0"/>
@@ -17820,11 +16549,6 @@
         </p:spPr>
       </p:pic>
     </p:spTree>
-    <p:extLst>
-      <p:ext uri="{BB962C8B-B14F-4D97-AF65-F5344CB8AC3E}">
-        <p14:creationId xmlns:p14="http://schemas.microsoft.com/office/powerpoint/2010/main" val="1612837189"/>
-      </p:ext>
-    </p:extLst>
   </p:cSld>
   <p:clrMapOvr>
     <a:masterClrMapping/>
@@ -17851,13 +16575,7 @@
       </p:grpSpPr>
       <p:sp>
         <p:nvSpPr>
-          <p:cNvPr id="2" name="Title 1">
-            <a:extLst>
-              <a:ext uri="{FF2B5EF4-FFF2-40B4-BE49-F238E27FC236}">
-                <a16:creationId xmlns:a16="http://schemas.microsoft.com/office/drawing/2014/main" id="{BB31A824-EB53-4D94-AD9A-7DB7E6F42DAC}"/>
-              </a:ext>
-            </a:extLst>
-          </p:cNvPr>
+          <p:cNvPr id="2" name="Title 1"/>
           <p:cNvSpPr>
             <a:spLocks noGrp="1"/>
           </p:cNvSpPr>
@@ -17884,13 +16602,7 @@
       </p:sp>
       <p:sp>
         <p:nvSpPr>
-          <p:cNvPr id="3" name="Content Placeholder 2">
-            <a:extLst>
-              <a:ext uri="{FF2B5EF4-FFF2-40B4-BE49-F238E27FC236}">
-                <a16:creationId xmlns:a16="http://schemas.microsoft.com/office/drawing/2014/main" id="{DDDF9A79-8643-4F82-A55C-FF3B4DBAD4B2}"/>
-              </a:ext>
-            </a:extLst>
-          </p:cNvPr>
+          <p:cNvPr id="3" name="Content Placeholder 2"/>
           <p:cNvSpPr>
             <a:spLocks noGrp="1"/>
           </p:cNvSpPr>
@@ -17956,6 +16668,7 @@
               <a:rPr lang="en-US" b="1" dirty="0"/>
               <a:t> </a:t>
             </a:r>
+            <a:endParaRPr lang="en-US" b="1" dirty="0"/>
           </a:p>
           <a:p>
             <a:endParaRPr lang="en-US" altLang="zh-CN" dirty="0"/>
@@ -18069,11 +16782,6 @@
         </p:txBody>
       </p:sp>
     </p:spTree>
-    <p:extLst>
-      <p:ext uri="{BB962C8B-B14F-4D97-AF65-F5344CB8AC3E}">
-        <p14:creationId xmlns:p14="http://schemas.microsoft.com/office/powerpoint/2010/main" val="3875081412"/>
-      </p:ext>
-    </p:extLst>
   </p:cSld>
   <p:clrMapOvr>
     <a:masterClrMapping/>
@@ -18100,13 +16808,7 @@
       </p:grpSpPr>
       <p:sp>
         <p:nvSpPr>
-          <p:cNvPr id="2" name="Title 1">
-            <a:extLst>
-              <a:ext uri="{FF2B5EF4-FFF2-40B4-BE49-F238E27FC236}">
-                <a16:creationId xmlns:a16="http://schemas.microsoft.com/office/drawing/2014/main" id="{0C4F57B8-22E0-4EF8-878A-829B98F5E0B2}"/>
-              </a:ext>
-            </a:extLst>
-          </p:cNvPr>
+          <p:cNvPr id="2" name="Title 1"/>
           <p:cNvSpPr>
             <a:spLocks noGrp="1"/>
           </p:cNvSpPr>
@@ -18121,213 +16823,88 @@
           <a:p>
             <a:r>
               <a:rPr lang="zh-CN" altLang="en-US" dirty="0"/>
-              <a:t>规律</a:t>
-            </a:r>
-            <a:r>
-              <a:rPr lang="en-US" altLang="zh-CN" dirty="0"/>
-              <a:t>?…</a:t>
-            </a:r>
-            <a:endParaRPr lang="en-US" dirty="0"/>
-          </a:p>
-        </p:txBody>
-      </p:sp>
-      <p:pic>
-        <p:nvPicPr>
-          <p:cNvPr id="6146" name="Picture 2" descr="âæºæ¿  ä¸çº¿  åå°âçå¾çæç´¢ç»æ">
-            <a:extLst>
-              <a:ext uri="{FF2B5EF4-FFF2-40B4-BE49-F238E27FC236}">
-                <a16:creationId xmlns:a16="http://schemas.microsoft.com/office/drawing/2014/main" id="{91D9FA36-CAA6-45F6-B310-847B96A6DAB6}"/>
-              </a:ext>
-            </a:extLst>
-          </p:cNvPr>
-          <p:cNvPicPr>
-            <a:picLocks noGrp="1" noChangeAspect="1" noChangeArrowheads="1"/>
-          </p:cNvPicPr>
+              <a:t>如何发现，掌握规律</a:t>
+            </a:r>
+            <a:endParaRPr lang="en-US" dirty="0"/>
+          </a:p>
+        </p:txBody>
+      </p:sp>
+      <p:sp>
+        <p:nvSpPr>
+          <p:cNvPr id="3" name="Content Placeholder 2"/>
+          <p:cNvSpPr>
+            <a:spLocks noGrp="1"/>
+          </p:cNvSpPr>
           <p:nvPr>
             <p:ph idx="1"/>
           </p:nvPr>
-        </p:nvPicPr>
-        <p:blipFill>
-          <a:blip r:embed="rId3">
-            <a:extLst>
-              <a:ext uri="{28A0092B-C50C-407E-A947-70E740481C1C}">
-                <a14:useLocalDpi xmlns:a14="http://schemas.microsoft.com/office/drawing/2010/main" val="0"/>
-              </a:ext>
-            </a:extLst>
-          </a:blip>
-          <a:srcRect/>
-          <a:stretch>
-            <a:fillRect/>
-          </a:stretch>
-        </p:blipFill>
-        <p:spPr bwMode="auto">
-          <a:xfrm>
-            <a:off x="2362201" y="1752601"/>
-            <a:ext cx="2619375" cy="1743075"/>
-          </a:xfrm>
-          <a:prstGeom prst="rect">
-            <a:avLst/>
-          </a:prstGeom>
-          <a:noFill/>
-          <a:extLst>
-            <a:ext uri="{909E8E84-426E-40DD-AFC4-6F175D3DCCD1}">
-              <a14:hiddenFill xmlns:a14="http://schemas.microsoft.com/office/drawing/2010/main">
-                <a:solidFill>
-                  <a:srgbClr val="FFFFFF"/>
-                </a:solidFill>
-              </a14:hiddenFill>
-            </a:ext>
-          </a:extLst>
-        </p:spPr>
-      </p:pic>
-      <p:pic>
-        <p:nvPicPr>
-          <p:cNvPr id="6148" name="Picture 4" descr="âæºæ¿  ä¸çº¿  åå°âçå¾çæç´¢ç»æ">
-            <a:extLst>
-              <a:ext uri="{FF2B5EF4-FFF2-40B4-BE49-F238E27FC236}">
-                <a16:creationId xmlns:a16="http://schemas.microsoft.com/office/drawing/2014/main" id="{31DB50DD-322B-4430-9628-84B3DB8721C7}"/>
-              </a:ext>
-            </a:extLst>
-          </p:cNvPr>
-          <p:cNvPicPr>
-            <a:picLocks noChangeAspect="1" noChangeArrowheads="1"/>
-          </p:cNvPicPr>
-          <p:nvPr/>
-        </p:nvPicPr>
-        <p:blipFill>
-          <a:blip r:embed="rId4">
-            <a:extLst>
-              <a:ext uri="{28A0092B-C50C-407E-A947-70E740481C1C}">
-                <a14:useLocalDpi xmlns:a14="http://schemas.microsoft.com/office/drawing/2010/main" val="0"/>
-              </a:ext>
-            </a:extLst>
-          </a:blip>
-          <a:srcRect/>
-          <a:stretch>
-            <a:fillRect/>
-          </a:stretch>
-        </p:blipFill>
-        <p:spPr bwMode="auto">
-          <a:xfrm>
-            <a:off x="5014925" y="1752601"/>
-            <a:ext cx="2619375" cy="1743075"/>
-          </a:xfrm>
-          <a:prstGeom prst="rect">
-            <a:avLst/>
-          </a:prstGeom>
-          <a:noFill/>
-          <a:extLst>
-            <a:ext uri="{909E8E84-426E-40DD-AFC4-6F175D3DCCD1}">
-              <a14:hiddenFill xmlns:a14="http://schemas.microsoft.com/office/drawing/2010/main">
-                <a:solidFill>
-                  <a:srgbClr val="FFFFFF"/>
-                </a:solidFill>
-              </a14:hiddenFill>
-            </a:ext>
-          </a:extLst>
-        </p:spPr>
-      </p:pic>
-      <p:pic>
-        <p:nvPicPr>
-          <p:cNvPr id="6150" name="Picture 6" descr="âæºæ¿  ä¸çº¿  åå°âçå¾çæç´¢ç»æ">
-            <a:extLst>
-              <a:ext uri="{FF2B5EF4-FFF2-40B4-BE49-F238E27FC236}">
-                <a16:creationId xmlns:a16="http://schemas.microsoft.com/office/drawing/2014/main" id="{EE635FB0-4BD1-4C27-A2A5-9B264967759A}"/>
-              </a:ext>
-            </a:extLst>
-          </p:cNvPr>
-          <p:cNvPicPr>
-            <a:picLocks noChangeAspect="1" noChangeArrowheads="1"/>
-          </p:cNvPicPr>
-          <p:nvPr/>
-        </p:nvPicPr>
-        <p:blipFill>
-          <a:blip r:embed="rId5">
-            <a:extLst>
-              <a:ext uri="{28A0092B-C50C-407E-A947-70E740481C1C}">
-                <a14:useLocalDpi xmlns:a14="http://schemas.microsoft.com/office/drawing/2010/main" val="0"/>
-              </a:ext>
-            </a:extLst>
-          </a:blip>
-          <a:srcRect/>
-          <a:stretch>
-            <a:fillRect/>
-          </a:stretch>
-        </p:blipFill>
-        <p:spPr bwMode="auto">
-          <a:xfrm>
-            <a:off x="7696200" y="1752601"/>
-            <a:ext cx="2647950" cy="1724025"/>
-          </a:xfrm>
-          <a:prstGeom prst="rect">
-            <a:avLst/>
-          </a:prstGeom>
-          <a:noFill/>
-          <a:extLst>
-            <a:ext uri="{909E8E84-426E-40DD-AFC4-6F175D3DCCD1}">
-              <a14:hiddenFill xmlns:a14="http://schemas.microsoft.com/office/drawing/2010/main">
-                <a:solidFill>
-                  <a:srgbClr val="FFFFFF"/>
-                </a:solidFill>
-              </a14:hiddenFill>
-            </a:ext>
-          </a:extLst>
-        </p:spPr>
-      </p:pic>
-      <p:pic>
-        <p:nvPicPr>
-          <p:cNvPr id="6152" name="Picture 8" descr="ç¸å-³å¾ç">
-            <a:extLst>
-              <a:ext uri="{FF2B5EF4-FFF2-40B4-BE49-F238E27FC236}">
-                <a16:creationId xmlns:a16="http://schemas.microsoft.com/office/drawing/2014/main" id="{8FFE880B-084D-4A1E-AD38-9FC1B9D54D7F}"/>
-              </a:ext>
-            </a:extLst>
-          </p:cNvPr>
-          <p:cNvPicPr>
-            <a:picLocks noChangeAspect="1" noChangeArrowheads="1"/>
-          </p:cNvPicPr>
-          <p:nvPr/>
-        </p:nvPicPr>
-        <p:blipFill>
-          <a:blip r:embed="rId6">
-            <a:extLst>
-              <a:ext uri="{28A0092B-C50C-407E-A947-70E740481C1C}">
-                <a14:useLocalDpi xmlns:a14="http://schemas.microsoft.com/office/drawing/2010/main" val="0"/>
-              </a:ext>
-            </a:extLst>
-          </a:blip>
-          <a:srcRect/>
-          <a:stretch>
-            <a:fillRect/>
-          </a:stretch>
-        </p:blipFill>
-        <p:spPr bwMode="auto">
-          <a:xfrm>
-            <a:off x="3865947" y="4114801"/>
-            <a:ext cx="4460106" cy="2508811"/>
-          </a:xfrm>
-          <a:prstGeom prst="rect">
-            <a:avLst/>
-          </a:prstGeom>
-          <a:noFill/>
-          <a:extLst>
-            <a:ext uri="{909E8E84-426E-40DD-AFC4-6F175D3DCCD1}">
-              <a14:hiddenFill xmlns:a14="http://schemas.microsoft.com/office/drawing/2010/main">
-                <a:solidFill>
-                  <a:srgbClr val="FFFFFF"/>
-                </a:solidFill>
-              </a14:hiddenFill>
-            </a:ext>
-          </a:extLst>
-        </p:spPr>
-      </p:pic>
+        </p:nvSpPr>
+        <p:spPr/>
+        <p:txBody>
+          <a:bodyPr>
+            <a:normAutofit/>
+          </a:bodyPr>
+          <a:lstStyle/>
+          <a:p>
+            <a:pPr marL="118745" indent="0">
+              <a:buNone/>
+            </a:pPr>
+            <a:r>
+              <a:rPr lang="zh-CN" altLang="en-US" dirty="0"/>
+              <a:t>软件工程有很多名词和概念</a:t>
+            </a:r>
+            <a:endParaRPr lang="en-US" altLang="zh-CN" dirty="0"/>
+          </a:p>
+          <a:p>
+            <a:endParaRPr lang="en-US" altLang="zh-CN" dirty="0"/>
+          </a:p>
+          <a:p>
+            <a:r>
+              <a:rPr lang="zh-CN" altLang="en-US" sz="2800" dirty="0"/>
+              <a:t>“你可以知道一种鸟的名字在全世界各种语言中怎么说，但是说完之后，你还是不了解这个鸟。 所以我们要观察这个鸟的行动 </a:t>
+            </a:r>
+            <a:r>
+              <a:rPr lang="en-US" sz="2800" dirty="0"/>
+              <a:t>– </a:t>
+            </a:r>
+            <a:r>
+              <a:rPr lang="zh-CN" altLang="en-US" sz="2800" dirty="0"/>
+              <a:t>这才是最重要的。” </a:t>
+            </a:r>
+            <a:endParaRPr lang="en-US" altLang="zh-CN" sz="2800" dirty="0"/>
+          </a:p>
+          <a:p>
+            <a:pPr marL="118745" indent="0" algn="r">
+              <a:buNone/>
+            </a:pPr>
+            <a:endParaRPr lang="en-US" altLang="zh-CN" sz="2800" dirty="0"/>
+          </a:p>
+          <a:p>
+            <a:r>
+              <a:rPr lang="zh-CN" altLang="en-US" dirty="0"/>
+              <a:t>如何研究规律？</a:t>
+            </a:r>
+            <a:endParaRPr lang="en-US" altLang="zh-CN" dirty="0"/>
+          </a:p>
+          <a:p>
+            <a:pPr lvl="1"/>
+            <a:r>
+              <a:rPr lang="zh-CN" altLang="en-US" dirty="0"/>
+              <a:t>观察它的行动</a:t>
+            </a:r>
+            <a:endParaRPr lang="en-US" altLang="zh-CN" dirty="0"/>
+          </a:p>
+          <a:p>
+            <a:pPr lvl="1"/>
+            <a:r>
+              <a:rPr lang="en-US" dirty="0"/>
+              <a:t>Learning by doing. </a:t>
+            </a:r>
+            <a:endParaRPr lang="en-US" dirty="0"/>
+          </a:p>
+        </p:txBody>
+      </p:sp>
     </p:spTree>
-    <p:extLst>
-      <p:ext uri="{BB962C8B-B14F-4D97-AF65-F5344CB8AC3E}">
-        <p14:creationId xmlns:p14="http://schemas.microsoft.com/office/powerpoint/2010/main" val="3412302101"/>
-      </p:ext>
-    </p:extLst>
   </p:cSld>
   <p:clrMapOvr>
     <a:masterClrMapping/>
@@ -18354,13 +16931,7 @@
       </p:grpSpPr>
       <p:sp>
         <p:nvSpPr>
-          <p:cNvPr id="2" name="Title 1">
-            <a:extLst>
-              <a:ext uri="{FF2B5EF4-FFF2-40B4-BE49-F238E27FC236}">
-                <a16:creationId xmlns:a16="http://schemas.microsoft.com/office/drawing/2014/main" id="{31B71AFA-30C0-4DAF-A7BF-4F4B50CDA3FE}"/>
-              </a:ext>
-            </a:extLst>
-          </p:cNvPr>
+          <p:cNvPr id="2" name="Title 1"/>
           <p:cNvSpPr>
             <a:spLocks noGrp="1"/>
           </p:cNvSpPr>
@@ -18375,21 +16946,15 @@
           <a:p>
             <a:r>
               <a:rPr lang="zh-CN" altLang="en-US" dirty="0"/>
-              <a:t>如何发现，掌握规律</a:t>
-            </a:r>
-            <a:endParaRPr lang="en-US" dirty="0"/>
-          </a:p>
-        </p:txBody>
-      </p:sp>
-      <p:sp>
-        <p:nvSpPr>
-          <p:cNvPr id="3" name="Content Placeholder 2">
-            <a:extLst>
-              <a:ext uri="{FF2B5EF4-FFF2-40B4-BE49-F238E27FC236}">
-                <a16:creationId xmlns:a16="http://schemas.microsoft.com/office/drawing/2014/main" id="{67053C4F-420C-45C2-97BC-F7BCEA9BF982}"/>
-              </a:ext>
-            </a:extLst>
-          </p:cNvPr>
+              <a:t>软件工程的学术研究</a:t>
+            </a:r>
+            <a:endParaRPr lang="en-US" dirty="0"/>
+          </a:p>
+        </p:txBody>
+      </p:sp>
+      <p:sp>
+        <p:nvSpPr>
+          <p:cNvPr id="3" name="Content Placeholder 2"/>
           <p:cNvSpPr>
             <a:spLocks noGrp="1"/>
           </p:cNvSpPr>
@@ -18404,87 +16969,60 @@
           </a:bodyPr>
           <a:lstStyle/>
           <a:p>
-            <a:pPr marL="118872" indent="0">
+            <a:r>
+              <a:rPr lang="zh-CN" altLang="en-US" dirty="0"/>
+              <a:t>由任课老师补充，不是本教程的重点</a:t>
+            </a:r>
+            <a:endParaRPr lang="en-US" altLang="zh-CN" dirty="0"/>
+          </a:p>
+          <a:p>
+            <a:pPr marL="457200" lvl="1" indent="0">
               <a:buNone/>
             </a:pPr>
-            <a:r>
-              <a:rPr lang="zh-CN" altLang="en-US" dirty="0"/>
-              <a:t>软件工程有很多名词和概念</a:t>
-            </a:r>
             <a:endParaRPr lang="en-US" altLang="zh-CN" dirty="0"/>
           </a:p>
           <a:p>
+            <a:r>
+              <a:rPr lang="zh-CN" altLang="en-US" dirty="0"/>
+              <a:t>前沿会议</a:t>
+            </a:r>
             <a:endParaRPr lang="en-US" altLang="zh-CN" dirty="0"/>
           </a:p>
           <a:p>
-            <a:r>
-              <a:rPr lang="zh-CN" altLang="en-US" sz="2800" dirty="0"/>
-              <a:t>“你可以知道一种鸟的名字在全世界各种语言中怎么说，但是说完之后，你还是不了解这个鸟。 所以我们要观察这个鸟的行动 </a:t>
-            </a:r>
-            <a:r>
-              <a:rPr lang="en-US" sz="2800" dirty="0"/>
-              <a:t>– </a:t>
-            </a:r>
-            <a:r>
-              <a:rPr lang="zh-CN" altLang="en-US" sz="2800" dirty="0"/>
-              <a:t>这才是最重要的。” </a:t>
-            </a:r>
-            <a:endParaRPr lang="en-US" altLang="zh-CN" sz="2800" dirty="0"/>
-          </a:p>
-          <a:p>
-            <a:pPr marL="118872" indent="0" algn="r">
-              <a:buNone/>
-            </a:pPr>
-            <a:r>
-              <a:rPr lang="en-US" altLang="zh-CN" sz="2800" dirty="0">
-                <a:hlinkClick r:id="rId2"/>
-              </a:rPr>
-              <a:t>Richard Feynman</a:t>
-            </a:r>
-            <a:r>
-              <a:rPr lang="zh-CN" altLang="en-US" sz="2800" dirty="0"/>
-              <a:t>（</a:t>
-            </a:r>
-            <a:r>
-              <a:rPr lang="en-US" altLang="zh-CN" sz="2800" dirty="0"/>
-              <a:t>video</a:t>
-            </a:r>
-            <a:r>
-              <a:rPr lang="zh-CN" altLang="en-US" sz="2800" dirty="0"/>
-              <a:t>）</a:t>
-            </a:r>
-            <a:endParaRPr lang="en-US" altLang="zh-CN" sz="2800" dirty="0"/>
-          </a:p>
-          <a:p>
-            <a:r>
-              <a:rPr lang="zh-CN" altLang="en-US" dirty="0"/>
-              <a:t>如何研究规律？</a:t>
-            </a:r>
-            <a:endParaRPr lang="en-US" altLang="zh-CN" dirty="0"/>
-          </a:p>
-          <a:p>
             <a:pPr lvl="1"/>
             <a:r>
-              <a:rPr lang="zh-CN" altLang="en-US" dirty="0"/>
-              <a:t>观察它的行动</a:t>
-            </a:r>
-            <a:endParaRPr lang="en-US" altLang="zh-CN" dirty="0"/>
+              <a:rPr lang="en-US" sz="2400" dirty="0"/>
+              <a:t>ICSE (Intl Conference on Software Engineering)</a:t>
+            </a:r>
+            <a:endParaRPr lang="en-US" sz="2400" dirty="0"/>
           </a:p>
           <a:p>
             <a:pPr lvl="1"/>
             <a:r>
-              <a:rPr lang="en-US" dirty="0"/>
-              <a:t>Learning by doing. </a:t>
-            </a:r>
+              <a:rPr lang="en-US" sz="2400" dirty="0"/>
+              <a:t>ESEC/FSE (European Software Eng. Conf &amp; ACM SIGSOFT Symposium on Foundations of Software Eng</a:t>
+            </a:r>
+            <a:r>
+              <a:rPr lang="en-US" altLang="zh-CN" sz="2400" dirty="0"/>
+              <a:t>ineering</a:t>
+            </a:r>
+            <a:r>
+              <a:rPr lang="en-US" sz="2400" dirty="0"/>
+              <a:t>)</a:t>
+            </a:r>
+            <a:endParaRPr lang="en-US" sz="2400" dirty="0"/>
+          </a:p>
+          <a:p>
+            <a:pPr lvl="1"/>
+            <a:r>
+              <a:rPr lang="en-US" sz="2400" dirty="0"/>
+              <a:t>ASE (Intl Conf on Automated Software Engineering)</a:t>
+            </a:r>
+            <a:endParaRPr lang="en-US" sz="2400" dirty="0"/>
           </a:p>
         </p:txBody>
       </p:sp>
     </p:spTree>
-    <p:extLst>
-      <p:ext uri="{BB962C8B-B14F-4D97-AF65-F5344CB8AC3E}">
-        <p14:creationId xmlns:p14="http://schemas.microsoft.com/office/powerpoint/2010/main" val="2264470809"/>
-      </p:ext>
-    </p:extLst>
   </p:cSld>
   <p:clrMapOvr>
     <a:masterClrMapping/>
@@ -18511,142 +17049,6 @@
       </p:grpSpPr>
       <p:sp>
         <p:nvSpPr>
-          <p:cNvPr id="2" name="Title 1"/>
-          <p:cNvSpPr>
-            <a:spLocks noGrp="1"/>
-          </p:cNvSpPr>
-          <p:nvPr>
-            <p:ph type="title"/>
-          </p:nvPr>
-        </p:nvSpPr>
-        <p:spPr/>
-        <p:txBody>
-          <a:bodyPr/>
-          <a:lstStyle/>
-          <a:p>
-            <a:r>
-              <a:rPr lang="zh-CN" altLang="en-US" dirty="0"/>
-              <a:t>软件工程的学术研究</a:t>
-            </a:r>
-            <a:endParaRPr lang="en-US" dirty="0"/>
-          </a:p>
-        </p:txBody>
-      </p:sp>
-      <p:sp>
-        <p:nvSpPr>
-          <p:cNvPr id="3" name="Content Placeholder 2"/>
-          <p:cNvSpPr>
-            <a:spLocks noGrp="1"/>
-          </p:cNvSpPr>
-          <p:nvPr>
-            <p:ph idx="1"/>
-          </p:nvPr>
-        </p:nvSpPr>
-        <p:spPr/>
-        <p:txBody>
-          <a:bodyPr>
-            <a:normAutofit/>
-          </a:bodyPr>
-          <a:lstStyle/>
-          <a:p>
-            <a:r>
-              <a:rPr lang="zh-CN" altLang="en-US" dirty="0"/>
-              <a:t>由任课老师补充，不是本教程的重点</a:t>
-            </a:r>
-            <a:endParaRPr lang="en-US" altLang="zh-CN" dirty="0"/>
-          </a:p>
-          <a:p>
-            <a:pPr lvl="1"/>
-            <a:r>
-              <a:rPr lang="zh-CN" altLang="en-US" dirty="0">
-                <a:hlinkClick r:id="rId2"/>
-              </a:rPr>
-              <a:t>会议 </a:t>
-            </a:r>
-            <a:r>
-              <a:rPr lang="en-US" altLang="zh-CN" dirty="0">
-                <a:hlinkClick r:id="rId2"/>
-              </a:rPr>
-              <a:t>&amp; </a:t>
-            </a:r>
-            <a:r>
-              <a:rPr lang="zh-CN" altLang="en-US" dirty="0">
-                <a:hlinkClick r:id="rId2"/>
-              </a:rPr>
-              <a:t>期刊</a:t>
-            </a:r>
-            <a:endParaRPr lang="en-US" altLang="zh-CN" dirty="0"/>
-          </a:p>
-          <a:p>
-            <a:r>
-              <a:rPr lang="zh-CN" altLang="en-US" dirty="0"/>
-              <a:t>前沿会议</a:t>
-            </a:r>
-            <a:endParaRPr lang="en-US" altLang="zh-CN" dirty="0"/>
-          </a:p>
-          <a:p>
-            <a:pPr lvl="1"/>
-            <a:r>
-              <a:rPr lang="en-US" sz="2400" dirty="0"/>
-              <a:t>ICSE (Intl Conference on Software Engineering)</a:t>
-            </a:r>
-          </a:p>
-          <a:p>
-            <a:pPr lvl="1"/>
-            <a:r>
-              <a:rPr lang="en-US" sz="2400" dirty="0"/>
-              <a:t>ESEC/FSE (European Software Eng. Conf &amp; ACM SIGSOFT Symposium on Foundations of Software Eng</a:t>
-            </a:r>
-            <a:r>
-              <a:rPr lang="en-US" altLang="zh-CN" sz="2400" dirty="0"/>
-              <a:t>ineering</a:t>
-            </a:r>
-            <a:r>
-              <a:rPr lang="en-US" sz="2400" dirty="0"/>
-              <a:t>)</a:t>
-            </a:r>
-          </a:p>
-          <a:p>
-            <a:pPr lvl="1"/>
-            <a:r>
-              <a:rPr lang="en-US" sz="2400" dirty="0"/>
-              <a:t>ASE (Intl Conf on Automated Software Engineering)</a:t>
-            </a:r>
-          </a:p>
-        </p:txBody>
-      </p:sp>
-    </p:spTree>
-    <p:extLst>
-      <p:ext uri="{BB962C8B-B14F-4D97-AF65-F5344CB8AC3E}">
-        <p14:creationId xmlns:p14="http://schemas.microsoft.com/office/powerpoint/2010/main" val="767424033"/>
-      </p:ext>
-    </p:extLst>
-  </p:cSld>
-  <p:clrMapOvr>
-    <a:masterClrMapping/>
-  </p:clrMapOvr>
-</p:sld>
-</file>
-
-<file path=ppt/slides/slide55.xml><?xml version="1.0" encoding="utf-8"?>
-<p:sld xmlns:a="http://schemas.openxmlformats.org/drawingml/2006/main" xmlns:r="http://schemas.openxmlformats.org/officeDocument/2006/relationships" xmlns:p="http://schemas.openxmlformats.org/presentationml/2006/main">
-  <p:cSld>
-    <p:spTree>
-      <p:nvGrpSpPr>
-        <p:cNvPr id="1" name=""/>
-        <p:cNvGrpSpPr/>
-        <p:nvPr/>
-      </p:nvGrpSpPr>
-      <p:grpSpPr>
-        <a:xfrm>
-          <a:off x="0" y="0"/>
-          <a:ext cx="0" cy="0"/>
-          <a:chOff x="0" y="0"/>
-          <a:chExt cx="0" cy="0"/>
-        </a:xfrm>
-      </p:grpSpPr>
-      <p:sp>
-        <p:nvSpPr>
           <p:cNvPr id="2" name="标题 1"/>
           <p:cNvSpPr>
             <a:spLocks noGrp="1"/>
@@ -18776,7 +17178,7 @@
           <p:nvPr/>
         </p:nvPicPr>
         <p:blipFill>
-          <a:blip r:embed="rId3" cstate="print">
+          <a:blip r:embed="rId1" cstate="print">
             <a:extLst>
               <a:ext uri="{28A0092B-C50C-407E-A947-70E740481C1C}">
                 <a14:useLocalDpi xmlns:a14="http://schemas.microsoft.com/office/drawing/2010/main" val="0"/>
@@ -18806,7 +17208,7 @@
           <p:nvPr/>
         </p:nvPicPr>
         <p:blipFill>
-          <a:blip r:embed="rId4">
+          <a:blip r:embed="rId2">
             <a:extLst>
               <a:ext uri="{28A0092B-C50C-407E-A947-70E740481C1C}">
                 <a14:useLocalDpi xmlns:a14="http://schemas.microsoft.com/office/drawing/2010/main" val="0"/>
@@ -18836,7 +17238,7 @@
           <p:nvPr/>
         </p:nvPicPr>
         <p:blipFill>
-          <a:blip r:embed="rId5"/>
+          <a:blip r:embed="rId3"/>
           <a:stretch>
             <a:fillRect/>
           </a:stretch>
@@ -18860,7 +17262,7 @@
           <p:nvPr/>
         </p:nvPicPr>
         <p:blipFill>
-          <a:blip r:embed="rId6">
+          <a:blip r:embed="rId4">
             <a:extLst>
               <a:ext uri="{28A0092B-C50C-407E-A947-70E740481C1C}">
                 <a14:useLocalDpi xmlns:a14="http://schemas.microsoft.com/office/drawing/2010/main" val="0"/>
@@ -18890,7 +17292,7 @@
           <p:nvPr/>
         </p:nvPicPr>
         <p:blipFill>
-          <a:blip r:embed="rId7" cstate="print">
+          <a:blip r:embed="rId5" cstate="print">
             <a:extLst>
               <a:ext uri="{28A0092B-C50C-407E-A947-70E740481C1C}">
                 <a14:useLocalDpi xmlns:a14="http://schemas.microsoft.com/office/drawing/2010/main" val="0"/>
@@ -18912,11 +17314,6 @@
         </p:spPr>
       </p:pic>
     </p:spTree>
-    <p:extLst>
-      <p:ext uri="{BB962C8B-B14F-4D97-AF65-F5344CB8AC3E}">
-        <p14:creationId xmlns:p14="http://schemas.microsoft.com/office/powerpoint/2010/main" val="1678637684"/>
-      </p:ext>
-    </p:extLst>
   </p:cSld>
   <p:clrMapOvr>
     <a:masterClrMapping/>
@@ -19222,7 +17619,7 @@
 </p:sld>
 </file>
 
-<file path=ppt/slides/slide56.xml><?xml version="1.0" encoding="utf-8"?>
+<file path=ppt/slides/slide55.xml><?xml version="1.0" encoding="utf-8"?>
 <p:sld xmlns:a="http://schemas.openxmlformats.org/drawingml/2006/main" xmlns:r="http://schemas.openxmlformats.org/officeDocument/2006/relationships" xmlns:p="http://schemas.openxmlformats.org/presentationml/2006/main" show="0">
   <p:cSld>
     <p:spTree>
@@ -19280,7 +17677,7 @@
           </a:bodyPr>
           <a:lstStyle/>
           <a:p>
-            <a:pPr marL="118872" indent="0">
+            <a:pPr marL="118745" indent="0">
               <a:lnSpc>
                 <a:spcPct val="120000"/>
               </a:lnSpc>
@@ -19366,6 +17763,7 @@
               <a:rPr lang="zh-CN" altLang="en-US" sz="2200" dirty="0"/>
               <a:t>这些软件的开发者是怎么说服你（陌生人）成为他们的用户的？他们的目标都是盈利么？他们的目标都是赚取用户的现金么？还是别的？ </a:t>
             </a:r>
+            <a:endParaRPr lang="zh-CN" altLang="en-US" sz="2200" dirty="0"/>
           </a:p>
           <a:p>
             <a:pPr lvl="1">
@@ -19385,6 +17783,7 @@
               <a:rPr lang="zh-CN" altLang="en-US" sz="2200" dirty="0"/>
               <a:t>） </a:t>
             </a:r>
+            <a:endParaRPr lang="zh-CN" altLang="en-US" sz="2200" dirty="0"/>
           </a:p>
           <a:p>
             <a:pPr lvl="1">
@@ -19404,6 +17803,7 @@
               <a:rPr lang="zh-CN" altLang="en-US" sz="2200" dirty="0"/>
               <a:t>么？又是如何更新新版本的？ </a:t>
             </a:r>
+            <a:endParaRPr lang="zh-CN" altLang="en-US" sz="2200" dirty="0"/>
           </a:p>
           <a:p>
             <a:pPr lvl="1">
@@ -19492,6 +17892,83 @@
               <a:t>年还会存在么，为什么？</a:t>
             </a:r>
             <a:endParaRPr lang="en-US" altLang="zh-CN" sz="2200" dirty="0"/>
+          </a:p>
+        </p:txBody>
+      </p:sp>
+    </p:spTree>
+  </p:cSld>
+  <p:clrMapOvr>
+    <a:masterClrMapping/>
+  </p:clrMapOvr>
+  <p:transition/>
+</p:sld>
+</file>
+
+<file path=ppt/slides/slide56.xml><?xml version="1.0" encoding="utf-8"?>
+<p:sld xmlns:a="http://schemas.openxmlformats.org/drawingml/2006/main" xmlns:r="http://schemas.openxmlformats.org/officeDocument/2006/relationships" xmlns:p="http://schemas.openxmlformats.org/presentationml/2006/main">
+  <p:cSld>
+    <p:spTree>
+      <p:nvGrpSpPr>
+        <p:cNvPr id="1" name=""/>
+        <p:cNvGrpSpPr/>
+        <p:nvPr/>
+      </p:nvGrpSpPr>
+      <p:grpSpPr>
+        <a:xfrm>
+          <a:off x="0" y="0"/>
+          <a:ext cx="0" cy="0"/>
+          <a:chOff x="0" y="0"/>
+          <a:chExt cx="0" cy="0"/>
+        </a:xfrm>
+      </p:grpSpPr>
+      <p:sp>
+        <p:nvSpPr>
+          <p:cNvPr id="2" name="Title 1"/>
+          <p:cNvSpPr>
+            <a:spLocks noGrp="1"/>
+          </p:cNvSpPr>
+          <p:nvPr>
+            <p:ph type="title"/>
+          </p:nvPr>
+        </p:nvSpPr>
+        <p:spPr/>
+        <p:txBody>
+          <a:bodyPr/>
+          <a:lstStyle/>
+          <a:p>
+            <a:r>
+              <a:rPr lang="zh-CN" altLang="en-US" dirty="0"/>
+              <a:t>更多作业和讨论</a:t>
+            </a:r>
+            <a:endParaRPr lang="en-US" dirty="0"/>
+          </a:p>
+        </p:txBody>
+      </p:sp>
+      <p:sp>
+        <p:nvSpPr>
+          <p:cNvPr id="3" name="Content Placeholder 2"/>
+          <p:cNvSpPr>
+            <a:spLocks noGrp="1"/>
+          </p:cNvSpPr>
+          <p:nvPr>
+            <p:ph idx="1"/>
+          </p:nvPr>
+        </p:nvSpPr>
+        <p:spPr/>
+        <p:txBody>
+          <a:bodyPr/>
+          <a:lstStyle/>
+          <a:p>
+            <a:r>
+              <a:rPr lang="en-US" dirty="0">
+                <a:hlinkClick r:id="rId1"/>
+              </a:rPr>
+              <a:t>http://www.cnblogs.com/xinz/p/3803035.html</a:t>
+            </a:r>
+            <a:endParaRPr lang="en-US" dirty="0"/>
+          </a:p>
+          <a:p>
+            <a:endParaRPr lang="en-US" dirty="0"/>
           </a:p>
         </p:txBody>
       </p:sp>
@@ -19537,7 +18014,7 @@
           <a:p>
             <a:r>
               <a:rPr lang="zh-CN" altLang="en-US" dirty="0"/>
-              <a:t>更多作业和讨论</a:t>
+              <a:t>构建软件的不同目的</a:t>
             </a:r>
             <a:endParaRPr lang="en-US" dirty="0"/>
           </a:p>
@@ -19558,88 +18035,7 @@
           <a:bodyPr/>
           <a:lstStyle/>
           <a:p>
-            <a:r>
-              <a:rPr lang="en-US" dirty="0">
-                <a:hlinkClick r:id="rId2"/>
-              </a:rPr>
-              <a:t>http://www.cnblogs.com/xinz/p/3803035.html</a:t>
-            </a:r>
-            <a:endParaRPr lang="en-US" dirty="0"/>
-          </a:p>
-          <a:p>
-            <a:endParaRPr lang="en-US" dirty="0"/>
-          </a:p>
-        </p:txBody>
-      </p:sp>
-    </p:spTree>
-    <p:extLst>
-      <p:ext uri="{BB962C8B-B14F-4D97-AF65-F5344CB8AC3E}">
-        <p14:creationId xmlns:p14="http://schemas.microsoft.com/office/powerpoint/2010/main" val="2211337153"/>
-      </p:ext>
-    </p:extLst>
-  </p:cSld>
-  <p:clrMapOvr>
-    <a:masterClrMapping/>
-  </p:clrMapOvr>
-</p:sld>
-</file>
-
-<file path=ppt/slides/slide58.xml><?xml version="1.0" encoding="utf-8"?>
-<p:sld xmlns:a="http://schemas.openxmlformats.org/drawingml/2006/main" xmlns:r="http://schemas.openxmlformats.org/officeDocument/2006/relationships" xmlns:p="http://schemas.openxmlformats.org/presentationml/2006/main">
-  <p:cSld>
-    <p:spTree>
-      <p:nvGrpSpPr>
-        <p:cNvPr id="1" name=""/>
-        <p:cNvGrpSpPr/>
-        <p:nvPr/>
-      </p:nvGrpSpPr>
-      <p:grpSpPr>
-        <a:xfrm>
-          <a:off x="0" y="0"/>
-          <a:ext cx="0" cy="0"/>
-          <a:chOff x="0" y="0"/>
-          <a:chExt cx="0" cy="0"/>
-        </a:xfrm>
-      </p:grpSpPr>
-      <p:sp>
-        <p:nvSpPr>
-          <p:cNvPr id="2" name="Title 1"/>
-          <p:cNvSpPr>
-            <a:spLocks noGrp="1"/>
-          </p:cNvSpPr>
-          <p:nvPr>
-            <p:ph type="title"/>
-          </p:nvPr>
-        </p:nvSpPr>
-        <p:spPr/>
-        <p:txBody>
-          <a:bodyPr/>
-          <a:lstStyle/>
-          <a:p>
-            <a:r>
-              <a:rPr lang="zh-CN" altLang="en-US" dirty="0"/>
-              <a:t>构建软件的不同目的</a:t>
-            </a:r>
-            <a:endParaRPr lang="en-US" dirty="0"/>
-          </a:p>
-        </p:txBody>
-      </p:sp>
-      <p:sp>
-        <p:nvSpPr>
-          <p:cNvPr id="3" name="Content Placeholder 2"/>
-          <p:cNvSpPr>
-            <a:spLocks noGrp="1"/>
-          </p:cNvSpPr>
-          <p:nvPr>
-            <p:ph idx="1"/>
-          </p:nvPr>
-        </p:nvSpPr>
-        <p:spPr/>
-        <p:txBody>
-          <a:bodyPr/>
-          <a:lstStyle/>
-          <a:p>
-            <a:pPr marL="118872" indent="0">
+            <a:pPr marL="118745" indent="0">
               <a:buNone/>
             </a:pPr>
             <a:r>
@@ -19649,25 +18045,25 @@
             <a:endParaRPr lang="en-US" altLang="zh-CN" dirty="0"/>
           </a:p>
           <a:p>
-            <a:pPr marL="118872" indent="0">
+            <a:pPr marL="118745" indent="0">
               <a:buNone/>
             </a:pPr>
             <a:r>
               <a:rPr lang="en-US" altLang="zh-CN" sz="2000" dirty="0">
-                <a:hlinkClick r:id="rId2"/>
+                <a:hlinkClick r:id="rId1"/>
               </a:rPr>
               <a:t>http://zhuanlan.zhihu.com/goujianzhifa/20003750</a:t>
             </a:r>
             <a:endParaRPr lang="en-US" altLang="zh-CN" sz="2000" dirty="0"/>
           </a:p>
           <a:p>
-            <a:pPr marL="118872" indent="0">
+            <a:pPr marL="118745" indent="0">
               <a:buNone/>
             </a:pPr>
             <a:endParaRPr lang="en-US" altLang="zh-CN" dirty="0"/>
           </a:p>
           <a:p>
-            <a:pPr marL="118872" indent="0">
+            <a:pPr marL="118745" indent="0">
               <a:buNone/>
             </a:pPr>
             <a:r>
@@ -19681,116 +18077,32 @@
               <a:rPr lang="en-US" altLang="zh-CN" dirty="0"/>
               <a:t>Build to Pass</a:t>
             </a:r>
+            <a:endParaRPr lang="en-US" altLang="zh-CN" dirty="0"/>
           </a:p>
           <a:p>
             <a:r>
               <a:rPr lang="en-US" dirty="0"/>
               <a:t>Build to Learn</a:t>
             </a:r>
+            <a:endParaRPr lang="en-US" dirty="0"/>
           </a:p>
           <a:p>
             <a:r>
               <a:rPr lang="en-US" dirty="0"/>
               <a:t>Build to Show</a:t>
             </a:r>
+            <a:endParaRPr lang="en-US" dirty="0"/>
           </a:p>
           <a:p>
             <a:r>
               <a:rPr lang="en-US" dirty="0"/>
               <a:t>Build to Win</a:t>
             </a:r>
+            <a:endParaRPr lang="en-US" dirty="0"/>
           </a:p>
         </p:txBody>
       </p:sp>
     </p:spTree>
-    <p:extLst>
-      <p:ext uri="{BB962C8B-B14F-4D97-AF65-F5344CB8AC3E}">
-        <p14:creationId xmlns:p14="http://schemas.microsoft.com/office/powerpoint/2010/main" val="1320509596"/>
-      </p:ext>
-    </p:extLst>
-  </p:cSld>
-  <p:clrMapOvr>
-    <a:masterClrMapping/>
-  </p:clrMapOvr>
-</p:sld>
-</file>
-
-<file path=ppt/slides/slide59.xml><?xml version="1.0" encoding="utf-8"?>
-<p:sld xmlns:a="http://schemas.openxmlformats.org/drawingml/2006/main" xmlns:r="http://schemas.openxmlformats.org/officeDocument/2006/relationships" xmlns:p="http://schemas.openxmlformats.org/presentationml/2006/main">
-  <p:cSld>
-    <p:spTree>
-      <p:nvGrpSpPr>
-        <p:cNvPr id="1" name=""/>
-        <p:cNvGrpSpPr/>
-        <p:nvPr/>
-      </p:nvGrpSpPr>
-      <p:grpSpPr>
-        <a:xfrm>
-          <a:off x="0" y="0"/>
-          <a:ext cx="0" cy="0"/>
-          <a:chOff x="0" y="0"/>
-          <a:chExt cx="0" cy="0"/>
-        </a:xfrm>
-      </p:grpSpPr>
-      <p:sp>
-        <p:nvSpPr>
-          <p:cNvPr id="2" name="Title 1">
-            <a:extLst>
-              <a:ext uri="{FF2B5EF4-FFF2-40B4-BE49-F238E27FC236}">
-                <a16:creationId xmlns:a16="http://schemas.microsoft.com/office/drawing/2014/main" id="{24577D88-E090-464B-BC87-D60EE9128A0F}"/>
-              </a:ext>
-            </a:extLst>
-          </p:cNvPr>
-          <p:cNvSpPr>
-            <a:spLocks noGrp="1"/>
-          </p:cNvSpPr>
-          <p:nvPr>
-            <p:ph type="title"/>
-          </p:nvPr>
-        </p:nvSpPr>
-        <p:spPr/>
-        <p:txBody>
-          <a:bodyPr/>
-          <a:lstStyle/>
-          <a:p>
-            <a:r>
-              <a:rPr lang="en-US" dirty="0"/>
-              <a:t>appendix</a:t>
-            </a:r>
-          </a:p>
-        </p:txBody>
-      </p:sp>
-      <p:sp>
-        <p:nvSpPr>
-          <p:cNvPr id="3" name="Content Placeholder 2">
-            <a:extLst>
-              <a:ext uri="{FF2B5EF4-FFF2-40B4-BE49-F238E27FC236}">
-                <a16:creationId xmlns:a16="http://schemas.microsoft.com/office/drawing/2014/main" id="{3402149D-B9D8-49F7-8135-09433B6F86C7}"/>
-              </a:ext>
-            </a:extLst>
-          </p:cNvPr>
-          <p:cNvSpPr>
-            <a:spLocks noGrp="1"/>
-          </p:cNvSpPr>
-          <p:nvPr>
-            <p:ph idx="1"/>
-          </p:nvPr>
-        </p:nvSpPr>
-        <p:spPr/>
-        <p:txBody>
-          <a:bodyPr/>
-          <a:lstStyle/>
-          <a:p>
-            <a:endParaRPr lang="en-US"/>
-          </a:p>
-        </p:txBody>
-      </p:sp>
-    </p:spTree>
-    <p:extLst>
-      <p:ext uri="{BB962C8B-B14F-4D97-AF65-F5344CB8AC3E}">
-        <p14:creationId xmlns:p14="http://schemas.microsoft.com/office/powerpoint/2010/main" val="161325156"/>
-      </p:ext>
-    </p:extLst>
   </p:cSld>
   <p:clrMapOvr>
     <a:masterClrMapping/>
@@ -19835,6 +18147,7 @@
               <a:rPr lang="en-US"/>
               <a:t>Professional today: 66 Billion</a:t>
             </a:r>
+            <a:endParaRPr lang="en-US"/>
           </a:p>
         </p:txBody>
       </p:sp>
@@ -19847,7 +18160,7 @@
           <p:nvPr/>
         </p:nvPicPr>
         <p:blipFill>
-          <a:blip r:embed="rId2">
+          <a:blip r:embed="rId1">
             <a:extLst>
               <a:ext uri="{28A0092B-C50C-407E-A947-70E740481C1C}">
                 <a14:useLocalDpi xmlns:a14="http://schemas.microsoft.com/office/drawing/2010/main" val="0"/>
@@ -19958,7 +18271,7 @@
           </a:bodyPr>
           <a:lstStyle/>
           <a:p>
-            <a:pPr marL="4763" indent="-4763">
+            <a:pPr marL="5080" indent="-5080">
               <a:buClr>
                 <a:schemeClr val="accent3"/>
               </a:buClr>
@@ -19982,9 +18295,10 @@
               <a:rPr lang="zh-CN" altLang="en-US" sz="2200" dirty="0"/>
               <a:t>是把系统的、有序的、可量化的方法应用到软件的开发、运营和维护上的过程。</a:t>
             </a:r>
-          </a:p>
-          <a:p>
-            <a:pPr marL="4763" indent="-4763">
+            <a:endParaRPr lang="zh-CN" altLang="en-US" sz="2200" dirty="0"/>
+          </a:p>
+          <a:p>
+            <a:pPr marL="5080" indent="-5080">
               <a:buClr>
                 <a:schemeClr val="accent3"/>
               </a:buClr>
@@ -20008,9 +18322,10 @@
               <a:rPr lang="zh-CN" altLang="en-US" sz="2200" dirty="0"/>
               <a:t>软件需求分析、软件设计、软件构建、软件测试和软件维护。</a:t>
             </a:r>
-          </a:p>
-          <a:p>
-            <a:pPr marL="4763" indent="-4763">
+            <a:endParaRPr lang="zh-CN" altLang="en-US" sz="2200" dirty="0"/>
+          </a:p>
+          <a:p>
+            <a:pPr marL="5080" indent="-5080">
               <a:buClr>
                 <a:schemeClr val="accent3"/>
               </a:buClr>
@@ -20034,9 +18349,10 @@
               <a:rPr lang="zh-CN" altLang="en-US" sz="2200" dirty="0"/>
               <a:t>计算机科学、计算机工程、管理学、数学、项目管理学、质量管理、</a:t>
             </a:r>
-          </a:p>
-          <a:p>
-            <a:pPr marL="4763" indent="-4763">
+            <a:endParaRPr lang="zh-CN" altLang="en-US" sz="2200" dirty="0"/>
+          </a:p>
+          <a:p>
+            <a:pPr marL="5080" indent="-5080">
               <a:buClr>
                 <a:schemeClr val="accent3"/>
               </a:buClr>
@@ -20047,6 +18363,7 @@
               <a:rPr lang="zh-CN" altLang="en-US" sz="2200" dirty="0"/>
               <a:t>软件人体工学、系统工程、工业设计和用户界面设计。</a:t>
             </a:r>
+            <a:endParaRPr lang="zh-CN" altLang="en-US" sz="2200" dirty="0"/>
           </a:p>
         </p:txBody>
       </p:sp>
@@ -20094,6 +18411,7 @@
               <a:rPr lang="en-US" dirty="0"/>
               <a:t>What is Software Engineering</a:t>
             </a:r>
+            <a:endParaRPr lang="en-US" dirty="0"/>
           </a:p>
         </p:txBody>
       </p:sp>
@@ -20112,7 +18430,7 @@
           <a:bodyPr/>
           <a:lstStyle/>
           <a:p>
-            <a:pPr marL="4763" indent="-4763">
+            <a:pPr marL="5080" indent="-5080">
               <a:buClr>
                 <a:schemeClr val="accent3"/>
               </a:buClr>
@@ -20131,13 +18449,14 @@
               <a:rPr lang="en-US" sz="2400" b="1" dirty="0"/>
               <a:t>software. </a:t>
             </a:r>
-          </a:p>
-          <a:p>
-            <a:pPr marL="4763" indent="-4763">
+            <a:endParaRPr lang="en-US" sz="2400" b="1" dirty="0"/>
+          </a:p>
+          <a:p>
+            <a:pPr marL="5080" indent="-5080">
               <a:buClr>
                 <a:schemeClr val="accent3"/>
               </a:buClr>
-              <a:buFont typeface="Wingdings 2"/>
+              <a:buFont typeface="Wingdings 2" panose="05020102010507070707"/>
               <a:buChar char=""/>
               <a:defRPr/>
             </a:pPr>
@@ -20145,10 +18464,11 @@
               <a:rPr lang="en-US" sz="2400" dirty="0"/>
               <a:t>Disciplines</a:t>
             </a:r>
-          </a:p>
-          <a:p>
-            <a:pPr marL="442913" lvl="1" indent="-4763">
-              <a:buFont typeface="Wingdings 2"/>
+            <a:endParaRPr lang="en-US" sz="2400" dirty="0"/>
+          </a:p>
+          <a:p>
+            <a:pPr marL="443230" lvl="1" indent="-5080">
+              <a:buFont typeface="Wingdings 2" panose="05020102010507070707"/>
               <a:buChar char=""/>
               <a:defRPr/>
             </a:pPr>
@@ -20156,13 +18476,14 @@
               <a:rPr lang="en-US" sz="2000" dirty="0"/>
               <a:t>Software requirement, design, construction, testing and maintenance. </a:t>
             </a:r>
-          </a:p>
-          <a:p>
-            <a:pPr marL="4763" indent="-4763">
+            <a:endParaRPr lang="en-US" sz="2000" dirty="0"/>
+          </a:p>
+          <a:p>
+            <a:pPr marL="5080" indent="-5080">
               <a:buClr>
                 <a:schemeClr val="accent3"/>
               </a:buClr>
-              <a:buFont typeface="Wingdings 2"/>
+              <a:buFont typeface="Wingdings 2" panose="05020102010507070707"/>
               <a:buChar char=""/>
               <a:defRPr/>
             </a:pPr>
@@ -20170,9 +18491,10 @@
               <a:rPr lang="en-US" sz="2400" dirty="0"/>
               <a:t>Related fields:</a:t>
             </a:r>
-          </a:p>
-          <a:p>
-            <a:pPr marL="442913" lvl="1" indent="-4763">
+            <a:endParaRPr lang="en-US" sz="2400" dirty="0"/>
+          </a:p>
+          <a:p>
+            <a:pPr marL="443230" lvl="1" indent="-5080">
               <a:buNone/>
               <a:defRPr/>
             </a:pPr>
@@ -20180,9 +18502,10 @@
               <a:rPr lang="en-US" sz="2000" dirty="0"/>
               <a:t>Computer Science, Computer Engineering, management, mathematics, project management, quality management, software ergonomics (usability), system engineering,  industrial design, UI design</a:t>
             </a:r>
-          </a:p>
-          <a:p>
-            <a:pPr marL="4763" indent="-4763">
+            <a:endParaRPr lang="en-US" sz="2000" dirty="0"/>
+          </a:p>
+          <a:p>
+            <a:pPr marL="5080" indent="-5080">
               <a:buClr>
                 <a:schemeClr val="accent3"/>
               </a:buClr>
@@ -20207,11 +18530,6 @@
         </p:txBody>
       </p:sp>
     </p:spTree>
-    <p:extLst>
-      <p:ext uri="{BB962C8B-B14F-4D97-AF65-F5344CB8AC3E}">
-        <p14:creationId xmlns:p14="http://schemas.microsoft.com/office/powerpoint/2010/main" val="2655540517"/>
-      </p:ext>
-    </p:extLst>
   </p:cSld>
   <p:clrMapOvr>
     <a:masterClrMapping/>
@@ -20279,7 +18597,7 @@
           </a:bodyPr>
           <a:lstStyle/>
           <a:p>
-            <a:pPr marL="4763" indent="-4763">
+            <a:pPr marL="5080" indent="-5080">
               <a:buClr>
                 <a:schemeClr val="accent3"/>
               </a:buClr>
@@ -20511,11 +18829,9 @@
       </a:bgFillStyleLst>
     </a:fmtScheme>
   </a:themeElements>
-  <a:objectDefaults/>
-  <a:extraClrSchemeLst/>
   <a:extLst>
     <a:ext uri="{05A4C25C-085E-4340-85A3-A5531E510DB2}">
-      <thm15:themeFamily xmlns:thm15="http://schemas.microsoft.com/office/thememl/2012/main" name="Depth" id="{7BEAFC2A-325C-49C4-AC08-2B765DA903F9}" vid="{1735E755-43E6-43AA-ABA2-C989ECC79AF5}"/>
+      <thm15:themeFamily xmlns:thm15="http://schemas.microsoft.com/office/thememl/2012/main" name="Office Theme" id="{62F939B6-93AF-4DB8-9C6B-D6C7DFDC589F}" vid="{4A3C46E8-61CC-4603-A589-7422A47A8E4A}"/>
     </a:ext>
   </a:extLst>
 </a:theme>
@@ -20799,8 +19115,11 @@
       </a:bgFillStyleLst>
     </a:fmtScheme>
   </a:themeElements>
-  <a:objectDefaults/>
-  <a:extraClrSchemeLst/>
+  <a:extLst>
+    <a:ext uri="{05A4C25C-085E-4340-85A3-A5531E510DB2}">
+      <thm15:themeFamily xmlns:thm15="http://schemas.microsoft.com/office/thememl/2012/main" name="Office Theme" id="{62F939B6-93AF-4DB8-9C6B-D6C7DFDC589F}" vid="{4A3C46E8-61CC-4603-A589-7422A47A8E4A}"/>
+    </a:ext>
+  </a:extLst>
 </a:theme>
 </file>
 
@@ -20935,33 +19254,18 @@
 
 <file path=customXml/itemProps1.xml><?xml version="1.0" encoding="utf-8"?>
 <ds:datastoreItem xmlns:ds="http://schemas.openxmlformats.org/officeDocument/2006/customXml" ds:itemID="{3A578484-EFC7-41EF-A5B1-C62DDCF2E328}">
-  <ds:schemaRefs>
-    <ds:schemaRef ds:uri="http://schemas.microsoft.com/office/2006/metadata/contentType"/>
-    <ds:schemaRef ds:uri="http://schemas.microsoft.com/office/2006/metadata/properties/metaAttributes"/>
-    <ds:schemaRef ds:uri="http://www.w3.org/2001/XMLSchema"/>
-    <ds:schemaRef ds:uri="http://schemas.microsoft.com/office/2006/metadata/properties"/>
-    <ds:schemaRef ds:uri="http://schemas.openxmlformats.org/package/2006/metadata/core-properties"/>
-    <ds:schemaRef ds:uri="http://purl.org/dc/elements/1.1/"/>
-    <ds:schemaRef ds:uri="http://purl.org/dc/terms/"/>
-    <ds:schemaRef ds:uri="http://schemas.microsoft.com/internal/obd"/>
-    <ds:schemaRef ds:uri="http://schemas.microsoft.com/office/infopath/2007/PartnerControls"/>
-  </ds:schemaRefs>
+  <ds:schemaRefs/>
 </ds:datastoreItem>
 </file>
 
 <file path=customXml/itemProps2.xml><?xml version="1.0" encoding="utf-8"?>
 <ds:datastoreItem xmlns:ds="http://schemas.openxmlformats.org/officeDocument/2006/customXml" ds:itemID="{D5495DD4-04CD-4725-AADE-F45F611A52AA}">
-  <ds:schemaRefs>
-    <ds:schemaRef ds:uri="http://schemas.microsoft.com/office/2006/metadata/properties"/>
-    <ds:schemaRef ds:uri="http://schemas.microsoft.com/office/infopath/2007/PartnerControls"/>
-  </ds:schemaRefs>
+  <ds:schemaRefs/>
 </ds:datastoreItem>
 </file>
 
 <file path=customXml/itemProps3.xml><?xml version="1.0" encoding="utf-8"?>
 <ds:datastoreItem xmlns:ds="http://schemas.openxmlformats.org/officeDocument/2006/customXml" ds:itemID="{152C3F0E-25C3-4B31-B914-3A618B652002}">
-  <ds:schemaRefs>
-    <ds:schemaRef ds:uri="http://schemas.microsoft.com/sharepoint/v3/contenttype/forms"/>
-  </ds:schemaRefs>
+  <ds:schemaRefs/>
 </ds:datastoreItem>
 </file>
--- a/chapter01/ASE_1_SoftwareEngineering.pptx
+++ b/chapter01/ASE_1_SoftwareEngineering.pptx
@@ -2,69 +2,69 @@
 <file path=ppt/presentation.xml><?xml version="1.0" encoding="utf-8"?>
 <p:presentation xmlns:a="http://schemas.openxmlformats.org/drawingml/2006/main" xmlns:r="http://schemas.openxmlformats.org/officeDocument/2006/relationships" xmlns:p="http://schemas.openxmlformats.org/presentationml/2006/main" showSpecialPlsOnTitleSld="0" strictFirstAndLastChars="0">
   <p:sldMasterIdLst>
-    <p:sldMasterId id="2147483648" r:id="rId1"/>
+    <p:sldMasterId id="2147483648" r:id="rId4"/>
   </p:sldMasterIdLst>
   <p:notesMasterIdLst>
-    <p:notesMasterId r:id="rId4"/>
+    <p:notesMasterId r:id="rId62"/>
   </p:notesMasterIdLst>
   <p:sldIdLst>
-    <p:sldId id="256" r:id="rId3"/>
-    <p:sldId id="333" r:id="rId5"/>
-    <p:sldId id="286" r:id="rId6"/>
-    <p:sldId id="284" r:id="rId7"/>
-    <p:sldId id="287" r:id="rId8"/>
-    <p:sldId id="285" r:id="rId9"/>
-    <p:sldId id="300" r:id="rId10"/>
-    <p:sldId id="334" r:id="rId11"/>
-    <p:sldId id="301" r:id="rId12"/>
-    <p:sldId id="335" r:id="rId13"/>
-    <p:sldId id="302" r:id="rId14"/>
-    <p:sldId id="313" r:id="rId15"/>
-    <p:sldId id="336" r:id="rId16"/>
-    <p:sldId id="319" r:id="rId17"/>
-    <p:sldId id="320" r:id="rId18"/>
-    <p:sldId id="321" r:id="rId19"/>
-    <p:sldId id="311" r:id="rId20"/>
-    <p:sldId id="303" r:id="rId21"/>
-    <p:sldId id="295" r:id="rId22"/>
-    <p:sldId id="296" r:id="rId23"/>
-    <p:sldId id="294" r:id="rId24"/>
-    <p:sldId id="315" r:id="rId25"/>
-    <p:sldId id="314" r:id="rId26"/>
-    <p:sldId id="329" r:id="rId27"/>
-    <p:sldId id="346" r:id="rId28"/>
-    <p:sldId id="347" r:id="rId29"/>
-    <p:sldId id="348" r:id="rId30"/>
-    <p:sldId id="375" r:id="rId31"/>
-    <p:sldId id="349" r:id="rId32"/>
-    <p:sldId id="350" r:id="rId33"/>
-    <p:sldId id="351" r:id="rId34"/>
-    <p:sldId id="322" r:id="rId35"/>
-    <p:sldId id="291" r:id="rId36"/>
-    <p:sldId id="345" r:id="rId37"/>
-    <p:sldId id="343" r:id="rId38"/>
-    <p:sldId id="344" r:id="rId39"/>
-    <p:sldId id="305" r:id="rId40"/>
-    <p:sldId id="306" r:id="rId41"/>
-    <p:sldId id="307" r:id="rId42"/>
-    <p:sldId id="323" r:id="rId43"/>
-    <p:sldId id="324" r:id="rId44"/>
-    <p:sldId id="339" r:id="rId45"/>
-    <p:sldId id="340" r:id="rId46"/>
-    <p:sldId id="341" r:id="rId47"/>
-    <p:sldId id="342" r:id="rId48"/>
-    <p:sldId id="352" r:id="rId49"/>
-    <p:sldId id="353" r:id="rId50"/>
-    <p:sldId id="325" r:id="rId51"/>
-    <p:sldId id="354" r:id="rId52"/>
-    <p:sldId id="356" r:id="rId53"/>
-    <p:sldId id="357" r:id="rId54"/>
-    <p:sldId id="355" r:id="rId55"/>
-    <p:sldId id="326" r:id="rId56"/>
-    <p:sldId id="337" r:id="rId57"/>
-    <p:sldId id="304" r:id="rId58"/>
-    <p:sldId id="318" r:id="rId59"/>
-    <p:sldId id="330" r:id="rId60"/>
+    <p:sldId id="256" r:id="rId5"/>
+    <p:sldId id="333" r:id="rId6"/>
+    <p:sldId id="286" r:id="rId7"/>
+    <p:sldId id="284" r:id="rId8"/>
+    <p:sldId id="287" r:id="rId9"/>
+    <p:sldId id="285" r:id="rId10"/>
+    <p:sldId id="300" r:id="rId11"/>
+    <p:sldId id="334" r:id="rId12"/>
+    <p:sldId id="301" r:id="rId13"/>
+    <p:sldId id="335" r:id="rId14"/>
+    <p:sldId id="302" r:id="rId15"/>
+    <p:sldId id="313" r:id="rId16"/>
+    <p:sldId id="336" r:id="rId17"/>
+    <p:sldId id="319" r:id="rId18"/>
+    <p:sldId id="320" r:id="rId19"/>
+    <p:sldId id="321" r:id="rId20"/>
+    <p:sldId id="311" r:id="rId21"/>
+    <p:sldId id="303" r:id="rId22"/>
+    <p:sldId id="295" r:id="rId23"/>
+    <p:sldId id="296" r:id="rId24"/>
+    <p:sldId id="294" r:id="rId25"/>
+    <p:sldId id="315" r:id="rId26"/>
+    <p:sldId id="314" r:id="rId27"/>
+    <p:sldId id="329" r:id="rId28"/>
+    <p:sldId id="346" r:id="rId29"/>
+    <p:sldId id="347" r:id="rId30"/>
+    <p:sldId id="348" r:id="rId31"/>
+    <p:sldId id="375" r:id="rId32"/>
+    <p:sldId id="349" r:id="rId33"/>
+    <p:sldId id="350" r:id="rId34"/>
+    <p:sldId id="351" r:id="rId35"/>
+    <p:sldId id="322" r:id="rId36"/>
+    <p:sldId id="291" r:id="rId37"/>
+    <p:sldId id="345" r:id="rId38"/>
+    <p:sldId id="343" r:id="rId39"/>
+    <p:sldId id="344" r:id="rId40"/>
+    <p:sldId id="305" r:id="rId41"/>
+    <p:sldId id="306" r:id="rId42"/>
+    <p:sldId id="307" r:id="rId43"/>
+    <p:sldId id="323" r:id="rId44"/>
+    <p:sldId id="324" r:id="rId45"/>
+    <p:sldId id="339" r:id="rId46"/>
+    <p:sldId id="340" r:id="rId47"/>
+    <p:sldId id="341" r:id="rId48"/>
+    <p:sldId id="342" r:id="rId49"/>
+    <p:sldId id="352" r:id="rId50"/>
+    <p:sldId id="353" r:id="rId51"/>
+    <p:sldId id="325" r:id="rId52"/>
+    <p:sldId id="354" r:id="rId53"/>
+    <p:sldId id="356" r:id="rId54"/>
+    <p:sldId id="357" r:id="rId55"/>
+    <p:sldId id="355" r:id="rId56"/>
+    <p:sldId id="326" r:id="rId57"/>
+    <p:sldId id="337" r:id="rId58"/>
+    <p:sldId id="304" r:id="rId59"/>
+    <p:sldId id="318" r:id="rId60"/>
+    <p:sldId id="330" r:id="rId61"/>
   </p:sldIdLst>
   <p:sldSz cx="12192000" cy="6858000"/>
   <p:notesSz cx="6858000" cy="9144000"/>
@@ -300,6 +300,7 @@
             </a:pPr>
             <a:fld id="{D9FE4259-CDD9-4688-807A-933F5020E247}" type="datetimeFigureOut">
               <a:rPr lang="en-US"/>
+              <a:t>5/26/2026</a:t>
             </a:fld>
             <a:endParaRPr lang="en-US"/>
           </a:p>
@@ -369,7 +370,6 @@
               <a:rPr lang="en-US" noProof="0"/>
               <a:t>Click to edit Master text styles</a:t>
             </a:r>
-            <a:endParaRPr lang="en-US" noProof="0"/>
           </a:p>
           <a:p>
             <a:pPr lvl="1"/>
@@ -377,7 +377,6 @@
               <a:rPr lang="en-US" noProof="0"/>
               <a:t>Second level</a:t>
             </a:r>
-            <a:endParaRPr lang="en-US" noProof="0"/>
           </a:p>
           <a:p>
             <a:pPr lvl="2"/>
@@ -385,7 +384,6 @@
               <a:rPr lang="en-US" noProof="0"/>
               <a:t>Third level</a:t>
             </a:r>
-            <a:endParaRPr lang="en-US" noProof="0"/>
           </a:p>
           <a:p>
             <a:pPr lvl="3"/>
@@ -393,7 +391,6 @@
               <a:rPr lang="en-US" noProof="0"/>
               <a:t>Fourth level</a:t>
             </a:r>
-            <a:endParaRPr lang="en-US" noProof="0"/>
           </a:p>
           <a:p>
             <a:pPr lvl="4"/>
@@ -401,7 +398,6 @@
               <a:rPr lang="en-US" noProof="0"/>
               <a:t>Fifth level</a:t>
             </a:r>
-            <a:endParaRPr lang="en-US" noProof="0"/>
           </a:p>
         </p:txBody>
       </p:sp>
@@ -471,6 +467,7 @@
             </a:pPr>
             <a:fld id="{C5ADAB1E-5BE0-4555-8709-524C8D586A6B}" type="slidenum">
               <a:rPr lang="en-US"/>
+              <a:t>‹#›</a:t>
             </a:fld>
             <a:endParaRPr lang="en-US"/>
           </a:p>
@@ -677,6 +674,7 @@
             </a:pPr>
             <a:fld id="{C5ADAB1E-5BE0-4555-8709-524C8D586A6B}" type="slidenum">
               <a:rPr lang="en-US" smtClean="0"/>
+              <a:t>1</a:t>
             </a:fld>
             <a:endParaRPr lang="en-US"/>
           </a:p>
@@ -797,7 +795,6 @@
               <a:rPr lang="en-US" altLang="zh-CN" sz="2200" dirty="0"/>
               <a:t>Quiz – housing &amp; 1Billion$</a:t>
             </a:r>
-            <a:endParaRPr lang="en-US" altLang="zh-CN" sz="2200" dirty="0"/>
           </a:p>
           <a:p>
             <a:pPr eaLnBrk="1" hangingPunct="1">
@@ -944,6 +941,7 @@
           <a:p>
             <a:fld id="{9FA30708-CCA8-4933-B01C-46738CEF215D}" type="slidenum">
               <a:rPr lang="en-US" smtClean="0"/>
+              <a:t>33</a:t>
             </a:fld>
             <a:endParaRPr lang="en-US"/>
           </a:p>
@@ -1182,6 +1180,7 @@
           <a:p>
             <a:fld id="{3F4CE25E-E002-44E5-ACD7-66C89E0F12B2}" type="slidenum">
               <a:rPr lang="en-US" smtClean="0"/>
+              <a:t>38</a:t>
             </a:fld>
             <a:endParaRPr lang="en-US"/>
           </a:p>
@@ -1268,6 +1267,7 @@
             </a:pPr>
             <a:fld id="{C5ADAB1E-5BE0-4555-8709-524C8D586A6B}" type="slidenum">
               <a:rPr lang="en-US" smtClean="0"/>
+              <a:t>46</a:t>
             </a:fld>
             <a:endParaRPr lang="en-US"/>
           </a:p>
@@ -1369,7 +1369,6 @@
               <a:rPr lang="en-US" dirty="0"/>
               <a:t>	http://www.wuji8.com/meta/565085646.html</a:t>
             </a:r>
-            <a:endParaRPr lang="en-US" dirty="0"/>
           </a:p>
           <a:p>
             <a:endParaRPr lang="en-US" dirty="0"/>
@@ -1396,6 +1395,7 @@
             </a:pPr>
             <a:fld id="{C5ADAB1E-5BE0-4555-8709-524C8D586A6B}" type="slidenum">
               <a:rPr lang="en-US" smtClean="0"/>
+              <a:t>54</a:t>
             </a:fld>
             <a:endParaRPr lang="en-US"/>
           </a:p>
@@ -1871,6 +1871,7 @@
           <a:p>
             <a:fld id="{2551ACDB-B434-4061-BA28-70898E2A9AA7}" type="slidenum">
               <a:rPr lang="en-US" smtClean="0"/>
+              <a:t>4</a:t>
             </a:fld>
             <a:endParaRPr lang="en-US"/>
           </a:p>
@@ -1984,7 +1985,7 @@
             </a:r>
             <a:r>
               <a:rPr lang="en-US">
-                <a:hlinkClick r:id="rId3" tooltip="Brian Randell" action="ppaction://hlinkfile"/>
+                <a:hlinkClick r:id="rId3" action="ppaction://hlinkfile" tooltip="Brian Randell"/>
               </a:rPr>
               <a:t>Brian Randell</a:t>
             </a:r>
@@ -1994,7 +1995,7 @@
             </a:r>
             <a:r>
               <a:rPr lang="en-US">
-                <a:hlinkClick r:id="rId4" tooltip="F.L. Bauer" action="ppaction://hlinkfile"/>
+                <a:hlinkClick r:id="rId4" action="ppaction://hlinkfile" tooltip="F.L. Bauer"/>
               </a:rPr>
               <a:t>F.L. Bauer</a:t>
             </a:r>
@@ -2014,7 +2015,7 @@
             </a:r>
             <a:r>
               <a:rPr lang="en-US">
-                <a:hlinkClick r:id="rId6" tooltip="Requirements analysis" action="ppaction://hlinkfile"/>
+                <a:hlinkClick r:id="rId6" action="ppaction://hlinkfile" tooltip="Requirements analysis"/>
               </a:rPr>
               <a:t>software requirements</a:t>
             </a:r>
@@ -2024,7 +2025,7 @@
             </a:r>
             <a:r>
               <a:rPr lang="en-US">
-                <a:hlinkClick r:id="rId7" tooltip="Software design" action="ppaction://hlinkfile"/>
+                <a:hlinkClick r:id="rId7" action="ppaction://hlinkfile" tooltip="Software design"/>
               </a:rPr>
               <a:t>software design</a:t>
             </a:r>
@@ -2034,7 +2035,7 @@
             </a:r>
             <a:r>
               <a:rPr lang="en-US">
-                <a:hlinkClick r:id="rId8" tooltip="Computer programming" action="ppaction://hlinkfile"/>
+                <a:hlinkClick r:id="rId8" action="ppaction://hlinkfile" tooltip="Computer programming"/>
               </a:rPr>
               <a:t>software construction</a:t>
             </a:r>
@@ -2044,7 +2045,7 @@
             </a:r>
             <a:r>
               <a:rPr lang="en-US">
-                <a:hlinkClick r:id="rId9" tooltip="Software testing" action="ppaction://hlinkfile"/>
+                <a:hlinkClick r:id="rId9" action="ppaction://hlinkfile" tooltip="Software testing"/>
               </a:rPr>
               <a:t>software testing</a:t>
             </a:r>
@@ -2054,7 +2055,7 @@
             </a:r>
             <a:r>
               <a:rPr lang="en-US">
-                <a:hlinkClick r:id="rId10" tooltip="Software maintenance" action="ppaction://hlinkfile"/>
+                <a:hlinkClick r:id="rId10" action="ppaction://hlinkfile" tooltip="Software maintenance"/>
               </a:rPr>
               <a:t>software maintenance</a:t>
             </a:r>
@@ -2074,7 +2075,7 @@
             </a:r>
             <a:r>
               <a:rPr lang="en-US">
-                <a:hlinkClick r:id="rId12" tooltip="Computer science" action="ppaction://hlinkfile"/>
+                <a:hlinkClick r:id="rId12" action="ppaction://hlinkfile" tooltip="Computer science"/>
               </a:rPr>
               <a:t>computer science</a:t>
             </a:r>
@@ -2084,7 +2085,7 @@
             </a:r>
             <a:r>
               <a:rPr lang="en-US">
-                <a:hlinkClick r:id="rId13" tooltip="Computer engineering" action="ppaction://hlinkfile"/>
+                <a:hlinkClick r:id="rId13" action="ppaction://hlinkfile" tooltip="Computer engineering"/>
               </a:rPr>
               <a:t>computer engineering</a:t>
             </a:r>
@@ -2094,7 +2095,7 @@
             </a:r>
             <a:r>
               <a:rPr lang="en-US">
-                <a:hlinkClick r:id="rId14" tooltip="Management" action="ppaction://hlinkfile"/>
+                <a:hlinkClick r:id="rId14" action="ppaction://hlinkfile" tooltip="Management"/>
               </a:rPr>
               <a:t>management</a:t>
             </a:r>
@@ -2104,7 +2105,7 @@
             </a:r>
             <a:r>
               <a:rPr lang="en-US">
-                <a:hlinkClick r:id="rId15" tooltip="Mathematics" action="ppaction://hlinkfile"/>
+                <a:hlinkClick r:id="rId15" action="ppaction://hlinkfile" tooltip="Mathematics"/>
               </a:rPr>
               <a:t>mathematics</a:t>
             </a:r>
@@ -2114,7 +2115,7 @@
             </a:r>
             <a:r>
               <a:rPr lang="en-US">
-                <a:hlinkClick r:id="rId16" tooltip="Project management" action="ppaction://hlinkfile"/>
+                <a:hlinkClick r:id="rId16" action="ppaction://hlinkfile" tooltip="Project management"/>
               </a:rPr>
               <a:t>project management</a:t>
             </a:r>
@@ -2124,7 +2125,7 @@
             </a:r>
             <a:r>
               <a:rPr lang="en-US">
-                <a:hlinkClick r:id="rId17" tooltip="Quality management" action="ppaction://hlinkfile"/>
+                <a:hlinkClick r:id="rId17" action="ppaction://hlinkfile" tooltip="Quality management"/>
               </a:rPr>
               <a:t>quality management</a:t>
             </a:r>
@@ -2134,7 +2135,7 @@
             </a:r>
             <a:r>
               <a:rPr lang="en-US">
-                <a:hlinkClick r:id="rId18" tooltip="Ergonomics" action="ppaction://hlinkfile"/>
+                <a:hlinkClick r:id="rId18" action="ppaction://hlinkfile" tooltip="Ergonomics"/>
               </a:rPr>
               <a:t>ergonomics</a:t>
             </a:r>
@@ -2144,7 +2145,7 @@
             </a:r>
             <a:r>
               <a:rPr lang="en-US">
-                <a:hlinkClick r:id="rId19" tooltip="Systems engineering" action="ppaction://hlinkfile"/>
+                <a:hlinkClick r:id="rId19" action="ppaction://hlinkfile" tooltip="Systems engineering"/>
               </a:rPr>
               <a:t>systems engineering</a:t>
             </a:r>
@@ -2300,6 +2301,7 @@
           <a:p>
             <a:fld id="{97989AEB-0172-4163-907A-0644FD1BC23F}" type="slidenum">
               <a:rPr lang="en-US" smtClean="0"/>
+              <a:t>7</a:t>
             </a:fld>
             <a:endParaRPr lang="en-US"/>
           </a:p>
@@ -2539,6 +2541,7 @@
           <a:p>
             <a:fld id="{C95BD9B2-E9EE-4A05-9F7C-A035C87EA3D1}" type="slidenum">
               <a:rPr lang="en-US" smtClean="0"/>
+              <a:t>19</a:t>
             </a:fld>
             <a:endParaRPr lang="en-US"/>
           </a:p>
@@ -2643,7 +2646,6 @@
               <a:rPr lang="en-US" dirty="0"/>
               <a:t>Each month, there are about 1-2 flight accidents involving use of flight safety equipment. </a:t>
             </a:r>
-            <a:endParaRPr lang="en-US" dirty="0"/>
           </a:p>
           <a:p>
             <a:pPr eaLnBrk="1" hangingPunct="1"/>
@@ -2655,7 +2657,6 @@
               <a:rPr lang="en-US" dirty="0"/>
               <a:t>The total number of flights scheduled to operate worldwide this month is 2.55 million, offering 306.9 million seats to travelers around the globe. </a:t>
             </a:r>
-            <a:endParaRPr lang="en-US" dirty="0"/>
           </a:p>
           <a:p>
             <a:pPr eaLnBrk="1" hangingPunct="1"/>
@@ -2667,7 +2668,6 @@
               <a:rPr lang="en-US" dirty="0"/>
               <a:t>http://portal.antara.co.id/en/arc/2008/5/16/slowdown-in-growth-rate-of-flights-worldwide/</a:t>
             </a:r>
-            <a:endParaRPr lang="en-US" dirty="0"/>
           </a:p>
           <a:p>
             <a:pPr eaLnBrk="1" hangingPunct="1"/>
@@ -2810,6 +2810,7 @@
           <a:p>
             <a:fld id="{3A2928E0-FC3A-4241-9402-C30252AEB309}" type="slidenum">
               <a:rPr lang="en-US" smtClean="0"/>
+              <a:t>21</a:t>
             </a:fld>
             <a:endParaRPr lang="en-US"/>
           </a:p>
@@ -2876,7 +2877,6 @@
               <a:rPr lang="en-US" dirty="0"/>
               <a:t>https://en.wikipedia.org/wiki/US_Airways_Flight_1549</a:t>
             </a:r>
-            <a:endParaRPr lang="en-US" dirty="0"/>
           </a:p>
           <a:p>
             <a:endParaRPr lang="en-US" dirty="0"/>
@@ -2889,7 +2889,6 @@
               <a:rPr lang="en-US" dirty="0"/>
               <a:t>https://www.youtube.com/watch?v=imDFSnklB0k</a:t>
             </a:r>
-            <a:endParaRPr lang="en-US" dirty="0"/>
           </a:p>
           <a:p>
             <a:endParaRPr lang="en-US" dirty="0"/>
@@ -2916,6 +2915,7 @@
             </a:pPr>
             <a:fld id="{C5ADAB1E-5BE0-4555-8709-524C8D586A6B}" type="slidenum">
               <a:rPr lang="en-US" smtClean="0"/>
+              <a:t>23</a:t>
             </a:fld>
             <a:endParaRPr lang="en-US"/>
           </a:p>
@@ -3006,6 +3006,7 @@
             </a:pPr>
             <a:fld id="{C5ADAB1E-5BE0-4555-8709-524C8D586A6B}" type="slidenum">
               <a:rPr lang="en-US" smtClean="0"/>
+              <a:t>25</a:t>
             </a:fld>
             <a:endParaRPr lang="en-US"/>
           </a:p>
@@ -3127,7 +3128,6 @@
               <a:rPr lang="zh-CN" altLang="en-US" dirty="0"/>
               <a:t>）其他方面的知识</a:t>
             </a:r>
-            <a:endParaRPr lang="zh-CN" altLang="en-US" dirty="0"/>
           </a:p>
         </p:txBody>
       </p:sp>
@@ -3151,6 +3151,7 @@
             </a:pPr>
             <a:fld id="{C5ADAB1E-5BE0-4555-8709-524C8D586A6B}" type="slidenum">
               <a:rPr lang="en-US" smtClean="0"/>
+              <a:t>28</a:t>
             </a:fld>
             <a:endParaRPr lang="en-US"/>
           </a:p>
@@ -3233,7 +3234,6 @@
               <a:rPr lang="zh-CN" altLang="en-US" dirty="0"/>
               <a:t>软件的这些本质特性让 “做一个好软件”变得很难，同时也让软件工程有它独特的挑战和魅力。</a:t>
             </a:r>
-            <a:endParaRPr lang="zh-CN" altLang="en-US" dirty="0"/>
           </a:p>
           <a:p>
             <a:endParaRPr lang="en-US" dirty="0"/>
@@ -3260,6 +3260,7 @@
             </a:pPr>
             <a:fld id="{C5ADAB1E-5BE0-4555-8709-524C8D586A6B}" type="slidenum">
               <a:rPr lang="en-US" smtClean="0"/>
+              <a:t>31</a:t>
             </a:fld>
             <a:endParaRPr lang="en-US"/>
           </a:p>
@@ -3469,6 +3470,7 @@
           <a:p>
             <a:fld id="{48A87A34-81AB-432B-8DAE-1953F412C126}" type="datetimeFigureOut">
               <a:rPr lang="en-US" smtClean="0"/>
+              <a:t>5/26/2026</a:t>
             </a:fld>
             <a:endParaRPr lang="en-US" dirty="0"/>
           </a:p>
@@ -3510,6 +3512,7 @@
           <a:p>
             <a:fld id="{6D22F896-40B5-4ADD-8801-0D06FADFA095}" type="slidenum">
               <a:rPr lang="en-US" smtClean="0"/>
+              <a:t>‹#›</a:t>
             </a:fld>
             <a:endParaRPr lang="en-US" dirty="0"/>
           </a:p>
@@ -3723,7 +3726,6 @@
               <a:rPr lang="en-US"/>
               <a:t>Edit Master text styles</a:t>
             </a:r>
-            <a:endParaRPr lang="en-US"/>
           </a:p>
         </p:txBody>
       </p:sp>
@@ -3744,6 +3746,7 @@
           <a:p>
             <a:fld id="{48A87A34-81AB-432B-8DAE-1953F412C126}" type="datetimeFigureOut">
               <a:rPr lang="en-US" smtClean="0"/>
+              <a:t>5/26/2026</a:t>
             </a:fld>
             <a:endParaRPr lang="en-US" dirty="0"/>
           </a:p>
@@ -3785,6 +3788,7 @@
           <a:p>
             <a:fld id="{6D22F896-40B5-4ADD-8801-0D06FADFA095}" type="slidenum">
               <a:rPr lang="en-US" smtClean="0"/>
+              <a:t>‹#›</a:t>
             </a:fld>
             <a:endParaRPr lang="en-US" dirty="0"/>
           </a:p>
@@ -3909,7 +3913,6 @@
               <a:rPr lang="en-US"/>
               <a:t>Edit Master text styles</a:t>
             </a:r>
-            <a:endParaRPr lang="en-US"/>
           </a:p>
         </p:txBody>
       </p:sp>
@@ -3930,6 +3933,7 @@
           <a:p>
             <a:fld id="{48A87A34-81AB-432B-8DAE-1953F412C126}" type="datetimeFigureOut">
               <a:rPr lang="en-US" smtClean="0"/>
+              <a:t>5/26/2026</a:t>
             </a:fld>
             <a:endParaRPr lang="en-US" dirty="0"/>
           </a:p>
@@ -3971,6 +3975,7 @@
           <a:p>
             <a:fld id="{6D22F896-40B5-4ADD-8801-0D06FADFA095}" type="slidenum">
               <a:rPr lang="en-US" smtClean="0"/>
+              <a:t>‹#›</a:t>
             </a:fld>
             <a:endParaRPr lang="en-US" dirty="0"/>
           </a:p>
@@ -4097,7 +4102,6 @@
               <a:rPr lang="en-US"/>
               <a:t>Edit Master text styles</a:t>
             </a:r>
-            <a:endParaRPr lang="en-US"/>
           </a:p>
         </p:txBody>
       </p:sp>
@@ -4165,7 +4169,6 @@
               <a:rPr lang="en-US"/>
               <a:t>Edit Master text styles</a:t>
             </a:r>
-            <a:endParaRPr lang="en-US"/>
           </a:p>
         </p:txBody>
       </p:sp>
@@ -4186,6 +4189,7 @@
           <a:p>
             <a:fld id="{48A87A34-81AB-432B-8DAE-1953F412C126}" type="datetimeFigureOut">
               <a:rPr lang="en-US" smtClean="0"/>
+              <a:t>5/26/2026</a:t>
             </a:fld>
             <a:endParaRPr lang="en-US" dirty="0"/>
           </a:p>
@@ -4227,6 +4231,7 @@
           <a:p>
             <a:fld id="{6D22F896-40B5-4ADD-8801-0D06FADFA095}" type="slidenum">
               <a:rPr lang="en-US" smtClean="0"/>
+              <a:t>‹#›</a:t>
             </a:fld>
             <a:endParaRPr lang="en-US" dirty="0"/>
           </a:p>
@@ -4345,12 +4350,6 @@
               </a:rPr>
               <a:t>“</a:t>
             </a:r>
-            <a:endParaRPr lang="en-US" sz="8000" dirty="0">
-              <a:solidFill>
-                <a:schemeClr val="tx1"/>
-              </a:solidFill>
-              <a:effectLst/>
-            </a:endParaRPr>
           </a:p>
         </p:txBody>
       </p:sp>
@@ -4467,12 +4466,6 @@
               </a:rPr>
               <a:t>”</a:t>
             </a:r>
-            <a:endParaRPr lang="en-US" sz="8000" dirty="0">
-              <a:solidFill>
-                <a:schemeClr val="tx1"/>
-              </a:solidFill>
-              <a:effectLst/>
-            </a:endParaRPr>
           </a:p>
         </p:txBody>
       </p:sp>
@@ -4597,7 +4590,6 @@
               <a:rPr lang="en-US"/>
               <a:t>Edit Master text styles</a:t>
             </a:r>
-            <a:endParaRPr lang="en-US"/>
           </a:p>
         </p:txBody>
       </p:sp>
@@ -4618,6 +4610,7 @@
           <a:p>
             <a:fld id="{48A87A34-81AB-432B-8DAE-1953F412C126}" type="datetimeFigureOut">
               <a:rPr lang="en-US" smtClean="0"/>
+              <a:t>5/26/2026</a:t>
             </a:fld>
             <a:endParaRPr lang="en-US" dirty="0"/>
           </a:p>
@@ -4659,6 +4652,7 @@
           <a:p>
             <a:fld id="{6D22F896-40B5-4ADD-8801-0D06FADFA095}" type="slidenum">
               <a:rPr lang="en-US" smtClean="0"/>
+              <a:t>‹#›</a:t>
             </a:fld>
             <a:endParaRPr lang="en-US" dirty="0"/>
           </a:p>
@@ -4808,7 +4802,6 @@
               <a:rPr lang="en-US"/>
               <a:t>Edit Master text styles</a:t>
             </a:r>
-            <a:endParaRPr lang="en-US"/>
           </a:p>
         </p:txBody>
       </p:sp>
@@ -4876,7 +4869,6 @@
               <a:rPr lang="en-US"/>
               <a:t>Edit Master text styles</a:t>
             </a:r>
-            <a:endParaRPr lang="en-US"/>
           </a:p>
         </p:txBody>
       </p:sp>
@@ -4941,7 +4933,6 @@
               <a:rPr lang="en-US"/>
               <a:t>Edit Master text styles</a:t>
             </a:r>
-            <a:endParaRPr lang="en-US"/>
           </a:p>
         </p:txBody>
       </p:sp>
@@ -5009,7 +5000,6 @@
               <a:rPr lang="en-US"/>
               <a:t>Edit Master text styles</a:t>
             </a:r>
-            <a:endParaRPr lang="en-US"/>
           </a:p>
         </p:txBody>
       </p:sp>
@@ -5074,7 +5064,6 @@
               <a:rPr lang="en-US"/>
               <a:t>Edit Master text styles</a:t>
             </a:r>
-            <a:endParaRPr lang="en-US"/>
           </a:p>
         </p:txBody>
       </p:sp>
@@ -5142,7 +5131,6 @@
               <a:rPr lang="en-US"/>
               <a:t>Edit Master text styles</a:t>
             </a:r>
-            <a:endParaRPr lang="en-US"/>
           </a:p>
         </p:txBody>
       </p:sp>
@@ -5163,6 +5151,7 @@
           <a:p>
             <a:fld id="{48A87A34-81AB-432B-8DAE-1953F412C126}" type="datetimeFigureOut">
               <a:rPr lang="en-US" smtClean="0"/>
+              <a:t>5/26/2026</a:t>
             </a:fld>
             <a:endParaRPr lang="en-US" dirty="0"/>
           </a:p>
@@ -5204,6 +5193,7 @@
           <a:p>
             <a:fld id="{6D22F896-40B5-4ADD-8801-0D06FADFA095}" type="slidenum">
               <a:rPr lang="en-US" smtClean="0"/>
+              <a:t>‹#›</a:t>
             </a:fld>
             <a:endParaRPr lang="en-US" dirty="0"/>
           </a:p>
@@ -5349,7 +5339,6 @@
               <a:rPr lang="en-US"/>
               <a:t>Edit Master text styles</a:t>
             </a:r>
-            <a:endParaRPr lang="en-US"/>
           </a:p>
         </p:txBody>
       </p:sp>
@@ -5496,7 +5485,6 @@
               <a:rPr lang="en-US"/>
               <a:t>Edit Master text styles</a:t>
             </a:r>
-            <a:endParaRPr lang="en-US"/>
           </a:p>
         </p:txBody>
       </p:sp>
@@ -5587,7 +5575,6 @@
               <a:rPr lang="en-US"/>
               <a:t>Edit Master text styles</a:t>
             </a:r>
-            <a:endParaRPr lang="en-US"/>
           </a:p>
         </p:txBody>
       </p:sp>
@@ -5734,7 +5721,6 @@
               <a:rPr lang="en-US"/>
               <a:t>Edit Master text styles</a:t>
             </a:r>
-            <a:endParaRPr lang="en-US"/>
           </a:p>
         </p:txBody>
       </p:sp>
@@ -5825,7 +5811,6 @@
               <a:rPr lang="en-US"/>
               <a:t>Edit Master text styles</a:t>
             </a:r>
-            <a:endParaRPr lang="en-US"/>
           </a:p>
         </p:txBody>
       </p:sp>
@@ -5972,7 +5957,6 @@
               <a:rPr lang="en-US"/>
               <a:t>Edit Master text styles</a:t>
             </a:r>
-            <a:endParaRPr lang="en-US"/>
           </a:p>
         </p:txBody>
       </p:sp>
@@ -5993,6 +5977,7 @@
           <a:p>
             <a:fld id="{48A87A34-81AB-432B-8DAE-1953F412C126}" type="datetimeFigureOut">
               <a:rPr lang="en-US" smtClean="0"/>
+              <a:t>5/26/2026</a:t>
             </a:fld>
             <a:endParaRPr lang="en-US" dirty="0"/>
           </a:p>
@@ -6034,6 +6019,7 @@
           <a:p>
             <a:fld id="{6D22F896-40B5-4ADD-8801-0D06FADFA095}" type="slidenum">
               <a:rPr lang="en-US" smtClean="0"/>
+              <a:t>‹#›</a:t>
             </a:fld>
             <a:endParaRPr lang="en-US" dirty="0"/>
           </a:p>
@@ -6107,7 +6093,6 @@
               <a:rPr lang="en-US"/>
               <a:t>Edit Master text styles</a:t>
             </a:r>
-            <a:endParaRPr lang="en-US"/>
           </a:p>
           <a:p>
             <a:pPr lvl="1"/>
@@ -6115,7 +6100,6 @@
               <a:rPr lang="en-US"/>
               <a:t>Second level</a:t>
             </a:r>
-            <a:endParaRPr lang="en-US"/>
           </a:p>
           <a:p>
             <a:pPr lvl="2"/>
@@ -6123,7 +6107,6 @@
               <a:rPr lang="en-US"/>
               <a:t>Third level</a:t>
             </a:r>
-            <a:endParaRPr lang="en-US"/>
           </a:p>
           <a:p>
             <a:pPr lvl="3"/>
@@ -6131,7 +6114,6 @@
               <a:rPr lang="en-US"/>
               <a:t>Fourth level</a:t>
             </a:r>
-            <a:endParaRPr lang="en-US"/>
           </a:p>
           <a:p>
             <a:pPr lvl="4"/>
@@ -6160,6 +6142,7 @@
           <a:p>
             <a:fld id="{48A87A34-81AB-432B-8DAE-1953F412C126}" type="datetimeFigureOut">
               <a:rPr lang="en-US" smtClean="0"/>
+              <a:t>5/26/2026</a:t>
             </a:fld>
             <a:endParaRPr lang="en-US" dirty="0"/>
           </a:p>
@@ -6201,6 +6184,7 @@
           <a:p>
             <a:fld id="{6D22F896-40B5-4ADD-8801-0D06FADFA095}" type="slidenum">
               <a:rPr lang="en-US" smtClean="0"/>
+              <a:t>‹#›</a:t>
             </a:fld>
             <a:endParaRPr lang="en-US" dirty="0"/>
           </a:p>
@@ -6284,7 +6268,6 @@
               <a:rPr lang="en-US"/>
               <a:t>Edit Master text styles</a:t>
             </a:r>
-            <a:endParaRPr lang="en-US"/>
           </a:p>
           <a:p>
             <a:pPr lvl="1"/>
@@ -6292,7 +6275,6 @@
               <a:rPr lang="en-US"/>
               <a:t>Second level</a:t>
             </a:r>
-            <a:endParaRPr lang="en-US"/>
           </a:p>
           <a:p>
             <a:pPr lvl="2"/>
@@ -6300,7 +6282,6 @@
               <a:rPr lang="en-US"/>
               <a:t>Third level</a:t>
             </a:r>
-            <a:endParaRPr lang="en-US"/>
           </a:p>
           <a:p>
             <a:pPr lvl="3"/>
@@ -6308,7 +6289,6 @@
               <a:rPr lang="en-US"/>
               <a:t>Fourth level</a:t>
             </a:r>
-            <a:endParaRPr lang="en-US"/>
           </a:p>
           <a:p>
             <a:pPr lvl="4"/>
@@ -6337,6 +6317,7 @@
           <a:p>
             <a:fld id="{48A87A34-81AB-432B-8DAE-1953F412C126}" type="datetimeFigureOut">
               <a:rPr lang="en-US" smtClean="0"/>
+              <a:t>5/26/2026</a:t>
             </a:fld>
             <a:endParaRPr lang="en-US" dirty="0"/>
           </a:p>
@@ -6378,6 +6359,7 @@
           <a:p>
             <a:fld id="{6D22F896-40B5-4ADD-8801-0D06FADFA095}" type="slidenum">
               <a:rPr lang="en-US" smtClean="0"/>
+              <a:t>‹#›</a:t>
             </a:fld>
             <a:endParaRPr lang="en-US" dirty="0"/>
           </a:p>
@@ -6451,7 +6433,6 @@
               <a:rPr lang="en-US"/>
               <a:t>Edit Master text styles</a:t>
             </a:r>
-            <a:endParaRPr lang="en-US"/>
           </a:p>
           <a:p>
             <a:pPr lvl="1"/>
@@ -6459,7 +6440,6 @@
               <a:rPr lang="en-US"/>
               <a:t>Second level</a:t>
             </a:r>
-            <a:endParaRPr lang="en-US"/>
           </a:p>
           <a:p>
             <a:pPr lvl="2"/>
@@ -6467,7 +6447,6 @@
               <a:rPr lang="en-US"/>
               <a:t>Third level</a:t>
             </a:r>
-            <a:endParaRPr lang="en-US"/>
           </a:p>
           <a:p>
             <a:pPr lvl="3"/>
@@ -6475,7 +6454,6 @@
               <a:rPr lang="en-US"/>
               <a:t>Fourth level</a:t>
             </a:r>
-            <a:endParaRPr lang="en-US"/>
           </a:p>
           <a:p>
             <a:pPr lvl="4"/>
@@ -6504,6 +6482,7 @@
           <a:p>
             <a:fld id="{48A87A34-81AB-432B-8DAE-1953F412C126}" type="datetimeFigureOut">
               <a:rPr lang="en-US" smtClean="0"/>
+              <a:t>5/26/2026</a:t>
             </a:fld>
             <a:endParaRPr lang="en-US" dirty="0"/>
           </a:p>
@@ -6545,6 +6524,7 @@
           <a:p>
             <a:fld id="{6D22F896-40B5-4ADD-8801-0D06FADFA095}" type="slidenum">
               <a:rPr lang="en-US" smtClean="0"/>
+              <a:t>‹#›</a:t>
             </a:fld>
             <a:endParaRPr lang="en-US" dirty="0"/>
           </a:p>
@@ -6754,6 +6734,7 @@
           <a:p>
             <a:fld id="{48A87A34-81AB-432B-8DAE-1953F412C126}" type="datetimeFigureOut">
               <a:rPr lang="en-US" smtClean="0"/>
+              <a:t>5/26/2026</a:t>
             </a:fld>
             <a:endParaRPr lang="en-US" dirty="0"/>
           </a:p>
@@ -6795,6 +6776,7 @@
           <a:p>
             <a:fld id="{6D22F896-40B5-4ADD-8801-0D06FADFA095}" type="slidenum">
               <a:rPr lang="en-US" smtClean="0"/>
+              <a:t>‹#›</a:t>
             </a:fld>
             <a:endParaRPr lang="en-US" dirty="0"/>
           </a:p>
@@ -6873,7 +6855,6 @@
               <a:rPr lang="en-US"/>
               <a:t>Edit Master text styles</a:t>
             </a:r>
-            <a:endParaRPr lang="en-US"/>
           </a:p>
           <a:p>
             <a:pPr lvl="1"/>
@@ -6881,7 +6862,6 @@
               <a:rPr lang="en-US"/>
               <a:t>Second level</a:t>
             </a:r>
-            <a:endParaRPr lang="en-US"/>
           </a:p>
           <a:p>
             <a:pPr lvl="2"/>
@@ -6889,7 +6869,6 @@
               <a:rPr lang="en-US"/>
               <a:t>Third level</a:t>
             </a:r>
-            <a:endParaRPr lang="en-US"/>
           </a:p>
           <a:p>
             <a:pPr lvl="3"/>
@@ -6897,7 +6876,6 @@
               <a:rPr lang="en-US"/>
               <a:t>Fourth level</a:t>
             </a:r>
-            <a:endParaRPr lang="en-US"/>
           </a:p>
           <a:p>
             <a:pPr lvl="4"/>
@@ -6934,7 +6912,6 @@
               <a:rPr lang="en-US"/>
               <a:t>Edit Master text styles</a:t>
             </a:r>
-            <a:endParaRPr lang="en-US"/>
           </a:p>
           <a:p>
             <a:pPr lvl="1"/>
@@ -6942,7 +6919,6 @@
               <a:rPr lang="en-US"/>
               <a:t>Second level</a:t>
             </a:r>
-            <a:endParaRPr lang="en-US"/>
           </a:p>
           <a:p>
             <a:pPr lvl="2"/>
@@ -6950,7 +6926,6 @@
               <a:rPr lang="en-US"/>
               <a:t>Third level</a:t>
             </a:r>
-            <a:endParaRPr lang="en-US"/>
           </a:p>
           <a:p>
             <a:pPr lvl="3"/>
@@ -6958,7 +6933,6 @@
               <a:rPr lang="en-US"/>
               <a:t>Fourth level</a:t>
             </a:r>
-            <a:endParaRPr lang="en-US"/>
           </a:p>
           <a:p>
             <a:pPr lvl="4"/>
@@ -6987,6 +6961,7 @@
           <a:p>
             <a:fld id="{48A87A34-81AB-432B-8DAE-1953F412C126}" type="datetimeFigureOut">
               <a:rPr lang="en-US" smtClean="0"/>
+              <a:t>5/26/2026</a:t>
             </a:fld>
             <a:endParaRPr lang="en-US" dirty="0"/>
           </a:p>
@@ -7028,6 +7003,7 @@
           <a:p>
             <a:fld id="{6D22F896-40B5-4ADD-8801-0D06FADFA095}" type="slidenum">
               <a:rPr lang="en-US" smtClean="0"/>
+              <a:t>‹#›</a:t>
             </a:fld>
             <a:endParaRPr lang="en-US" dirty="0"/>
           </a:p>
@@ -7175,7 +7151,6 @@
               <a:rPr lang="en-US"/>
               <a:t>Edit Master text styles</a:t>
             </a:r>
-            <a:endParaRPr lang="en-US"/>
           </a:p>
         </p:txBody>
       </p:sp>
@@ -7204,7 +7179,6 @@
               <a:rPr lang="en-US"/>
               <a:t>Edit Master text styles</a:t>
             </a:r>
-            <a:endParaRPr lang="en-US"/>
           </a:p>
           <a:p>
             <a:pPr lvl="1"/>
@@ -7212,7 +7186,6 @@
               <a:rPr lang="en-US"/>
               <a:t>Second level</a:t>
             </a:r>
-            <a:endParaRPr lang="en-US"/>
           </a:p>
           <a:p>
             <a:pPr lvl="2"/>
@@ -7220,7 +7193,6 @@
               <a:rPr lang="en-US"/>
               <a:t>Third level</a:t>
             </a:r>
-            <a:endParaRPr lang="en-US"/>
           </a:p>
           <a:p>
             <a:pPr lvl="3"/>
@@ -7228,7 +7200,6 @@
               <a:rPr lang="en-US"/>
               <a:t>Fourth level</a:t>
             </a:r>
-            <a:endParaRPr lang="en-US"/>
           </a:p>
           <a:p>
             <a:pPr lvl="4"/>
@@ -7301,7 +7272,6 @@
               <a:rPr lang="en-US"/>
               <a:t>Edit Master text styles</a:t>
             </a:r>
-            <a:endParaRPr lang="en-US"/>
           </a:p>
         </p:txBody>
       </p:sp>
@@ -7330,7 +7300,6 @@
               <a:rPr lang="en-US"/>
               <a:t>Edit Master text styles</a:t>
             </a:r>
-            <a:endParaRPr lang="en-US"/>
           </a:p>
           <a:p>
             <a:pPr lvl="1"/>
@@ -7338,7 +7307,6 @@
               <a:rPr lang="en-US"/>
               <a:t>Second level</a:t>
             </a:r>
-            <a:endParaRPr lang="en-US"/>
           </a:p>
           <a:p>
             <a:pPr lvl="2"/>
@@ -7346,7 +7314,6 @@
               <a:rPr lang="en-US"/>
               <a:t>Third level</a:t>
             </a:r>
-            <a:endParaRPr lang="en-US"/>
           </a:p>
           <a:p>
             <a:pPr lvl="3"/>
@@ -7354,7 +7321,6 @@
               <a:rPr lang="en-US"/>
               <a:t>Fourth level</a:t>
             </a:r>
-            <a:endParaRPr lang="en-US"/>
           </a:p>
           <a:p>
             <a:pPr lvl="4"/>
@@ -7383,6 +7349,7 @@
           <a:p>
             <a:fld id="{48A87A34-81AB-432B-8DAE-1953F412C126}" type="datetimeFigureOut">
               <a:rPr lang="en-US" smtClean="0"/>
+              <a:t>5/26/2026</a:t>
             </a:fld>
             <a:endParaRPr lang="en-US" dirty="0"/>
           </a:p>
@@ -7424,6 +7391,7 @@
           <a:p>
             <a:fld id="{6D22F896-40B5-4ADD-8801-0D06FADFA095}" type="slidenum">
               <a:rPr lang="en-US" smtClean="0"/>
+              <a:t>‹#›</a:t>
             </a:fld>
             <a:endParaRPr lang="en-US" dirty="0"/>
           </a:p>
@@ -7494,6 +7462,7 @@
           <a:p>
             <a:fld id="{48A87A34-81AB-432B-8DAE-1953F412C126}" type="datetimeFigureOut">
               <a:rPr lang="en-US" smtClean="0"/>
+              <a:t>5/26/2026</a:t>
             </a:fld>
             <a:endParaRPr lang="en-US" dirty="0"/>
           </a:p>
@@ -7535,6 +7504,7 @@
           <a:p>
             <a:fld id="{6D22F896-40B5-4ADD-8801-0D06FADFA095}" type="slidenum">
               <a:rPr lang="en-US" smtClean="0"/>
+              <a:t>‹#›</a:t>
             </a:fld>
             <a:endParaRPr lang="en-US" dirty="0"/>
           </a:p>
@@ -7582,6 +7552,7 @@
           <a:p>
             <a:fld id="{48A87A34-81AB-432B-8DAE-1953F412C126}" type="datetimeFigureOut">
               <a:rPr lang="en-US" smtClean="0"/>
+              <a:t>5/26/2026</a:t>
             </a:fld>
             <a:endParaRPr lang="en-US" dirty="0"/>
           </a:p>
@@ -7623,6 +7594,7 @@
           <a:p>
             <a:fld id="{6D22F896-40B5-4ADD-8801-0D06FADFA095}" type="slidenum">
               <a:rPr lang="en-US" smtClean="0"/>
+              <a:t>‹#›</a:t>
             </a:fld>
             <a:endParaRPr lang="en-US" dirty="0"/>
           </a:p>
@@ -7710,7 +7682,6 @@
               <a:rPr lang="en-US"/>
               <a:t>Edit Master text styles</a:t>
             </a:r>
-            <a:endParaRPr lang="en-US"/>
           </a:p>
           <a:p>
             <a:pPr lvl="1"/>
@@ -7718,7 +7689,6 @@
               <a:rPr lang="en-US"/>
               <a:t>Second level</a:t>
             </a:r>
-            <a:endParaRPr lang="en-US"/>
           </a:p>
           <a:p>
             <a:pPr lvl="2"/>
@@ -7726,7 +7696,6 @@
               <a:rPr lang="en-US"/>
               <a:t>Third level</a:t>
             </a:r>
-            <a:endParaRPr lang="en-US"/>
           </a:p>
           <a:p>
             <a:pPr lvl="3"/>
@@ -7734,7 +7703,6 @@
               <a:rPr lang="en-US"/>
               <a:t>Fourth level</a:t>
             </a:r>
-            <a:endParaRPr lang="en-US"/>
           </a:p>
           <a:p>
             <a:pPr lvl="4"/>
@@ -7832,7 +7800,6 @@
               <a:rPr lang="en-US"/>
               <a:t>Edit Master text styles</a:t>
             </a:r>
-            <a:endParaRPr lang="en-US"/>
           </a:p>
         </p:txBody>
       </p:sp>
@@ -7853,6 +7820,7 @@
           <a:p>
             <a:fld id="{48A87A34-81AB-432B-8DAE-1953F412C126}" type="datetimeFigureOut">
               <a:rPr lang="en-US" smtClean="0"/>
+              <a:t>5/26/2026</a:t>
             </a:fld>
             <a:endParaRPr lang="en-US" dirty="0"/>
           </a:p>
@@ -7894,6 +7862,7 @@
           <a:p>
             <a:fld id="{6D22F896-40B5-4ADD-8801-0D06FADFA095}" type="slidenum">
               <a:rPr lang="en-US" smtClean="0"/>
+              <a:t>‹#›</a:t>
             </a:fld>
             <a:endParaRPr lang="en-US" dirty="0"/>
           </a:p>
@@ -8107,7 +8076,6 @@
               <a:rPr lang="en-US"/>
               <a:t>Edit Master text styles</a:t>
             </a:r>
-            <a:endParaRPr lang="en-US"/>
           </a:p>
         </p:txBody>
       </p:sp>
@@ -8128,6 +8096,7 @@
           <a:p>
             <a:fld id="{48A87A34-81AB-432B-8DAE-1953F412C126}" type="datetimeFigureOut">
               <a:rPr lang="en-US" smtClean="0"/>
+              <a:t>5/26/2026</a:t>
             </a:fld>
             <a:endParaRPr lang="en-US" dirty="0"/>
           </a:p>
@@ -8169,6 +8138,7 @@
           <a:p>
             <a:fld id="{6D22F896-40B5-4ADD-8801-0D06FADFA095}" type="slidenum">
               <a:rPr lang="en-US" smtClean="0"/>
+              <a:t>‹#›</a:t>
             </a:fld>
             <a:endParaRPr lang="en-US" dirty="0"/>
           </a:p>
@@ -8188,7 +8158,7 @@
     <p:bg>
       <p:bgPr>
         <a:blipFill dpi="0" rotWithShape="1">
-          <a:blip r:embed="rId18">
+          <a:blip r:embed="rId19">
             <a:lum/>
           </a:blip>
           <a:srcRect/>
@@ -8276,7 +8246,6 @@
               <a:rPr lang="en-US"/>
               <a:t>Edit Master text styles</a:t>
             </a:r>
-            <a:endParaRPr lang="en-US"/>
           </a:p>
           <a:p>
             <a:pPr lvl="1"/>
@@ -8284,7 +8253,6 @@
               <a:rPr lang="en-US"/>
               <a:t>Second level</a:t>
             </a:r>
-            <a:endParaRPr lang="en-US"/>
           </a:p>
           <a:p>
             <a:pPr lvl="2"/>
@@ -8292,7 +8260,6 @@
               <a:rPr lang="en-US"/>
               <a:t>Third level</a:t>
             </a:r>
-            <a:endParaRPr lang="en-US"/>
           </a:p>
           <a:p>
             <a:pPr lvl="3"/>
@@ -8300,7 +8267,6 @@
               <a:rPr lang="en-US"/>
               <a:t>Fourth level</a:t>
             </a:r>
-            <a:endParaRPr lang="en-US"/>
           </a:p>
           <a:p>
             <a:pPr lvl="4"/>
@@ -8365,6 +8331,7 @@
           <a:p>
             <a:fld id="{48A87A34-81AB-432B-8DAE-1953F412C126}" type="datetimeFigureOut">
               <a:rPr lang="en-US" smtClean="0"/>
+              <a:t>5/26/2026</a:t>
             </a:fld>
             <a:endParaRPr lang="en-US" dirty="0"/>
           </a:p>
@@ -8478,6 +8445,7 @@
           <a:p>
             <a:fld id="{6D22F896-40B5-4ADD-8801-0D06FADFA095}" type="slidenum">
               <a:rPr lang="en-US" smtClean="0"/>
+              <a:t>‹#›</a:t>
             </a:fld>
             <a:endParaRPr lang="en-US" dirty="0"/>
           </a:p>
@@ -9016,7 +8984,7 @@
               <a:rPr lang="en-US" altLang="zh-CN" sz="4000" dirty="0">
                 <a:ea typeface="黑体" panose="02010609060101010101" pitchFamily="49" charset="-122"/>
               </a:rPr>
-              <a:t>2019</a:t>
+              <a:t>2026</a:t>
             </a:r>
             <a:endParaRPr lang="zh-CN" altLang="en-US" sz="4000" dirty="0">
               <a:ea typeface="黑体" panose="02010609060101010101" pitchFamily="49" charset="-122"/>
@@ -9098,7 +9066,6 @@
               <a:rPr lang="zh-CN" altLang="en-US" dirty="0"/>
               <a:t>软件开发流程的目的是为了提高 软件开发、运营、维护的效率，并提高软件的质量、用户满意度、可靠性和软件的可维护性。</a:t>
             </a:r>
-            <a:endParaRPr lang="zh-CN" altLang="en-US" dirty="0"/>
           </a:p>
           <a:p>
             <a:endParaRPr lang="en-US" dirty="0"/>
@@ -9154,7 +9121,6 @@
               <a:rPr lang="en-US" dirty="0"/>
               <a:t>?</a:t>
             </a:r>
-            <a:endParaRPr lang="en-US" dirty="0"/>
           </a:p>
         </p:txBody>
       </p:sp>
@@ -9204,7 +9170,6 @@
               <a:rPr lang="en-US" dirty="0"/>
               <a:t>The effort is necessitated by the potential complexity of those systems, which may contain millions of lines of code.</a:t>
             </a:r>
-            <a:endParaRPr lang="en-US" dirty="0"/>
           </a:p>
           <a:p>
             <a:pPr eaLnBrk="1" hangingPunct="1"/>
@@ -9220,7 +9185,6 @@
               <a:rPr lang="en-US" dirty="0"/>
               <a:t>Millions of dollars, people’s life, business depends on it. </a:t>
             </a:r>
-            <a:endParaRPr lang="en-US" dirty="0"/>
           </a:p>
           <a:p>
             <a:pPr eaLnBrk="1" hangingPunct="1">
@@ -9308,8 +9272,20 @@
                 <a:tableStyleId>{5C22544A-7EE6-4342-B048-85BDC9FD1C3A}</a:tableStyleId>
               </a:tblPr>
               <a:tblGrid>
-                <a:gridCol w="7238999"/>
-                <a:gridCol w="1066804"/>
+                <a:gridCol w="7238999">
+                  <a:extLst>
+                    <a:ext uri="{9D8B030D-6E8A-4147-A177-3AD203B41FA5}">
+                      <a16:colId xmlns:a16="http://schemas.microsoft.com/office/drawing/2014/main" val="20000"/>
+                    </a:ext>
+                  </a:extLst>
+                </a:gridCol>
+                <a:gridCol w="1066804">
+                  <a:extLst>
+                    <a:ext uri="{9D8B030D-6E8A-4147-A177-3AD203B41FA5}">
+                      <a16:colId xmlns:a16="http://schemas.microsoft.com/office/drawing/2014/main" val="20001"/>
+                    </a:ext>
+                  </a:extLst>
+                </a:gridCol>
               </a:tblGrid>
               <a:tr h="370840">
                 <a:tc>
@@ -9321,7 +9297,6 @@
                         <a:rPr lang="en-US" dirty="0"/>
                         <a:t>Programming</a:t>
                       </a:r>
-                      <a:endParaRPr lang="en-US" dirty="0"/>
                     </a:p>
                   </a:txBody>
                   <a:tcPr/>
@@ -9344,6 +9319,11 @@
                   </a:txBody>
                   <a:tcPr/>
                 </a:tc>
+                <a:extLst>
+                  <a:ext uri="{0D108BD9-81ED-4DB2-BD59-A6C34878D82A}">
+                    <a16:rowId xmlns:a16="http://schemas.microsoft.com/office/drawing/2014/main" val="10000"/>
+                  </a:ext>
+                </a:extLst>
               </a:tr>
               <a:tr h="370840">
                 <a:tc>
@@ -9366,7 +9346,6 @@
                         <a:rPr lang="en-US" dirty="0"/>
                         <a:t>Children’s toy </a:t>
                       </a:r>
-                      <a:endParaRPr lang="en-US" dirty="0"/>
                     </a:p>
                     <a:p>
                       <a:pPr marL="640080" lvl="1" indent="-247015" eaLnBrk="1" fontAlgn="auto" hangingPunct="1">
@@ -9381,7 +9360,6 @@
                         <a:rPr lang="en-US" dirty="0"/>
                         <a:t>Write a “hello world” in a new language</a:t>
                       </a:r>
-                      <a:endParaRPr lang="en-US" dirty="0"/>
                     </a:p>
                     <a:p>
                       <a:pPr marL="640080" lvl="1" indent="-247015" eaLnBrk="1" fontAlgn="auto" hangingPunct="1">
@@ -9396,7 +9374,6 @@
                         <a:rPr lang="en-US" dirty="0"/>
                         <a:t>Time: one afternoon</a:t>
                       </a:r>
-                      <a:endParaRPr lang="en-US" dirty="0"/>
                     </a:p>
                   </a:txBody>
                   <a:tcPr/>
@@ -9411,6 +9388,11 @@
                   </a:txBody>
                   <a:tcPr/>
                 </a:tc>
+                <a:extLst>
+                  <a:ext uri="{0D108BD9-81ED-4DB2-BD59-A6C34878D82A}">
+                    <a16:rowId xmlns:a16="http://schemas.microsoft.com/office/drawing/2014/main" val="10001"/>
+                  </a:ext>
+                </a:extLst>
               </a:tr>
               <a:tr h="370840">
                 <a:tc>
@@ -9433,7 +9415,6 @@
                         <a:rPr lang="en-US" dirty="0"/>
                         <a:t>Hobbyist</a:t>
                       </a:r>
-                      <a:endParaRPr lang="en-US" dirty="0"/>
                     </a:p>
                     <a:p>
                       <a:pPr marL="640080" lvl="1" indent="-247015" eaLnBrk="1" fontAlgn="auto" hangingPunct="1">
@@ -9448,7 +9429,6 @@
                         <a:rPr lang="en-US" dirty="0"/>
                         <a:t>Try something new and cool in Perl, Python, Asp.net, etc. </a:t>
                       </a:r>
-                      <a:endParaRPr lang="en-US" dirty="0"/>
                     </a:p>
                     <a:p>
                       <a:pPr marL="640080" lvl="1" indent="-247015" eaLnBrk="1" fontAlgn="auto" hangingPunct="1">
@@ -9463,7 +9443,6 @@
                         <a:rPr lang="en-US" dirty="0"/>
                         <a:t>Time: a couple of days</a:t>
                       </a:r>
-                      <a:endParaRPr lang="en-US" dirty="0"/>
                     </a:p>
                   </a:txBody>
                   <a:tcPr/>
@@ -9478,6 +9457,11 @@
                   </a:txBody>
                   <a:tcPr/>
                 </a:tc>
+                <a:extLst>
+                  <a:ext uri="{0D108BD9-81ED-4DB2-BD59-A6C34878D82A}">
+                    <a16:rowId xmlns:a16="http://schemas.microsoft.com/office/drawing/2014/main" val="10002"/>
+                  </a:ext>
+                </a:extLst>
               </a:tr>
               <a:tr h="370840">
                 <a:tc>
@@ -9500,7 +9484,6 @@
                         <a:rPr lang="en-US" dirty="0"/>
                         <a:t>Prototype</a:t>
                       </a:r>
-                      <a:endParaRPr lang="en-US" dirty="0"/>
                     </a:p>
                     <a:p>
                       <a:pPr marL="640080" lvl="1" indent="-247015" eaLnBrk="1" fontAlgn="auto" hangingPunct="1">
@@ -9515,7 +9498,6 @@
                         <a:rPr lang="en-US" dirty="0"/>
                         <a:t>Write some web sites, tools for others to use</a:t>
                       </a:r>
-                      <a:endParaRPr lang="en-US" dirty="0"/>
                     </a:p>
                     <a:p>
                       <a:pPr marL="640080" lvl="1" indent="-247015" eaLnBrk="1" fontAlgn="auto" hangingPunct="1">
@@ -9530,7 +9512,6 @@
                         <a:rPr lang="en-US" dirty="0"/>
                         <a:t>Several weeks, months</a:t>
                       </a:r>
-                      <a:endParaRPr lang="en-US" dirty="0"/>
                     </a:p>
                   </a:txBody>
                   <a:tcPr/>
@@ -9545,6 +9526,11 @@
                   </a:txBody>
                   <a:tcPr/>
                 </a:tc>
+                <a:extLst>
+                  <a:ext uri="{0D108BD9-81ED-4DB2-BD59-A6C34878D82A}">
+                    <a16:rowId xmlns:a16="http://schemas.microsoft.com/office/drawing/2014/main" val="10003"/>
+                  </a:ext>
+                </a:extLst>
               </a:tr>
               <a:tr h="370840">
                 <a:tc>
@@ -9567,7 +9553,6 @@
                         <a:rPr lang="en-US" dirty="0"/>
                         <a:t>Professionals</a:t>
                       </a:r>
-                      <a:endParaRPr lang="en-US" dirty="0"/>
                     </a:p>
                     <a:p>
                       <a:pPr marL="640080" lvl="1" indent="-247015" eaLnBrk="1" fontAlgn="auto" hangingPunct="1">
@@ -9582,7 +9567,6 @@
                         <a:rPr lang="en-US" dirty="0"/>
                         <a:t>Make a living by writing software, like Bill Gates.</a:t>
                       </a:r>
-                      <a:endParaRPr lang="en-US" dirty="0"/>
                     </a:p>
                     <a:p>
                       <a:pPr marL="640080" lvl="1" indent="-247015" eaLnBrk="1" fontAlgn="auto" hangingPunct="1">
@@ -9597,7 +9581,6 @@
                         <a:rPr lang="en-US" dirty="0"/>
                         <a:t>Time: several years, several million/billion dollars. </a:t>
                       </a:r>
-                      <a:endParaRPr lang="en-US" dirty="0"/>
                     </a:p>
                   </a:txBody>
                   <a:tcPr/>
@@ -9612,6 +9595,11 @@
                   </a:txBody>
                   <a:tcPr/>
                 </a:tc>
+                <a:extLst>
+                  <a:ext uri="{0D108BD9-81ED-4DB2-BD59-A6C34878D82A}">
+                    <a16:rowId xmlns:a16="http://schemas.microsoft.com/office/drawing/2014/main" val="10004"/>
+                  </a:ext>
+                </a:extLst>
               </a:tr>
             </a:tbl>
           </a:graphicData>
@@ -9620,7 +9608,7 @@
       <p:pic>
         <p:nvPicPr>
           <p:cNvPr id="5" name="Picture 4" descr="http://tbn0.google.com/images?q=tbn:50QzruCKWotv6M:http://veronikanagy.files.wordpress.com/2008/02/paper_airplane_sm.jpg">
-            <a:hlinkClick r:id="rId1"/>
+            <a:hlinkClick r:id="rId2"/>
           </p:cNvPr>
           <p:cNvPicPr>
             <a:picLocks noChangeAspect="1" noChangeArrowheads="1"/>
@@ -9628,7 +9616,7 @@
           <p:nvPr/>
         </p:nvPicPr>
         <p:blipFill>
-          <a:blip r:embed="rId2">
+          <a:blip r:embed="rId3">
             <a:extLst>
               <a:ext uri="{28A0092B-C50C-407E-A947-70E740481C1C}">
                 <a14:useLocalDpi xmlns:a14="http://schemas.microsoft.com/office/drawing/2010/main" val="0"/>
@@ -9682,7 +9670,7 @@
           <p:nvPr/>
         </p:nvPicPr>
         <p:blipFill>
-          <a:blip r:embed="rId3" cstate="print">
+          <a:blip r:embed="rId4" cstate="print">
             <a:extLst>
               <a:ext uri="{28A0092B-C50C-407E-A947-70E740481C1C}">
                 <a14:useLocalDpi xmlns:a14="http://schemas.microsoft.com/office/drawing/2010/main" val="0"/>
@@ -9736,7 +9724,7 @@
           <p:nvPr/>
         </p:nvPicPr>
         <p:blipFill>
-          <a:blip r:embed="rId4" cstate="print">
+          <a:blip r:embed="rId5" cstate="print">
             <a:extLst>
               <a:ext uri="{28A0092B-C50C-407E-A947-70E740481C1C}">
                 <a14:useLocalDpi xmlns:a14="http://schemas.microsoft.com/office/drawing/2010/main" val="0"/>
@@ -9790,7 +9778,7 @@
           <p:nvPr/>
         </p:nvPicPr>
         <p:blipFill>
-          <a:blip r:embed="rId5" cstate="print">
+          <a:blip r:embed="rId6" cstate="print">
             <a:extLst>
               <a:ext uri="{28A0092B-C50C-407E-A947-70E740481C1C}">
                 <a14:useLocalDpi xmlns:a14="http://schemas.microsoft.com/office/drawing/2010/main" val="0"/>
@@ -9974,7 +9962,6 @@
               <a:rPr lang="en-US" dirty="0"/>
               <a:t>Service</a:t>
             </a:r>
-            <a:endParaRPr lang="en-US" dirty="0"/>
           </a:p>
         </p:txBody>
       </p:sp>
@@ -10018,7 +10005,6 @@
               <a:rPr lang="en-US" altLang="zh-CN" sz="2000" dirty="0"/>
               <a:t>:</a:t>
             </a:r>
-            <a:endParaRPr lang="en-US" altLang="zh-CN" sz="2000" dirty="0"/>
           </a:p>
           <a:p>
             <a:pPr lvl="1"/>
@@ -10026,7 +10012,6 @@
               <a:rPr lang="en-US" altLang="zh-CN" sz="1800" dirty="0"/>
               <a:t>C/C++</a:t>
             </a:r>
-            <a:endParaRPr lang="en-US" altLang="zh-CN" sz="1800" dirty="0"/>
           </a:p>
           <a:p>
             <a:pPr lvl="1"/>
@@ -10034,7 +10019,6 @@
               <a:rPr lang="en-US" altLang="zh-CN" sz="1800" dirty="0"/>
               <a:t>C#/VB.net/Java</a:t>
             </a:r>
-            <a:endParaRPr lang="en-US" altLang="zh-CN" sz="1800" dirty="0"/>
           </a:p>
           <a:p>
             <a:pPr lvl="1"/>
@@ -10042,7 +10026,6 @@
               <a:rPr lang="en-US" sz="1800" dirty="0"/>
               <a:t>Excel</a:t>
             </a:r>
-            <a:endParaRPr lang="en-US" sz="1800" dirty="0"/>
           </a:p>
           <a:p>
             <a:pPr lvl="1"/>
@@ -10050,7 +10033,6 @@
               <a:rPr lang="en-US" sz="1800" dirty="0"/>
               <a:t>Unix Shell</a:t>
             </a:r>
-            <a:endParaRPr lang="en-US" sz="1800" dirty="0"/>
           </a:p>
           <a:p>
             <a:pPr lvl="1"/>
@@ -10082,7 +10064,6 @@
               <a:rPr lang="en-US" sz="1800" dirty="0"/>
               <a:t>Perl</a:t>
             </a:r>
-            <a:endParaRPr lang="en-US" sz="1800" dirty="0"/>
           </a:p>
           <a:p>
             <a:pPr lvl="1"/>
@@ -10090,7 +10071,6 @@
               <a:rPr lang="en-US" sz="1800" dirty="0"/>
               <a:t>Python</a:t>
             </a:r>
-            <a:endParaRPr lang="en-US" sz="1800" dirty="0"/>
           </a:p>
           <a:p>
             <a:r>
@@ -10117,7 +10097,6 @@
               <a:rPr lang="en-US" altLang="zh-CN" sz="2200" dirty="0"/>
               <a:t>1】</a:t>
             </a:r>
-            <a:endParaRPr lang="en-US" altLang="zh-CN" sz="2200" dirty="0"/>
           </a:p>
           <a:p>
             <a:r>
@@ -10158,7 +10137,6 @@
               <a:rPr lang="en-US" altLang="zh-CN" sz="2200" dirty="0"/>
               <a:t>2】</a:t>
             </a:r>
-            <a:endParaRPr lang="en-US" altLang="zh-CN" sz="2200" dirty="0"/>
           </a:p>
           <a:p>
             <a:r>
@@ -10506,21 +10484,18 @@
               <a:rPr lang="en-US" dirty="0"/>
               <a:t>Program = data structure + algorithm</a:t>
             </a:r>
-            <a:endParaRPr lang="en-US" dirty="0"/>
           </a:p>
           <a:p>
             <a:r>
               <a:rPr lang="en-US" dirty="0"/>
               <a:t>Software = Program + Software Engineering</a:t>
             </a:r>
-            <a:endParaRPr lang="en-US" dirty="0"/>
           </a:p>
           <a:p>
             <a:r>
               <a:rPr lang="en-US" altLang="zh-CN" dirty="0"/>
               <a:t>Software Company = </a:t>
             </a:r>
-            <a:endParaRPr lang="en-US" altLang="zh-CN" dirty="0"/>
           </a:p>
           <a:p>
             <a:pPr marL="118745" indent="0">
@@ -10542,7 +10517,6 @@
               <a:rPr lang="en-US" altLang="zh-CN" dirty="0"/>
               <a:t>Model</a:t>
             </a:r>
-            <a:endParaRPr lang="en-US" altLang="zh-CN" dirty="0"/>
           </a:p>
           <a:p>
             <a:pPr marL="118745" indent="0">
@@ -10953,7 +10927,6 @@
               <a:rPr lang="en-US" dirty="0"/>
               <a:t>…</a:t>
             </a:r>
-            <a:endParaRPr lang="en-US" dirty="0"/>
           </a:p>
         </p:txBody>
       </p:sp>
@@ -10995,7 +10968,6 @@
               <a:rPr lang="en-US" sz="2000" dirty="0"/>
               <a:t>get a new one</a:t>
             </a:r>
-            <a:endParaRPr lang="en-US" sz="2000" dirty="0"/>
           </a:p>
           <a:p>
             <a:pPr eaLnBrk="1" hangingPunct="1"/>
@@ -11015,7 +10987,6 @@
               <a:rPr lang="en-US" sz="2000" dirty="0"/>
               <a:t>we had fun, move on… </a:t>
             </a:r>
-            <a:endParaRPr lang="en-US" sz="2000" dirty="0"/>
           </a:p>
           <a:p>
             <a:pPr eaLnBrk="1" hangingPunct="1"/>
@@ -11035,7 +11006,6 @@
               <a:rPr lang="en-US" sz="2000" dirty="0"/>
               <a:t>learn the lesson, find another way, and keep going…</a:t>
             </a:r>
-            <a:endParaRPr lang="en-US" sz="2000" dirty="0"/>
           </a:p>
           <a:p>
             <a:pPr eaLnBrk="1" hangingPunct="1"/>
@@ -11071,7 +11041,6 @@
               <a:rPr lang="en-US" sz="1700" dirty="0"/>
               <a:t>people’s life, money</a:t>
             </a:r>
-            <a:endParaRPr lang="en-US" sz="1700" dirty="0"/>
           </a:p>
           <a:p>
             <a:pPr lvl="1" eaLnBrk="1" hangingPunct="1"/>
@@ -11128,7 +11097,6 @@
               <a:rPr lang="en-US"/>
               <a:t>Quiz:</a:t>
             </a:r>
-            <a:endParaRPr lang="en-US"/>
           </a:p>
         </p:txBody>
       </p:sp>
@@ -11155,7 +11123,6 @@
               <a:rPr lang="en-US"/>
               <a:t>If a feature in a commercial product has 1-in-a-million chance of usage, do you want to build it and educate customer about it every time they use the product?</a:t>
             </a:r>
-            <a:endParaRPr lang="en-US"/>
           </a:p>
           <a:p>
             <a:pPr marL="984250" lvl="1" indent="-514350">
@@ -11166,7 +11133,6 @@
               <a:rPr lang="en-US"/>
               <a:t>don’t even plan it. </a:t>
             </a:r>
-            <a:endParaRPr lang="en-US"/>
           </a:p>
           <a:p>
             <a:pPr marL="984250" lvl="1" indent="-514350">
@@ -11177,7 +11143,6 @@
               <a:rPr lang="en-US"/>
               <a:t>cut it if we don’t have time. </a:t>
             </a:r>
-            <a:endParaRPr lang="en-US"/>
           </a:p>
           <a:p>
             <a:pPr marL="984250" lvl="1" indent="-514350">
@@ -11188,7 +11153,6 @@
               <a:rPr lang="en-US"/>
               <a:t>Build it, but don’t need to tell users</a:t>
             </a:r>
-            <a:endParaRPr lang="en-US"/>
           </a:p>
           <a:p>
             <a:pPr marL="984250" lvl="1" indent="-514350">
@@ -11199,7 +11163,6 @@
               <a:rPr lang="en-US"/>
               <a:t>Build it, tell uses about it</a:t>
             </a:r>
-            <a:endParaRPr lang="en-US"/>
           </a:p>
         </p:txBody>
       </p:sp>
@@ -11319,7 +11282,6 @@
               <a:rPr lang="en-US"/>
               <a:t>The answer is:</a:t>
             </a:r>
-            <a:endParaRPr lang="en-US"/>
           </a:p>
         </p:txBody>
       </p:sp>
@@ -11332,7 +11294,7 @@
           <p:nvPr/>
         </p:nvPicPr>
         <p:blipFill>
-          <a:blip r:embed="rId1">
+          <a:blip r:embed="rId2">
             <a:extLst>
               <a:ext uri="{28A0092B-C50C-407E-A947-70E740481C1C}">
                 <a14:useLocalDpi xmlns:a14="http://schemas.microsoft.com/office/drawing/2010/main" val="0"/>
@@ -11422,7 +11384,6 @@
               <a:rPr lang="en-US"/>
               <a:t>A hole</a:t>
             </a:r>
-            <a:endParaRPr lang="en-US"/>
           </a:p>
         </p:txBody>
       </p:sp>
@@ -11435,7 +11396,7 @@
           <p:nvPr/>
         </p:nvPicPr>
         <p:blipFill>
-          <a:blip r:embed="rId1">
+          <a:blip r:embed="rId3">
             <a:extLst>
               <a:ext uri="{28A0092B-C50C-407E-A947-70E740481C1C}">
                 <a14:useLocalDpi xmlns:a14="http://schemas.microsoft.com/office/drawing/2010/main" val="0"/>
@@ -11553,7 +11514,6 @@
               <a:rPr lang="en-US" dirty="0"/>
               <a:t>?</a:t>
             </a:r>
-            <a:endParaRPr lang="en-US" dirty="0"/>
           </a:p>
         </p:txBody>
       </p:sp>
@@ -11608,7 +11568,7 @@
       <p:pic>
         <p:nvPicPr>
           <p:cNvPr id="26627" name="Picture 2" descr="File:Plane crash into Hudson River (crop).jpg">
-            <a:hlinkClick r:id="rId1"/>
+            <a:hlinkClick r:id="rId3"/>
           </p:cNvPr>
           <p:cNvPicPr>
             <a:picLocks noChangeAspect="1" noChangeArrowheads="1"/>
@@ -11616,7 +11576,7 @@
           <p:nvPr/>
         </p:nvPicPr>
         <p:blipFill>
-          <a:blip r:embed="rId2">
+          <a:blip r:embed="rId4">
             <a:extLst>
               <a:ext uri="{28A0092B-C50C-407E-A947-70E740481C1C}">
                 <a14:useLocalDpi xmlns:a14="http://schemas.microsoft.com/office/drawing/2010/main" val="0"/>
@@ -11767,7 +11727,6 @@
               <a:rPr lang="en-US" altLang="zh-CN" dirty="0"/>
               <a:t>?</a:t>
             </a:r>
-            <a:endParaRPr lang="en-US" altLang="zh-CN" dirty="0"/>
           </a:p>
           <a:p>
             <a:r>
@@ -11874,7 +11833,6 @@
               <a:rPr lang="zh-CN" altLang="en-US" dirty="0"/>
               <a:t>行源代码（相当于显示器的一屏）， 他们的智力、记忆力和常人差不多。软件的各个模块之间有各种显性或 隐性的依赖关系，随着系统的成长和模块的增多，这些关系的数量往往以几何级数的速度增长。</a:t>
             </a:r>
-            <a:endParaRPr lang="zh-CN" altLang="en-US" dirty="0"/>
           </a:p>
           <a:p>
             <a:endParaRPr lang="en-US" dirty="0"/>
@@ -11973,7 +11931,6 @@
               <a:rPr lang="zh-CN" altLang="en-US" dirty="0"/>
               <a:t>商用软件出现 了错误，工程师可以看到程序在出错的一瞬间留下的一些痕迹（错误代号、 大致的目标代码位置、错误信息），但是几乎无法完整重现到底程序出 现了什么问题。</a:t>
             </a:r>
-            <a:endParaRPr lang="zh-CN" altLang="en-US" dirty="0"/>
           </a:p>
           <a:p>
             <a:r>
@@ -12103,7 +12060,6 @@
               <a:rPr lang="zh-CN" altLang="en-US" dirty="0"/>
               <a:t>但是与此同时，正确地修改软件是一件很困难的事情。</a:t>
             </a:r>
-            <a:endParaRPr lang="zh-CN" altLang="en-US" dirty="0"/>
           </a:p>
           <a:p>
             <a:endParaRPr lang="en-US" dirty="0"/>
@@ -12191,7 +12147,7 @@
           </p:nvPr>
         </p:nvPicPr>
         <p:blipFill>
-          <a:blip r:embed="rId1">
+          <a:blip r:embed="rId3">
             <a:extLst>
               <a:ext uri="{28A0092B-C50C-407E-A947-70E740481C1C}">
                 <a14:useLocalDpi xmlns:a14="http://schemas.microsoft.com/office/drawing/2010/main" val="0"/>
@@ -12292,7 +12248,6 @@
               <a:rPr lang="zh-CN" altLang="en-US" dirty="0"/>
               <a:t>） 软件不能独立存在，它总是要运行在硬件上面，它要服从系统中其他组 成部分的要求，它还要服从用户的要求、行业系统的要求（例如银行利 率的变化）。</a:t>
             </a:r>
-            <a:endParaRPr lang="zh-CN" altLang="en-US" dirty="0"/>
           </a:p>
           <a:p>
             <a:endParaRPr lang="en-US" dirty="0"/>
@@ -12344,14 +12299,13 @@
               <a:rPr lang="en-US"/>
               <a:t>Children’s toy</a:t>
             </a:r>
-            <a:endParaRPr lang="en-US"/>
           </a:p>
         </p:txBody>
       </p:sp>
       <p:pic>
         <p:nvPicPr>
           <p:cNvPr id="6147" name="Picture 4" descr="http://tbn0.google.com/images?q=tbn:50QzruCKWotv6M:http://veronikanagy.files.wordpress.com/2008/02/paper_airplane_sm.jpg">
-            <a:hlinkClick r:id="rId1"/>
+            <a:hlinkClick r:id="rId2"/>
           </p:cNvPr>
           <p:cNvPicPr>
             <a:picLocks noChangeAspect="1" noChangeArrowheads="1"/>
@@ -12359,7 +12313,7 @@
           <p:nvPr/>
         </p:nvPicPr>
         <p:blipFill>
-          <a:blip r:embed="rId2">
+          <a:blip r:embed="rId3">
             <a:extLst>
               <a:ext uri="{28A0092B-C50C-407E-A947-70E740481C1C}">
                 <a14:useLocalDpi xmlns:a14="http://schemas.microsoft.com/office/drawing/2010/main" val="0"/>
@@ -12486,7 +12440,6 @@
               <a:rPr lang="zh-CN" altLang="en-US" dirty="0"/>
               <a:t>但是许多软件系统却没有这样的特性，有时输入上很小的变化，会 引起输出上极大的变化。</a:t>
             </a:r>
-            <a:endParaRPr lang="zh-CN" altLang="en-US" dirty="0"/>
           </a:p>
           <a:p>
             <a:endParaRPr lang="en-US" dirty="0"/>
@@ -12660,7 +12613,6 @@
               <a:rPr lang="zh-CN" altLang="en-US" dirty="0"/>
               <a:t>社区</a:t>
             </a:r>
-            <a:endParaRPr lang="zh-CN" altLang="en-US" dirty="0"/>
           </a:p>
           <a:p>
             <a:pPr marL="118745" indent="0">
@@ -12796,7 +12748,6 @@
               <a:rPr lang="en-US" dirty="0"/>
               <a:t> and maintainability of software systems.</a:t>
             </a:r>
-            <a:endParaRPr lang="en-US" dirty="0"/>
           </a:p>
           <a:p>
             <a:pPr marL="457200" indent="-457200">
@@ -12830,7 +12781,6 @@
               <a:rPr lang="en-US" dirty="0"/>
               <a:t>Lack of quality = defect (bug)</a:t>
             </a:r>
-            <a:endParaRPr lang="en-US" dirty="0"/>
           </a:p>
         </p:txBody>
       </p:sp>
@@ -12919,7 +12869,6 @@
               <a:rPr lang="en-US" altLang="zh-CN" sz="2200" dirty="0"/>
               <a:t>3 lines of code</a:t>
             </a:r>
-            <a:endParaRPr lang="en-US" altLang="zh-CN" sz="2200" dirty="0"/>
           </a:p>
           <a:p>
             <a:pPr lvl="1" eaLnBrk="1" hangingPunct="1"/>
@@ -12927,7 +12876,6 @@
               <a:rPr lang="en-US" altLang="zh-CN" sz="2200" dirty="0"/>
               <a:t>Cost Microsoft 1Billion$</a:t>
             </a:r>
-            <a:endParaRPr lang="en-US" altLang="zh-CN" sz="2200" dirty="0"/>
           </a:p>
           <a:p>
             <a:pPr eaLnBrk="1" hangingPunct="1"/>
@@ -12935,7 +12883,6 @@
               <a:rPr lang="en-US" altLang="zh-CN" dirty="0"/>
               <a:t>MSFT research</a:t>
             </a:r>
-            <a:endParaRPr lang="en-US" altLang="zh-CN" dirty="0"/>
           </a:p>
           <a:p>
             <a:pPr lvl="1" eaLnBrk="1" hangingPunct="1"/>
@@ -12943,7 +12890,6 @@
               <a:rPr lang="en-US" altLang="zh-CN" sz="2200" dirty="0"/>
               <a:t>Bug cost 12 hours of extra work, about 900$</a:t>
             </a:r>
-            <a:endParaRPr lang="en-US" altLang="zh-CN" sz="2200" dirty="0"/>
           </a:p>
           <a:p>
             <a:pPr lvl="1" eaLnBrk="1" hangingPunct="1"/>
@@ -12955,7 +12901,6 @@
               <a:rPr lang="en-US" altLang="zh-CN" sz="2200" dirty="0"/>
               <a:t>missing)</a:t>
             </a:r>
-            <a:endParaRPr lang="en-US" altLang="zh-CN" sz="2200" dirty="0"/>
           </a:p>
         </p:txBody>
       </p:sp>
@@ -13124,7 +13069,6 @@
               <a:rPr lang="en-US" altLang="zh-CN" sz="2400" dirty="0"/>
               <a:t>  </a:t>
             </a:r>
-            <a:endParaRPr lang="en-US" altLang="zh-CN" sz="2400" dirty="0"/>
           </a:p>
           <a:p>
             <a:r>
@@ -13168,7 +13112,7 @@
           <p:nvPr/>
         </p:nvPicPr>
         <p:blipFill>
-          <a:blip r:embed="rId1">
+          <a:blip r:embed="rId2">
             <a:extLst>
               <a:ext uri="{28A0092B-C50C-407E-A947-70E740481C1C}">
                 <a14:useLocalDpi xmlns:a14="http://schemas.microsoft.com/office/drawing/2010/main" val="0"/>
@@ -13365,7 +13309,6 @@
               <a:rPr lang="en-US" altLang="zh-CN" sz="1800" dirty="0"/>
               <a:t>)</a:t>
             </a:r>
-            <a:endParaRPr lang="en-US" altLang="zh-CN" sz="1800" dirty="0"/>
           </a:p>
           <a:p>
             <a:pPr marL="633095" indent="-514350">
@@ -13395,7 +13338,6 @@
               <a:rPr lang="zh-CN" altLang="en-US" sz="1800" dirty="0"/>
               <a:t>的模块。</a:t>
             </a:r>
-            <a:endParaRPr lang="zh-CN" altLang="en-US" sz="1800" dirty="0"/>
           </a:p>
           <a:p>
             <a:pPr marL="633095" indent="-514350">
@@ -13475,7 +13417,6 @@
               <a:rPr lang="en-US" altLang="zh-CN" sz="1800" dirty="0"/>
               <a:t>-  </a:t>
             </a:r>
-            <a:endParaRPr lang="en-US" altLang="zh-CN" sz="1800" dirty="0"/>
           </a:p>
           <a:p>
             <a:pPr marL="925830" lvl="1" indent="-514350">
@@ -13513,7 +13454,6 @@
               <a:rPr lang="en-US" altLang="zh-CN" sz="1400" dirty="0"/>
               <a:t>…</a:t>
             </a:r>
-            <a:endParaRPr lang="en-US" altLang="zh-CN" sz="1400" dirty="0"/>
           </a:p>
           <a:p>
             <a:pPr marL="925830" lvl="1" indent="-514350">
@@ -13535,7 +13475,6 @@
               <a:rPr lang="en-US" altLang="zh-CN" sz="1400" dirty="0"/>
               <a:t>…</a:t>
             </a:r>
-            <a:endParaRPr lang="en-US" altLang="zh-CN" sz="1400" dirty="0"/>
           </a:p>
           <a:p>
             <a:pPr marL="925830" lvl="1" indent="-514350">
@@ -13557,7 +13496,6 @@
               <a:rPr lang="en-US" altLang="zh-CN" sz="1400" dirty="0"/>
               <a:t>…</a:t>
             </a:r>
-            <a:endParaRPr lang="en-US" altLang="zh-CN" sz="1400" dirty="0"/>
           </a:p>
           <a:p>
             <a:pPr marL="925830" lvl="1" indent="-514350">
@@ -13571,7 +13509,6 @@
               <a:rPr lang="zh-CN" altLang="en-US" sz="1400" dirty="0"/>
               <a:t>最后没有人再发邮件了</a:t>
             </a:r>
-            <a:endParaRPr lang="zh-CN" altLang="en-US" sz="1400" dirty="0"/>
           </a:p>
           <a:p>
             <a:pPr marL="633095" indent="-514350">
@@ -13621,7 +13558,6 @@
               <a:rPr lang="en-US" altLang="zh-CN" sz="1800" dirty="0"/>
               <a:t> </a:t>
             </a:r>
-            <a:endParaRPr lang="en-US" altLang="zh-CN" sz="1800" dirty="0"/>
           </a:p>
           <a:p>
             <a:pPr>
@@ -13710,7 +13646,6 @@
               <a:rPr lang="en-US" altLang="zh-CN" dirty="0"/>
               <a:t>1: </a:t>
             </a:r>
-            <a:endParaRPr lang="en-US" altLang="zh-CN" dirty="0"/>
           </a:p>
           <a:p>
             <a:pPr lvl="1"/>
@@ -13748,7 +13683,6 @@
               <a:rPr lang="en-US" altLang="zh-CN" dirty="0"/>
               <a:t>2: </a:t>
             </a:r>
-            <a:endParaRPr lang="en-US" altLang="zh-CN" dirty="0"/>
           </a:p>
           <a:p>
             <a:pPr lvl="1"/>
@@ -13874,7 +13808,6 @@
               <a:rPr lang="en-US" altLang="zh-CN" dirty="0"/>
               <a:t>bug</a:t>
             </a:r>
-            <a:endParaRPr lang="en-US" altLang="zh-CN" dirty="0"/>
           </a:p>
           <a:p>
             <a:pPr lvl="1"/>
@@ -14067,7 +14000,6 @@
               <a:rPr lang="en-US" altLang="zh-CN" sz="2000"/>
               <a:t>…</a:t>
             </a:r>
-            <a:endParaRPr lang="en-US" altLang="zh-CN" sz="2000"/>
           </a:p>
           <a:p>
             <a:pPr eaLnBrk="1" hangingPunct="1"/>
@@ -14079,7 +14011,6 @@
               <a:rPr lang="en-US" altLang="zh-CN" sz="2000"/>
               <a:t>…</a:t>
             </a:r>
-            <a:endParaRPr lang="en-US" altLang="zh-CN" sz="2000"/>
           </a:p>
           <a:p>
             <a:pPr eaLnBrk="1" hangingPunct="1"/>
@@ -14139,7 +14070,6 @@
               <a:rPr lang="en-US" altLang="zh-CN" sz="2000"/>
               <a:t>? </a:t>
             </a:r>
-            <a:endParaRPr lang="en-US" altLang="zh-CN" sz="2000"/>
           </a:p>
         </p:txBody>
       </p:sp>
@@ -14257,7 +14187,6 @@
               <a:rPr lang="en-US" altLang="zh-CN" dirty="0"/>
               <a:t>It’s a bug!</a:t>
             </a:r>
-            <a:endParaRPr lang="en-US" altLang="zh-CN" dirty="0"/>
           </a:p>
           <a:p>
             <a:pPr eaLnBrk="1" hangingPunct="1"/>
@@ -14360,7 +14289,6 @@
               <a:rPr lang="en-US"/>
               <a:t>Hobbyist: Lawn chair, balloon</a:t>
             </a:r>
-            <a:endParaRPr lang="en-US"/>
           </a:p>
         </p:txBody>
       </p:sp>
@@ -14373,7 +14301,7 @@
           <p:nvPr/>
         </p:nvPicPr>
         <p:blipFill>
-          <a:blip r:embed="rId1">
+          <a:blip r:embed="rId3">
             <a:extLst>
               <a:ext uri="{28A0092B-C50C-407E-A947-70E740481C1C}">
                 <a14:useLocalDpi xmlns:a14="http://schemas.microsoft.com/office/drawing/2010/main" val="0"/>
@@ -14462,7 +14390,6 @@
               <a:rPr lang="en-US" dirty="0"/>
               <a:t>User’s Perspective</a:t>
             </a:r>
-            <a:endParaRPr lang="en-US" dirty="0"/>
           </a:p>
         </p:txBody>
       </p:sp>
@@ -14500,7 +14427,6 @@
               <a:rPr lang="en-US" altLang="zh-CN" dirty="0"/>
               <a:t>QQ</a:t>
             </a:r>
-            <a:endParaRPr lang="en-US" altLang="zh-CN" dirty="0"/>
           </a:p>
           <a:p>
             <a:pPr lvl="1"/>
@@ -14520,7 +14446,6 @@
               <a:rPr lang="en-US" altLang="zh-CN" dirty="0"/>
               <a:t>BMW</a:t>
             </a:r>
-            <a:endParaRPr lang="en-US" altLang="zh-CN" dirty="0"/>
           </a:p>
           <a:p>
             <a:r>
@@ -14546,7 +14471,6 @@
               <a:rPr lang="en-US" altLang="zh-CN" dirty="0"/>
               <a:t>?</a:t>
             </a:r>
-            <a:endParaRPr lang="en-US" altLang="zh-CN" dirty="0"/>
           </a:p>
           <a:p>
             <a:r>
@@ -14566,7 +14490,7 @@
           <p:nvPr/>
         </p:nvPicPr>
         <p:blipFill>
-          <a:blip r:embed="rId1">
+          <a:blip r:embed="rId2">
             <a:extLst>
               <a:ext uri="{28A0092B-C50C-407E-A947-70E740481C1C}">
                 <a14:useLocalDpi xmlns:a14="http://schemas.microsoft.com/office/drawing/2010/main" val="0"/>
@@ -14630,7 +14554,7 @@
           <p:nvPr/>
         </p:nvPicPr>
         <p:blipFill>
-          <a:blip r:embed="rId2">
+          <a:blip r:embed="rId3">
             <a:extLst>
               <a:ext uri="{28A0092B-C50C-407E-A947-70E740481C1C}">
                 <a14:useLocalDpi xmlns:a14="http://schemas.microsoft.com/office/drawing/2010/main" val="0"/>
@@ -14694,7 +14618,7 @@
           <p:nvPr/>
         </p:nvPicPr>
         <p:blipFill>
-          <a:blip r:embed="rId3">
+          <a:blip r:embed="rId4">
             <a:extLst>
               <a:ext uri="{28A0092B-C50C-407E-A947-70E740481C1C}">
                 <a14:useLocalDpi xmlns:a14="http://schemas.microsoft.com/office/drawing/2010/main" val="0"/>
@@ -15020,7 +14944,7 @@
           </p:nvPr>
         </p:nvPicPr>
         <p:blipFill>
-          <a:blip r:embed="rId1">
+          <a:blip r:embed="rId2" cstate="print">
             <a:extLst>
               <a:ext uri="{28A0092B-C50C-407E-A947-70E740481C1C}">
                 <a14:useLocalDpi xmlns:a14="http://schemas.microsoft.com/office/drawing/2010/main" val="0"/>
@@ -15097,7 +15021,7 @@
           </p:nvPr>
         </p:nvPicPr>
         <p:blipFill>
-          <a:blip r:embed="rId1"/>
+          <a:blip r:embed="rId2"/>
           <a:stretch>
             <a:fillRect/>
           </a:stretch>
@@ -15329,7 +15253,7 @@
           <a:p>
             <a:r>
               <a:rPr lang="en-US" dirty="0">
-                <a:hlinkClick r:id="rId1"/>
+                <a:hlinkClick r:id="rId2"/>
               </a:rPr>
               <a:t>http://www.infoq.com/presentations/tony-hoare-computing-engineering</a:t>
             </a:r>
@@ -15337,13 +15261,13 @@
           </a:p>
           <a:p>
             <a:endParaRPr lang="en-US" dirty="0">
-              <a:hlinkClick r:id="rId1"/>
+              <a:hlinkClick r:id="rId2"/>
             </a:endParaRPr>
           </a:p>
           <a:p>
             <a:r>
               <a:rPr lang="en-US" dirty="0">
-                <a:hlinkClick r:id="rId1"/>
+                <a:hlinkClick r:id="rId2"/>
               </a:rPr>
               <a:t>http://pan.baidu.com/s/1pJuNp03</a:t>
             </a:r>
@@ -15558,9 +15482,6 @@
               </a:rPr>
               <a:t>：以在市场上赢得用户为目标而构建的软件。这也是种种科学发现、技 术突破最好的试金石。</a:t>
             </a:r>
-            <a:endParaRPr lang="zh-CN" altLang="en-US" dirty="0">
-              <a:latin typeface="+mn-ea"/>
-            </a:endParaRPr>
           </a:p>
         </p:txBody>
       </p:sp>
@@ -15824,7 +15745,7 @@
           <p:nvPr/>
         </p:nvPicPr>
         <p:blipFill>
-          <a:blip r:embed="rId1"/>
+          <a:blip r:embed="rId2"/>
           <a:stretch>
             <a:fillRect/>
           </a:stretch>
@@ -15985,7 +15906,6 @@
               <a:rPr lang="en-US" dirty="0"/>
               <a:t>Software Requirements</a:t>
             </a:r>
-            <a:endParaRPr lang="en-US" dirty="0"/>
           </a:p>
           <a:p>
             <a:pPr lvl="1"/>
@@ -15993,7 +15913,6 @@
               <a:rPr lang="en-US" dirty="0"/>
               <a:t>Software Design</a:t>
             </a:r>
-            <a:endParaRPr lang="en-US" dirty="0"/>
           </a:p>
           <a:p>
             <a:pPr lvl="1"/>
@@ -16001,7 +15920,6 @@
               <a:rPr lang="en-US" dirty="0"/>
               <a:t>Software Construction</a:t>
             </a:r>
-            <a:endParaRPr lang="en-US" dirty="0"/>
           </a:p>
           <a:p>
             <a:pPr lvl="1"/>
@@ -16009,7 +15927,6 @@
               <a:rPr lang="en-US" dirty="0"/>
               <a:t>Software Testing</a:t>
             </a:r>
-            <a:endParaRPr lang="en-US" dirty="0"/>
           </a:p>
           <a:p>
             <a:pPr lvl="1"/>
@@ -16017,7 +15934,6 @@
               <a:rPr lang="en-US" dirty="0"/>
               <a:t>Software Maintenance</a:t>
             </a:r>
-            <a:endParaRPr lang="en-US" dirty="0"/>
           </a:p>
           <a:p>
             <a:pPr lvl="1"/>
@@ -16025,7 +15941,6 @@
               <a:rPr lang="en-US" dirty="0"/>
               <a:t>Software Configuration Management</a:t>
             </a:r>
-            <a:endParaRPr lang="en-US" dirty="0"/>
           </a:p>
           <a:p>
             <a:pPr lvl="1"/>
@@ -16033,7 +15948,6 @@
               <a:rPr lang="en-US" dirty="0"/>
               <a:t>Software Engineering Management</a:t>
             </a:r>
-            <a:endParaRPr lang="en-US" dirty="0"/>
           </a:p>
           <a:p>
             <a:pPr lvl="1"/>
@@ -16041,7 +15955,6 @@
               <a:rPr lang="en-US" dirty="0"/>
               <a:t>Software Engineering Process</a:t>
             </a:r>
-            <a:endParaRPr lang="en-US" dirty="0"/>
           </a:p>
           <a:p>
             <a:pPr lvl="1"/>
@@ -16049,7 +15962,6 @@
               <a:rPr lang="en-US" dirty="0"/>
               <a:t>Software Engineering Models and Methods</a:t>
             </a:r>
-            <a:endParaRPr lang="en-US" dirty="0"/>
           </a:p>
           <a:p>
             <a:pPr lvl="1"/>
@@ -16057,7 +15969,6 @@
               <a:rPr lang="en-US" dirty="0"/>
               <a:t>Software Quality</a:t>
             </a:r>
-            <a:endParaRPr lang="en-US" dirty="0"/>
           </a:p>
           <a:p>
             <a:pPr lvl="1"/>
@@ -16065,7 +15976,6 @@
               <a:rPr lang="en-US" dirty="0"/>
               <a:t>Software Engineering Professional Practice</a:t>
             </a:r>
-            <a:endParaRPr lang="en-US" dirty="0"/>
           </a:p>
           <a:p>
             <a:pPr lvl="1"/>
@@ -16073,7 +15983,6 @@
               <a:rPr lang="en-US" dirty="0"/>
               <a:t>Software Engineering Economics</a:t>
             </a:r>
-            <a:endParaRPr lang="en-US" dirty="0"/>
           </a:p>
         </p:txBody>
       </p:sp>
@@ -16156,7 +16065,6 @@
               <a:rPr lang="en-US" dirty="0"/>
               <a:t> </a:t>
             </a:r>
-            <a:endParaRPr lang="en-US" dirty="0"/>
           </a:p>
           <a:p>
             <a:r>
@@ -16220,7 +16128,6 @@
               <a:rPr lang="en-US" dirty="0"/>
               <a:t>Prototype: Wright Brother</a:t>
             </a:r>
-            <a:endParaRPr lang="en-US" dirty="0"/>
           </a:p>
         </p:txBody>
       </p:sp>
@@ -16233,7 +16140,7 @@
           <p:nvPr/>
         </p:nvPicPr>
         <p:blipFill>
-          <a:blip r:embed="rId1">
+          <a:blip r:embed="rId2">
             <a:extLst>
               <a:ext uri="{28A0092B-C50C-407E-A947-70E740481C1C}">
                 <a14:useLocalDpi xmlns:a14="http://schemas.microsoft.com/office/drawing/2010/main" val="0"/>
@@ -16434,7 +16341,7 @@
           <p:nvPr/>
         </p:nvPicPr>
         <p:blipFill>
-          <a:blip r:embed="rId1">
+          <a:blip r:embed="rId2">
             <a:extLst>
               <a:ext uri="{28A0092B-C50C-407E-A947-70E740481C1C}">
                 <a14:useLocalDpi xmlns:a14="http://schemas.microsoft.com/office/drawing/2010/main" val="0"/>
@@ -16475,7 +16382,7 @@
           <p:nvPr/>
         </p:nvPicPr>
         <p:blipFill>
-          <a:blip r:embed="rId2">
+          <a:blip r:embed="rId3">
             <a:extLst>
               <a:ext uri="{28A0092B-C50C-407E-A947-70E740481C1C}">
                 <a14:useLocalDpi xmlns:a14="http://schemas.microsoft.com/office/drawing/2010/main" val="0"/>
@@ -16516,7 +16423,7 @@
           <p:nvPr/>
         </p:nvPicPr>
         <p:blipFill>
-          <a:blip r:embed="rId3">
+          <a:blip r:embed="rId4">
             <a:extLst>
               <a:ext uri="{28A0092B-C50C-407E-A947-70E740481C1C}">
                 <a14:useLocalDpi xmlns:a14="http://schemas.microsoft.com/office/drawing/2010/main" val="0"/>
@@ -16668,7 +16575,6 @@
               <a:rPr lang="en-US" b="1" dirty="0"/>
               <a:t> </a:t>
             </a:r>
-            <a:endParaRPr lang="en-US" b="1" dirty="0"/>
           </a:p>
           <a:p>
             <a:endParaRPr lang="en-US" altLang="zh-CN" dirty="0"/>
@@ -16900,7 +16806,6 @@
               <a:rPr lang="en-US" dirty="0"/>
               <a:t>Learning by doing. </a:t>
             </a:r>
-            <a:endParaRPr lang="en-US" dirty="0"/>
           </a:p>
         </p:txBody>
       </p:sp>
@@ -16994,7 +16899,6 @@
               <a:rPr lang="en-US" sz="2400" dirty="0"/>
               <a:t>ICSE (Intl Conference on Software Engineering)</a:t>
             </a:r>
-            <a:endParaRPr lang="en-US" sz="2400" dirty="0"/>
           </a:p>
           <a:p>
             <a:pPr lvl="1"/>
@@ -17010,7 +16914,6 @@
               <a:rPr lang="en-US" sz="2400" dirty="0"/>
               <a:t>)</a:t>
             </a:r>
-            <a:endParaRPr lang="en-US" sz="2400" dirty="0"/>
           </a:p>
           <a:p>
             <a:pPr lvl="1"/>
@@ -17018,7 +16921,6 @@
               <a:rPr lang="en-US" sz="2400" dirty="0"/>
               <a:t>ASE (Intl Conf on Automated Software Engineering)</a:t>
             </a:r>
-            <a:endParaRPr lang="en-US" sz="2400" dirty="0"/>
           </a:p>
         </p:txBody>
       </p:sp>
@@ -17178,7 +17080,7 @@
           <p:nvPr/>
         </p:nvPicPr>
         <p:blipFill>
-          <a:blip r:embed="rId1" cstate="print">
+          <a:blip r:embed="rId3" cstate="print">
             <a:extLst>
               <a:ext uri="{28A0092B-C50C-407E-A947-70E740481C1C}">
                 <a14:useLocalDpi xmlns:a14="http://schemas.microsoft.com/office/drawing/2010/main" val="0"/>
@@ -17208,7 +17110,7 @@
           <p:nvPr/>
         </p:nvPicPr>
         <p:blipFill>
-          <a:blip r:embed="rId2">
+          <a:blip r:embed="rId4">
             <a:extLst>
               <a:ext uri="{28A0092B-C50C-407E-A947-70E740481C1C}">
                 <a14:useLocalDpi xmlns:a14="http://schemas.microsoft.com/office/drawing/2010/main" val="0"/>
@@ -17238,7 +17140,7 @@
           <p:nvPr/>
         </p:nvPicPr>
         <p:blipFill>
-          <a:blip r:embed="rId3"/>
+          <a:blip r:embed="rId5"/>
           <a:stretch>
             <a:fillRect/>
           </a:stretch>
@@ -17262,7 +17164,7 @@
           <p:nvPr/>
         </p:nvPicPr>
         <p:blipFill>
-          <a:blip r:embed="rId4">
+          <a:blip r:embed="rId6">
             <a:extLst>
               <a:ext uri="{28A0092B-C50C-407E-A947-70E740481C1C}">
                 <a14:useLocalDpi xmlns:a14="http://schemas.microsoft.com/office/drawing/2010/main" val="0"/>
@@ -17292,7 +17194,7 @@
           <p:nvPr/>
         </p:nvPicPr>
         <p:blipFill>
-          <a:blip r:embed="rId5" cstate="print">
+          <a:blip r:embed="rId7" cstate="print">
             <a:extLst>
               <a:ext uri="{28A0092B-C50C-407E-A947-70E740481C1C}">
                 <a14:useLocalDpi xmlns:a14="http://schemas.microsoft.com/office/drawing/2010/main" val="0"/>
@@ -17763,7 +17665,6 @@
               <a:rPr lang="zh-CN" altLang="en-US" sz="2200" dirty="0"/>
               <a:t>这些软件的开发者是怎么说服你（陌生人）成为他们的用户的？他们的目标都是盈利么？他们的目标都是赚取用户的现金么？还是别的？ </a:t>
             </a:r>
-            <a:endParaRPr lang="zh-CN" altLang="en-US" sz="2200" dirty="0"/>
           </a:p>
           <a:p>
             <a:pPr lvl="1">
@@ -17783,7 +17684,6 @@
               <a:rPr lang="zh-CN" altLang="en-US" sz="2200" dirty="0"/>
               <a:t>） </a:t>
             </a:r>
-            <a:endParaRPr lang="zh-CN" altLang="en-US" sz="2200" dirty="0"/>
           </a:p>
           <a:p>
             <a:pPr lvl="1">
@@ -17803,7 +17703,6 @@
               <a:rPr lang="zh-CN" altLang="en-US" sz="2200" dirty="0"/>
               <a:t>么？又是如何更新新版本的？ </a:t>
             </a:r>
-            <a:endParaRPr lang="zh-CN" altLang="en-US" sz="2200" dirty="0"/>
           </a:p>
           <a:p>
             <a:pPr lvl="1">
@@ -17961,7 +17860,7 @@
           <a:p>
             <a:r>
               <a:rPr lang="en-US" dirty="0">
-                <a:hlinkClick r:id="rId1"/>
+                <a:hlinkClick r:id="rId2"/>
               </a:rPr>
               <a:t>http://www.cnblogs.com/xinz/p/3803035.html</a:t>
             </a:r>
@@ -18050,7 +17949,7 @@
             </a:pPr>
             <a:r>
               <a:rPr lang="en-US" altLang="zh-CN" sz="2000" dirty="0">
-                <a:hlinkClick r:id="rId1"/>
+                <a:hlinkClick r:id="rId2"/>
               </a:rPr>
               <a:t>http://zhuanlan.zhihu.com/goujianzhifa/20003750</a:t>
             </a:r>
@@ -18077,28 +17976,24 @@
               <a:rPr lang="en-US" altLang="zh-CN" dirty="0"/>
               <a:t>Build to Pass</a:t>
             </a:r>
-            <a:endParaRPr lang="en-US" altLang="zh-CN" dirty="0"/>
           </a:p>
           <a:p>
             <a:r>
               <a:rPr lang="en-US" dirty="0"/>
               <a:t>Build to Learn</a:t>
             </a:r>
-            <a:endParaRPr lang="en-US" dirty="0"/>
           </a:p>
           <a:p>
             <a:r>
               <a:rPr lang="en-US" dirty="0"/>
               <a:t>Build to Show</a:t>
             </a:r>
-            <a:endParaRPr lang="en-US" dirty="0"/>
           </a:p>
           <a:p>
             <a:r>
               <a:rPr lang="en-US" dirty="0"/>
               <a:t>Build to Win</a:t>
             </a:r>
-            <a:endParaRPr lang="en-US" dirty="0"/>
           </a:p>
         </p:txBody>
       </p:sp>
@@ -18147,7 +18042,6 @@
               <a:rPr lang="en-US"/>
               <a:t>Professional today: 66 Billion</a:t>
             </a:r>
-            <a:endParaRPr lang="en-US"/>
           </a:p>
         </p:txBody>
       </p:sp>
@@ -18160,7 +18054,7 @@
           <p:nvPr/>
         </p:nvPicPr>
         <p:blipFill>
-          <a:blip r:embed="rId1">
+          <a:blip r:embed="rId2">
             <a:extLst>
               <a:ext uri="{28A0092B-C50C-407E-A947-70E740481C1C}">
                 <a14:useLocalDpi xmlns:a14="http://schemas.microsoft.com/office/drawing/2010/main" val="0"/>
@@ -18295,7 +18189,6 @@
               <a:rPr lang="zh-CN" altLang="en-US" sz="2200" dirty="0"/>
               <a:t>是把系统的、有序的、可量化的方法应用到软件的开发、运营和维护上的过程。</a:t>
             </a:r>
-            <a:endParaRPr lang="zh-CN" altLang="en-US" sz="2200" dirty="0"/>
           </a:p>
           <a:p>
             <a:pPr marL="5080" indent="-5080">
@@ -18322,7 +18215,6 @@
               <a:rPr lang="zh-CN" altLang="en-US" sz="2200" dirty="0"/>
               <a:t>软件需求分析、软件设计、软件构建、软件测试和软件维护。</a:t>
             </a:r>
-            <a:endParaRPr lang="zh-CN" altLang="en-US" sz="2200" dirty="0"/>
           </a:p>
           <a:p>
             <a:pPr marL="5080" indent="-5080">
@@ -18349,7 +18241,6 @@
               <a:rPr lang="zh-CN" altLang="en-US" sz="2200" dirty="0"/>
               <a:t>计算机科学、计算机工程、管理学、数学、项目管理学、质量管理、</a:t>
             </a:r>
-            <a:endParaRPr lang="zh-CN" altLang="en-US" sz="2200" dirty="0"/>
           </a:p>
           <a:p>
             <a:pPr marL="5080" indent="-5080">
@@ -18363,7 +18254,6 @@
               <a:rPr lang="zh-CN" altLang="en-US" sz="2200" dirty="0"/>
               <a:t>软件人体工学、系统工程、工业设计和用户界面设计。</a:t>
             </a:r>
-            <a:endParaRPr lang="zh-CN" altLang="en-US" sz="2200" dirty="0"/>
           </a:p>
         </p:txBody>
       </p:sp>
@@ -18411,7 +18301,6 @@
               <a:rPr lang="en-US" dirty="0"/>
               <a:t>What is Software Engineering</a:t>
             </a:r>
-            <a:endParaRPr lang="en-US" dirty="0"/>
           </a:p>
         </p:txBody>
       </p:sp>
@@ -18449,7 +18338,6 @@
               <a:rPr lang="en-US" sz="2400" b="1" dirty="0"/>
               <a:t>software. </a:t>
             </a:r>
-            <a:endParaRPr lang="en-US" sz="2400" b="1" dirty="0"/>
           </a:p>
           <a:p>
             <a:pPr marL="5080" indent="-5080">
@@ -18464,7 +18352,6 @@
               <a:rPr lang="en-US" sz="2400" dirty="0"/>
               <a:t>Disciplines</a:t>
             </a:r>
-            <a:endParaRPr lang="en-US" sz="2400" dirty="0"/>
           </a:p>
           <a:p>
             <a:pPr marL="443230" lvl="1" indent="-5080">
@@ -18476,7 +18363,6 @@
               <a:rPr lang="en-US" sz="2000" dirty="0"/>
               <a:t>Software requirement, design, construction, testing and maintenance. </a:t>
             </a:r>
-            <a:endParaRPr lang="en-US" sz="2000" dirty="0"/>
           </a:p>
           <a:p>
             <a:pPr marL="5080" indent="-5080">
@@ -18491,7 +18377,6 @@
               <a:rPr lang="en-US" sz="2400" dirty="0"/>
               <a:t>Related fields:</a:t>
             </a:r>
-            <a:endParaRPr lang="en-US" sz="2400" dirty="0"/>
           </a:p>
           <a:p>
             <a:pPr marL="443230" lvl="1" indent="-5080">
@@ -18502,7 +18387,6 @@
               <a:rPr lang="en-US" sz="2000" dirty="0"/>
               <a:t>Computer Science, Computer Engineering, management, mathematics, project management, quality management, software ergonomics (usability), system engineering,  industrial design, UI design</a:t>
             </a:r>
-            <a:endParaRPr lang="en-US" sz="2000" dirty="0"/>
           </a:p>
           <a:p>
             <a:pPr marL="5080" indent="-5080">
@@ -18829,6 +18713,8 @@
       </a:bgFillStyleLst>
     </a:fmtScheme>
   </a:themeElements>
+  <a:objectDefaults/>
+  <a:extraClrSchemeLst/>
   <a:extLst>
     <a:ext uri="{05A4C25C-085E-4340-85A3-A5531E510DB2}">
       <thm15:themeFamily xmlns:thm15="http://schemas.microsoft.com/office/thememl/2012/main" name="Office Theme" id="{62F939B6-93AF-4DB8-9C6B-D6C7DFDC589F}" vid="{4A3C46E8-61CC-4603-A589-7422A47A8E4A}"/>
@@ -19115,6 +19001,8 @@
       </a:bgFillStyleLst>
     </a:fmtScheme>
   </a:themeElements>
+  <a:objectDefaults/>
+  <a:extraClrSchemeLst/>
   <a:extLst>
     <a:ext uri="{05A4C25C-085E-4340-85A3-A5531E510DB2}">
       <thm15:themeFamily xmlns:thm15="http://schemas.microsoft.com/office/thememl/2012/main" name="Office Theme" id="{62F939B6-93AF-4DB8-9C6B-D6C7DFDC589F}" vid="{4A3C46E8-61CC-4603-A589-7422A47A8E4A}"/>
@@ -19124,6 +19012,15 @@
 </file>
 
 <file path=customXml/item1.xml><?xml version="1.0" encoding="utf-8"?>
+<?mso-contentType ?>
+<FormTemplates xmlns="http://schemas.microsoft.com/sharepoint/v3/contenttype/forms">
+  <Display>DocumentLibraryForm</Display>
+  <Edit>DocumentLibraryForm</Edit>
+  <New>DocumentLibraryForm</New>
+</FormTemplates>
+</file>
+
+<file path=customXml/item2.xml><?xml version="1.0" encoding="utf-8"?>
 <ct:contentTypeSchema xmlns:ct="http://schemas.microsoft.com/office/2006/metadata/contentType" xmlns:ma="http://schemas.microsoft.com/office/2006/metadata/properties/metaAttributes" ct:_="" ma:_="" ma:contentTypeName="Document" ma:contentTypeID="0x0101006371182FA640024E8A2815D490E1EF25" ma:contentTypeVersion="0" ma:contentTypeDescription="Create a new document." ma:contentTypeScope="" ma:versionID="3591aab47f172a2900f307f59d422227">
   <xsd:schema xmlns:xsd="http://www.w3.org/2001/XMLSchema" xmlns:xs="http://www.w3.org/2001/XMLSchema" xmlns:p="http://schemas.microsoft.com/office/2006/metadata/properties" targetNamespace="http://schemas.microsoft.com/office/2006/metadata/properties" ma:root="true" ma:fieldsID="1f28ea01430cdfb20a10736313f817e3">
     <xsd:element name="properties">
@@ -19237,35 +19134,26 @@
 </ct:contentTypeSchema>
 </file>
 
-<file path=customXml/item2.xml><?xml version="1.0" encoding="utf-8"?>
+<file path=customXml/item3.xml><?xml version="1.0" encoding="utf-8"?>
 <p:properties xmlns:p="http://schemas.microsoft.com/office/2006/metadata/properties" xmlns:xsi="http://www.w3.org/2001/XMLSchema-instance" xmlns:pc="http://schemas.microsoft.com/office/infopath/2007/PartnerControls">
   <documentManagement/>
 </p:properties>
 </file>
 
-<file path=customXml/item3.xml><?xml version="1.0" encoding="utf-8"?>
-<?mso-contentType ?>
-<FormTemplates xmlns="http://schemas.microsoft.com/sharepoint/v3/contenttype/forms">
-  <Display>DocumentLibraryForm</Display>
-  <Edit>DocumentLibraryForm</Edit>
-  <New>DocumentLibraryForm</New>
-</FormTemplates>
+<file path=customXml/itemProps1.xml><?xml version="1.0" encoding="utf-8"?>
+<ds:datastoreItem xmlns:ds="http://schemas.openxmlformats.org/officeDocument/2006/customXml" ds:itemID="{152C3F0E-25C3-4B31-B914-3A618B652002}">
+  <ds:schemaRefs/>
+</ds:datastoreItem>
 </file>
 
-<file path=customXml/itemProps1.xml><?xml version="1.0" encoding="utf-8"?>
+<file path=customXml/itemProps2.xml><?xml version="1.0" encoding="utf-8"?>
 <ds:datastoreItem xmlns:ds="http://schemas.openxmlformats.org/officeDocument/2006/customXml" ds:itemID="{3A578484-EFC7-41EF-A5B1-C62DDCF2E328}">
   <ds:schemaRefs/>
 </ds:datastoreItem>
 </file>
 
-<file path=customXml/itemProps2.xml><?xml version="1.0" encoding="utf-8"?>
+<file path=customXml/itemProps3.xml><?xml version="1.0" encoding="utf-8"?>
 <ds:datastoreItem xmlns:ds="http://schemas.openxmlformats.org/officeDocument/2006/customXml" ds:itemID="{D5495DD4-04CD-4725-AADE-F45F611A52AA}">
   <ds:schemaRefs/>
 </ds:datastoreItem>
-</file>
-
-<file path=customXml/itemProps3.xml><?xml version="1.0" encoding="utf-8"?>
-<ds:datastoreItem xmlns:ds="http://schemas.openxmlformats.org/officeDocument/2006/customXml" ds:itemID="{152C3F0E-25C3-4B31-B914-3A618B652002}">
-  <ds:schemaRefs/>
-</ds:datastoreItem>
 </file>